--- a/1.10 Practice/1.10 Practice.pptx
+++ b/1.10 Practice/1.10 Practice.pptx
@@ -7,6 +7,17 @@
   <p:sldIdLst>
     <p:sldId id="256" r:id="rId2"/>
     <p:sldId id="258" r:id="rId3"/>
+    <p:sldId id="259" r:id="rId4"/>
+    <p:sldId id="260" r:id="rId5"/>
+    <p:sldId id="261" r:id="rId6"/>
+    <p:sldId id="262" r:id="rId7"/>
+    <p:sldId id="264" r:id="rId8"/>
+    <p:sldId id="263" r:id="rId9"/>
+    <p:sldId id="265" r:id="rId10"/>
+    <p:sldId id="266" r:id="rId11"/>
+    <p:sldId id="267" r:id="rId12"/>
+    <p:sldId id="268" r:id="rId13"/>
+    <p:sldId id="269" r:id="rId14"/>
   </p:sldIdLst>
   <p:sldSz cx="12192000" cy="6858000"/>
   <p:notesSz cx="6858000" cy="9144000"/>
@@ -105,6 +116,11 @@
       </a:defRPr>
     </a:lvl9pPr>
   </p:defaultTextStyle>
+  <p:extLst>
+    <p:ext uri="{EFAFB233-063F-42B5-8137-9DF3F51BA10A}">
+      <p15:sldGuideLst xmlns:p15="http://schemas.microsoft.com/office/powerpoint/2012/main"/>
+    </p:ext>
+  </p:extLst>
 </p:presentation>
 </file>
 
@@ -239,7 +255,7 @@
           <a:p>
             <a:fld id="{6ED376EB-5FF0-47A5-9975-500A3B41E1BB}" type="datetimeFigureOut">
               <a:rPr lang="ru-RU" smtClean="0"/>
-              <a:t>30.09.2026</a:t>
+              <a:t>02.10.2026</a:t>
             </a:fld>
             <a:endParaRPr lang="ru-RU"/>
           </a:p>
@@ -409,7 +425,7 @@
           <a:p>
             <a:fld id="{6ED376EB-5FF0-47A5-9975-500A3B41E1BB}" type="datetimeFigureOut">
               <a:rPr lang="ru-RU" smtClean="0"/>
-              <a:t>30.09.2026</a:t>
+              <a:t>02.10.2026</a:t>
             </a:fld>
             <a:endParaRPr lang="ru-RU"/>
           </a:p>
@@ -589,7 +605,7 @@
           <a:p>
             <a:fld id="{6ED376EB-5FF0-47A5-9975-500A3B41E1BB}" type="datetimeFigureOut">
               <a:rPr lang="ru-RU" smtClean="0"/>
-              <a:t>30.09.2026</a:t>
+              <a:t>02.10.2026</a:t>
             </a:fld>
             <a:endParaRPr lang="ru-RU"/>
           </a:p>
@@ -759,7 +775,7 @@
           <a:p>
             <a:fld id="{6ED376EB-5FF0-47A5-9975-500A3B41E1BB}" type="datetimeFigureOut">
               <a:rPr lang="ru-RU" smtClean="0"/>
-              <a:t>30.09.2026</a:t>
+              <a:t>02.10.2026</a:t>
             </a:fld>
             <a:endParaRPr lang="ru-RU"/>
           </a:p>
@@ -1005,7 +1021,7 @@
           <a:p>
             <a:fld id="{6ED376EB-5FF0-47A5-9975-500A3B41E1BB}" type="datetimeFigureOut">
               <a:rPr lang="ru-RU" smtClean="0"/>
-              <a:t>30.09.2026</a:t>
+              <a:t>02.10.2026</a:t>
             </a:fld>
             <a:endParaRPr lang="ru-RU"/>
           </a:p>
@@ -1237,7 +1253,7 @@
           <a:p>
             <a:fld id="{6ED376EB-5FF0-47A5-9975-500A3B41E1BB}" type="datetimeFigureOut">
               <a:rPr lang="ru-RU" smtClean="0"/>
-              <a:t>30.09.2026</a:t>
+              <a:t>02.10.2026</a:t>
             </a:fld>
             <a:endParaRPr lang="ru-RU"/>
           </a:p>
@@ -1604,7 +1620,7 @@
           <a:p>
             <a:fld id="{6ED376EB-5FF0-47A5-9975-500A3B41E1BB}" type="datetimeFigureOut">
               <a:rPr lang="ru-RU" smtClean="0"/>
-              <a:t>30.09.2026</a:t>
+              <a:t>02.10.2026</a:t>
             </a:fld>
             <a:endParaRPr lang="ru-RU"/>
           </a:p>
@@ -1722,7 +1738,7 @@
           <a:p>
             <a:fld id="{6ED376EB-5FF0-47A5-9975-500A3B41E1BB}" type="datetimeFigureOut">
               <a:rPr lang="ru-RU" smtClean="0"/>
-              <a:t>30.09.2026</a:t>
+              <a:t>02.10.2026</a:t>
             </a:fld>
             <a:endParaRPr lang="ru-RU"/>
           </a:p>
@@ -1817,7 +1833,7 @@
           <a:p>
             <a:fld id="{6ED376EB-5FF0-47A5-9975-500A3B41E1BB}" type="datetimeFigureOut">
               <a:rPr lang="ru-RU" smtClean="0"/>
-              <a:t>30.09.2026</a:t>
+              <a:t>02.10.2026</a:t>
             </a:fld>
             <a:endParaRPr lang="ru-RU"/>
           </a:p>
@@ -2094,7 +2110,7 @@
           <a:p>
             <a:fld id="{6ED376EB-5FF0-47A5-9975-500A3B41E1BB}" type="datetimeFigureOut">
               <a:rPr lang="ru-RU" smtClean="0"/>
-              <a:t>30.09.2026</a:t>
+              <a:t>02.10.2026</a:t>
             </a:fld>
             <a:endParaRPr lang="ru-RU"/>
           </a:p>
@@ -2347,7 +2363,7 @@
           <a:p>
             <a:fld id="{6ED376EB-5FF0-47A5-9975-500A3B41E1BB}" type="datetimeFigureOut">
               <a:rPr lang="ru-RU" smtClean="0"/>
-              <a:t>30.09.2026</a:t>
+              <a:t>02.10.2026</a:t>
             </a:fld>
             <a:endParaRPr lang="ru-RU"/>
           </a:p>
@@ -2560,7 +2576,7 @@
           <a:p>
             <a:fld id="{6ED376EB-5FF0-47A5-9975-500A3B41E1BB}" type="datetimeFigureOut">
               <a:rPr lang="ru-RU" smtClean="0"/>
-              <a:t>30.09.2026</a:t>
+              <a:t>02.10.2026</a:t>
             </a:fld>
             <a:endParaRPr lang="ru-RU"/>
           </a:p>
@@ -3631,6 +3647,3925 @@
 </p:sld>
 </file>
 
+<file path=ppt/slides/slide10.xml><?xml version="1.0" encoding="utf-8"?>
+<p:sld xmlns:a="http://schemas.openxmlformats.org/drawingml/2006/main" xmlns:r="http://schemas.openxmlformats.org/officeDocument/2006/relationships" xmlns:p="http://schemas.openxmlformats.org/presentationml/2006/main">
+  <p:cSld>
+    <p:spTree>
+      <p:nvGrpSpPr>
+        <p:cNvPr id="1" name=""/>
+        <p:cNvGrpSpPr/>
+        <p:nvPr/>
+      </p:nvGrpSpPr>
+      <p:grpSpPr>
+        <a:xfrm>
+          <a:off x="0" y="0"/>
+          <a:ext cx="0" cy="0"/>
+          <a:chOff x="0" y="0"/>
+          <a:chExt cx="0" cy="0"/>
+        </a:xfrm>
+      </p:grpSpPr>
+      <p:sp>
+        <p:nvSpPr>
+          <p:cNvPr id="2" name="Заголовок 1"/>
+          <p:cNvSpPr>
+            <a:spLocks noGrp="1"/>
+          </p:cNvSpPr>
+          <p:nvPr>
+            <p:ph type="title"/>
+          </p:nvPr>
+        </p:nvSpPr>
+        <p:spPr>
+          <a:xfrm>
+            <a:off x="218342" y="206864"/>
+            <a:ext cx="10515600" cy="628406"/>
+          </a:xfrm>
+        </p:spPr>
+        <p:txBody>
+          <a:bodyPr>
+            <a:normAutofit fontScale="90000"/>
+          </a:bodyPr>
+          <a:lstStyle/>
+          <a:p>
+            <a:r>
+              <a:rPr lang="ru-RU" dirty="0"/>
+              <a:t>Расширенные списки доступа</a:t>
+            </a:r>
+          </a:p>
+        </p:txBody>
+      </p:sp>
+      <p:sp>
+        <p:nvSpPr>
+          <p:cNvPr id="4" name="Заголовок 3"/>
+          <p:cNvSpPr txBox="1">
+            <a:spLocks/>
+          </p:cNvSpPr>
+          <p:nvPr/>
+        </p:nvSpPr>
+        <p:spPr>
+          <a:xfrm>
+            <a:off x="218342" y="993532"/>
+            <a:ext cx="11755315" cy="5591906"/>
+          </a:xfrm>
+          <a:prstGeom prst="rect">
+            <a:avLst/>
+          </a:prstGeom>
+          <a:solidFill>
+            <a:schemeClr val="tx1"/>
+          </a:solidFill>
+          <a:ln>
+            <a:solidFill>
+              <a:schemeClr val="tx1"/>
+            </a:solidFill>
+          </a:ln>
+        </p:spPr>
+        <p:txBody>
+          <a:bodyPr vert="horz" lIns="91440" tIns="45720" rIns="91440" bIns="45720" rtlCol="0" anchor="ctr">
+            <a:normAutofit/>
+          </a:bodyPr>
+          <a:lstStyle>
+            <a:lvl1pPr algn="l" defTabSz="914400" rtl="0" eaLnBrk="1" latinLnBrk="0" hangingPunct="1">
+              <a:lnSpc>
+                <a:spcPct val="90000"/>
+              </a:lnSpc>
+              <a:spcBef>
+                <a:spcPct val="0"/>
+              </a:spcBef>
+              <a:buNone/>
+              <a:defRPr sz="4400" kern="1200">
+                <a:solidFill>
+                  <a:schemeClr val="tx1"/>
+                </a:solidFill>
+                <a:latin typeface="+mj-lt"/>
+                <a:ea typeface="+mj-ea"/>
+                <a:cs typeface="+mj-cs"/>
+              </a:defRPr>
+            </a:lvl1pPr>
+          </a:lstStyle>
+          <a:p>
+            <a:endParaRPr lang="ru-RU" sz="2400" dirty="0" smtClean="0">
+              <a:solidFill>
+                <a:schemeClr val="bg1"/>
+              </a:solidFill>
+              <a:latin typeface="Consolas" panose="020B0609020204030204" pitchFamily="49" charset="0"/>
+            </a:endParaRPr>
+          </a:p>
+          <a:p>
+            <a:r>
+              <a:rPr lang="en-US" sz="2000" dirty="0">
+                <a:solidFill>
+                  <a:schemeClr val="bg1"/>
+                </a:solidFill>
+                <a:latin typeface="Consolas" panose="020B0609020204030204" pitchFamily="49" charset="0"/>
+              </a:rPr>
+              <a:t>Router(</a:t>
+            </a:r>
+            <a:r>
+              <a:rPr lang="en-US" sz="2000" dirty="0" err="1">
+                <a:solidFill>
+                  <a:schemeClr val="bg1"/>
+                </a:solidFill>
+                <a:latin typeface="Consolas" panose="020B0609020204030204" pitchFamily="49" charset="0"/>
+              </a:rPr>
+              <a:t>config</a:t>
+            </a:r>
+            <a:r>
+              <a:rPr lang="en-US" sz="2000" dirty="0">
+                <a:solidFill>
+                  <a:schemeClr val="bg1"/>
+                </a:solidFill>
+                <a:latin typeface="Consolas" panose="020B0609020204030204" pitchFamily="49" charset="0"/>
+              </a:rPr>
+              <a:t>)#</a:t>
+            </a:r>
+            <a:r>
+              <a:rPr lang="en-US" sz="2000" dirty="0" err="1">
+                <a:solidFill>
+                  <a:schemeClr val="bg1"/>
+                </a:solidFill>
+                <a:latin typeface="Consolas" panose="020B0609020204030204" pitchFamily="49" charset="0"/>
+              </a:rPr>
+              <a:t>ip</a:t>
+            </a:r>
+            <a:r>
+              <a:rPr lang="en-US" sz="2000" dirty="0">
+                <a:solidFill>
+                  <a:schemeClr val="bg1"/>
+                </a:solidFill>
+                <a:latin typeface="Consolas" panose="020B0609020204030204" pitchFamily="49" charset="0"/>
+              </a:rPr>
+              <a:t> access-list extended </a:t>
+            </a:r>
+            <a:r>
+              <a:rPr lang="en-US" sz="2000" dirty="0" smtClean="0">
+                <a:solidFill>
+                  <a:schemeClr val="bg1"/>
+                </a:solidFill>
+                <a:latin typeface="Consolas" panose="020B0609020204030204" pitchFamily="49" charset="0"/>
+              </a:rPr>
+              <a:t>EXTENDED_ACL</a:t>
+            </a:r>
+            <a:endParaRPr lang="ru-RU" sz="2000" dirty="0" smtClean="0">
+              <a:solidFill>
+                <a:schemeClr val="bg1"/>
+              </a:solidFill>
+              <a:latin typeface="Consolas" panose="020B0609020204030204" pitchFamily="49" charset="0"/>
+            </a:endParaRPr>
+          </a:p>
+          <a:p>
+            <a:endParaRPr lang="en-US" sz="2000" dirty="0" smtClean="0">
+              <a:solidFill>
+                <a:schemeClr val="bg1"/>
+              </a:solidFill>
+              <a:latin typeface="Consolas" panose="020B0609020204030204" pitchFamily="49" charset="0"/>
+            </a:endParaRPr>
+          </a:p>
+          <a:p>
+            <a:r>
+              <a:rPr lang="en-US" sz="2000" dirty="0" smtClean="0">
+                <a:solidFill>
+                  <a:schemeClr val="bg1"/>
+                </a:solidFill>
+                <a:latin typeface="Consolas" panose="020B0609020204030204" pitchFamily="49" charset="0"/>
+              </a:rPr>
+              <a:t>! </a:t>
+            </a:r>
+            <a:r>
+              <a:rPr lang="ru-RU" sz="2000" dirty="0" smtClean="0">
+                <a:solidFill>
+                  <a:schemeClr val="bg1"/>
+                </a:solidFill>
+                <a:latin typeface="Consolas" panose="020B0609020204030204" pitchFamily="49" charset="0"/>
+              </a:rPr>
+              <a:t>Разрешить весь </a:t>
+            </a:r>
+            <a:r>
+              <a:rPr lang="en-US" sz="2000" dirty="0" smtClean="0">
+                <a:solidFill>
+                  <a:schemeClr val="bg1"/>
+                </a:solidFill>
+                <a:latin typeface="Consolas" panose="020B0609020204030204" pitchFamily="49" charset="0"/>
+              </a:rPr>
+              <a:t>IP </a:t>
+            </a:r>
+            <a:r>
+              <a:rPr lang="ru-RU" sz="2000" dirty="0" smtClean="0">
+                <a:solidFill>
+                  <a:schemeClr val="bg1"/>
+                </a:solidFill>
+                <a:latin typeface="Consolas" panose="020B0609020204030204" pitchFamily="49" charset="0"/>
+              </a:rPr>
+              <a:t>трафик из сети 10.10.0.0/16 в сеть 172.16.5.0/24</a:t>
+            </a:r>
+            <a:endParaRPr lang="en-US" sz="2000" dirty="0">
+              <a:solidFill>
+                <a:schemeClr val="bg1"/>
+              </a:solidFill>
+              <a:latin typeface="Consolas" panose="020B0609020204030204" pitchFamily="49" charset="0"/>
+            </a:endParaRPr>
+          </a:p>
+          <a:p>
+            <a:r>
+              <a:rPr lang="en-US" sz="2000" dirty="0">
+                <a:solidFill>
+                  <a:schemeClr val="bg1"/>
+                </a:solidFill>
+                <a:latin typeface="Consolas" panose="020B0609020204030204" pitchFamily="49" charset="0"/>
+              </a:rPr>
+              <a:t>Router(</a:t>
+            </a:r>
+            <a:r>
+              <a:rPr lang="en-US" sz="2000" dirty="0" err="1">
+                <a:solidFill>
+                  <a:schemeClr val="bg1"/>
+                </a:solidFill>
+                <a:latin typeface="Consolas" panose="020B0609020204030204" pitchFamily="49" charset="0"/>
+              </a:rPr>
+              <a:t>config-ext-nacl</a:t>
+            </a:r>
+            <a:r>
+              <a:rPr lang="en-US" sz="2000" dirty="0">
+                <a:solidFill>
+                  <a:schemeClr val="bg1"/>
+                </a:solidFill>
+                <a:latin typeface="Consolas" panose="020B0609020204030204" pitchFamily="49" charset="0"/>
+              </a:rPr>
+              <a:t>)#permit </a:t>
+            </a:r>
+            <a:r>
+              <a:rPr lang="en-US" sz="2000" dirty="0" err="1">
+                <a:solidFill>
+                  <a:schemeClr val="bg1"/>
+                </a:solidFill>
+                <a:latin typeface="Consolas" panose="020B0609020204030204" pitchFamily="49" charset="0"/>
+              </a:rPr>
+              <a:t>ip</a:t>
+            </a:r>
+            <a:r>
+              <a:rPr lang="en-US" sz="2000" dirty="0">
+                <a:solidFill>
+                  <a:schemeClr val="bg1"/>
+                </a:solidFill>
+                <a:latin typeface="Consolas" panose="020B0609020204030204" pitchFamily="49" charset="0"/>
+              </a:rPr>
+              <a:t> 10.10.0.0 0.0.255.255 172.16.5.0 </a:t>
+            </a:r>
+            <a:r>
+              <a:rPr lang="en-US" sz="2000" dirty="0" smtClean="0">
+                <a:solidFill>
+                  <a:schemeClr val="bg1"/>
+                </a:solidFill>
+                <a:latin typeface="Consolas" panose="020B0609020204030204" pitchFamily="49" charset="0"/>
+              </a:rPr>
+              <a:t>0.0.0.255</a:t>
+            </a:r>
+            <a:endParaRPr lang="ru-RU" sz="2000" dirty="0" smtClean="0">
+              <a:solidFill>
+                <a:schemeClr val="bg1"/>
+              </a:solidFill>
+              <a:latin typeface="Consolas" panose="020B0609020204030204" pitchFamily="49" charset="0"/>
+            </a:endParaRPr>
+          </a:p>
+          <a:p>
+            <a:endParaRPr lang="en-US" sz="2000" dirty="0" smtClean="0">
+              <a:solidFill>
+                <a:schemeClr val="bg1"/>
+              </a:solidFill>
+              <a:latin typeface="Consolas" panose="020B0609020204030204" pitchFamily="49" charset="0"/>
+            </a:endParaRPr>
+          </a:p>
+          <a:p>
+            <a:r>
+              <a:rPr lang="ru-RU" sz="2000" dirty="0" smtClean="0">
+                <a:solidFill>
+                  <a:schemeClr val="bg1"/>
+                </a:solidFill>
+                <a:latin typeface="Consolas" panose="020B0609020204030204" pitchFamily="49" charset="0"/>
+              </a:rPr>
+              <a:t>! Разрешить весь </a:t>
+            </a:r>
+            <a:r>
+              <a:rPr lang="en-US" sz="2000" dirty="0" smtClean="0">
+                <a:solidFill>
+                  <a:schemeClr val="bg1"/>
+                </a:solidFill>
+                <a:latin typeface="Consolas" panose="020B0609020204030204" pitchFamily="49" charset="0"/>
+              </a:rPr>
+              <a:t>TCP </a:t>
+            </a:r>
+            <a:r>
+              <a:rPr lang="ru-RU" sz="2000" dirty="0" smtClean="0">
+                <a:solidFill>
+                  <a:schemeClr val="bg1"/>
+                </a:solidFill>
+                <a:latin typeface="Consolas" panose="020B0609020204030204" pitchFamily="49" charset="0"/>
+              </a:rPr>
+              <a:t>к хосту </a:t>
+            </a:r>
+            <a:r>
+              <a:rPr lang="en-US" sz="2000" dirty="0" smtClean="0">
+                <a:solidFill>
+                  <a:schemeClr val="bg1"/>
+                </a:solidFill>
+                <a:latin typeface="Consolas" panose="020B0609020204030204" pitchFamily="49" charset="0"/>
+              </a:rPr>
+              <a:t>198.51.100.50</a:t>
+            </a:r>
+            <a:r>
+              <a:rPr lang="ru-RU" sz="2000" dirty="0" smtClean="0">
+                <a:solidFill>
+                  <a:schemeClr val="bg1"/>
+                </a:solidFill>
+                <a:latin typeface="Consolas" panose="020B0609020204030204" pitchFamily="49" charset="0"/>
+              </a:rPr>
+              <a:t> на порт 443</a:t>
+            </a:r>
+            <a:endParaRPr lang="en-US" sz="2000" dirty="0">
+              <a:solidFill>
+                <a:schemeClr val="bg1"/>
+              </a:solidFill>
+              <a:latin typeface="Consolas" panose="020B0609020204030204" pitchFamily="49" charset="0"/>
+            </a:endParaRPr>
+          </a:p>
+          <a:p>
+            <a:r>
+              <a:rPr lang="en-US" sz="2000" dirty="0">
+                <a:solidFill>
+                  <a:schemeClr val="bg1"/>
+                </a:solidFill>
+                <a:latin typeface="Consolas" panose="020B0609020204030204" pitchFamily="49" charset="0"/>
+              </a:rPr>
+              <a:t>Router(</a:t>
+            </a:r>
+            <a:r>
+              <a:rPr lang="en-US" sz="2000" dirty="0" err="1">
+                <a:solidFill>
+                  <a:schemeClr val="bg1"/>
+                </a:solidFill>
+                <a:latin typeface="Consolas" panose="020B0609020204030204" pitchFamily="49" charset="0"/>
+              </a:rPr>
+              <a:t>config-ext-nacl</a:t>
+            </a:r>
+            <a:r>
+              <a:rPr lang="en-US" sz="2000" dirty="0">
+                <a:solidFill>
+                  <a:schemeClr val="bg1"/>
+                </a:solidFill>
+                <a:latin typeface="Consolas" panose="020B0609020204030204" pitchFamily="49" charset="0"/>
+              </a:rPr>
+              <a:t>)#permit </a:t>
+            </a:r>
+            <a:r>
+              <a:rPr lang="en-US" sz="2000" dirty="0" err="1">
+                <a:solidFill>
+                  <a:schemeClr val="bg1"/>
+                </a:solidFill>
+                <a:latin typeface="Consolas" panose="020B0609020204030204" pitchFamily="49" charset="0"/>
+              </a:rPr>
+              <a:t>tcp</a:t>
+            </a:r>
+            <a:r>
+              <a:rPr lang="en-US" sz="2000" dirty="0">
+                <a:solidFill>
+                  <a:schemeClr val="bg1"/>
+                </a:solidFill>
+                <a:latin typeface="Consolas" panose="020B0609020204030204" pitchFamily="49" charset="0"/>
+              </a:rPr>
+              <a:t> any host 198.51.100.50 </a:t>
+            </a:r>
+            <a:r>
+              <a:rPr lang="en-US" sz="2000" dirty="0" err="1">
+                <a:solidFill>
+                  <a:schemeClr val="bg1"/>
+                </a:solidFill>
+                <a:latin typeface="Consolas" panose="020B0609020204030204" pitchFamily="49" charset="0"/>
+              </a:rPr>
+              <a:t>eq</a:t>
+            </a:r>
+            <a:r>
+              <a:rPr lang="en-US" sz="2000" dirty="0">
+                <a:solidFill>
+                  <a:schemeClr val="bg1"/>
+                </a:solidFill>
+                <a:latin typeface="Consolas" panose="020B0609020204030204" pitchFamily="49" charset="0"/>
+              </a:rPr>
+              <a:t> </a:t>
+            </a:r>
+            <a:r>
+              <a:rPr lang="en-US" sz="2000" dirty="0" smtClean="0">
+                <a:solidFill>
+                  <a:schemeClr val="bg1"/>
+                </a:solidFill>
+                <a:latin typeface="Consolas" panose="020B0609020204030204" pitchFamily="49" charset="0"/>
+              </a:rPr>
+              <a:t>443</a:t>
+            </a:r>
+          </a:p>
+          <a:p>
+            <a:endParaRPr lang="ru-RU" sz="2000" dirty="0" smtClean="0">
+              <a:solidFill>
+                <a:schemeClr val="bg1"/>
+              </a:solidFill>
+              <a:latin typeface="Consolas" panose="020B0609020204030204" pitchFamily="49" charset="0"/>
+            </a:endParaRPr>
+          </a:p>
+          <a:p>
+            <a:r>
+              <a:rPr lang="ru-RU" sz="2000" dirty="0" smtClean="0">
+                <a:solidFill>
+                  <a:schemeClr val="bg1"/>
+                </a:solidFill>
+                <a:latin typeface="Consolas" panose="020B0609020204030204" pitchFamily="49" charset="0"/>
+              </a:rPr>
+              <a:t>! </a:t>
+            </a:r>
+            <a:r>
+              <a:rPr lang="ru-RU" sz="2000" dirty="0">
+                <a:solidFill>
+                  <a:schemeClr val="bg1"/>
+                </a:solidFill>
+                <a:latin typeface="Consolas" panose="020B0609020204030204" pitchFamily="49" charset="0"/>
+              </a:rPr>
+              <a:t>Разрешить </a:t>
+            </a:r>
+            <a:r>
+              <a:rPr lang="en-US" sz="2000" dirty="0" smtClean="0">
+                <a:solidFill>
+                  <a:schemeClr val="bg1"/>
+                </a:solidFill>
+                <a:latin typeface="Consolas" panose="020B0609020204030204" pitchFamily="49" charset="0"/>
+              </a:rPr>
+              <a:t>TCP</a:t>
+            </a:r>
+            <a:r>
+              <a:rPr lang="ru-RU" sz="2000" dirty="0" smtClean="0">
+                <a:solidFill>
+                  <a:schemeClr val="bg1"/>
+                </a:solidFill>
+                <a:latin typeface="Consolas" panose="020B0609020204030204" pitchFamily="49" charset="0"/>
+              </a:rPr>
+              <a:t> от </a:t>
+            </a:r>
+            <a:r>
+              <a:rPr lang="en-US" sz="2000" dirty="0" smtClean="0">
+                <a:solidFill>
+                  <a:schemeClr val="bg1"/>
+                </a:solidFill>
+                <a:latin typeface="Consolas" panose="020B0609020204030204" pitchFamily="49" charset="0"/>
+              </a:rPr>
+              <a:t>198.51.100.50</a:t>
+            </a:r>
+            <a:r>
+              <a:rPr lang="ru-RU" sz="2000" dirty="0" smtClean="0">
+                <a:solidFill>
+                  <a:schemeClr val="bg1"/>
+                </a:solidFill>
+                <a:latin typeface="Consolas" panose="020B0609020204030204" pitchFamily="49" charset="0"/>
+              </a:rPr>
+              <a:t> с </a:t>
+            </a:r>
+            <a:r>
+              <a:rPr lang="en-US" sz="2000" dirty="0" err="1" smtClean="0">
+                <a:solidFill>
+                  <a:schemeClr val="bg1"/>
+                </a:solidFill>
+                <a:latin typeface="Consolas" panose="020B0609020204030204" pitchFamily="49" charset="0"/>
+              </a:rPr>
+              <a:t>SrcPort</a:t>
+            </a:r>
+            <a:r>
+              <a:rPr lang="en-US" sz="2000" dirty="0" smtClean="0">
+                <a:solidFill>
+                  <a:schemeClr val="bg1"/>
+                </a:solidFill>
+                <a:latin typeface="Consolas" panose="020B0609020204030204" pitchFamily="49" charset="0"/>
+              </a:rPr>
+              <a:t> = 80</a:t>
+            </a:r>
+            <a:endParaRPr lang="en-US" sz="2000" dirty="0">
+              <a:solidFill>
+                <a:schemeClr val="bg1"/>
+              </a:solidFill>
+              <a:latin typeface="Consolas" panose="020B0609020204030204" pitchFamily="49" charset="0"/>
+            </a:endParaRPr>
+          </a:p>
+          <a:p>
+            <a:r>
+              <a:rPr lang="en-US" sz="2000" dirty="0">
+                <a:solidFill>
+                  <a:schemeClr val="bg1"/>
+                </a:solidFill>
+                <a:latin typeface="Consolas" panose="020B0609020204030204" pitchFamily="49" charset="0"/>
+              </a:rPr>
+              <a:t>Router(</a:t>
+            </a:r>
+            <a:r>
+              <a:rPr lang="en-US" sz="2000" dirty="0" err="1">
+                <a:solidFill>
+                  <a:schemeClr val="bg1"/>
+                </a:solidFill>
+                <a:latin typeface="Consolas" panose="020B0609020204030204" pitchFamily="49" charset="0"/>
+              </a:rPr>
+              <a:t>config-ext-nacl</a:t>
+            </a:r>
+            <a:r>
+              <a:rPr lang="en-US" sz="2000" dirty="0">
+                <a:solidFill>
+                  <a:schemeClr val="bg1"/>
+                </a:solidFill>
+                <a:latin typeface="Consolas" panose="020B0609020204030204" pitchFamily="49" charset="0"/>
+              </a:rPr>
+              <a:t>)#permit </a:t>
+            </a:r>
+            <a:r>
+              <a:rPr lang="en-US" sz="2000" dirty="0" err="1">
+                <a:solidFill>
+                  <a:schemeClr val="bg1"/>
+                </a:solidFill>
+                <a:latin typeface="Consolas" panose="020B0609020204030204" pitchFamily="49" charset="0"/>
+              </a:rPr>
+              <a:t>tcp</a:t>
+            </a:r>
+            <a:r>
+              <a:rPr lang="en-US" sz="2000" dirty="0">
+                <a:solidFill>
+                  <a:schemeClr val="bg1"/>
+                </a:solidFill>
+                <a:latin typeface="Consolas" panose="020B0609020204030204" pitchFamily="49" charset="0"/>
+              </a:rPr>
+              <a:t> host 198.51.100.50 </a:t>
+            </a:r>
+            <a:r>
+              <a:rPr lang="en-US" sz="2000" dirty="0" err="1">
+                <a:solidFill>
+                  <a:schemeClr val="bg1"/>
+                </a:solidFill>
+                <a:latin typeface="Consolas" panose="020B0609020204030204" pitchFamily="49" charset="0"/>
+              </a:rPr>
+              <a:t>eq</a:t>
+            </a:r>
+            <a:r>
+              <a:rPr lang="en-US" sz="2000" dirty="0">
+                <a:solidFill>
+                  <a:schemeClr val="bg1"/>
+                </a:solidFill>
+                <a:latin typeface="Consolas" panose="020B0609020204030204" pitchFamily="49" charset="0"/>
+              </a:rPr>
+              <a:t> 80 </a:t>
+            </a:r>
+            <a:r>
+              <a:rPr lang="en-US" sz="2000" dirty="0" smtClean="0">
+                <a:solidFill>
+                  <a:schemeClr val="bg1"/>
+                </a:solidFill>
+                <a:latin typeface="Consolas" panose="020B0609020204030204" pitchFamily="49" charset="0"/>
+              </a:rPr>
+              <a:t>any</a:t>
+            </a:r>
+          </a:p>
+          <a:p>
+            <a:endParaRPr lang="en-US" sz="2000" dirty="0" smtClean="0">
+              <a:solidFill>
+                <a:schemeClr val="bg1"/>
+              </a:solidFill>
+              <a:latin typeface="Consolas" panose="020B0609020204030204" pitchFamily="49" charset="0"/>
+            </a:endParaRPr>
+          </a:p>
+          <a:p>
+            <a:r>
+              <a:rPr lang="en-US" sz="2000" dirty="0" smtClean="0">
+                <a:solidFill>
+                  <a:schemeClr val="bg1"/>
+                </a:solidFill>
+                <a:latin typeface="Consolas" panose="020B0609020204030204" pitchFamily="49" charset="0"/>
+              </a:rPr>
+              <a:t>! </a:t>
+            </a:r>
+            <a:r>
+              <a:rPr lang="ru-RU" sz="2000" dirty="0" smtClean="0">
+                <a:solidFill>
+                  <a:schemeClr val="bg1"/>
+                </a:solidFill>
+                <a:latin typeface="Consolas" panose="020B0609020204030204" pitchFamily="49" charset="0"/>
+              </a:rPr>
+              <a:t>Разрешить </a:t>
+            </a:r>
+            <a:r>
+              <a:rPr lang="en-US" sz="2000" dirty="0" smtClean="0">
+                <a:solidFill>
+                  <a:schemeClr val="bg1"/>
+                </a:solidFill>
+                <a:latin typeface="Consolas" panose="020B0609020204030204" pitchFamily="49" charset="0"/>
+              </a:rPr>
+              <a:t>UDP </a:t>
+            </a:r>
+            <a:r>
+              <a:rPr lang="ru-RU" sz="2000" dirty="0" smtClean="0">
+                <a:solidFill>
+                  <a:schemeClr val="bg1"/>
+                </a:solidFill>
+                <a:latin typeface="Consolas" panose="020B0609020204030204" pitchFamily="49" charset="0"/>
+              </a:rPr>
+              <a:t>с </a:t>
+            </a:r>
+            <a:r>
+              <a:rPr lang="en-US" sz="2000" dirty="0" err="1" smtClean="0">
+                <a:solidFill>
+                  <a:schemeClr val="bg1"/>
+                </a:solidFill>
+                <a:latin typeface="Consolas" panose="020B0609020204030204" pitchFamily="49" charset="0"/>
+              </a:rPr>
+              <a:t>SrcPort</a:t>
+            </a:r>
+            <a:r>
+              <a:rPr lang="en-US" sz="2000" dirty="0" smtClean="0">
+                <a:solidFill>
+                  <a:schemeClr val="bg1"/>
+                </a:solidFill>
+                <a:latin typeface="Consolas" panose="020B0609020204030204" pitchFamily="49" charset="0"/>
+              </a:rPr>
+              <a:t> = 53 </a:t>
+            </a:r>
+            <a:endParaRPr lang="en-US" sz="2000" dirty="0">
+              <a:solidFill>
+                <a:schemeClr val="bg1"/>
+              </a:solidFill>
+              <a:latin typeface="Consolas" panose="020B0609020204030204" pitchFamily="49" charset="0"/>
+            </a:endParaRPr>
+          </a:p>
+          <a:p>
+            <a:r>
+              <a:rPr lang="en-US" sz="2000" dirty="0">
+                <a:solidFill>
+                  <a:schemeClr val="bg1"/>
+                </a:solidFill>
+                <a:latin typeface="Consolas" panose="020B0609020204030204" pitchFamily="49" charset="0"/>
+              </a:rPr>
+              <a:t>Router(</a:t>
+            </a:r>
+            <a:r>
+              <a:rPr lang="en-US" sz="2000" dirty="0" err="1">
+                <a:solidFill>
+                  <a:schemeClr val="bg1"/>
+                </a:solidFill>
+                <a:latin typeface="Consolas" panose="020B0609020204030204" pitchFamily="49" charset="0"/>
+              </a:rPr>
+              <a:t>config-ext-nacl</a:t>
+            </a:r>
+            <a:r>
+              <a:rPr lang="en-US" sz="2000" dirty="0">
+                <a:solidFill>
+                  <a:schemeClr val="bg1"/>
+                </a:solidFill>
+                <a:latin typeface="Consolas" panose="020B0609020204030204" pitchFamily="49" charset="0"/>
+              </a:rPr>
+              <a:t>)#permit </a:t>
+            </a:r>
+            <a:r>
+              <a:rPr lang="en-US" sz="2000" dirty="0" err="1">
+                <a:solidFill>
+                  <a:schemeClr val="bg1"/>
+                </a:solidFill>
+                <a:latin typeface="Consolas" panose="020B0609020204030204" pitchFamily="49" charset="0"/>
+              </a:rPr>
+              <a:t>udp</a:t>
+            </a:r>
+            <a:r>
+              <a:rPr lang="en-US" sz="2000" dirty="0">
+                <a:solidFill>
+                  <a:schemeClr val="bg1"/>
+                </a:solidFill>
+                <a:latin typeface="Consolas" panose="020B0609020204030204" pitchFamily="49" charset="0"/>
+              </a:rPr>
+              <a:t> host 198.51.100.50 </a:t>
+            </a:r>
+            <a:r>
+              <a:rPr lang="en-US" sz="2000" dirty="0" err="1">
+                <a:solidFill>
+                  <a:schemeClr val="bg1"/>
+                </a:solidFill>
+                <a:latin typeface="Consolas" panose="020B0609020204030204" pitchFamily="49" charset="0"/>
+              </a:rPr>
+              <a:t>eq</a:t>
+            </a:r>
+            <a:r>
+              <a:rPr lang="en-US" sz="2000" dirty="0">
+                <a:solidFill>
+                  <a:schemeClr val="bg1"/>
+                </a:solidFill>
+                <a:latin typeface="Consolas" panose="020B0609020204030204" pitchFamily="49" charset="0"/>
+              </a:rPr>
+              <a:t> domain </a:t>
+            </a:r>
+            <a:r>
+              <a:rPr lang="en-US" sz="2000" dirty="0" smtClean="0">
+                <a:solidFill>
+                  <a:schemeClr val="bg1"/>
+                </a:solidFill>
+                <a:latin typeface="Consolas" panose="020B0609020204030204" pitchFamily="49" charset="0"/>
+              </a:rPr>
+              <a:t>any</a:t>
+            </a:r>
+          </a:p>
+          <a:p>
+            <a:endParaRPr lang="ru-RU" sz="2000" dirty="0" smtClean="0">
+              <a:solidFill>
+                <a:schemeClr val="bg1"/>
+              </a:solidFill>
+              <a:latin typeface="Consolas" panose="020B0609020204030204" pitchFamily="49" charset="0"/>
+            </a:endParaRPr>
+          </a:p>
+          <a:p>
+            <a:r>
+              <a:rPr lang="ru-RU" sz="2000" dirty="0" smtClean="0">
+                <a:solidFill>
+                  <a:schemeClr val="bg1"/>
+                </a:solidFill>
+                <a:latin typeface="Consolas" panose="020B0609020204030204" pitchFamily="49" charset="0"/>
+              </a:rPr>
+              <a:t>! Разрешить </a:t>
+            </a:r>
+            <a:r>
+              <a:rPr lang="en-US" sz="2000" dirty="0" smtClean="0">
+                <a:solidFill>
+                  <a:schemeClr val="bg1"/>
+                </a:solidFill>
+                <a:latin typeface="Consolas" panose="020B0609020204030204" pitchFamily="49" charset="0"/>
+              </a:rPr>
+              <a:t>ICMP </a:t>
+            </a:r>
+            <a:r>
+              <a:rPr lang="ru-RU" sz="2000" dirty="0" smtClean="0">
+                <a:solidFill>
+                  <a:schemeClr val="bg1"/>
+                </a:solidFill>
+                <a:latin typeface="Consolas" panose="020B0609020204030204" pitchFamily="49" charset="0"/>
+              </a:rPr>
+              <a:t>из 10.0.0.0/8 к хосту </a:t>
+            </a:r>
+            <a:r>
+              <a:rPr lang="en-US" sz="2000" dirty="0" smtClean="0">
+                <a:solidFill>
+                  <a:schemeClr val="bg1"/>
+                </a:solidFill>
+                <a:latin typeface="Consolas" panose="020B0609020204030204" pitchFamily="49" charset="0"/>
+              </a:rPr>
+              <a:t>198.51.100.50</a:t>
+            </a:r>
+            <a:endParaRPr lang="en-US" sz="2000" dirty="0">
+              <a:solidFill>
+                <a:schemeClr val="bg1"/>
+              </a:solidFill>
+              <a:latin typeface="Consolas" panose="020B0609020204030204" pitchFamily="49" charset="0"/>
+            </a:endParaRPr>
+          </a:p>
+          <a:p>
+            <a:r>
+              <a:rPr lang="en-US" sz="2000" dirty="0">
+                <a:solidFill>
+                  <a:schemeClr val="bg1"/>
+                </a:solidFill>
+                <a:latin typeface="Consolas" panose="020B0609020204030204" pitchFamily="49" charset="0"/>
+              </a:rPr>
+              <a:t>Router(</a:t>
+            </a:r>
+            <a:r>
+              <a:rPr lang="en-US" sz="2000" dirty="0" err="1">
+                <a:solidFill>
+                  <a:schemeClr val="bg1"/>
+                </a:solidFill>
+                <a:latin typeface="Consolas" panose="020B0609020204030204" pitchFamily="49" charset="0"/>
+              </a:rPr>
+              <a:t>config-ext-nacl</a:t>
+            </a:r>
+            <a:r>
+              <a:rPr lang="en-US" sz="2000" dirty="0">
+                <a:solidFill>
+                  <a:schemeClr val="bg1"/>
+                </a:solidFill>
+                <a:latin typeface="Consolas" panose="020B0609020204030204" pitchFamily="49" charset="0"/>
+              </a:rPr>
+              <a:t>)#permit </a:t>
+            </a:r>
+            <a:r>
+              <a:rPr lang="en-US" sz="2000" dirty="0" err="1">
+                <a:solidFill>
+                  <a:schemeClr val="bg1"/>
+                </a:solidFill>
+                <a:latin typeface="Consolas" panose="020B0609020204030204" pitchFamily="49" charset="0"/>
+              </a:rPr>
+              <a:t>icmp</a:t>
+            </a:r>
+            <a:r>
+              <a:rPr lang="en-US" sz="2000" dirty="0">
+                <a:solidFill>
+                  <a:schemeClr val="bg1"/>
+                </a:solidFill>
+                <a:latin typeface="Consolas" panose="020B0609020204030204" pitchFamily="49" charset="0"/>
+              </a:rPr>
+              <a:t> 10.0.0.0 0.255.255.255 host </a:t>
+            </a:r>
+            <a:r>
+              <a:rPr lang="en-US" sz="2000" dirty="0" smtClean="0">
+                <a:solidFill>
+                  <a:schemeClr val="bg1"/>
+                </a:solidFill>
+                <a:latin typeface="Consolas" panose="020B0609020204030204" pitchFamily="49" charset="0"/>
+              </a:rPr>
+              <a:t>198.51.100.50</a:t>
+            </a:r>
+          </a:p>
+          <a:p>
+            <a:endParaRPr lang="en-US" sz="2400" dirty="0">
+              <a:solidFill>
+                <a:schemeClr val="bg1"/>
+              </a:solidFill>
+              <a:latin typeface="Consolas" panose="020B0609020204030204" pitchFamily="49" charset="0"/>
+            </a:endParaRPr>
+          </a:p>
+        </p:txBody>
+      </p:sp>
+    </p:spTree>
+    <p:extLst>
+      <p:ext uri="{BB962C8B-B14F-4D97-AF65-F5344CB8AC3E}">
+        <p14:creationId xmlns:p14="http://schemas.microsoft.com/office/powerpoint/2010/main" val="479526209"/>
+      </p:ext>
+    </p:extLst>
+  </p:cSld>
+  <p:clrMapOvr>
+    <a:masterClrMapping/>
+  </p:clrMapOvr>
+  <p:timing>
+    <p:tnLst>
+      <p:par>
+        <p:cTn id="1" dur="indefinite" restart="never" nodeType="tmRoot"/>
+      </p:par>
+    </p:tnLst>
+  </p:timing>
+</p:sld>
+</file>
+
+<file path=ppt/slides/slide11.xml><?xml version="1.0" encoding="utf-8"?>
+<p:sld xmlns:a="http://schemas.openxmlformats.org/drawingml/2006/main" xmlns:r="http://schemas.openxmlformats.org/officeDocument/2006/relationships" xmlns:p="http://schemas.openxmlformats.org/presentationml/2006/main">
+  <p:cSld>
+    <p:spTree>
+      <p:nvGrpSpPr>
+        <p:cNvPr id="1" name=""/>
+        <p:cNvGrpSpPr/>
+        <p:nvPr/>
+      </p:nvGrpSpPr>
+      <p:grpSpPr>
+        <a:xfrm>
+          <a:off x="0" y="0"/>
+          <a:ext cx="0" cy="0"/>
+          <a:chOff x="0" y="0"/>
+          <a:chExt cx="0" cy="0"/>
+        </a:xfrm>
+      </p:grpSpPr>
+      <p:sp>
+        <p:nvSpPr>
+          <p:cNvPr id="2" name="Заголовок 1"/>
+          <p:cNvSpPr>
+            <a:spLocks noGrp="1"/>
+          </p:cNvSpPr>
+          <p:nvPr>
+            <p:ph type="title"/>
+          </p:nvPr>
+        </p:nvSpPr>
+        <p:spPr>
+          <a:xfrm>
+            <a:off x="838200" y="365125"/>
+            <a:ext cx="10515600" cy="416231"/>
+          </a:xfrm>
+        </p:spPr>
+        <p:txBody>
+          <a:bodyPr>
+            <a:normAutofit fontScale="90000"/>
+          </a:bodyPr>
+          <a:lstStyle/>
+          <a:p>
+            <a:r>
+              <a:rPr lang="ru-RU" dirty="0" smtClean="0"/>
+              <a:t>Использование списков доступа</a:t>
+            </a:r>
+            <a:endParaRPr lang="ru-RU" dirty="0"/>
+          </a:p>
+        </p:txBody>
+      </p:sp>
+      <p:sp>
+        <p:nvSpPr>
+          <p:cNvPr id="4" name="Заголовок 3"/>
+          <p:cNvSpPr txBox="1">
+            <a:spLocks/>
+          </p:cNvSpPr>
+          <p:nvPr/>
+        </p:nvSpPr>
+        <p:spPr>
+          <a:xfrm>
+            <a:off x="209549" y="1407638"/>
+            <a:ext cx="11755315" cy="817684"/>
+          </a:xfrm>
+          <a:prstGeom prst="rect">
+            <a:avLst/>
+          </a:prstGeom>
+          <a:solidFill>
+            <a:schemeClr val="tx1"/>
+          </a:solidFill>
+          <a:ln>
+            <a:solidFill>
+              <a:schemeClr val="tx1"/>
+            </a:solidFill>
+          </a:ln>
+        </p:spPr>
+        <p:txBody>
+          <a:bodyPr vert="horz" lIns="91440" tIns="45720" rIns="91440" bIns="45720" rtlCol="0" anchor="ctr">
+            <a:normAutofit/>
+          </a:bodyPr>
+          <a:lstStyle>
+            <a:lvl1pPr algn="l" defTabSz="914400" rtl="0" eaLnBrk="1" latinLnBrk="0" hangingPunct="1">
+              <a:lnSpc>
+                <a:spcPct val="90000"/>
+              </a:lnSpc>
+              <a:spcBef>
+                <a:spcPct val="0"/>
+              </a:spcBef>
+              <a:buNone/>
+              <a:defRPr sz="4400" kern="1200">
+                <a:solidFill>
+                  <a:schemeClr val="tx1"/>
+                </a:solidFill>
+                <a:latin typeface="+mj-lt"/>
+                <a:ea typeface="+mj-ea"/>
+                <a:cs typeface="+mj-cs"/>
+              </a:defRPr>
+            </a:lvl1pPr>
+          </a:lstStyle>
+          <a:p>
+            <a:r>
+              <a:rPr lang="en-US" sz="2400" dirty="0">
+                <a:solidFill>
+                  <a:schemeClr val="bg1"/>
+                </a:solidFill>
+                <a:latin typeface="Consolas" panose="020B0609020204030204" pitchFamily="49" charset="0"/>
+              </a:rPr>
+              <a:t>Router(</a:t>
+            </a:r>
+            <a:r>
+              <a:rPr lang="en-US" sz="2400" dirty="0" err="1">
+                <a:solidFill>
+                  <a:schemeClr val="bg1"/>
+                </a:solidFill>
+                <a:latin typeface="Consolas" panose="020B0609020204030204" pitchFamily="49" charset="0"/>
+              </a:rPr>
+              <a:t>config</a:t>
+            </a:r>
+            <a:r>
+              <a:rPr lang="en-US" sz="2400" dirty="0">
+                <a:solidFill>
+                  <a:schemeClr val="bg1"/>
+                </a:solidFill>
+                <a:latin typeface="Consolas" panose="020B0609020204030204" pitchFamily="49" charset="0"/>
+              </a:rPr>
+              <a:t>-if)# </a:t>
+            </a:r>
+            <a:r>
+              <a:rPr lang="en-US" sz="2400" dirty="0" err="1">
+                <a:solidFill>
+                  <a:schemeClr val="bg1"/>
+                </a:solidFill>
+                <a:latin typeface="Consolas" panose="020B0609020204030204" pitchFamily="49" charset="0"/>
+              </a:rPr>
+              <a:t>ip</a:t>
+            </a:r>
+            <a:r>
+              <a:rPr lang="en-US" sz="2400" dirty="0">
+                <a:solidFill>
+                  <a:schemeClr val="bg1"/>
+                </a:solidFill>
+                <a:latin typeface="Consolas" panose="020B0609020204030204" pitchFamily="49" charset="0"/>
+              </a:rPr>
+              <a:t> access-group &lt;ИМЯ_ACL&gt; &lt;in | out&gt;</a:t>
+            </a:r>
+            <a:endParaRPr lang="ru-RU" sz="2400" dirty="0">
+              <a:solidFill>
+                <a:schemeClr val="bg1"/>
+              </a:solidFill>
+              <a:latin typeface="Consolas" panose="020B0609020204030204" pitchFamily="49" charset="0"/>
+            </a:endParaRPr>
+          </a:p>
+        </p:txBody>
+      </p:sp>
+      <p:sp>
+        <p:nvSpPr>
+          <p:cNvPr id="5" name="TextBox 4"/>
+          <p:cNvSpPr txBox="1"/>
+          <p:nvPr/>
+        </p:nvSpPr>
+        <p:spPr>
+          <a:xfrm>
+            <a:off x="536331" y="924061"/>
+            <a:ext cx="4716997" cy="369332"/>
+          </a:xfrm>
+          <a:prstGeom prst="rect">
+            <a:avLst/>
+          </a:prstGeom>
+          <a:noFill/>
+        </p:spPr>
+        <p:txBody>
+          <a:bodyPr wrap="none" rtlCol="0">
+            <a:spAutoFit/>
+          </a:bodyPr>
+          <a:lstStyle/>
+          <a:p>
+            <a:r>
+              <a:rPr lang="ru-RU" b="1" dirty="0"/>
+              <a:t>Применение ACL на физические интерфейсы</a:t>
+            </a:r>
+          </a:p>
+        </p:txBody>
+      </p:sp>
+      <p:graphicFrame>
+        <p:nvGraphicFramePr>
+          <p:cNvPr id="7" name="Таблица 6"/>
+          <p:cNvGraphicFramePr>
+            <a:graphicFrameLocks noGrp="1"/>
+          </p:cNvGraphicFramePr>
+          <p:nvPr>
+            <p:extLst>
+              <p:ext uri="{D42A27DB-BD31-4B8C-83A1-F6EECF244321}">
+                <p14:modId xmlns:p14="http://schemas.microsoft.com/office/powerpoint/2010/main" val="1399938411"/>
+              </p:ext>
+            </p:extLst>
+          </p:nvPr>
+        </p:nvGraphicFramePr>
+        <p:xfrm>
+          <a:off x="209547" y="2437498"/>
+          <a:ext cx="11755317" cy="1352550"/>
+        </p:xfrm>
+        <a:graphic>
+          <a:graphicData uri="http://schemas.openxmlformats.org/drawingml/2006/table">
+            <a:tbl>
+              <a:tblPr/>
+              <a:tblGrid>
+                <a:gridCol w="2006115">
+                  <a:extLst>
+                    <a:ext uri="{9D8B030D-6E8A-4147-A177-3AD203B41FA5}">
+                      <a16:colId xmlns:a16="http://schemas.microsoft.com/office/drawing/2014/main" val="207901487"/>
+                    </a:ext>
+                  </a:extLst>
+                </a:gridCol>
+                <a:gridCol w="5231423">
+                  <a:extLst>
+                    <a:ext uri="{9D8B030D-6E8A-4147-A177-3AD203B41FA5}">
+                      <a16:colId xmlns:a16="http://schemas.microsoft.com/office/drawing/2014/main" val="50644823"/>
+                    </a:ext>
+                  </a:extLst>
+                </a:gridCol>
+                <a:gridCol w="4517779">
+                  <a:extLst>
+                    <a:ext uri="{9D8B030D-6E8A-4147-A177-3AD203B41FA5}">
+                      <a16:colId xmlns:a16="http://schemas.microsoft.com/office/drawing/2014/main" val="3264033052"/>
+                    </a:ext>
+                  </a:extLst>
+                </a:gridCol>
+              </a:tblGrid>
+              <a:tr h="252310">
+                <a:tc>
+                  <a:txBody>
+                    <a:bodyPr/>
+                    <a:lstStyle/>
+                    <a:p>
+                      <a:pPr algn="l"/>
+                      <a:r>
+                        <a:rPr lang="ru-RU" sz="1400">
+                          <a:effectLst/>
+                        </a:rPr>
+                        <a:t>Направление</a:t>
+                      </a:r>
+                    </a:p>
+                  </a:txBody>
+                  <a:tcPr marL="95250" marR="95250" marT="47625" marB="47625" anchor="ctr">
+                    <a:lnL>
+                      <a:noFill/>
+                    </a:lnL>
+                    <a:lnR>
+                      <a:noFill/>
+                    </a:lnR>
+                    <a:lnT>
+                      <a:noFill/>
+                    </a:lnT>
+                    <a:lnB>
+                      <a:noFill/>
+                    </a:lnB>
+                  </a:tcPr>
+                </a:tc>
+                <a:tc>
+                  <a:txBody>
+                    <a:bodyPr/>
+                    <a:lstStyle/>
+                    <a:p>
+                      <a:pPr algn="l"/>
+                      <a:r>
+                        <a:rPr lang="ru-RU" sz="1400">
+                          <a:effectLst/>
+                        </a:rPr>
+                        <a:t>Момент проверки пакета</a:t>
+                      </a:r>
+                    </a:p>
+                  </a:txBody>
+                  <a:tcPr marL="95250" marR="95250" marT="47625" marB="47625" anchor="ctr">
+                    <a:lnL>
+                      <a:noFill/>
+                    </a:lnL>
+                    <a:lnR>
+                      <a:noFill/>
+                    </a:lnR>
+                    <a:lnT>
+                      <a:noFill/>
+                    </a:lnT>
+                    <a:lnB>
+                      <a:noFill/>
+                    </a:lnB>
+                  </a:tcPr>
+                </a:tc>
+                <a:tc>
+                  <a:txBody>
+                    <a:bodyPr/>
+                    <a:lstStyle/>
+                    <a:p>
+                      <a:pPr algn="l"/>
+                      <a:r>
+                        <a:rPr lang="ru-RU" sz="1400">
+                          <a:effectLst/>
+                        </a:rPr>
+                        <a:t>Типичное применение</a:t>
+                      </a:r>
+                    </a:p>
+                  </a:txBody>
+                  <a:tcPr marL="95250" marR="95250" marT="47625" marB="47625" anchor="ctr">
+                    <a:lnL>
+                      <a:noFill/>
+                    </a:lnL>
+                    <a:lnR>
+                      <a:noFill/>
+                    </a:lnR>
+                    <a:lnT>
+                      <a:noFill/>
+                    </a:lnT>
+                    <a:lnB>
+                      <a:noFill/>
+                    </a:lnB>
+                  </a:tcPr>
+                </a:tc>
+                <a:extLst>
+                  <a:ext uri="{0D108BD9-81ED-4DB2-BD59-A6C34878D82A}">
+                    <a16:rowId xmlns:a16="http://schemas.microsoft.com/office/drawing/2014/main" val="118823367"/>
+                  </a:ext>
+                </a:extLst>
+              </a:tr>
+              <a:tr h="426746">
+                <a:tc>
+                  <a:txBody>
+                    <a:bodyPr/>
+                    <a:lstStyle/>
+                    <a:p>
+                      <a:r>
+                        <a:rPr lang="af-ZA" sz="1400" b="1">
+                          <a:effectLst/>
+                        </a:rPr>
+                        <a:t>in</a:t>
+                      </a:r>
+                      <a:r>
+                        <a:rPr lang="af-ZA" sz="1400">
+                          <a:effectLst/>
+                        </a:rPr>
+                        <a:t> (</a:t>
+                      </a:r>
+                      <a:r>
+                        <a:rPr lang="ru-RU" sz="1400">
+                          <a:effectLst/>
+                        </a:rPr>
+                        <a:t>входящий)</a:t>
+                      </a:r>
+                    </a:p>
+                  </a:txBody>
+                  <a:tcPr marL="95250" marR="95250" marT="47625" marB="47625" anchor="ctr">
+                    <a:lnL>
+                      <a:noFill/>
+                    </a:lnL>
+                    <a:lnR>
+                      <a:noFill/>
+                    </a:lnR>
+                    <a:lnT>
+                      <a:noFill/>
+                    </a:lnT>
+                    <a:lnB>
+                      <a:noFill/>
+                    </a:lnB>
+                  </a:tcPr>
+                </a:tc>
+                <a:tc>
+                  <a:txBody>
+                    <a:bodyPr/>
+                    <a:lstStyle/>
+                    <a:p>
+                      <a:r>
+                        <a:rPr lang="ru-RU" sz="1400" dirty="0">
+                          <a:effectLst/>
+                        </a:rPr>
+                        <a:t>До обработки таблицей маршрутизации (</a:t>
+                      </a:r>
+                      <a:r>
+                        <a:rPr lang="ru-RU" sz="1400" dirty="0" err="1">
+                          <a:effectLst/>
+                        </a:rPr>
+                        <a:t>Pre-routing</a:t>
+                      </a:r>
+                      <a:r>
+                        <a:rPr lang="ru-RU" sz="1400" dirty="0">
+                          <a:effectLst/>
+                        </a:rPr>
+                        <a:t>).</a:t>
+                      </a:r>
+                    </a:p>
+                  </a:txBody>
+                  <a:tcPr marL="95250" marR="95250" marT="47625" marB="47625" anchor="ctr">
+                    <a:lnL>
+                      <a:noFill/>
+                    </a:lnL>
+                    <a:lnR>
+                      <a:noFill/>
+                    </a:lnR>
+                    <a:lnT>
+                      <a:noFill/>
+                    </a:lnT>
+                    <a:lnB>
+                      <a:noFill/>
+                    </a:lnB>
+                  </a:tcPr>
+                </a:tc>
+                <a:tc>
+                  <a:txBody>
+                    <a:bodyPr/>
+                    <a:lstStyle/>
+                    <a:p>
+                      <a:r>
+                        <a:rPr lang="ru-RU" sz="1400" dirty="0">
+                          <a:effectLst/>
+                        </a:rPr>
+                        <a:t>Быстрая блокировка нежелательного трафика на периметре.</a:t>
+                      </a:r>
+                    </a:p>
+                  </a:txBody>
+                  <a:tcPr marL="95250" marR="95250" marT="47625" marB="47625" anchor="ctr">
+                    <a:lnL>
+                      <a:noFill/>
+                    </a:lnL>
+                    <a:lnR>
+                      <a:noFill/>
+                    </a:lnR>
+                    <a:lnT>
+                      <a:noFill/>
+                    </a:lnT>
+                    <a:lnB>
+                      <a:noFill/>
+                    </a:lnB>
+                  </a:tcPr>
+                </a:tc>
+                <a:extLst>
+                  <a:ext uri="{0D108BD9-81ED-4DB2-BD59-A6C34878D82A}">
+                    <a16:rowId xmlns:a16="http://schemas.microsoft.com/office/drawing/2014/main" val="3050888680"/>
+                  </a:ext>
+                </a:extLst>
+              </a:tr>
+              <a:tr h="426746">
+                <a:tc>
+                  <a:txBody>
+                    <a:bodyPr/>
+                    <a:lstStyle/>
+                    <a:p>
+                      <a:r>
+                        <a:rPr lang="af-ZA" sz="1400" b="1" dirty="0">
+                          <a:effectLst/>
+                        </a:rPr>
+                        <a:t>out</a:t>
+                      </a:r>
+                      <a:r>
+                        <a:rPr lang="af-ZA" sz="1400" dirty="0">
+                          <a:effectLst/>
+                        </a:rPr>
+                        <a:t> (</a:t>
+                      </a:r>
+                      <a:r>
+                        <a:rPr lang="ru-RU" sz="1400" dirty="0">
+                          <a:effectLst/>
+                        </a:rPr>
+                        <a:t>исходящий)</a:t>
+                      </a:r>
+                    </a:p>
+                  </a:txBody>
+                  <a:tcPr marL="95250" marR="95250" marT="47625" marB="47625" anchor="ctr">
+                    <a:lnL>
+                      <a:noFill/>
+                    </a:lnL>
+                    <a:lnR>
+                      <a:noFill/>
+                    </a:lnR>
+                    <a:lnT>
+                      <a:noFill/>
+                    </a:lnT>
+                    <a:lnB>
+                      <a:noFill/>
+                    </a:lnB>
+                  </a:tcPr>
+                </a:tc>
+                <a:tc>
+                  <a:txBody>
+                    <a:bodyPr/>
+                    <a:lstStyle/>
+                    <a:p>
+                      <a:r>
+                        <a:rPr lang="ru-RU" sz="1400" dirty="0">
+                          <a:effectLst/>
+                        </a:rPr>
+                        <a:t>После принятия решения о маршрутизации и определения выходного порта (</a:t>
+                      </a:r>
+                      <a:r>
+                        <a:rPr lang="ru-RU" sz="1400" dirty="0" err="1">
+                          <a:effectLst/>
+                        </a:rPr>
+                        <a:t>Post-routing</a:t>
+                      </a:r>
+                      <a:r>
+                        <a:rPr lang="ru-RU" sz="1400" dirty="0">
+                          <a:effectLst/>
+                        </a:rPr>
+                        <a:t>).</a:t>
+                      </a:r>
+                    </a:p>
+                  </a:txBody>
+                  <a:tcPr marL="95250" marR="95250" marT="47625" marB="47625" anchor="ctr">
+                    <a:lnL>
+                      <a:noFill/>
+                    </a:lnL>
+                    <a:lnR>
+                      <a:noFill/>
+                    </a:lnR>
+                    <a:lnT>
+                      <a:noFill/>
+                    </a:lnT>
+                    <a:lnB>
+                      <a:noFill/>
+                    </a:lnB>
+                  </a:tcPr>
+                </a:tc>
+                <a:tc>
+                  <a:txBody>
+                    <a:bodyPr/>
+                    <a:lstStyle/>
+                    <a:p>
+                      <a:r>
+                        <a:rPr lang="ru-RU" sz="1400" dirty="0">
+                          <a:effectLst/>
+                        </a:rPr>
+                        <a:t>Контроль трафика, покидающего данный сегмент / направляющегося к подключенным серверам.</a:t>
+                      </a:r>
+                    </a:p>
+                  </a:txBody>
+                  <a:tcPr marL="95250" marR="95250" marT="47625" marB="47625" anchor="ctr">
+                    <a:lnL>
+                      <a:noFill/>
+                    </a:lnL>
+                    <a:lnR>
+                      <a:noFill/>
+                    </a:lnR>
+                    <a:lnT>
+                      <a:noFill/>
+                    </a:lnT>
+                    <a:lnB>
+                      <a:noFill/>
+                    </a:lnB>
+                  </a:tcPr>
+                </a:tc>
+                <a:extLst>
+                  <a:ext uri="{0D108BD9-81ED-4DB2-BD59-A6C34878D82A}">
+                    <a16:rowId xmlns:a16="http://schemas.microsoft.com/office/drawing/2014/main" val="2158935532"/>
+                  </a:ext>
+                </a:extLst>
+              </a:tr>
+            </a:tbl>
+          </a:graphicData>
+        </a:graphic>
+      </p:graphicFrame>
+      <p:sp>
+        <p:nvSpPr>
+          <p:cNvPr id="8" name="Rectangle 3"/>
+          <p:cNvSpPr>
+            <a:spLocks noChangeArrowheads="1"/>
+          </p:cNvSpPr>
+          <p:nvPr/>
+        </p:nvSpPr>
+        <p:spPr bwMode="auto">
+          <a:xfrm>
+            <a:off x="109328" y="2437498"/>
+            <a:ext cx="13549500" cy="646331"/>
+          </a:xfrm>
+          <a:prstGeom prst="rect">
+            <a:avLst/>
+          </a:prstGeom>
+          <a:noFill/>
+          <a:ln>
+            <a:noFill/>
+          </a:ln>
+          <a:effectLst/>
+          <a:extLst>
+            <a:ext uri="{909E8E84-426E-40DD-AFC4-6F175D3DCCD1}">
+              <a14:hiddenFill xmlns:a14="http://schemas.microsoft.com/office/drawing/2010/main">
+                <a:solidFill>
+                  <a:schemeClr val="accent1"/>
+                </a:solidFill>
+              </a14:hiddenFill>
+            </a:ext>
+            <a:ext uri="{91240B29-F687-4F45-9708-019B960494DF}">
+              <a14:hiddenLine xmlns:a14="http://schemas.microsoft.com/office/drawing/2010/main" w="9525">
+                <a:solidFill>
+                  <a:schemeClr val="tx1"/>
+                </a:solidFill>
+                <a:miter lim="800000"/>
+                <a:headEnd/>
+                <a:tailEnd/>
+              </a14:hiddenLine>
+            </a:ext>
+            <a:ext uri="{AF507438-7753-43E0-B8FC-AC1667EBCBE1}">
+              <a14:hiddenEffects xmlns:a14="http://schemas.microsoft.com/office/drawing/2010/main">
+                <a:effectLst>
+                  <a:outerShdw dist="35921" dir="2700000" algn="ctr" rotWithShape="0">
+                    <a:schemeClr val="bg2"/>
+                  </a:outerShdw>
+                </a:effectLst>
+              </a14:hiddenEffects>
+            </a:ext>
+          </a:extLst>
+        </p:spPr>
+        <p:txBody>
+          <a:bodyPr vert="horz" wrap="square" lIns="91440" tIns="45720" rIns="91440" bIns="45720" numCol="1" anchor="ctr" anchorCtr="0" compatLnSpc="1">
+            <a:prstTxWarp prst="textNoShape">
+              <a:avLst/>
+            </a:prstTxWarp>
+            <a:spAutoFit/>
+          </a:bodyPr>
+          <a:lstStyle/>
+          <a:p>
+            <a:pPr marL="0" marR="0" lvl="0" indent="0" algn="l" defTabSz="914400" rtl="0" eaLnBrk="0" fontAlgn="base" latinLnBrk="0" hangingPunct="0">
+              <a:lnSpc>
+                <a:spcPct val="100000"/>
+              </a:lnSpc>
+              <a:spcBef>
+                <a:spcPct val="0"/>
+              </a:spcBef>
+              <a:spcAft>
+                <a:spcPct val="0"/>
+              </a:spcAft>
+              <a:buClrTx/>
+              <a:buSzTx/>
+              <a:buFontTx/>
+              <a:buNone/>
+              <a:tabLst/>
+            </a:pPr>
+            <a:r>
+              <a:rPr kumimoji="0" lang="ru-RU" altLang="ru-RU" sz="1800" b="0" i="0" u="none" strike="noStrike" cap="none" normalizeH="0" baseline="0" smtClean="0">
+                <a:ln>
+                  <a:noFill/>
+                </a:ln>
+                <a:solidFill>
+                  <a:schemeClr val="tx1"/>
+                </a:solidFill>
+                <a:effectLst/>
+                <a:latin typeface="Arial" panose="020B0604020202020204" pitchFamily="34" charset="0"/>
+              </a:rPr>
+              <a:t/>
+            </a:r>
+            <a:br>
+              <a:rPr kumimoji="0" lang="ru-RU" altLang="ru-RU" sz="1800" b="0" i="0" u="none" strike="noStrike" cap="none" normalizeH="0" baseline="0" smtClean="0">
+                <a:ln>
+                  <a:noFill/>
+                </a:ln>
+                <a:solidFill>
+                  <a:schemeClr val="tx1"/>
+                </a:solidFill>
+                <a:effectLst/>
+                <a:latin typeface="Arial" panose="020B0604020202020204" pitchFamily="34" charset="0"/>
+              </a:rPr>
+            </a:br>
+            <a:endParaRPr kumimoji="0" lang="ru-RU" altLang="ru-RU" sz="1800" b="0" i="0" u="none" strike="noStrike" cap="none" normalizeH="0" baseline="0" smtClean="0">
+              <a:ln>
+                <a:noFill/>
+              </a:ln>
+              <a:solidFill>
+                <a:schemeClr val="tx1"/>
+              </a:solidFill>
+              <a:effectLst/>
+              <a:latin typeface="Arial" panose="020B0604020202020204" pitchFamily="34" charset="0"/>
+            </a:endParaRPr>
+          </a:p>
+        </p:txBody>
+      </p:sp>
+      <p:sp>
+        <p:nvSpPr>
+          <p:cNvPr id="9" name="Заголовок 3"/>
+          <p:cNvSpPr txBox="1">
+            <a:spLocks/>
+          </p:cNvSpPr>
+          <p:nvPr/>
+        </p:nvSpPr>
+        <p:spPr>
+          <a:xfrm>
+            <a:off x="209549" y="4391161"/>
+            <a:ext cx="11755315" cy="817684"/>
+          </a:xfrm>
+          <a:prstGeom prst="rect">
+            <a:avLst/>
+          </a:prstGeom>
+          <a:solidFill>
+            <a:schemeClr val="tx1"/>
+          </a:solidFill>
+          <a:ln>
+            <a:solidFill>
+              <a:schemeClr val="tx1"/>
+            </a:solidFill>
+          </a:ln>
+        </p:spPr>
+        <p:txBody>
+          <a:bodyPr vert="horz" lIns="91440" tIns="45720" rIns="91440" bIns="45720" rtlCol="0" anchor="ctr">
+            <a:normAutofit/>
+          </a:bodyPr>
+          <a:lstStyle>
+            <a:lvl1pPr algn="l" defTabSz="914400" rtl="0" eaLnBrk="1" latinLnBrk="0" hangingPunct="1">
+              <a:lnSpc>
+                <a:spcPct val="90000"/>
+              </a:lnSpc>
+              <a:spcBef>
+                <a:spcPct val="0"/>
+              </a:spcBef>
+              <a:buNone/>
+              <a:defRPr sz="4400" kern="1200">
+                <a:solidFill>
+                  <a:schemeClr val="tx1"/>
+                </a:solidFill>
+                <a:latin typeface="+mj-lt"/>
+                <a:ea typeface="+mj-ea"/>
+                <a:cs typeface="+mj-cs"/>
+              </a:defRPr>
+            </a:lvl1pPr>
+          </a:lstStyle>
+          <a:p>
+            <a:r>
+              <a:rPr lang="en-US" sz="2400" dirty="0">
+                <a:solidFill>
+                  <a:schemeClr val="bg1"/>
+                </a:solidFill>
+                <a:latin typeface="Consolas" panose="020B0609020204030204" pitchFamily="49" charset="0"/>
+              </a:rPr>
+              <a:t>Router(</a:t>
+            </a:r>
+            <a:r>
+              <a:rPr lang="en-US" sz="2400" dirty="0" err="1">
+                <a:solidFill>
+                  <a:schemeClr val="bg1"/>
+                </a:solidFill>
+                <a:latin typeface="Consolas" panose="020B0609020204030204" pitchFamily="49" charset="0"/>
+              </a:rPr>
+              <a:t>config</a:t>
+            </a:r>
+            <a:r>
+              <a:rPr lang="en-US" sz="2400" dirty="0">
+                <a:solidFill>
+                  <a:schemeClr val="bg1"/>
+                </a:solidFill>
+                <a:latin typeface="Consolas" panose="020B0609020204030204" pitchFamily="49" charset="0"/>
+              </a:rPr>
+              <a:t>)# line </a:t>
+            </a:r>
+            <a:r>
+              <a:rPr lang="en-US" sz="2400" dirty="0" err="1">
+                <a:solidFill>
+                  <a:schemeClr val="bg1"/>
+                </a:solidFill>
+                <a:latin typeface="Consolas" panose="020B0609020204030204" pitchFamily="49" charset="0"/>
+              </a:rPr>
+              <a:t>vty</a:t>
+            </a:r>
+            <a:r>
+              <a:rPr lang="en-US" sz="2400" dirty="0">
+                <a:solidFill>
+                  <a:schemeClr val="bg1"/>
+                </a:solidFill>
+                <a:latin typeface="Consolas" panose="020B0609020204030204" pitchFamily="49" charset="0"/>
+              </a:rPr>
+              <a:t> &lt;</a:t>
+            </a:r>
+            <a:r>
+              <a:rPr lang="ru-RU" sz="2400" dirty="0">
+                <a:solidFill>
+                  <a:schemeClr val="bg1"/>
+                </a:solidFill>
+                <a:latin typeface="Consolas" panose="020B0609020204030204" pitchFamily="49" charset="0"/>
+              </a:rPr>
+              <a:t>НАЧАЛО&gt; &lt;КОНЕЦ&gt;</a:t>
+            </a:r>
+          </a:p>
+          <a:p>
+            <a:r>
+              <a:rPr lang="en-US" sz="2400" dirty="0">
+                <a:solidFill>
+                  <a:schemeClr val="bg1"/>
+                </a:solidFill>
+                <a:latin typeface="Consolas" panose="020B0609020204030204" pitchFamily="49" charset="0"/>
+              </a:rPr>
+              <a:t>Router(</a:t>
+            </a:r>
+            <a:r>
+              <a:rPr lang="en-US" sz="2400" dirty="0" err="1">
+                <a:solidFill>
+                  <a:schemeClr val="bg1"/>
+                </a:solidFill>
+                <a:latin typeface="Consolas" panose="020B0609020204030204" pitchFamily="49" charset="0"/>
+              </a:rPr>
+              <a:t>config</a:t>
+            </a:r>
+            <a:r>
+              <a:rPr lang="en-US" sz="2400" dirty="0">
+                <a:solidFill>
+                  <a:schemeClr val="bg1"/>
+                </a:solidFill>
+                <a:latin typeface="Consolas" panose="020B0609020204030204" pitchFamily="49" charset="0"/>
+              </a:rPr>
+              <a:t>-line)# access-class &lt;</a:t>
+            </a:r>
+            <a:r>
+              <a:rPr lang="ru-RU" sz="2400" dirty="0">
+                <a:solidFill>
+                  <a:schemeClr val="bg1"/>
+                </a:solidFill>
+                <a:latin typeface="Consolas" panose="020B0609020204030204" pitchFamily="49" charset="0"/>
+              </a:rPr>
+              <a:t>ИМЯ_</a:t>
+            </a:r>
+            <a:r>
+              <a:rPr lang="en-US" sz="2400" dirty="0">
+                <a:solidFill>
+                  <a:schemeClr val="bg1"/>
+                </a:solidFill>
+                <a:latin typeface="Consolas" panose="020B0609020204030204" pitchFamily="49" charset="0"/>
+              </a:rPr>
+              <a:t>ACL&gt; in</a:t>
+            </a:r>
+            <a:endParaRPr lang="ru-RU" sz="2400" dirty="0">
+              <a:solidFill>
+                <a:schemeClr val="bg1"/>
+              </a:solidFill>
+              <a:latin typeface="Consolas" panose="020B0609020204030204" pitchFamily="49" charset="0"/>
+            </a:endParaRPr>
+          </a:p>
+        </p:txBody>
+      </p:sp>
+      <p:sp>
+        <p:nvSpPr>
+          <p:cNvPr id="10" name="TextBox 9"/>
+          <p:cNvSpPr txBox="1"/>
+          <p:nvPr/>
+        </p:nvSpPr>
+        <p:spPr>
+          <a:xfrm>
+            <a:off x="536331" y="3907584"/>
+            <a:ext cx="6523892" cy="646331"/>
+          </a:xfrm>
+          <a:prstGeom prst="rect">
+            <a:avLst/>
+          </a:prstGeom>
+          <a:noFill/>
+        </p:spPr>
+        <p:txBody>
+          <a:bodyPr wrap="square" rtlCol="0">
+            <a:spAutoFit/>
+          </a:bodyPr>
+          <a:lstStyle/>
+          <a:p>
+            <a:r>
+              <a:rPr lang="ru-RU" b="1" dirty="0"/>
+              <a:t>Применение для фильтрации сессий управления (</a:t>
+            </a:r>
+            <a:r>
+              <a:rPr lang="ru-RU" b="1" dirty="0" smtClean="0"/>
+              <a:t>VTY</a:t>
+            </a:r>
+            <a:r>
+              <a:rPr lang="ru-RU" dirty="0"/>
+              <a:t/>
+            </a:r>
+            <a:br>
+              <a:rPr lang="ru-RU" dirty="0"/>
+            </a:br>
+            <a:endParaRPr lang="ru-RU" b="1" dirty="0"/>
+          </a:p>
+        </p:txBody>
+      </p:sp>
+      <p:graphicFrame>
+        <p:nvGraphicFramePr>
+          <p:cNvPr id="12" name="Таблица 11"/>
+          <p:cNvGraphicFramePr>
+            <a:graphicFrameLocks noGrp="1"/>
+          </p:cNvGraphicFramePr>
+          <p:nvPr>
+            <p:extLst>
+              <p:ext uri="{D42A27DB-BD31-4B8C-83A1-F6EECF244321}">
+                <p14:modId xmlns:p14="http://schemas.microsoft.com/office/powerpoint/2010/main" val="2015177485"/>
+              </p:ext>
+            </p:extLst>
+          </p:nvPr>
+        </p:nvGraphicFramePr>
+        <p:xfrm>
+          <a:off x="216875" y="5336931"/>
+          <a:ext cx="11747988" cy="1187932"/>
+        </p:xfrm>
+        <a:graphic>
+          <a:graphicData uri="http://schemas.openxmlformats.org/drawingml/2006/table">
+            <a:tbl>
+              <a:tblPr/>
+              <a:tblGrid>
+                <a:gridCol w="1383325">
+                  <a:extLst>
+                    <a:ext uri="{9D8B030D-6E8A-4147-A177-3AD203B41FA5}">
+                      <a16:colId xmlns:a16="http://schemas.microsoft.com/office/drawing/2014/main" val="1326741074"/>
+                    </a:ext>
+                  </a:extLst>
+                </a:gridCol>
+                <a:gridCol w="4615962">
+                  <a:extLst>
+                    <a:ext uri="{9D8B030D-6E8A-4147-A177-3AD203B41FA5}">
+                      <a16:colId xmlns:a16="http://schemas.microsoft.com/office/drawing/2014/main" val="3271294546"/>
+                    </a:ext>
+                  </a:extLst>
+                </a:gridCol>
+                <a:gridCol w="5748701">
+                  <a:extLst>
+                    <a:ext uri="{9D8B030D-6E8A-4147-A177-3AD203B41FA5}">
+                      <a16:colId xmlns:a16="http://schemas.microsoft.com/office/drawing/2014/main" val="1420761482"/>
+                    </a:ext>
+                  </a:extLst>
+                </a:gridCol>
+              </a:tblGrid>
+              <a:tr h="0">
+                <a:tc>
+                  <a:txBody>
+                    <a:bodyPr/>
+                    <a:lstStyle/>
+                    <a:p>
+                      <a:pPr algn="l"/>
+                      <a:r>
+                        <a:rPr lang="ru-RU" sz="1200" b="0" dirty="0">
+                          <a:effectLst/>
+                          <a:latin typeface="quote-cjk-patch"/>
+                        </a:rPr>
+                        <a:t>Направление</a:t>
+                      </a:r>
+                    </a:p>
+                  </a:txBody>
+                  <a:tcPr marR="152400" marT="95250" marB="95250" anchor="ctr">
+                    <a:lnL>
+                      <a:noFill/>
+                    </a:lnL>
+                    <a:lnR>
+                      <a:noFill/>
+                    </a:lnR>
+                    <a:lnT>
+                      <a:noFill/>
+                    </a:lnT>
+                    <a:lnB>
+                      <a:noFill/>
+                    </a:lnB>
+                    <a:solidFill>
+                      <a:srgbClr val="FFFFFF"/>
+                    </a:solidFill>
+                  </a:tcPr>
+                </a:tc>
+                <a:tc>
+                  <a:txBody>
+                    <a:bodyPr/>
+                    <a:lstStyle/>
+                    <a:p>
+                      <a:pPr algn="l"/>
+                      <a:r>
+                        <a:rPr lang="ru-RU" sz="1200" b="0">
+                          <a:effectLst/>
+                          <a:latin typeface="quote-cjk-patch"/>
+                        </a:rPr>
+                        <a:t>Что фильтрует</a:t>
+                      </a:r>
+                    </a:p>
+                  </a:txBody>
+                  <a:tcPr marL="152400" marR="152400" marT="95250" marB="95250" anchor="ctr">
+                    <a:lnL>
+                      <a:noFill/>
+                    </a:lnL>
+                    <a:lnR>
+                      <a:noFill/>
+                    </a:lnR>
+                    <a:lnT>
+                      <a:noFill/>
+                    </a:lnT>
+                    <a:lnB>
+                      <a:noFill/>
+                    </a:lnB>
+                    <a:solidFill>
+                      <a:srgbClr val="FFFFFF"/>
+                    </a:solidFill>
+                  </a:tcPr>
+                </a:tc>
+                <a:tc>
+                  <a:txBody>
+                    <a:bodyPr/>
+                    <a:lstStyle/>
+                    <a:p>
+                      <a:pPr algn="l"/>
+                      <a:r>
+                        <a:rPr lang="ru-RU" sz="1200" b="0" dirty="0">
+                          <a:effectLst/>
+                          <a:latin typeface="quote-cjk-patch"/>
+                        </a:rPr>
+                        <a:t>Какой адрес в ACL проверяется</a:t>
+                      </a:r>
+                    </a:p>
+                  </a:txBody>
+                  <a:tcPr marL="152400" marR="152400" marT="95250" marB="95250" anchor="ctr">
+                    <a:lnL>
+                      <a:noFill/>
+                    </a:lnL>
+                    <a:lnR>
+                      <a:noFill/>
+                    </a:lnR>
+                    <a:lnT>
+                      <a:noFill/>
+                    </a:lnT>
+                    <a:lnB>
+                      <a:noFill/>
+                    </a:lnB>
+                    <a:solidFill>
+                      <a:srgbClr val="FFFFFF"/>
+                    </a:solidFill>
+                  </a:tcPr>
+                </a:tc>
+                <a:extLst>
+                  <a:ext uri="{0D108BD9-81ED-4DB2-BD59-A6C34878D82A}">
+                    <a16:rowId xmlns:a16="http://schemas.microsoft.com/office/drawing/2014/main" val="3777656784"/>
+                  </a:ext>
+                </a:extLst>
+              </a:tr>
+              <a:tr h="363698">
+                <a:tc>
+                  <a:txBody>
+                    <a:bodyPr/>
+                    <a:lstStyle/>
+                    <a:p>
+                      <a:r>
+                        <a:rPr lang="af-ZA" sz="1200" b="1">
+                          <a:effectLst/>
+                          <a:latin typeface="quote-cjk-patch"/>
+                        </a:rPr>
+                        <a:t>in</a:t>
+                      </a:r>
+                      <a:endParaRPr lang="af-ZA" sz="1200" b="0">
+                        <a:effectLst/>
+                        <a:latin typeface="quote-cjk-patch"/>
+                      </a:endParaRPr>
+                    </a:p>
+                  </a:txBody>
+                  <a:tcPr marR="152400" marT="95250" marB="95250" anchor="ctr">
+                    <a:lnL>
+                      <a:noFill/>
+                    </a:lnL>
+                    <a:lnR>
+                      <a:noFill/>
+                    </a:lnR>
+                    <a:lnT>
+                      <a:noFill/>
+                    </a:lnT>
+                    <a:lnB>
+                      <a:noFill/>
+                    </a:lnB>
+                    <a:solidFill>
+                      <a:srgbClr val="FFFFFF"/>
+                    </a:solidFill>
+                  </a:tcPr>
+                </a:tc>
+                <a:tc>
+                  <a:txBody>
+                    <a:bodyPr/>
+                    <a:lstStyle/>
+                    <a:p>
+                      <a:r>
+                        <a:rPr lang="ru-RU" sz="1200" b="1">
+                          <a:effectLst/>
+                          <a:latin typeface="quote-cjk-patch"/>
+                        </a:rPr>
+                        <a:t>Входящие</a:t>
+                      </a:r>
+                      <a:r>
+                        <a:rPr lang="ru-RU" sz="1200" b="0">
+                          <a:effectLst/>
+                          <a:latin typeface="quote-cjk-patch"/>
+                        </a:rPr>
+                        <a:t> </a:t>
+                      </a:r>
+                      <a:r>
+                        <a:rPr lang="af-ZA" sz="1200" b="0">
+                          <a:effectLst/>
+                          <a:latin typeface="quote-cjk-patch"/>
+                        </a:rPr>
+                        <a:t>SSH/Telnet-</a:t>
+                      </a:r>
+                      <a:r>
+                        <a:rPr lang="ru-RU" sz="1200" b="0">
+                          <a:effectLst/>
+                          <a:latin typeface="quote-cjk-patch"/>
+                        </a:rPr>
+                        <a:t>подключения </a:t>
+                      </a:r>
+                      <a:r>
+                        <a:rPr lang="ru-RU" sz="1200" b="1">
+                          <a:effectLst/>
+                          <a:latin typeface="quote-cjk-patch"/>
+                        </a:rPr>
+                        <a:t>к</a:t>
+                      </a:r>
+                      <a:r>
+                        <a:rPr lang="ru-RU" sz="1200" b="0">
+                          <a:effectLst/>
+                          <a:latin typeface="quote-cjk-patch"/>
+                        </a:rPr>
+                        <a:t> устройству</a:t>
+                      </a:r>
+                    </a:p>
+                  </a:txBody>
+                  <a:tcPr marL="152400" marR="152400" marT="95250" marB="95250" anchor="ctr">
+                    <a:lnL>
+                      <a:noFill/>
+                    </a:lnL>
+                    <a:lnR>
+                      <a:noFill/>
+                    </a:lnR>
+                    <a:lnT>
+                      <a:noFill/>
+                    </a:lnT>
+                    <a:lnB>
+                      <a:noFill/>
+                    </a:lnB>
+                    <a:solidFill>
+                      <a:srgbClr val="FFFFFF"/>
+                    </a:solidFill>
+                  </a:tcPr>
+                </a:tc>
+                <a:tc>
+                  <a:txBody>
+                    <a:bodyPr/>
+                    <a:lstStyle/>
+                    <a:p>
+                      <a:r>
+                        <a:rPr lang="ru-RU" sz="1200" b="1">
+                          <a:effectLst/>
+                          <a:latin typeface="quote-cjk-patch"/>
+                        </a:rPr>
+                        <a:t>Source Address</a:t>
+                      </a:r>
+                      <a:r>
+                        <a:rPr lang="ru-RU" sz="1200" b="0">
+                          <a:effectLst/>
+                          <a:latin typeface="quote-cjk-patch"/>
+                        </a:rPr>
+                        <a:t> (откуда пришел клиент)</a:t>
+                      </a:r>
+                    </a:p>
+                  </a:txBody>
+                  <a:tcPr marL="152400" marT="95250" marB="95250" anchor="ctr">
+                    <a:lnL>
+                      <a:noFill/>
+                    </a:lnL>
+                    <a:lnR>
+                      <a:noFill/>
+                    </a:lnR>
+                    <a:lnT>
+                      <a:noFill/>
+                    </a:lnT>
+                    <a:lnB>
+                      <a:noFill/>
+                    </a:lnB>
+                    <a:solidFill>
+                      <a:srgbClr val="FFFFFF"/>
+                    </a:solidFill>
+                  </a:tcPr>
+                </a:tc>
+                <a:extLst>
+                  <a:ext uri="{0D108BD9-81ED-4DB2-BD59-A6C34878D82A}">
+                    <a16:rowId xmlns:a16="http://schemas.microsoft.com/office/drawing/2014/main" val="1564626315"/>
+                  </a:ext>
+                </a:extLst>
+              </a:tr>
+              <a:tr h="441172">
+                <a:tc>
+                  <a:txBody>
+                    <a:bodyPr/>
+                    <a:lstStyle/>
+                    <a:p>
+                      <a:r>
+                        <a:rPr lang="af-ZA" sz="1200" b="1">
+                          <a:effectLst/>
+                          <a:latin typeface="quote-cjk-patch"/>
+                        </a:rPr>
+                        <a:t>out</a:t>
+                      </a:r>
+                      <a:endParaRPr lang="af-ZA" sz="1200" b="0">
+                        <a:effectLst/>
+                        <a:latin typeface="quote-cjk-patch"/>
+                      </a:endParaRPr>
+                    </a:p>
+                  </a:txBody>
+                  <a:tcPr marR="152400" marT="95250" marB="95250" anchor="ctr">
+                    <a:lnL>
+                      <a:noFill/>
+                    </a:lnL>
+                    <a:lnR>
+                      <a:noFill/>
+                    </a:lnR>
+                    <a:lnT>
+                      <a:noFill/>
+                    </a:lnT>
+                    <a:lnB>
+                      <a:noFill/>
+                    </a:lnB>
+                    <a:solidFill>
+                      <a:srgbClr val="FFFFFF"/>
+                    </a:solidFill>
+                  </a:tcPr>
+                </a:tc>
+                <a:tc>
+                  <a:txBody>
+                    <a:bodyPr/>
+                    <a:lstStyle/>
+                    <a:p>
+                      <a:r>
+                        <a:rPr lang="ru-RU" sz="1200" b="1">
+                          <a:effectLst/>
+                          <a:latin typeface="quote-cjk-patch"/>
+                        </a:rPr>
+                        <a:t>Исходящие</a:t>
+                      </a:r>
+                      <a:r>
+                        <a:rPr lang="ru-RU" sz="1200" b="0">
+                          <a:effectLst/>
+                          <a:latin typeface="quote-cjk-patch"/>
+                        </a:rPr>
+                        <a:t> подключения </a:t>
+                      </a:r>
+                      <a:r>
+                        <a:rPr lang="ru-RU" sz="1200" b="1">
+                          <a:effectLst/>
+                          <a:latin typeface="quote-cjk-patch"/>
+                        </a:rPr>
+                        <a:t>с</a:t>
+                      </a:r>
+                      <a:r>
+                        <a:rPr lang="ru-RU" sz="1200" b="0">
+                          <a:effectLst/>
+                          <a:latin typeface="quote-cjk-patch"/>
+                        </a:rPr>
+                        <a:t> этого VTY к другим устройствам</a:t>
+                      </a:r>
+                    </a:p>
+                  </a:txBody>
+                  <a:tcPr marL="152400" marR="152400" marT="95250" marB="95250" anchor="ctr">
+                    <a:lnL>
+                      <a:noFill/>
+                    </a:lnL>
+                    <a:lnR>
+                      <a:noFill/>
+                    </a:lnR>
+                    <a:lnT>
+                      <a:noFill/>
+                    </a:lnT>
+                    <a:lnB>
+                      <a:noFill/>
+                    </a:lnB>
+                    <a:solidFill>
+                      <a:srgbClr val="FFFFFF"/>
+                    </a:solidFill>
+                  </a:tcPr>
+                </a:tc>
+                <a:tc>
+                  <a:txBody>
+                    <a:bodyPr/>
+                    <a:lstStyle/>
+                    <a:p>
+                      <a:r>
+                        <a:rPr lang="ru-RU" sz="1200" b="1" dirty="0" err="1">
+                          <a:effectLst/>
+                          <a:latin typeface="quote-cjk-patch"/>
+                        </a:rPr>
+                        <a:t>Destination</a:t>
+                      </a:r>
+                      <a:r>
+                        <a:rPr lang="ru-RU" sz="1200" b="1" dirty="0">
+                          <a:effectLst/>
+                          <a:latin typeface="quote-cjk-patch"/>
+                        </a:rPr>
+                        <a:t> </a:t>
+                      </a:r>
+                      <a:r>
+                        <a:rPr lang="ru-RU" sz="1200" b="1" dirty="0" err="1">
+                          <a:effectLst/>
+                          <a:latin typeface="quote-cjk-patch"/>
+                        </a:rPr>
+                        <a:t>Address</a:t>
+                      </a:r>
+                      <a:r>
+                        <a:rPr lang="ru-RU" sz="1200" b="0" dirty="0">
+                          <a:effectLst/>
+                          <a:latin typeface="quote-cjk-patch"/>
+                        </a:rPr>
+                        <a:t> (куда пытается подключиться пользователь)</a:t>
+                      </a:r>
+                    </a:p>
+                  </a:txBody>
+                  <a:tcPr marL="152400" marT="95250" marB="95250" anchor="ctr">
+                    <a:lnL>
+                      <a:noFill/>
+                    </a:lnL>
+                    <a:lnR>
+                      <a:noFill/>
+                    </a:lnR>
+                    <a:lnT>
+                      <a:noFill/>
+                    </a:lnT>
+                    <a:lnB>
+                      <a:noFill/>
+                    </a:lnB>
+                    <a:solidFill>
+                      <a:srgbClr val="FFFFFF"/>
+                    </a:solidFill>
+                  </a:tcPr>
+                </a:tc>
+                <a:extLst>
+                  <a:ext uri="{0D108BD9-81ED-4DB2-BD59-A6C34878D82A}">
+                    <a16:rowId xmlns:a16="http://schemas.microsoft.com/office/drawing/2014/main" val="3902784271"/>
+                  </a:ext>
+                </a:extLst>
+              </a:tr>
+            </a:tbl>
+          </a:graphicData>
+        </a:graphic>
+      </p:graphicFrame>
+    </p:spTree>
+    <p:extLst>
+      <p:ext uri="{BB962C8B-B14F-4D97-AF65-F5344CB8AC3E}">
+        <p14:creationId xmlns:p14="http://schemas.microsoft.com/office/powerpoint/2010/main" val="1642136392"/>
+      </p:ext>
+    </p:extLst>
+  </p:cSld>
+  <p:clrMapOvr>
+    <a:masterClrMapping/>
+  </p:clrMapOvr>
+  <p:timing>
+    <p:tnLst>
+      <p:par>
+        <p:cTn id="1" dur="indefinite" restart="never" nodeType="tmRoot"/>
+      </p:par>
+    </p:tnLst>
+  </p:timing>
+</p:sld>
+</file>
+
+<file path=ppt/slides/slide12.xml><?xml version="1.0" encoding="utf-8"?>
+<p:sld xmlns:a="http://schemas.openxmlformats.org/drawingml/2006/main" xmlns:r="http://schemas.openxmlformats.org/officeDocument/2006/relationships" xmlns:p="http://schemas.openxmlformats.org/presentationml/2006/main">
+  <p:cSld>
+    <p:spTree>
+      <p:nvGrpSpPr>
+        <p:cNvPr id="1" name=""/>
+        <p:cNvGrpSpPr/>
+        <p:nvPr/>
+      </p:nvGrpSpPr>
+      <p:grpSpPr>
+        <a:xfrm>
+          <a:off x="0" y="0"/>
+          <a:ext cx="0" cy="0"/>
+          <a:chOff x="0" y="0"/>
+          <a:chExt cx="0" cy="0"/>
+        </a:xfrm>
+      </p:grpSpPr>
+      <p:sp>
+        <p:nvSpPr>
+          <p:cNvPr id="2" name="Заголовок 1"/>
+          <p:cNvSpPr>
+            <a:spLocks noGrp="1"/>
+          </p:cNvSpPr>
+          <p:nvPr>
+            <p:ph type="title"/>
+          </p:nvPr>
+        </p:nvSpPr>
+        <p:spPr>
+          <a:xfrm>
+            <a:off x="218342" y="154110"/>
+            <a:ext cx="10515600" cy="610821"/>
+          </a:xfrm>
+        </p:spPr>
+        <p:txBody>
+          <a:bodyPr>
+            <a:normAutofit fontScale="90000"/>
+          </a:bodyPr>
+          <a:lstStyle/>
+          <a:p>
+            <a:r>
+              <a:rPr lang="ru-RU" dirty="0" smtClean="0"/>
+              <a:t>Настройка </a:t>
+            </a:r>
+            <a:r>
+              <a:rPr lang="en-US" dirty="0" smtClean="0"/>
+              <a:t>NAT</a:t>
+            </a:r>
+            <a:endParaRPr lang="ru-RU" dirty="0"/>
+          </a:p>
+        </p:txBody>
+      </p:sp>
+      <p:sp>
+        <p:nvSpPr>
+          <p:cNvPr id="4" name="Заголовок 3"/>
+          <p:cNvSpPr txBox="1">
+            <a:spLocks/>
+          </p:cNvSpPr>
+          <p:nvPr/>
+        </p:nvSpPr>
+        <p:spPr>
+          <a:xfrm>
+            <a:off x="218342" y="1134263"/>
+            <a:ext cx="11755315" cy="1379890"/>
+          </a:xfrm>
+          <a:prstGeom prst="rect">
+            <a:avLst/>
+          </a:prstGeom>
+          <a:solidFill>
+            <a:schemeClr val="tx1"/>
+          </a:solidFill>
+          <a:ln>
+            <a:solidFill>
+              <a:schemeClr val="tx1"/>
+            </a:solidFill>
+          </a:ln>
+        </p:spPr>
+        <p:txBody>
+          <a:bodyPr vert="horz" lIns="91440" tIns="45720" rIns="91440" bIns="45720" rtlCol="0" anchor="ctr">
+            <a:normAutofit fontScale="77500" lnSpcReduction="20000"/>
+          </a:bodyPr>
+          <a:lstStyle>
+            <a:lvl1pPr algn="l" defTabSz="914400" rtl="0" eaLnBrk="1" latinLnBrk="0" hangingPunct="1">
+              <a:lnSpc>
+                <a:spcPct val="90000"/>
+              </a:lnSpc>
+              <a:spcBef>
+                <a:spcPct val="0"/>
+              </a:spcBef>
+              <a:buNone/>
+              <a:defRPr sz="4400" kern="1200">
+                <a:solidFill>
+                  <a:schemeClr val="tx1"/>
+                </a:solidFill>
+                <a:latin typeface="+mj-lt"/>
+                <a:ea typeface="+mj-ea"/>
+                <a:cs typeface="+mj-cs"/>
+              </a:defRPr>
+            </a:lvl1pPr>
+          </a:lstStyle>
+          <a:p>
+            <a:endParaRPr lang="en-US" sz="1900" dirty="0" smtClean="0">
+              <a:solidFill>
+                <a:schemeClr val="bg1"/>
+              </a:solidFill>
+              <a:latin typeface="Consolas" panose="020B0609020204030204" pitchFamily="49" charset="0"/>
+            </a:endParaRPr>
+          </a:p>
+          <a:p>
+            <a:r>
+              <a:rPr lang="en-US" sz="1900" dirty="0" smtClean="0">
+                <a:solidFill>
+                  <a:schemeClr val="bg1"/>
+                </a:solidFill>
+                <a:latin typeface="Consolas" panose="020B0609020204030204" pitchFamily="49" charset="0"/>
+              </a:rPr>
+              <a:t>! </a:t>
+            </a:r>
+            <a:r>
+              <a:rPr lang="ru-RU" sz="1900" dirty="0">
+                <a:solidFill>
+                  <a:schemeClr val="bg1"/>
+                </a:solidFill>
+                <a:latin typeface="Consolas" panose="020B0609020204030204" pitchFamily="49" charset="0"/>
+              </a:rPr>
+              <a:t>Подключение к локальной (частной) сети</a:t>
+            </a:r>
+          </a:p>
+          <a:p>
+            <a:endParaRPr lang="en-US" sz="1900" dirty="0" smtClean="0">
+              <a:solidFill>
+                <a:schemeClr val="bg1"/>
+              </a:solidFill>
+              <a:latin typeface="Consolas" panose="020B0609020204030204" pitchFamily="49" charset="0"/>
+            </a:endParaRPr>
+          </a:p>
+          <a:p>
+            <a:r>
+              <a:rPr lang="en-US" sz="1900" dirty="0" smtClean="0">
+                <a:solidFill>
+                  <a:schemeClr val="bg1"/>
+                </a:solidFill>
+                <a:latin typeface="Consolas" panose="020B0609020204030204" pitchFamily="49" charset="0"/>
+              </a:rPr>
+              <a:t>Router(</a:t>
+            </a:r>
+            <a:r>
+              <a:rPr lang="en-US" sz="1900" dirty="0" err="1" smtClean="0">
+                <a:solidFill>
+                  <a:schemeClr val="bg1"/>
+                </a:solidFill>
+                <a:latin typeface="Consolas" panose="020B0609020204030204" pitchFamily="49" charset="0"/>
+              </a:rPr>
+              <a:t>config</a:t>
+            </a:r>
+            <a:r>
+              <a:rPr lang="en-US" sz="1900" dirty="0" smtClean="0">
+                <a:solidFill>
+                  <a:schemeClr val="bg1"/>
+                </a:solidFill>
+                <a:latin typeface="Consolas" panose="020B0609020204030204" pitchFamily="49" charset="0"/>
+              </a:rPr>
+              <a:t>-if</a:t>
+            </a:r>
+            <a:r>
+              <a:rPr lang="en-US" sz="1900" dirty="0">
+                <a:solidFill>
+                  <a:schemeClr val="bg1"/>
+                </a:solidFill>
+                <a:latin typeface="Consolas" panose="020B0609020204030204" pitchFamily="49" charset="0"/>
+              </a:rPr>
+              <a:t>)# </a:t>
+            </a:r>
+            <a:r>
+              <a:rPr lang="en-US" sz="1900" dirty="0" err="1">
+                <a:solidFill>
+                  <a:schemeClr val="bg1"/>
+                </a:solidFill>
+                <a:latin typeface="Consolas" panose="020B0609020204030204" pitchFamily="49" charset="0"/>
+              </a:rPr>
+              <a:t>ip</a:t>
+            </a:r>
+            <a:r>
+              <a:rPr lang="en-US" sz="1900" dirty="0">
+                <a:solidFill>
+                  <a:schemeClr val="bg1"/>
+                </a:solidFill>
+                <a:latin typeface="Consolas" panose="020B0609020204030204" pitchFamily="49" charset="0"/>
+              </a:rPr>
+              <a:t> </a:t>
+            </a:r>
+            <a:r>
+              <a:rPr lang="en-US" sz="1900" dirty="0" err="1">
+                <a:solidFill>
+                  <a:schemeClr val="bg1"/>
+                </a:solidFill>
+                <a:latin typeface="Consolas" panose="020B0609020204030204" pitchFamily="49" charset="0"/>
+              </a:rPr>
+              <a:t>nat</a:t>
+            </a:r>
+            <a:r>
+              <a:rPr lang="en-US" sz="1900" dirty="0">
+                <a:solidFill>
+                  <a:schemeClr val="bg1"/>
+                </a:solidFill>
+                <a:latin typeface="Consolas" panose="020B0609020204030204" pitchFamily="49" charset="0"/>
+              </a:rPr>
+              <a:t> inside   </a:t>
+            </a:r>
+            <a:endParaRPr lang="en-US" sz="1900" dirty="0" smtClean="0">
+              <a:solidFill>
+                <a:schemeClr val="bg1"/>
+              </a:solidFill>
+              <a:latin typeface="Consolas" panose="020B0609020204030204" pitchFamily="49" charset="0"/>
+            </a:endParaRPr>
+          </a:p>
+          <a:p>
+            <a:endParaRPr lang="en-US" sz="1900" dirty="0" smtClean="0">
+              <a:solidFill>
+                <a:schemeClr val="bg1"/>
+              </a:solidFill>
+              <a:latin typeface="Consolas" panose="020B0609020204030204" pitchFamily="49" charset="0"/>
+            </a:endParaRPr>
+          </a:p>
+          <a:p>
+            <a:r>
+              <a:rPr lang="en-US" sz="1900" dirty="0">
+                <a:solidFill>
+                  <a:schemeClr val="bg1"/>
+                </a:solidFill>
+                <a:latin typeface="Consolas" panose="020B0609020204030204" pitchFamily="49" charset="0"/>
+              </a:rPr>
+              <a:t>! </a:t>
+            </a:r>
+            <a:r>
+              <a:rPr lang="ru-RU" sz="1900" dirty="0">
+                <a:solidFill>
+                  <a:schemeClr val="bg1"/>
+                </a:solidFill>
+                <a:latin typeface="Consolas" panose="020B0609020204030204" pitchFamily="49" charset="0"/>
+              </a:rPr>
+              <a:t>Подключение к внешней (публичной) </a:t>
+            </a:r>
+            <a:r>
+              <a:rPr lang="ru-RU" sz="1900" dirty="0" smtClean="0">
+                <a:solidFill>
+                  <a:schemeClr val="bg1"/>
+                </a:solidFill>
+                <a:latin typeface="Consolas" panose="020B0609020204030204" pitchFamily="49" charset="0"/>
+              </a:rPr>
+              <a:t>сети</a:t>
+            </a:r>
+            <a:endParaRPr lang="en-US" sz="1900" dirty="0">
+              <a:solidFill>
+                <a:schemeClr val="bg1"/>
+              </a:solidFill>
+              <a:latin typeface="Consolas" panose="020B0609020204030204" pitchFamily="49" charset="0"/>
+            </a:endParaRPr>
+          </a:p>
+          <a:p>
+            <a:endParaRPr lang="en-US" sz="1900" dirty="0" smtClean="0">
+              <a:solidFill>
+                <a:schemeClr val="bg1"/>
+              </a:solidFill>
+              <a:latin typeface="Consolas" panose="020B0609020204030204" pitchFamily="49" charset="0"/>
+            </a:endParaRPr>
+          </a:p>
+          <a:p>
+            <a:r>
+              <a:rPr lang="en-US" sz="1900" dirty="0" smtClean="0">
+                <a:solidFill>
+                  <a:schemeClr val="bg1"/>
+                </a:solidFill>
+                <a:latin typeface="Consolas" panose="020B0609020204030204" pitchFamily="49" charset="0"/>
+              </a:rPr>
+              <a:t>Router(</a:t>
+            </a:r>
+            <a:r>
+              <a:rPr lang="en-US" sz="1900" dirty="0" err="1" smtClean="0">
+                <a:solidFill>
+                  <a:schemeClr val="bg1"/>
+                </a:solidFill>
+                <a:latin typeface="Consolas" panose="020B0609020204030204" pitchFamily="49" charset="0"/>
+              </a:rPr>
+              <a:t>config</a:t>
+            </a:r>
+            <a:r>
+              <a:rPr lang="en-US" sz="1900" dirty="0" smtClean="0">
+                <a:solidFill>
+                  <a:schemeClr val="bg1"/>
+                </a:solidFill>
+                <a:latin typeface="Consolas" panose="020B0609020204030204" pitchFamily="49" charset="0"/>
+              </a:rPr>
+              <a:t>-if</a:t>
+            </a:r>
+            <a:r>
+              <a:rPr lang="en-US" sz="1900" dirty="0">
+                <a:solidFill>
+                  <a:schemeClr val="bg1"/>
+                </a:solidFill>
+                <a:latin typeface="Consolas" panose="020B0609020204030204" pitchFamily="49" charset="0"/>
+              </a:rPr>
+              <a:t>)# </a:t>
+            </a:r>
+            <a:r>
+              <a:rPr lang="en-US" sz="1900" dirty="0" err="1">
+                <a:solidFill>
+                  <a:schemeClr val="bg1"/>
+                </a:solidFill>
+                <a:latin typeface="Consolas" panose="020B0609020204030204" pitchFamily="49" charset="0"/>
+              </a:rPr>
+              <a:t>ip</a:t>
+            </a:r>
+            <a:r>
+              <a:rPr lang="en-US" sz="1900" dirty="0">
+                <a:solidFill>
+                  <a:schemeClr val="bg1"/>
+                </a:solidFill>
+                <a:latin typeface="Consolas" panose="020B0609020204030204" pitchFamily="49" charset="0"/>
+              </a:rPr>
+              <a:t> </a:t>
+            </a:r>
+            <a:r>
+              <a:rPr lang="en-US" sz="1900" dirty="0" err="1">
+                <a:solidFill>
+                  <a:schemeClr val="bg1"/>
+                </a:solidFill>
+                <a:latin typeface="Consolas" panose="020B0609020204030204" pitchFamily="49" charset="0"/>
+              </a:rPr>
+              <a:t>nat</a:t>
+            </a:r>
+            <a:r>
+              <a:rPr lang="en-US" sz="1900" dirty="0">
+                <a:solidFill>
+                  <a:schemeClr val="bg1"/>
+                </a:solidFill>
+                <a:latin typeface="Consolas" panose="020B0609020204030204" pitchFamily="49" charset="0"/>
+              </a:rPr>
+              <a:t> </a:t>
+            </a:r>
+            <a:r>
+              <a:rPr lang="en-US" sz="1900" dirty="0" smtClean="0">
+                <a:solidFill>
+                  <a:schemeClr val="bg1"/>
+                </a:solidFill>
+                <a:latin typeface="Consolas" panose="020B0609020204030204" pitchFamily="49" charset="0"/>
+              </a:rPr>
+              <a:t>outside</a:t>
+            </a:r>
+          </a:p>
+          <a:p>
+            <a:endParaRPr lang="ru-RU" sz="2400" dirty="0">
+              <a:solidFill>
+                <a:schemeClr val="bg1"/>
+              </a:solidFill>
+              <a:latin typeface="Consolas" panose="020B0609020204030204" pitchFamily="49" charset="0"/>
+            </a:endParaRPr>
+          </a:p>
+        </p:txBody>
+      </p:sp>
+      <p:sp>
+        <p:nvSpPr>
+          <p:cNvPr id="5" name="TextBox 4"/>
+          <p:cNvSpPr txBox="1"/>
+          <p:nvPr/>
+        </p:nvSpPr>
+        <p:spPr>
+          <a:xfrm>
+            <a:off x="545124" y="764931"/>
+            <a:ext cx="3579891" cy="369332"/>
+          </a:xfrm>
+          <a:prstGeom prst="rect">
+            <a:avLst/>
+          </a:prstGeom>
+          <a:noFill/>
+        </p:spPr>
+        <p:txBody>
+          <a:bodyPr wrap="none" rtlCol="0">
+            <a:spAutoFit/>
+          </a:bodyPr>
+          <a:lstStyle/>
+          <a:p>
+            <a:r>
+              <a:rPr lang="ru-RU" b="1" dirty="0"/>
+              <a:t>Определение ролей интерфейсов</a:t>
+            </a:r>
+          </a:p>
+        </p:txBody>
+      </p:sp>
+      <p:sp>
+        <p:nvSpPr>
+          <p:cNvPr id="7" name="Заголовок 3"/>
+          <p:cNvSpPr txBox="1">
+            <a:spLocks/>
+          </p:cNvSpPr>
+          <p:nvPr/>
+        </p:nvSpPr>
+        <p:spPr>
+          <a:xfrm>
+            <a:off x="218339" y="4611455"/>
+            <a:ext cx="11755315" cy="532130"/>
+          </a:xfrm>
+          <a:prstGeom prst="rect">
+            <a:avLst/>
+          </a:prstGeom>
+          <a:solidFill>
+            <a:schemeClr val="tx1"/>
+          </a:solidFill>
+          <a:ln>
+            <a:solidFill>
+              <a:schemeClr val="tx1"/>
+            </a:solidFill>
+          </a:ln>
+        </p:spPr>
+        <p:txBody>
+          <a:bodyPr vert="horz" lIns="91440" tIns="45720" rIns="91440" bIns="45720" rtlCol="0" anchor="ctr">
+            <a:normAutofit/>
+          </a:bodyPr>
+          <a:lstStyle>
+            <a:lvl1pPr algn="l" defTabSz="914400" rtl="0" eaLnBrk="1" latinLnBrk="0" hangingPunct="1">
+              <a:lnSpc>
+                <a:spcPct val="90000"/>
+              </a:lnSpc>
+              <a:spcBef>
+                <a:spcPct val="0"/>
+              </a:spcBef>
+              <a:buNone/>
+              <a:defRPr sz="4400" kern="1200">
+                <a:solidFill>
+                  <a:schemeClr val="tx1"/>
+                </a:solidFill>
+                <a:latin typeface="+mj-lt"/>
+                <a:ea typeface="+mj-ea"/>
+                <a:cs typeface="+mj-cs"/>
+              </a:defRPr>
+            </a:lvl1pPr>
+          </a:lstStyle>
+          <a:p>
+            <a:r>
+              <a:rPr lang="en-US" sz="1800" dirty="0" smtClean="0">
+                <a:solidFill>
+                  <a:schemeClr val="bg1"/>
+                </a:solidFill>
+                <a:latin typeface="Consolas" panose="020B0609020204030204" pitchFamily="49" charset="0"/>
+              </a:rPr>
+              <a:t>Router(</a:t>
+            </a:r>
+            <a:r>
+              <a:rPr lang="en-US" sz="1800" dirty="0" err="1" smtClean="0">
+                <a:solidFill>
+                  <a:schemeClr val="bg1"/>
+                </a:solidFill>
+                <a:latin typeface="Consolas" panose="020B0609020204030204" pitchFamily="49" charset="0"/>
+              </a:rPr>
+              <a:t>config</a:t>
+            </a:r>
+            <a:r>
+              <a:rPr lang="en-US" sz="1800" dirty="0">
+                <a:solidFill>
+                  <a:schemeClr val="bg1"/>
+                </a:solidFill>
+                <a:latin typeface="Consolas" panose="020B0609020204030204" pitchFamily="49" charset="0"/>
+              </a:rPr>
+              <a:t>)# </a:t>
+            </a:r>
+            <a:r>
+              <a:rPr lang="en-US" sz="1800" dirty="0" err="1">
+                <a:solidFill>
+                  <a:schemeClr val="bg1"/>
+                </a:solidFill>
+                <a:latin typeface="Consolas" panose="020B0609020204030204" pitchFamily="49" charset="0"/>
+              </a:rPr>
+              <a:t>ip</a:t>
+            </a:r>
+            <a:r>
+              <a:rPr lang="en-US" sz="1800" dirty="0">
+                <a:solidFill>
+                  <a:schemeClr val="bg1"/>
+                </a:solidFill>
+                <a:latin typeface="Consolas" panose="020B0609020204030204" pitchFamily="49" charset="0"/>
+              </a:rPr>
+              <a:t> </a:t>
+            </a:r>
+            <a:r>
+              <a:rPr lang="en-US" sz="1800" dirty="0" err="1">
+                <a:solidFill>
+                  <a:schemeClr val="bg1"/>
+                </a:solidFill>
+                <a:latin typeface="Consolas" panose="020B0609020204030204" pitchFamily="49" charset="0"/>
+              </a:rPr>
+              <a:t>nat</a:t>
+            </a:r>
+            <a:r>
+              <a:rPr lang="en-US" sz="1800" dirty="0">
+                <a:solidFill>
+                  <a:schemeClr val="bg1"/>
+                </a:solidFill>
+                <a:latin typeface="Consolas" panose="020B0609020204030204" pitchFamily="49" charset="0"/>
+              </a:rPr>
+              <a:t> inside source list &lt;</a:t>
+            </a:r>
+            <a:r>
+              <a:rPr lang="ru-RU" sz="1800" dirty="0">
+                <a:solidFill>
+                  <a:schemeClr val="bg1"/>
+                </a:solidFill>
+                <a:latin typeface="Consolas" panose="020B0609020204030204" pitchFamily="49" charset="0"/>
+              </a:rPr>
+              <a:t>ИМЯ_</a:t>
+            </a:r>
+            <a:r>
+              <a:rPr lang="en-US" sz="1800" dirty="0">
+                <a:solidFill>
+                  <a:schemeClr val="bg1"/>
+                </a:solidFill>
+                <a:latin typeface="Consolas" panose="020B0609020204030204" pitchFamily="49" charset="0"/>
+              </a:rPr>
+              <a:t>ACL&gt; interface &lt;</a:t>
+            </a:r>
+            <a:r>
+              <a:rPr lang="ru-RU" sz="1800" dirty="0">
+                <a:solidFill>
+                  <a:schemeClr val="bg1"/>
+                </a:solidFill>
+                <a:latin typeface="Consolas" panose="020B0609020204030204" pitchFamily="49" charset="0"/>
+              </a:rPr>
+              <a:t>ВНЕШНИЙ_ИНТЕРФЕЙС&gt; </a:t>
+            </a:r>
+            <a:r>
+              <a:rPr lang="en-US" sz="1800" dirty="0" smtClean="0">
+                <a:solidFill>
+                  <a:schemeClr val="bg1"/>
+                </a:solidFill>
+                <a:latin typeface="Consolas" panose="020B0609020204030204" pitchFamily="49" charset="0"/>
+              </a:rPr>
+              <a:t>overload</a:t>
+            </a:r>
+            <a:endParaRPr lang="ru-RU" sz="2400" dirty="0">
+              <a:solidFill>
+                <a:schemeClr val="bg1"/>
+              </a:solidFill>
+              <a:latin typeface="Consolas" panose="020B0609020204030204" pitchFamily="49" charset="0"/>
+            </a:endParaRPr>
+          </a:p>
+        </p:txBody>
+      </p:sp>
+      <p:sp>
+        <p:nvSpPr>
+          <p:cNvPr id="8" name="TextBox 7"/>
+          <p:cNvSpPr txBox="1"/>
+          <p:nvPr/>
+        </p:nvSpPr>
+        <p:spPr>
+          <a:xfrm>
+            <a:off x="537752" y="4070954"/>
+            <a:ext cx="4855047" cy="369332"/>
+          </a:xfrm>
+          <a:prstGeom prst="rect">
+            <a:avLst/>
+          </a:prstGeom>
+          <a:noFill/>
+        </p:spPr>
+        <p:txBody>
+          <a:bodyPr wrap="none" rtlCol="0">
+            <a:spAutoFit/>
+          </a:bodyPr>
+          <a:lstStyle/>
+          <a:p>
+            <a:r>
+              <a:rPr lang="ru-RU" b="1" dirty="0"/>
+              <a:t>Трансляция с перегрузкой в адрес интерфейса</a:t>
+            </a:r>
+          </a:p>
+        </p:txBody>
+      </p:sp>
+      <p:sp>
+        <p:nvSpPr>
+          <p:cNvPr id="9" name="Заголовок 3"/>
+          <p:cNvSpPr txBox="1">
+            <a:spLocks/>
+          </p:cNvSpPr>
+          <p:nvPr/>
+        </p:nvSpPr>
+        <p:spPr>
+          <a:xfrm>
+            <a:off x="218339" y="5785339"/>
+            <a:ext cx="11755315" cy="800100"/>
+          </a:xfrm>
+          <a:prstGeom prst="rect">
+            <a:avLst/>
+          </a:prstGeom>
+          <a:solidFill>
+            <a:schemeClr val="tx1"/>
+          </a:solidFill>
+          <a:ln>
+            <a:solidFill>
+              <a:schemeClr val="tx1"/>
+            </a:solidFill>
+          </a:ln>
+        </p:spPr>
+        <p:txBody>
+          <a:bodyPr vert="horz" lIns="91440" tIns="45720" rIns="91440" bIns="45720" rtlCol="0" anchor="ctr">
+            <a:normAutofit/>
+          </a:bodyPr>
+          <a:lstStyle>
+            <a:lvl1pPr algn="l" defTabSz="914400" rtl="0" eaLnBrk="1" latinLnBrk="0" hangingPunct="1">
+              <a:lnSpc>
+                <a:spcPct val="90000"/>
+              </a:lnSpc>
+              <a:spcBef>
+                <a:spcPct val="0"/>
+              </a:spcBef>
+              <a:buNone/>
+              <a:defRPr sz="4400" kern="1200">
+                <a:solidFill>
+                  <a:schemeClr val="tx1"/>
+                </a:solidFill>
+                <a:latin typeface="+mj-lt"/>
+                <a:ea typeface="+mj-ea"/>
+                <a:cs typeface="+mj-cs"/>
+              </a:defRPr>
+            </a:lvl1pPr>
+          </a:lstStyle>
+          <a:p>
+            <a:r>
+              <a:rPr lang="en-US" sz="1800" dirty="0" smtClean="0">
+                <a:solidFill>
+                  <a:schemeClr val="bg1"/>
+                </a:solidFill>
+                <a:latin typeface="Consolas" panose="020B0609020204030204" pitchFamily="49" charset="0"/>
+              </a:rPr>
+              <a:t>Router(</a:t>
+            </a:r>
+            <a:r>
+              <a:rPr lang="en-US" sz="1800" dirty="0" err="1" smtClean="0">
+                <a:solidFill>
+                  <a:schemeClr val="bg1"/>
+                </a:solidFill>
+                <a:latin typeface="Consolas" panose="020B0609020204030204" pitchFamily="49" charset="0"/>
+              </a:rPr>
+              <a:t>config</a:t>
+            </a:r>
+            <a:r>
+              <a:rPr lang="en-US" sz="1800" dirty="0">
+                <a:solidFill>
+                  <a:schemeClr val="bg1"/>
+                </a:solidFill>
+                <a:latin typeface="Consolas" panose="020B0609020204030204" pitchFamily="49" charset="0"/>
+              </a:rPr>
+              <a:t>)# </a:t>
+            </a:r>
+            <a:r>
+              <a:rPr lang="en-US" sz="1800" dirty="0" err="1">
+                <a:solidFill>
+                  <a:schemeClr val="bg1"/>
+                </a:solidFill>
+                <a:latin typeface="Consolas" panose="020B0609020204030204" pitchFamily="49" charset="0"/>
+              </a:rPr>
+              <a:t>ip</a:t>
+            </a:r>
+            <a:r>
+              <a:rPr lang="en-US" sz="1800" dirty="0">
+                <a:solidFill>
+                  <a:schemeClr val="bg1"/>
+                </a:solidFill>
+                <a:latin typeface="Consolas" panose="020B0609020204030204" pitchFamily="49" charset="0"/>
+              </a:rPr>
+              <a:t> </a:t>
+            </a:r>
+            <a:r>
+              <a:rPr lang="en-US" sz="1800" dirty="0" err="1">
+                <a:solidFill>
+                  <a:schemeClr val="bg1"/>
+                </a:solidFill>
+                <a:latin typeface="Consolas" panose="020B0609020204030204" pitchFamily="49" charset="0"/>
+              </a:rPr>
+              <a:t>nat</a:t>
+            </a:r>
+            <a:r>
+              <a:rPr lang="en-US" sz="1800" dirty="0">
+                <a:solidFill>
+                  <a:schemeClr val="bg1"/>
+                </a:solidFill>
+                <a:latin typeface="Consolas" panose="020B0609020204030204" pitchFamily="49" charset="0"/>
+              </a:rPr>
+              <a:t> pool &lt;</a:t>
+            </a:r>
+            <a:r>
+              <a:rPr lang="ru-RU" sz="1800" dirty="0">
+                <a:solidFill>
+                  <a:schemeClr val="bg1"/>
+                </a:solidFill>
+                <a:latin typeface="Consolas" panose="020B0609020204030204" pitchFamily="49" charset="0"/>
+              </a:rPr>
+              <a:t>ИМЯ_ПУЛА&gt; &lt;</a:t>
+            </a:r>
+            <a:r>
+              <a:rPr lang="en-US" sz="1800" dirty="0">
+                <a:solidFill>
+                  <a:schemeClr val="bg1"/>
+                </a:solidFill>
+                <a:latin typeface="Consolas" panose="020B0609020204030204" pitchFamily="49" charset="0"/>
+              </a:rPr>
+              <a:t>START_IP&gt; &lt;END_IP&gt; </a:t>
+            </a:r>
+            <a:r>
+              <a:rPr lang="en-US" sz="1800" dirty="0" err="1">
+                <a:solidFill>
+                  <a:schemeClr val="bg1"/>
+                </a:solidFill>
+                <a:latin typeface="Consolas" panose="020B0609020204030204" pitchFamily="49" charset="0"/>
+              </a:rPr>
+              <a:t>netmask</a:t>
+            </a:r>
+            <a:r>
+              <a:rPr lang="en-US" sz="1800" dirty="0">
+                <a:solidFill>
+                  <a:schemeClr val="bg1"/>
+                </a:solidFill>
+                <a:latin typeface="Consolas" panose="020B0609020204030204" pitchFamily="49" charset="0"/>
+              </a:rPr>
+              <a:t> &lt;</a:t>
+            </a:r>
+            <a:r>
+              <a:rPr lang="ru-RU" sz="1800" dirty="0">
+                <a:solidFill>
+                  <a:schemeClr val="bg1"/>
+                </a:solidFill>
+                <a:latin typeface="Consolas" panose="020B0609020204030204" pitchFamily="49" charset="0"/>
+              </a:rPr>
+              <a:t>МАСКА_СЕТИ&gt;</a:t>
+            </a:r>
+          </a:p>
+          <a:p>
+            <a:r>
+              <a:rPr lang="en-US" sz="1800" dirty="0">
+                <a:solidFill>
+                  <a:schemeClr val="bg1"/>
+                </a:solidFill>
+                <a:latin typeface="Consolas" panose="020B0609020204030204" pitchFamily="49" charset="0"/>
+              </a:rPr>
+              <a:t>Router(</a:t>
+            </a:r>
+            <a:r>
+              <a:rPr lang="en-US" sz="1800" dirty="0" err="1">
+                <a:solidFill>
+                  <a:schemeClr val="bg1"/>
+                </a:solidFill>
+                <a:latin typeface="Consolas" panose="020B0609020204030204" pitchFamily="49" charset="0"/>
+              </a:rPr>
+              <a:t>config</a:t>
+            </a:r>
+            <a:r>
+              <a:rPr lang="en-US" sz="1800" dirty="0">
+                <a:solidFill>
+                  <a:schemeClr val="bg1"/>
+                </a:solidFill>
+                <a:latin typeface="Consolas" panose="020B0609020204030204" pitchFamily="49" charset="0"/>
+              </a:rPr>
+              <a:t>)# </a:t>
+            </a:r>
+            <a:r>
+              <a:rPr lang="en-US" sz="1800" dirty="0" err="1">
+                <a:solidFill>
+                  <a:schemeClr val="bg1"/>
+                </a:solidFill>
+                <a:latin typeface="Consolas" panose="020B0609020204030204" pitchFamily="49" charset="0"/>
+              </a:rPr>
+              <a:t>ip</a:t>
+            </a:r>
+            <a:r>
+              <a:rPr lang="en-US" sz="1800" dirty="0">
+                <a:solidFill>
+                  <a:schemeClr val="bg1"/>
+                </a:solidFill>
+                <a:latin typeface="Consolas" panose="020B0609020204030204" pitchFamily="49" charset="0"/>
+              </a:rPr>
+              <a:t> </a:t>
+            </a:r>
+            <a:r>
+              <a:rPr lang="en-US" sz="1800" dirty="0" err="1">
+                <a:solidFill>
+                  <a:schemeClr val="bg1"/>
+                </a:solidFill>
+                <a:latin typeface="Consolas" panose="020B0609020204030204" pitchFamily="49" charset="0"/>
+              </a:rPr>
+              <a:t>nat</a:t>
+            </a:r>
+            <a:r>
+              <a:rPr lang="en-US" sz="1800" dirty="0">
+                <a:solidFill>
+                  <a:schemeClr val="bg1"/>
+                </a:solidFill>
+                <a:latin typeface="Consolas" panose="020B0609020204030204" pitchFamily="49" charset="0"/>
+              </a:rPr>
+              <a:t> inside source list &lt;</a:t>
+            </a:r>
+            <a:r>
+              <a:rPr lang="ru-RU" sz="1800" dirty="0">
+                <a:solidFill>
+                  <a:schemeClr val="bg1"/>
+                </a:solidFill>
+                <a:latin typeface="Consolas" panose="020B0609020204030204" pitchFamily="49" charset="0"/>
+              </a:rPr>
+              <a:t>ИМЯ_</a:t>
+            </a:r>
+            <a:r>
+              <a:rPr lang="en-US" sz="1800" dirty="0">
+                <a:solidFill>
+                  <a:schemeClr val="bg1"/>
+                </a:solidFill>
+                <a:latin typeface="Consolas" panose="020B0609020204030204" pitchFamily="49" charset="0"/>
+              </a:rPr>
+              <a:t>ACL&gt; pool &lt;</a:t>
+            </a:r>
+            <a:r>
+              <a:rPr lang="ru-RU" sz="1800" dirty="0">
+                <a:solidFill>
+                  <a:schemeClr val="bg1"/>
+                </a:solidFill>
+                <a:latin typeface="Consolas" panose="020B0609020204030204" pitchFamily="49" charset="0"/>
+              </a:rPr>
+              <a:t>ИМЯ_ПУЛА&gt; </a:t>
+            </a:r>
+            <a:r>
+              <a:rPr lang="en-US" sz="1800" dirty="0">
+                <a:solidFill>
+                  <a:schemeClr val="bg1"/>
+                </a:solidFill>
+                <a:latin typeface="Consolas" panose="020B0609020204030204" pitchFamily="49" charset="0"/>
+              </a:rPr>
+              <a:t>overload</a:t>
+            </a:r>
+            <a:endParaRPr lang="ru-RU" sz="2400" dirty="0">
+              <a:solidFill>
+                <a:schemeClr val="bg1"/>
+              </a:solidFill>
+              <a:latin typeface="Consolas" panose="020B0609020204030204" pitchFamily="49" charset="0"/>
+            </a:endParaRPr>
+          </a:p>
+        </p:txBody>
+      </p:sp>
+      <p:sp>
+        <p:nvSpPr>
+          <p:cNvPr id="10" name="TextBox 9"/>
+          <p:cNvSpPr txBox="1"/>
+          <p:nvPr/>
+        </p:nvSpPr>
+        <p:spPr>
+          <a:xfrm>
+            <a:off x="545124" y="5310569"/>
+            <a:ext cx="6081858" cy="369332"/>
+          </a:xfrm>
+          <a:prstGeom prst="rect">
+            <a:avLst/>
+          </a:prstGeom>
+          <a:noFill/>
+        </p:spPr>
+        <p:txBody>
+          <a:bodyPr wrap="none" rtlCol="0">
+            <a:spAutoFit/>
+          </a:bodyPr>
+          <a:lstStyle/>
+          <a:p>
+            <a:r>
+              <a:rPr lang="ru-RU" b="1" dirty="0"/>
+              <a:t>Трансляция с перегрузкой с использованием пула адресов</a:t>
+            </a:r>
+            <a:endParaRPr lang="ru-RU" b="1" dirty="0"/>
+          </a:p>
+        </p:txBody>
+      </p:sp>
+      <p:sp>
+        <p:nvSpPr>
+          <p:cNvPr id="12" name="Заголовок 3"/>
+          <p:cNvSpPr txBox="1">
+            <a:spLocks/>
+          </p:cNvSpPr>
+          <p:nvPr/>
+        </p:nvSpPr>
+        <p:spPr>
+          <a:xfrm>
+            <a:off x="218339" y="3241510"/>
+            <a:ext cx="11755315" cy="611093"/>
+          </a:xfrm>
+          <a:prstGeom prst="rect">
+            <a:avLst/>
+          </a:prstGeom>
+          <a:solidFill>
+            <a:schemeClr val="tx1"/>
+          </a:solidFill>
+          <a:ln>
+            <a:solidFill>
+              <a:schemeClr val="tx1"/>
+            </a:solidFill>
+          </a:ln>
+        </p:spPr>
+        <p:txBody>
+          <a:bodyPr vert="horz" lIns="91440" tIns="45720" rIns="91440" bIns="45720" rtlCol="0" anchor="ctr">
+            <a:normAutofit/>
+          </a:bodyPr>
+          <a:lstStyle>
+            <a:lvl1pPr algn="l" defTabSz="914400" rtl="0" eaLnBrk="1" latinLnBrk="0" hangingPunct="1">
+              <a:lnSpc>
+                <a:spcPct val="90000"/>
+              </a:lnSpc>
+              <a:spcBef>
+                <a:spcPct val="0"/>
+              </a:spcBef>
+              <a:buNone/>
+              <a:defRPr sz="4400" kern="1200">
+                <a:solidFill>
+                  <a:schemeClr val="tx1"/>
+                </a:solidFill>
+                <a:latin typeface="+mj-lt"/>
+                <a:ea typeface="+mj-ea"/>
+                <a:cs typeface="+mj-cs"/>
+              </a:defRPr>
+            </a:lvl1pPr>
+          </a:lstStyle>
+          <a:p>
+            <a:r>
+              <a:rPr lang="en-US" sz="1800" dirty="0">
+                <a:solidFill>
+                  <a:schemeClr val="bg1"/>
+                </a:solidFill>
+                <a:latin typeface="Consolas" panose="020B0609020204030204" pitchFamily="49" charset="0"/>
+              </a:rPr>
+              <a:t>Router(</a:t>
+            </a:r>
+            <a:r>
+              <a:rPr lang="en-US" sz="1800" dirty="0" err="1">
+                <a:solidFill>
+                  <a:schemeClr val="bg1"/>
+                </a:solidFill>
+                <a:latin typeface="Consolas" panose="020B0609020204030204" pitchFamily="49" charset="0"/>
+              </a:rPr>
+              <a:t>config</a:t>
+            </a:r>
+            <a:r>
+              <a:rPr lang="en-US" sz="1800" dirty="0">
+                <a:solidFill>
+                  <a:schemeClr val="bg1"/>
+                </a:solidFill>
+                <a:latin typeface="Consolas" panose="020B0609020204030204" pitchFamily="49" charset="0"/>
+              </a:rPr>
+              <a:t>)# </a:t>
+            </a:r>
+            <a:r>
+              <a:rPr lang="en-US" sz="1800" dirty="0" err="1">
+                <a:solidFill>
+                  <a:schemeClr val="bg1"/>
+                </a:solidFill>
+                <a:latin typeface="Consolas" panose="020B0609020204030204" pitchFamily="49" charset="0"/>
+              </a:rPr>
+              <a:t>ip</a:t>
+            </a:r>
+            <a:r>
+              <a:rPr lang="en-US" sz="1800" dirty="0">
+                <a:solidFill>
+                  <a:schemeClr val="bg1"/>
+                </a:solidFill>
+                <a:latin typeface="Consolas" panose="020B0609020204030204" pitchFamily="49" charset="0"/>
+              </a:rPr>
+              <a:t> access-list standard &lt;</a:t>
+            </a:r>
+            <a:r>
+              <a:rPr lang="ru-RU" sz="1800" dirty="0">
+                <a:solidFill>
+                  <a:schemeClr val="bg1"/>
+                </a:solidFill>
+                <a:latin typeface="Consolas" panose="020B0609020204030204" pitchFamily="49" charset="0"/>
+              </a:rPr>
+              <a:t>ИМЯ_</a:t>
+            </a:r>
+            <a:r>
+              <a:rPr lang="en-US" sz="1800" dirty="0">
+                <a:solidFill>
+                  <a:schemeClr val="bg1"/>
+                </a:solidFill>
+                <a:latin typeface="Consolas" panose="020B0609020204030204" pitchFamily="49" charset="0"/>
+              </a:rPr>
+              <a:t>ACL&gt;</a:t>
+            </a:r>
+          </a:p>
+          <a:p>
+            <a:r>
+              <a:rPr lang="en-US" sz="1800" dirty="0">
+                <a:solidFill>
+                  <a:schemeClr val="bg1"/>
+                </a:solidFill>
+                <a:latin typeface="Consolas" panose="020B0609020204030204" pitchFamily="49" charset="0"/>
+              </a:rPr>
+              <a:t>Router(</a:t>
+            </a:r>
+            <a:r>
+              <a:rPr lang="en-US" sz="1800" dirty="0" err="1">
+                <a:solidFill>
+                  <a:schemeClr val="bg1"/>
+                </a:solidFill>
+                <a:latin typeface="Consolas" panose="020B0609020204030204" pitchFamily="49" charset="0"/>
+              </a:rPr>
+              <a:t>config-std-nacl</a:t>
+            </a:r>
+            <a:r>
+              <a:rPr lang="en-US" sz="1800" dirty="0">
+                <a:solidFill>
+                  <a:schemeClr val="bg1"/>
+                </a:solidFill>
+                <a:latin typeface="Consolas" panose="020B0609020204030204" pitchFamily="49" charset="0"/>
+              </a:rPr>
+              <a:t>)# permit &lt;</a:t>
+            </a:r>
+            <a:r>
+              <a:rPr lang="ru-RU" sz="1800" dirty="0">
+                <a:solidFill>
+                  <a:schemeClr val="bg1"/>
+                </a:solidFill>
+                <a:latin typeface="Consolas" panose="020B0609020204030204" pitchFamily="49" charset="0"/>
+              </a:rPr>
+              <a:t>СЕТЬ_ИСТОЧНИКА&gt; &lt;</a:t>
+            </a:r>
+            <a:r>
+              <a:rPr lang="en-US" sz="1800" dirty="0">
+                <a:solidFill>
+                  <a:schemeClr val="bg1"/>
+                </a:solidFill>
+                <a:latin typeface="Consolas" panose="020B0609020204030204" pitchFamily="49" charset="0"/>
+              </a:rPr>
+              <a:t>WILDCARD_</a:t>
+            </a:r>
+            <a:r>
+              <a:rPr lang="ru-RU" sz="1800" dirty="0">
+                <a:solidFill>
+                  <a:schemeClr val="bg1"/>
+                </a:solidFill>
+                <a:latin typeface="Consolas" panose="020B0609020204030204" pitchFamily="49" charset="0"/>
+              </a:rPr>
+              <a:t>МАСКА&gt;</a:t>
+            </a:r>
+          </a:p>
+        </p:txBody>
+      </p:sp>
+      <p:sp>
+        <p:nvSpPr>
+          <p:cNvPr id="13" name="TextBox 12"/>
+          <p:cNvSpPr txBox="1"/>
+          <p:nvPr/>
+        </p:nvSpPr>
+        <p:spPr>
+          <a:xfrm>
+            <a:off x="537753" y="2653827"/>
+            <a:ext cx="5020542" cy="369332"/>
+          </a:xfrm>
+          <a:prstGeom prst="rect">
+            <a:avLst/>
+          </a:prstGeom>
+          <a:noFill/>
+        </p:spPr>
+        <p:txBody>
+          <a:bodyPr wrap="none" rtlCol="0">
+            <a:spAutoFit/>
+          </a:bodyPr>
+          <a:lstStyle/>
+          <a:p>
+            <a:r>
+              <a:rPr lang="ru-RU" b="1" dirty="0" smtClean="0"/>
+              <a:t>Создание списка доступа для «отбора» трафика</a:t>
+            </a:r>
+            <a:endParaRPr lang="ru-RU" b="1" dirty="0"/>
+          </a:p>
+        </p:txBody>
+      </p:sp>
+    </p:spTree>
+    <p:extLst>
+      <p:ext uri="{BB962C8B-B14F-4D97-AF65-F5344CB8AC3E}">
+        <p14:creationId xmlns:p14="http://schemas.microsoft.com/office/powerpoint/2010/main" val="434925703"/>
+      </p:ext>
+    </p:extLst>
+  </p:cSld>
+  <p:clrMapOvr>
+    <a:masterClrMapping/>
+  </p:clrMapOvr>
+  <p:timing>
+    <p:tnLst>
+      <p:par>
+        <p:cTn id="1" dur="indefinite" restart="never" nodeType="tmRoot"/>
+      </p:par>
+    </p:tnLst>
+  </p:timing>
+</p:sld>
+</file>
+
+<file path=ppt/slides/slide13.xml><?xml version="1.0" encoding="utf-8"?>
+<p:sld xmlns:a="http://schemas.openxmlformats.org/drawingml/2006/main" xmlns:r="http://schemas.openxmlformats.org/officeDocument/2006/relationships" xmlns:p="http://schemas.openxmlformats.org/presentationml/2006/main">
+  <p:cSld>
+    <p:spTree>
+      <p:nvGrpSpPr>
+        <p:cNvPr id="1" name=""/>
+        <p:cNvGrpSpPr/>
+        <p:nvPr/>
+      </p:nvGrpSpPr>
+      <p:grpSpPr>
+        <a:xfrm>
+          <a:off x="0" y="0"/>
+          <a:ext cx="0" cy="0"/>
+          <a:chOff x="0" y="0"/>
+          <a:chExt cx="0" cy="0"/>
+        </a:xfrm>
+      </p:grpSpPr>
+      <p:sp>
+        <p:nvSpPr>
+          <p:cNvPr id="4" name="Заголовок 3"/>
+          <p:cNvSpPr txBox="1">
+            <a:spLocks/>
+          </p:cNvSpPr>
+          <p:nvPr/>
+        </p:nvSpPr>
+        <p:spPr>
+          <a:xfrm>
+            <a:off x="218342" y="1134262"/>
+            <a:ext cx="11755315" cy="2435415"/>
+          </a:xfrm>
+          <a:prstGeom prst="rect">
+            <a:avLst/>
+          </a:prstGeom>
+          <a:solidFill>
+            <a:schemeClr val="tx1"/>
+          </a:solidFill>
+          <a:ln>
+            <a:solidFill>
+              <a:schemeClr val="tx1"/>
+            </a:solidFill>
+          </a:ln>
+        </p:spPr>
+        <p:txBody>
+          <a:bodyPr vert="horz" lIns="91440" tIns="45720" rIns="91440" bIns="45720" rtlCol="0" anchor="ctr">
+            <a:normAutofit fontScale="85000" lnSpcReduction="20000"/>
+          </a:bodyPr>
+          <a:lstStyle>
+            <a:lvl1pPr algn="l" defTabSz="914400" rtl="0" eaLnBrk="1" latinLnBrk="0" hangingPunct="1">
+              <a:lnSpc>
+                <a:spcPct val="90000"/>
+              </a:lnSpc>
+              <a:spcBef>
+                <a:spcPct val="0"/>
+              </a:spcBef>
+              <a:buNone/>
+              <a:defRPr sz="4400" kern="1200">
+                <a:solidFill>
+                  <a:schemeClr val="tx1"/>
+                </a:solidFill>
+                <a:latin typeface="+mj-lt"/>
+                <a:ea typeface="+mj-ea"/>
+                <a:cs typeface="+mj-cs"/>
+              </a:defRPr>
+            </a:lvl1pPr>
+          </a:lstStyle>
+          <a:p>
+            <a:endParaRPr lang="en-US" sz="1900" dirty="0" smtClean="0">
+              <a:solidFill>
+                <a:schemeClr val="bg1"/>
+              </a:solidFill>
+              <a:latin typeface="Consolas" panose="020B0609020204030204" pitchFamily="49" charset="0"/>
+            </a:endParaRPr>
+          </a:p>
+          <a:p>
+            <a:r>
+              <a:rPr lang="af-ZA" sz="2000" dirty="0">
+                <a:solidFill>
+                  <a:schemeClr val="bg1"/>
+                </a:solidFill>
+                <a:latin typeface="Consolas" panose="020B0609020204030204" pitchFamily="49" charset="0"/>
+              </a:rPr>
+              <a:t>Router</a:t>
+            </a:r>
+            <a:r>
+              <a:rPr lang="en-US" sz="1900" dirty="0" smtClean="0">
+                <a:solidFill>
+                  <a:schemeClr val="bg1"/>
+                </a:solidFill>
+                <a:latin typeface="Consolas" panose="020B0609020204030204" pitchFamily="49" charset="0"/>
+              </a:rPr>
+              <a:t>#show </a:t>
+            </a:r>
+            <a:r>
+              <a:rPr lang="en-US" sz="1900" dirty="0" err="1">
+                <a:solidFill>
+                  <a:schemeClr val="bg1"/>
+                </a:solidFill>
+                <a:latin typeface="Consolas" panose="020B0609020204030204" pitchFamily="49" charset="0"/>
+              </a:rPr>
+              <a:t>ip</a:t>
+            </a:r>
+            <a:r>
+              <a:rPr lang="en-US" sz="1900" dirty="0">
+                <a:solidFill>
+                  <a:schemeClr val="bg1"/>
+                </a:solidFill>
+                <a:latin typeface="Consolas" panose="020B0609020204030204" pitchFamily="49" charset="0"/>
+              </a:rPr>
+              <a:t> </a:t>
+            </a:r>
+            <a:r>
+              <a:rPr lang="en-US" sz="1900" dirty="0" err="1">
+                <a:solidFill>
+                  <a:schemeClr val="bg1"/>
+                </a:solidFill>
+                <a:latin typeface="Consolas" panose="020B0609020204030204" pitchFamily="49" charset="0"/>
+              </a:rPr>
+              <a:t>nat</a:t>
+            </a:r>
+            <a:r>
+              <a:rPr lang="en-US" sz="1900" dirty="0">
+                <a:solidFill>
+                  <a:schemeClr val="bg1"/>
+                </a:solidFill>
+                <a:latin typeface="Consolas" panose="020B0609020204030204" pitchFamily="49" charset="0"/>
+              </a:rPr>
+              <a:t> translations </a:t>
+            </a:r>
+          </a:p>
+          <a:p>
+            <a:r>
+              <a:rPr lang="en-US" sz="1900" dirty="0">
+                <a:solidFill>
+                  <a:schemeClr val="bg1"/>
+                </a:solidFill>
+                <a:latin typeface="Consolas" panose="020B0609020204030204" pitchFamily="49" charset="0"/>
+              </a:rPr>
+              <a:t>Load for five secs: 7%/2%; one minute: 8%; five minutes: 8%</a:t>
+            </a:r>
+          </a:p>
+          <a:p>
+            <a:r>
+              <a:rPr lang="en-US" sz="1900" dirty="0">
+                <a:solidFill>
+                  <a:schemeClr val="bg1"/>
+                </a:solidFill>
+                <a:latin typeface="Consolas" panose="020B0609020204030204" pitchFamily="49" charset="0"/>
+              </a:rPr>
+              <a:t>Time source is NTP, 14:55:25.043 MSK Fri Oct 2 2026</a:t>
+            </a:r>
+          </a:p>
+          <a:p>
+            <a:r>
+              <a:rPr lang="en-US" sz="1900" dirty="0">
+                <a:solidFill>
+                  <a:schemeClr val="bg1"/>
+                </a:solidFill>
+                <a:latin typeface="Consolas" panose="020B0609020204030204" pitchFamily="49" charset="0"/>
+              </a:rPr>
+              <a:t>Pro  Inside global         Inside local          Outside local         Outside global</a:t>
+            </a:r>
+          </a:p>
+          <a:p>
+            <a:r>
+              <a:rPr lang="en-US" sz="1900" dirty="0" err="1">
+                <a:solidFill>
+                  <a:schemeClr val="bg1"/>
+                </a:solidFill>
+                <a:latin typeface="Consolas" panose="020B0609020204030204" pitchFamily="49" charset="0"/>
+              </a:rPr>
+              <a:t>icmp</a:t>
+            </a:r>
+            <a:r>
+              <a:rPr lang="en-US" sz="1900" dirty="0">
+                <a:solidFill>
+                  <a:schemeClr val="bg1"/>
+                </a:solidFill>
+                <a:latin typeface="Consolas" panose="020B0609020204030204" pitchFamily="49" charset="0"/>
+              </a:rPr>
+              <a:t> 80.79.176.44:9002     172.22.18.35:9002     159.138.205.143:9002  159.138.205.143:9002</a:t>
+            </a:r>
+          </a:p>
+          <a:p>
+            <a:r>
+              <a:rPr lang="en-US" sz="1900" dirty="0" err="1">
+                <a:solidFill>
+                  <a:schemeClr val="bg1"/>
+                </a:solidFill>
+                <a:latin typeface="Consolas" panose="020B0609020204030204" pitchFamily="49" charset="0"/>
+              </a:rPr>
+              <a:t>tcp</a:t>
+            </a:r>
+            <a:r>
+              <a:rPr lang="en-US" sz="1900" dirty="0">
+                <a:solidFill>
+                  <a:schemeClr val="bg1"/>
+                </a:solidFill>
+                <a:latin typeface="Consolas" panose="020B0609020204030204" pitchFamily="49" charset="0"/>
+              </a:rPr>
+              <a:t>  31.10.13.250:80       172.24.136.178:80     193.243.190.165:35513 193.243.190.165:35513</a:t>
+            </a:r>
+          </a:p>
+          <a:p>
+            <a:r>
+              <a:rPr lang="en-US" sz="1900" dirty="0" err="1">
+                <a:solidFill>
+                  <a:schemeClr val="bg1"/>
+                </a:solidFill>
+                <a:latin typeface="Consolas" panose="020B0609020204030204" pitchFamily="49" charset="0"/>
+              </a:rPr>
+              <a:t>tcp</a:t>
+            </a:r>
+            <a:r>
+              <a:rPr lang="en-US" sz="1900" dirty="0">
+                <a:solidFill>
+                  <a:schemeClr val="bg1"/>
+                </a:solidFill>
+                <a:latin typeface="Consolas" panose="020B0609020204030204" pitchFamily="49" charset="0"/>
+              </a:rPr>
+              <a:t>  31.10.12.129:80       172.24.218.130:80     184.169.158.254:42573 184.169.158.254:42573</a:t>
+            </a:r>
+          </a:p>
+          <a:p>
+            <a:r>
+              <a:rPr lang="en-US" sz="1900" dirty="0" err="1">
+                <a:solidFill>
+                  <a:schemeClr val="bg1"/>
+                </a:solidFill>
+                <a:latin typeface="Consolas" panose="020B0609020204030204" pitchFamily="49" charset="0"/>
+              </a:rPr>
+              <a:t>tcp</a:t>
+            </a:r>
+            <a:r>
+              <a:rPr lang="en-US" sz="1900" dirty="0">
+                <a:solidFill>
+                  <a:schemeClr val="bg1"/>
+                </a:solidFill>
+                <a:latin typeface="Consolas" panose="020B0609020204030204" pitchFamily="49" charset="0"/>
+              </a:rPr>
+              <a:t>  80.79.176.44:62541    172.22.13.195:62541   151.236.102.200:443   151.236.102.200:443</a:t>
+            </a:r>
+          </a:p>
+          <a:p>
+            <a:r>
+              <a:rPr lang="en-US" sz="1900" dirty="0" err="1">
+                <a:solidFill>
+                  <a:schemeClr val="bg1"/>
+                </a:solidFill>
+                <a:latin typeface="Consolas" panose="020B0609020204030204" pitchFamily="49" charset="0"/>
+              </a:rPr>
+              <a:t>udp</a:t>
+            </a:r>
+            <a:r>
+              <a:rPr lang="en-US" sz="1900" dirty="0">
+                <a:solidFill>
+                  <a:schemeClr val="bg1"/>
+                </a:solidFill>
+                <a:latin typeface="Consolas" panose="020B0609020204030204" pitchFamily="49" charset="0"/>
+              </a:rPr>
+              <a:t>  31.10.12.66:53        172.19.65.250:53      212.119.203.226:63327 212.119.203.226:63327</a:t>
+            </a:r>
+          </a:p>
+          <a:p>
+            <a:r>
+              <a:rPr lang="en-US" sz="1900" dirty="0" err="1">
+                <a:solidFill>
+                  <a:schemeClr val="bg1"/>
+                </a:solidFill>
+                <a:latin typeface="Consolas" panose="020B0609020204030204" pitchFamily="49" charset="0"/>
+              </a:rPr>
+              <a:t>tcp</a:t>
+            </a:r>
+            <a:r>
+              <a:rPr lang="en-US" sz="1900" dirty="0">
+                <a:solidFill>
+                  <a:schemeClr val="bg1"/>
+                </a:solidFill>
+                <a:latin typeface="Consolas" panose="020B0609020204030204" pitchFamily="49" charset="0"/>
+              </a:rPr>
+              <a:t>  217.21.104.146:52420  10.70.2.22:3389       77.83.38.37:63008     77.83.38.37:63008</a:t>
+            </a:r>
+          </a:p>
+          <a:p>
+            <a:r>
+              <a:rPr lang="en-US" sz="1900" dirty="0" err="1">
+                <a:solidFill>
+                  <a:schemeClr val="bg1"/>
+                </a:solidFill>
+                <a:latin typeface="Consolas" panose="020B0609020204030204" pitchFamily="49" charset="0"/>
+              </a:rPr>
+              <a:t>tcp</a:t>
+            </a:r>
+            <a:r>
+              <a:rPr lang="en-US" sz="1900" dirty="0">
+                <a:solidFill>
+                  <a:schemeClr val="bg1"/>
+                </a:solidFill>
+                <a:latin typeface="Consolas" panose="020B0609020204030204" pitchFamily="49" charset="0"/>
+              </a:rPr>
+              <a:t>  80.79.176.44:38454    172.19.8.83:38454     188.166.140.47:554    188.166.140.47:554</a:t>
+            </a:r>
+          </a:p>
+          <a:p>
+            <a:r>
+              <a:rPr lang="en-US" sz="1900" dirty="0" err="1">
+                <a:solidFill>
+                  <a:schemeClr val="bg1"/>
+                </a:solidFill>
+                <a:latin typeface="Consolas" panose="020B0609020204030204" pitchFamily="49" charset="0"/>
+              </a:rPr>
+              <a:t>tcp</a:t>
+            </a:r>
+            <a:r>
+              <a:rPr lang="en-US" sz="1900" dirty="0">
+                <a:solidFill>
+                  <a:schemeClr val="bg1"/>
+                </a:solidFill>
+                <a:latin typeface="Consolas" panose="020B0609020204030204" pitchFamily="49" charset="0"/>
+              </a:rPr>
+              <a:t>  217.21.96.19:9192     10.1.34.164:32840     62.115.252.160:443    62.115.252.160:443</a:t>
+            </a:r>
+            <a:endParaRPr lang="ru-RU" sz="2400" dirty="0">
+              <a:solidFill>
+                <a:schemeClr val="bg1"/>
+              </a:solidFill>
+              <a:latin typeface="Consolas" panose="020B0609020204030204" pitchFamily="49" charset="0"/>
+            </a:endParaRPr>
+          </a:p>
+        </p:txBody>
+      </p:sp>
+      <p:sp>
+        <p:nvSpPr>
+          <p:cNvPr id="5" name="TextBox 4"/>
+          <p:cNvSpPr txBox="1"/>
+          <p:nvPr/>
+        </p:nvSpPr>
+        <p:spPr>
+          <a:xfrm>
+            <a:off x="545124" y="764931"/>
+            <a:ext cx="4045275" cy="369332"/>
+          </a:xfrm>
+          <a:prstGeom prst="rect">
+            <a:avLst/>
+          </a:prstGeom>
+          <a:noFill/>
+        </p:spPr>
+        <p:txBody>
+          <a:bodyPr wrap="none" rtlCol="0">
+            <a:spAutoFit/>
+          </a:bodyPr>
+          <a:lstStyle/>
+          <a:p>
+            <a:r>
+              <a:rPr lang="ru-RU" b="1" dirty="0" smtClean="0"/>
+              <a:t>Просмотр информации о трансляциях</a:t>
+            </a:r>
+            <a:endParaRPr lang="ru-RU" b="1" dirty="0"/>
+          </a:p>
+        </p:txBody>
+      </p:sp>
+      <p:sp>
+        <p:nvSpPr>
+          <p:cNvPr id="6" name="Заголовок 3"/>
+          <p:cNvSpPr txBox="1">
+            <a:spLocks/>
+          </p:cNvSpPr>
+          <p:nvPr/>
+        </p:nvSpPr>
+        <p:spPr>
+          <a:xfrm>
+            <a:off x="218342" y="4106062"/>
+            <a:ext cx="11755315" cy="2628846"/>
+          </a:xfrm>
+          <a:prstGeom prst="rect">
+            <a:avLst/>
+          </a:prstGeom>
+          <a:solidFill>
+            <a:schemeClr val="tx1"/>
+          </a:solidFill>
+          <a:ln>
+            <a:solidFill>
+              <a:schemeClr val="tx1"/>
+            </a:solidFill>
+          </a:ln>
+        </p:spPr>
+        <p:txBody>
+          <a:bodyPr vert="horz" lIns="91440" tIns="45720" rIns="91440" bIns="45720" rtlCol="0" anchor="ctr">
+            <a:normAutofit fontScale="85000" lnSpcReduction="10000"/>
+          </a:bodyPr>
+          <a:lstStyle>
+            <a:lvl1pPr algn="l" defTabSz="914400" rtl="0" eaLnBrk="1" latinLnBrk="0" hangingPunct="1">
+              <a:lnSpc>
+                <a:spcPct val="90000"/>
+              </a:lnSpc>
+              <a:spcBef>
+                <a:spcPct val="0"/>
+              </a:spcBef>
+              <a:buNone/>
+              <a:defRPr sz="4400" kern="1200">
+                <a:solidFill>
+                  <a:schemeClr val="tx1"/>
+                </a:solidFill>
+                <a:latin typeface="+mj-lt"/>
+                <a:ea typeface="+mj-ea"/>
+                <a:cs typeface="+mj-cs"/>
+              </a:defRPr>
+            </a:lvl1pPr>
+          </a:lstStyle>
+          <a:p>
+            <a:r>
+              <a:rPr lang="af-ZA" sz="2400" dirty="0">
+                <a:solidFill>
+                  <a:schemeClr val="bg1"/>
+                </a:solidFill>
+                <a:latin typeface="Consolas" panose="020B0609020204030204" pitchFamily="49" charset="0"/>
+              </a:rPr>
+              <a:t>Router(config)#ntp server </a:t>
+            </a:r>
+            <a:r>
+              <a:rPr lang="af-ZA" sz="2400" dirty="0" smtClean="0">
+                <a:solidFill>
+                  <a:schemeClr val="bg1"/>
+                </a:solidFill>
+                <a:latin typeface="Consolas" panose="020B0609020204030204" pitchFamily="49" charset="0"/>
+              </a:rPr>
+              <a:t>&lt;</a:t>
+            </a:r>
+            <a:r>
+              <a:rPr lang="en-US" sz="2400" dirty="0" smtClean="0">
+                <a:solidFill>
+                  <a:schemeClr val="bg1"/>
+                </a:solidFill>
+                <a:latin typeface="Consolas" panose="020B0609020204030204" pitchFamily="49" charset="0"/>
+              </a:rPr>
+              <a:t>IP</a:t>
+            </a:r>
+            <a:r>
+              <a:rPr lang="ru-RU" sz="2400" dirty="0" smtClean="0">
+                <a:solidFill>
+                  <a:schemeClr val="bg1"/>
+                </a:solidFill>
+                <a:latin typeface="Consolas" panose="020B0609020204030204" pitchFamily="49" charset="0"/>
+              </a:rPr>
+              <a:t>-сервера</a:t>
+            </a:r>
+            <a:r>
+              <a:rPr lang="af-ZA" sz="2400" dirty="0" smtClean="0">
+                <a:solidFill>
+                  <a:schemeClr val="bg1"/>
+                </a:solidFill>
+                <a:latin typeface="Consolas" panose="020B0609020204030204" pitchFamily="49" charset="0"/>
+              </a:rPr>
+              <a:t>&gt;</a:t>
+            </a:r>
+            <a:endParaRPr lang="ru-RU" sz="2400" dirty="0" smtClean="0">
+              <a:solidFill>
+                <a:schemeClr val="bg1"/>
+              </a:solidFill>
+              <a:latin typeface="Consolas" panose="020B0609020204030204" pitchFamily="49" charset="0"/>
+            </a:endParaRPr>
+          </a:p>
+          <a:p>
+            <a:r>
+              <a:rPr lang="af-ZA" sz="2400" dirty="0">
+                <a:solidFill>
+                  <a:schemeClr val="bg1"/>
+                </a:solidFill>
+                <a:latin typeface="Consolas" panose="020B0609020204030204" pitchFamily="49" charset="0"/>
+              </a:rPr>
+              <a:t>Router</a:t>
+            </a:r>
+            <a:r>
+              <a:rPr lang="af-ZA" sz="2400" dirty="0" smtClean="0">
+                <a:solidFill>
+                  <a:schemeClr val="bg1"/>
+                </a:solidFill>
+                <a:latin typeface="Consolas" panose="020B0609020204030204" pitchFamily="49" charset="0"/>
+              </a:rPr>
+              <a:t>#show </a:t>
+            </a:r>
+            <a:r>
+              <a:rPr lang="af-ZA" sz="2400" dirty="0">
+                <a:solidFill>
+                  <a:schemeClr val="bg1"/>
+                </a:solidFill>
+                <a:latin typeface="Consolas" panose="020B0609020204030204" pitchFamily="49" charset="0"/>
+              </a:rPr>
+              <a:t>ntp associations</a:t>
+            </a:r>
+          </a:p>
+          <a:p>
+            <a:r>
+              <a:rPr lang="af-ZA" sz="2400" dirty="0">
+                <a:solidFill>
+                  <a:schemeClr val="bg1"/>
+                </a:solidFill>
+                <a:latin typeface="Consolas" panose="020B0609020204030204" pitchFamily="49" charset="0"/>
+              </a:rPr>
+              <a:t>Load for five secs: 7%/2%; one minute: 8%; five minutes: 8%</a:t>
+            </a:r>
+          </a:p>
+          <a:p>
+            <a:r>
+              <a:rPr lang="af-ZA" sz="2400" dirty="0">
+                <a:solidFill>
+                  <a:schemeClr val="bg1"/>
+                </a:solidFill>
+                <a:latin typeface="Consolas" panose="020B0609020204030204" pitchFamily="49" charset="0"/>
+              </a:rPr>
+              <a:t>Time source is NTP, 14:57:42.444 MSK Fri Oct 2 2026</a:t>
+            </a:r>
+          </a:p>
+          <a:p>
+            <a:endParaRPr lang="af-ZA" sz="2400" dirty="0">
+              <a:solidFill>
+                <a:schemeClr val="bg1"/>
+              </a:solidFill>
+              <a:latin typeface="Consolas" panose="020B0609020204030204" pitchFamily="49" charset="0"/>
+            </a:endParaRPr>
+          </a:p>
+          <a:p>
+            <a:endParaRPr lang="af-ZA" sz="2400" dirty="0">
+              <a:solidFill>
+                <a:schemeClr val="bg1"/>
+              </a:solidFill>
+              <a:latin typeface="Consolas" panose="020B0609020204030204" pitchFamily="49" charset="0"/>
+            </a:endParaRPr>
+          </a:p>
+          <a:p>
+            <a:r>
+              <a:rPr lang="af-ZA" sz="2400" dirty="0">
+                <a:solidFill>
+                  <a:schemeClr val="bg1"/>
+                </a:solidFill>
+                <a:latin typeface="Consolas" panose="020B0609020204030204" pitchFamily="49" charset="0"/>
+              </a:rPr>
+              <a:t>  address         ref clock       st   when   poll reach  delay  offset   disp</a:t>
+            </a:r>
+          </a:p>
+          <a:p>
+            <a:r>
+              <a:rPr lang="af-ZA" sz="2400" dirty="0">
+                <a:solidFill>
+                  <a:schemeClr val="bg1"/>
+                </a:solidFill>
+                <a:latin typeface="Consolas" panose="020B0609020204030204" pitchFamily="49" charset="0"/>
+              </a:rPr>
+              <a:t> ~94.198.132.184  .STEP.          16   128d   1024     0  0.000   0.000 15937.</a:t>
+            </a:r>
+          </a:p>
+          <a:p>
+            <a:r>
+              <a:rPr lang="af-ZA" sz="2400" dirty="0">
+                <a:solidFill>
+                  <a:schemeClr val="bg1"/>
+                </a:solidFill>
+                <a:latin typeface="Consolas" panose="020B0609020204030204" pitchFamily="49" charset="0"/>
+              </a:rPr>
+              <a:t> ~127.127.1.1     .LOCL.           2     14     16   377  0.000   0.000  </a:t>
+            </a:r>
+            <a:r>
+              <a:rPr lang="af-ZA" sz="2400" dirty="0" smtClean="0">
+                <a:solidFill>
+                  <a:schemeClr val="bg1"/>
+                </a:solidFill>
+                <a:latin typeface="Consolas" panose="020B0609020204030204" pitchFamily="49" charset="0"/>
+              </a:rPr>
+              <a:t>1.204</a:t>
+            </a:r>
+            <a:endParaRPr lang="af-ZA" sz="2400" dirty="0">
+              <a:solidFill>
+                <a:schemeClr val="bg1"/>
+              </a:solidFill>
+              <a:latin typeface="Consolas" panose="020B0609020204030204" pitchFamily="49" charset="0"/>
+            </a:endParaRPr>
+          </a:p>
+        </p:txBody>
+      </p:sp>
+      <p:sp>
+        <p:nvSpPr>
+          <p:cNvPr id="7" name="TextBox 6"/>
+          <p:cNvSpPr txBox="1"/>
+          <p:nvPr/>
+        </p:nvSpPr>
+        <p:spPr>
+          <a:xfrm>
+            <a:off x="545124" y="3653203"/>
+            <a:ext cx="2705356" cy="369332"/>
+          </a:xfrm>
+          <a:prstGeom prst="rect">
+            <a:avLst/>
+          </a:prstGeom>
+          <a:noFill/>
+        </p:spPr>
+        <p:txBody>
+          <a:bodyPr wrap="none" rtlCol="0">
+            <a:spAutoFit/>
+          </a:bodyPr>
+          <a:lstStyle/>
+          <a:p>
+            <a:r>
+              <a:rPr lang="ru-RU" b="1" dirty="0" smtClean="0"/>
+              <a:t>Настройка и отладка </a:t>
+            </a:r>
+            <a:r>
+              <a:rPr lang="en-US" b="1" smtClean="0"/>
+              <a:t>NTP</a:t>
+            </a:r>
+            <a:endParaRPr lang="ru-RU" b="1" dirty="0"/>
+          </a:p>
+        </p:txBody>
+      </p:sp>
+    </p:spTree>
+    <p:extLst>
+      <p:ext uri="{BB962C8B-B14F-4D97-AF65-F5344CB8AC3E}">
+        <p14:creationId xmlns:p14="http://schemas.microsoft.com/office/powerpoint/2010/main" val="1073884275"/>
+      </p:ext>
+    </p:extLst>
+  </p:cSld>
+  <p:clrMapOvr>
+    <a:masterClrMapping/>
+  </p:clrMapOvr>
+  <p:timing>
+    <p:tnLst>
+      <p:par>
+        <p:cTn id="1" dur="indefinite" restart="never" nodeType="tmRoot"/>
+      </p:par>
+    </p:tnLst>
+  </p:timing>
+</p:sld>
+</file>
+
 <file path=ppt/slides/slide2.xml><?xml version="1.0" encoding="utf-8"?>
 <p:sld xmlns:a="http://schemas.openxmlformats.org/drawingml/2006/main" xmlns:r="http://schemas.openxmlformats.org/officeDocument/2006/relationships" xmlns:p="http://schemas.openxmlformats.org/presentationml/2006/main">
   <p:cSld>
@@ -3661,7 +7596,7 @@
         <p:spPr>
           <a:xfrm>
             <a:off x="228599" y="365125"/>
-            <a:ext cx="11755315" cy="1325563"/>
+            <a:ext cx="11755315" cy="1920875"/>
           </a:xfrm>
           <a:solidFill>
             <a:schemeClr val="tx1"/>
@@ -3687,6 +7622,129 @@
               </a:rPr>
               <a:t>S1(config)#username admin privilege 15 secret cisco</a:t>
             </a:r>
+            <a:br>
+              <a:rPr lang="af-ZA" sz="2400" dirty="0" smtClean="0">
+                <a:solidFill>
+                  <a:schemeClr val="bg1"/>
+                </a:solidFill>
+                <a:latin typeface="Consolas" panose="020B0609020204030204" pitchFamily="49" charset="0"/>
+              </a:rPr>
+            </a:br>
+            <a:r>
+              <a:rPr lang="en-US" sz="2400" dirty="0">
+                <a:solidFill>
+                  <a:schemeClr val="bg1"/>
+                </a:solidFill>
+                <a:latin typeface="Consolas" panose="020B0609020204030204" pitchFamily="49" charset="0"/>
+              </a:rPr>
+              <a:t>S1(</a:t>
+            </a:r>
+            <a:r>
+              <a:rPr lang="en-US" sz="2400" dirty="0" err="1">
+                <a:solidFill>
+                  <a:schemeClr val="bg1"/>
+                </a:solidFill>
+                <a:latin typeface="Consolas" panose="020B0609020204030204" pitchFamily="49" charset="0"/>
+              </a:rPr>
+              <a:t>config</a:t>
+            </a:r>
+            <a:r>
+              <a:rPr lang="en-US" sz="2400" dirty="0">
+                <a:solidFill>
+                  <a:schemeClr val="bg1"/>
+                </a:solidFill>
+                <a:latin typeface="Consolas" panose="020B0609020204030204" pitchFamily="49" charset="0"/>
+              </a:rPr>
+              <a:t>)#line </a:t>
+            </a:r>
+            <a:r>
+              <a:rPr lang="en-US" sz="2400" dirty="0" err="1">
+                <a:solidFill>
+                  <a:schemeClr val="bg1"/>
+                </a:solidFill>
+                <a:latin typeface="Consolas" panose="020B0609020204030204" pitchFamily="49" charset="0"/>
+              </a:rPr>
+              <a:t>vty</a:t>
+            </a:r>
+            <a:r>
+              <a:rPr lang="en-US" sz="2400" dirty="0">
+                <a:solidFill>
+                  <a:schemeClr val="bg1"/>
+                </a:solidFill>
+                <a:latin typeface="Consolas" panose="020B0609020204030204" pitchFamily="49" charset="0"/>
+              </a:rPr>
+              <a:t> 0 4</a:t>
+            </a:r>
+            <a:br>
+              <a:rPr lang="en-US" sz="2400" dirty="0">
+                <a:solidFill>
+                  <a:schemeClr val="bg1"/>
+                </a:solidFill>
+                <a:latin typeface="Consolas" panose="020B0609020204030204" pitchFamily="49" charset="0"/>
+              </a:rPr>
+            </a:br>
+            <a:r>
+              <a:rPr lang="en-US" sz="2400" dirty="0">
+                <a:solidFill>
+                  <a:schemeClr val="bg1"/>
+                </a:solidFill>
+                <a:latin typeface="Consolas" panose="020B0609020204030204" pitchFamily="49" charset="0"/>
+              </a:rPr>
+              <a:t>S1(</a:t>
+            </a:r>
+            <a:r>
+              <a:rPr lang="en-US" sz="2400" dirty="0" err="1">
+                <a:solidFill>
+                  <a:schemeClr val="bg1"/>
+                </a:solidFill>
+                <a:latin typeface="Consolas" panose="020B0609020204030204" pitchFamily="49" charset="0"/>
+              </a:rPr>
+              <a:t>config</a:t>
+            </a:r>
+            <a:r>
+              <a:rPr lang="en-US" sz="2400" dirty="0">
+                <a:solidFill>
+                  <a:schemeClr val="bg1"/>
+                </a:solidFill>
+                <a:latin typeface="Consolas" panose="020B0609020204030204" pitchFamily="49" charset="0"/>
+              </a:rPr>
+              <a:t>-line)#login local</a:t>
+            </a:r>
+            <a:br>
+              <a:rPr lang="en-US" sz="2400" dirty="0">
+                <a:solidFill>
+                  <a:schemeClr val="bg1"/>
+                </a:solidFill>
+                <a:latin typeface="Consolas" panose="020B0609020204030204" pitchFamily="49" charset="0"/>
+              </a:rPr>
+            </a:br>
+            <a:r>
+              <a:rPr lang="en-US" sz="2400" dirty="0">
+                <a:solidFill>
+                  <a:schemeClr val="bg1"/>
+                </a:solidFill>
+                <a:latin typeface="Consolas" panose="020B0609020204030204" pitchFamily="49" charset="0"/>
+              </a:rPr>
+              <a:t>S1(</a:t>
+            </a:r>
+            <a:r>
+              <a:rPr lang="en-US" sz="2400" dirty="0" err="1">
+                <a:solidFill>
+                  <a:schemeClr val="bg1"/>
+                </a:solidFill>
+                <a:latin typeface="Consolas" panose="020B0609020204030204" pitchFamily="49" charset="0"/>
+              </a:rPr>
+              <a:t>config</a:t>
+            </a:r>
+            <a:r>
+              <a:rPr lang="en-US" sz="2400" dirty="0">
+                <a:solidFill>
+                  <a:schemeClr val="bg1"/>
+                </a:solidFill>
+                <a:latin typeface="Consolas" panose="020B0609020204030204" pitchFamily="49" charset="0"/>
+              </a:rPr>
+              <a:t>-line)#end</a:t>
+            </a:r>
             <a:endParaRPr lang="ru-RU" sz="2400" dirty="0">
               <a:solidFill>
                 <a:schemeClr val="bg1"/>
@@ -3708,8 +7766,8 @@
         </p:nvSpPr>
         <p:spPr bwMode="auto">
           <a:xfrm>
-            <a:off x="300319" y="3084630"/>
-            <a:ext cx="11542058" cy="1958834"/>
+            <a:off x="228599" y="2583358"/>
+            <a:ext cx="11542058" cy="3436162"/>
           </a:xfrm>
           <a:prstGeom prst="rect">
             <a:avLst/>
@@ -3927,8 +7985,171 @@
                 <a:effectLst/>
                 <a:latin typeface="-apple-system"/>
               </a:rPr>
-              <a:t> - пароль пользователя</a:t>
-            </a:r>
+              <a:t> - пароль </a:t>
+            </a:r>
+            <a:r>
+              <a:rPr kumimoji="0" lang="ru-RU" altLang="ru-RU" sz="2400" b="0" i="0" u="none" strike="noStrike" cap="none" normalizeH="0" baseline="0" dirty="0" smtClean="0">
+                <a:ln>
+                  <a:noFill/>
+                </a:ln>
+                <a:effectLst/>
+                <a:latin typeface="-apple-system"/>
+              </a:rPr>
+              <a:t>пользователя</a:t>
+            </a:r>
+            <a:endParaRPr kumimoji="0" lang="en-US" altLang="ru-RU" sz="2400" b="0" i="0" u="none" strike="noStrike" cap="none" normalizeH="0" baseline="0" dirty="0" smtClean="0">
+              <a:ln>
+                <a:noFill/>
+              </a:ln>
+              <a:effectLst/>
+              <a:latin typeface="-apple-system"/>
+            </a:endParaRPr>
+          </a:p>
+          <a:p>
+            <a:pPr marL="0" marR="0" lvl="0" indent="0" algn="l" defTabSz="914400" rtl="0" eaLnBrk="0" fontAlgn="base" latinLnBrk="0" hangingPunct="0">
+              <a:lnSpc>
+                <a:spcPct val="100000"/>
+              </a:lnSpc>
+              <a:spcBef>
+                <a:spcPct val="0"/>
+              </a:spcBef>
+              <a:spcAft>
+                <a:spcPct val="0"/>
+              </a:spcAft>
+              <a:buClrTx/>
+              <a:buSzTx/>
+              <a:buFontTx/>
+              <a:buChar char="•"/>
+              <a:tabLst/>
+            </a:pPr>
+            <a:endParaRPr lang="en-US" altLang="ru-RU" sz="2400" dirty="0">
+              <a:latin typeface="-apple-system"/>
+            </a:endParaRPr>
+          </a:p>
+          <a:p>
+            <a:pPr marL="0" marR="0" lvl="0" indent="0" algn="l" defTabSz="914400" rtl="0" eaLnBrk="0" fontAlgn="base" latinLnBrk="0" hangingPunct="0">
+              <a:lnSpc>
+                <a:spcPct val="100000"/>
+              </a:lnSpc>
+              <a:spcBef>
+                <a:spcPct val="0"/>
+              </a:spcBef>
+              <a:spcAft>
+                <a:spcPct val="0"/>
+              </a:spcAft>
+              <a:buClrTx/>
+              <a:buSzTx/>
+              <a:buFontTx/>
+              <a:buChar char="•"/>
+              <a:tabLst/>
+            </a:pPr>
+            <a:r>
+              <a:rPr kumimoji="0" lang="en-US" altLang="ru-RU" sz="2400" b="0" i="0" u="none" strike="noStrike" cap="none" normalizeH="0" baseline="0" dirty="0" smtClean="0">
+                <a:ln>
+                  <a:noFill/>
+                </a:ln>
+                <a:effectLst/>
+                <a:latin typeface="-apple-system"/>
+              </a:rPr>
+              <a:t> </a:t>
+            </a:r>
+            <a:r>
+              <a:rPr lang="en-US" altLang="ru-RU" sz="2400" dirty="0">
+                <a:latin typeface="Consolas" panose="020B0609020204030204" pitchFamily="49" charset="0"/>
+              </a:rPr>
+              <a:t>line </a:t>
+            </a:r>
+            <a:r>
+              <a:rPr lang="en-US" altLang="ru-RU" sz="2400" dirty="0" err="1">
+                <a:latin typeface="Consolas" panose="020B0609020204030204" pitchFamily="49" charset="0"/>
+              </a:rPr>
+              <a:t>vty</a:t>
+            </a:r>
+            <a:r>
+              <a:rPr lang="en-US" altLang="ru-RU" sz="2400" dirty="0">
+                <a:latin typeface="Consolas" panose="020B0609020204030204" pitchFamily="49" charset="0"/>
+              </a:rPr>
+              <a:t> 0 4 </a:t>
+            </a:r>
+            <a:r>
+              <a:rPr kumimoji="0" lang="en-US" altLang="ru-RU" sz="2400" b="0" i="0" u="none" strike="noStrike" cap="none" normalizeH="0" baseline="0" dirty="0" smtClean="0">
+                <a:ln>
+                  <a:noFill/>
+                </a:ln>
+                <a:effectLst/>
+                <a:latin typeface="-apple-system"/>
+              </a:rPr>
+              <a:t>– </a:t>
+            </a:r>
+            <a:r>
+              <a:rPr kumimoji="0" lang="ru-RU" altLang="ru-RU" sz="2400" b="0" i="0" u="none" strike="noStrike" cap="none" normalizeH="0" baseline="0" dirty="0" smtClean="0">
+                <a:ln>
+                  <a:noFill/>
+                </a:ln>
+                <a:effectLst/>
+                <a:latin typeface="-apple-system"/>
+              </a:rPr>
+              <a:t>переход в режим конфигурации виртуальных линий управления</a:t>
+            </a:r>
+            <a:r>
+              <a:rPr kumimoji="0" lang="ru-RU" altLang="ru-RU" sz="2400" b="0" i="0" u="none" strike="noStrike" cap="none" normalizeH="0" dirty="0" smtClean="0">
+                <a:ln>
+                  <a:noFill/>
+                </a:ln>
+                <a:effectLst/>
+                <a:latin typeface="-apple-system"/>
+              </a:rPr>
+              <a:t> устройством (отвечают за протоколы удаленного доступа)</a:t>
+            </a:r>
+          </a:p>
+          <a:p>
+            <a:pPr marL="0" marR="0" lvl="0" indent="0" algn="l" defTabSz="914400" rtl="0" eaLnBrk="0" fontAlgn="base" latinLnBrk="0" hangingPunct="0">
+              <a:lnSpc>
+                <a:spcPct val="100000"/>
+              </a:lnSpc>
+              <a:spcBef>
+                <a:spcPct val="0"/>
+              </a:spcBef>
+              <a:spcAft>
+                <a:spcPct val="0"/>
+              </a:spcAft>
+              <a:buClrTx/>
+              <a:buSzTx/>
+              <a:buFontTx/>
+              <a:buChar char="•"/>
+              <a:tabLst/>
+            </a:pPr>
+            <a:r>
+              <a:rPr lang="ru-RU" altLang="ru-RU" sz="2400" dirty="0">
+                <a:latin typeface="-apple-system"/>
+              </a:rPr>
+              <a:t> </a:t>
+            </a:r>
+            <a:r>
+              <a:rPr lang="en-US" altLang="ru-RU" sz="2400" dirty="0">
+                <a:latin typeface="Consolas" panose="020B0609020204030204" pitchFamily="49" charset="0"/>
+              </a:rPr>
+              <a:t>login local </a:t>
+            </a:r>
+            <a:r>
+              <a:rPr lang="en-US" altLang="ru-RU" sz="2400" dirty="0" smtClean="0">
+                <a:latin typeface="-apple-system"/>
+              </a:rPr>
+              <a:t>– </a:t>
+            </a:r>
+            <a:r>
+              <a:rPr lang="ru-RU" altLang="ru-RU" sz="2400" dirty="0" smtClean="0">
+                <a:latin typeface="-apple-system"/>
+              </a:rPr>
+              <a:t>включение аутентификации по локальной базе пользователей</a:t>
+            </a:r>
+            <a:endParaRPr kumimoji="0" lang="ru-RU" altLang="ru-RU" sz="2400" b="0" i="0" u="none" strike="noStrike" cap="none" normalizeH="0" baseline="0" dirty="0" smtClean="0">
+              <a:ln>
+                <a:noFill/>
+              </a:ln>
+              <a:effectLst/>
+              <a:latin typeface="-apple-system"/>
+            </a:endParaRPr>
           </a:p>
         </p:txBody>
       </p:sp>
@@ -3936,6 +8157,3951 @@
     <p:extLst>
       <p:ext uri="{BB962C8B-B14F-4D97-AF65-F5344CB8AC3E}">
         <p14:creationId xmlns:p14="http://schemas.microsoft.com/office/powerpoint/2010/main" val="1848195376"/>
+      </p:ext>
+    </p:extLst>
+  </p:cSld>
+  <p:clrMapOvr>
+    <a:masterClrMapping/>
+  </p:clrMapOvr>
+  <p:timing>
+    <p:tnLst>
+      <p:par>
+        <p:cTn id="1" dur="indefinite" restart="never" nodeType="tmRoot"/>
+      </p:par>
+    </p:tnLst>
+  </p:timing>
+</p:sld>
+</file>
+
+<file path=ppt/slides/slide3.xml><?xml version="1.0" encoding="utf-8"?>
+<p:sld xmlns:a="http://schemas.openxmlformats.org/drawingml/2006/main" xmlns:r="http://schemas.openxmlformats.org/officeDocument/2006/relationships" xmlns:p="http://schemas.openxmlformats.org/presentationml/2006/main">
+  <p:cSld>
+    <p:spTree>
+      <p:nvGrpSpPr>
+        <p:cNvPr id="1" name=""/>
+        <p:cNvGrpSpPr/>
+        <p:nvPr/>
+      </p:nvGrpSpPr>
+      <p:grpSpPr>
+        <a:xfrm>
+          <a:off x="0" y="0"/>
+          <a:ext cx="0" cy="0"/>
+          <a:chOff x="0" y="0"/>
+          <a:chExt cx="0" cy="0"/>
+        </a:xfrm>
+      </p:grpSpPr>
+      <p:sp>
+        <p:nvSpPr>
+          <p:cNvPr id="2" name="Заголовок 1"/>
+          <p:cNvSpPr>
+            <a:spLocks noGrp="1"/>
+          </p:cNvSpPr>
+          <p:nvPr>
+            <p:ph type="title"/>
+          </p:nvPr>
+        </p:nvSpPr>
+        <p:spPr>
+          <a:xfrm>
+            <a:off x="218341" y="101356"/>
+            <a:ext cx="10515600" cy="725121"/>
+          </a:xfrm>
+        </p:spPr>
+        <p:txBody>
+          <a:bodyPr/>
+          <a:lstStyle/>
+          <a:p>
+            <a:r>
+              <a:rPr lang="ru-RU" dirty="0" smtClean="0"/>
+              <a:t>Настройка </a:t>
+            </a:r>
+            <a:r>
+              <a:rPr lang="en-US" dirty="0" smtClean="0"/>
+              <a:t>SSH</a:t>
+            </a:r>
+            <a:endParaRPr lang="ru-RU" dirty="0"/>
+          </a:p>
+        </p:txBody>
+      </p:sp>
+      <p:sp>
+        <p:nvSpPr>
+          <p:cNvPr id="4" name="Заголовок 3"/>
+          <p:cNvSpPr txBox="1">
+            <a:spLocks/>
+          </p:cNvSpPr>
+          <p:nvPr/>
+        </p:nvSpPr>
+        <p:spPr>
+          <a:xfrm>
+            <a:off x="218341" y="826477"/>
+            <a:ext cx="11755315" cy="2104537"/>
+          </a:xfrm>
+          <a:prstGeom prst="rect">
+            <a:avLst/>
+          </a:prstGeom>
+          <a:solidFill>
+            <a:schemeClr val="tx1"/>
+          </a:solidFill>
+          <a:ln>
+            <a:solidFill>
+              <a:schemeClr val="tx1"/>
+            </a:solidFill>
+          </a:ln>
+        </p:spPr>
+        <p:txBody>
+          <a:bodyPr vert="horz" lIns="91440" tIns="45720" rIns="91440" bIns="45720" rtlCol="0" anchor="ctr">
+            <a:normAutofit/>
+          </a:bodyPr>
+          <a:lstStyle>
+            <a:lvl1pPr algn="l" defTabSz="914400" rtl="0" eaLnBrk="1" latinLnBrk="0" hangingPunct="1">
+              <a:lnSpc>
+                <a:spcPct val="90000"/>
+              </a:lnSpc>
+              <a:spcBef>
+                <a:spcPct val="0"/>
+              </a:spcBef>
+              <a:buNone/>
+              <a:defRPr sz="4400" kern="1200">
+                <a:solidFill>
+                  <a:schemeClr val="tx1"/>
+                </a:solidFill>
+                <a:latin typeface="+mj-lt"/>
+                <a:ea typeface="+mj-ea"/>
+                <a:cs typeface="+mj-cs"/>
+              </a:defRPr>
+            </a:lvl1pPr>
+          </a:lstStyle>
+          <a:p>
+            <a:r>
+              <a:rPr lang="af-ZA" sz="2400" dirty="0" smtClean="0">
+                <a:solidFill>
+                  <a:schemeClr val="bg1"/>
+                </a:solidFill>
+                <a:latin typeface="Consolas" panose="020B0609020204030204" pitchFamily="49" charset="0"/>
+              </a:rPr>
+              <a:t>S1(config)#ip domain-name example.lan</a:t>
+            </a:r>
+            <a:br>
+              <a:rPr lang="af-ZA" sz="2400" dirty="0" smtClean="0">
+                <a:solidFill>
+                  <a:schemeClr val="bg1"/>
+                </a:solidFill>
+                <a:latin typeface="Consolas" panose="020B0609020204030204" pitchFamily="49" charset="0"/>
+              </a:rPr>
+            </a:br>
+            <a:r>
+              <a:rPr lang="en-US" sz="2400" dirty="0">
+                <a:solidFill>
+                  <a:schemeClr val="bg1"/>
+                </a:solidFill>
+                <a:latin typeface="Consolas" panose="020B0609020204030204" pitchFamily="49" charset="0"/>
+              </a:rPr>
+              <a:t>S1(</a:t>
+            </a:r>
+            <a:r>
+              <a:rPr lang="en-US" sz="2400" dirty="0" err="1">
+                <a:solidFill>
+                  <a:schemeClr val="bg1"/>
+                </a:solidFill>
+                <a:latin typeface="Consolas" panose="020B0609020204030204" pitchFamily="49" charset="0"/>
+              </a:rPr>
+              <a:t>config</a:t>
+            </a:r>
+            <a:r>
+              <a:rPr lang="en-US" sz="2400" dirty="0" smtClean="0">
+                <a:solidFill>
+                  <a:schemeClr val="bg1"/>
+                </a:solidFill>
+                <a:latin typeface="Consolas" panose="020B0609020204030204" pitchFamily="49" charset="0"/>
+              </a:rPr>
+              <a:t>)#</a:t>
+            </a:r>
+            <a:r>
+              <a:rPr lang="en-US" sz="2400" dirty="0">
+                <a:solidFill>
+                  <a:schemeClr val="bg1"/>
+                </a:solidFill>
+                <a:latin typeface="Consolas" panose="020B0609020204030204" pitchFamily="49" charset="0"/>
+              </a:rPr>
+              <a:t>crypto key generate </a:t>
+            </a:r>
+            <a:r>
+              <a:rPr lang="en-US" sz="2400" dirty="0" err="1" smtClean="0">
+                <a:solidFill>
+                  <a:schemeClr val="bg1"/>
+                </a:solidFill>
+                <a:latin typeface="Consolas" panose="020B0609020204030204" pitchFamily="49" charset="0"/>
+              </a:rPr>
+              <a:t>rsa</a:t>
+            </a:r>
+            <a:endParaRPr lang="en-US" sz="2400" dirty="0" smtClean="0">
+              <a:solidFill>
+                <a:schemeClr val="bg1"/>
+              </a:solidFill>
+              <a:latin typeface="Consolas" panose="020B0609020204030204" pitchFamily="49" charset="0"/>
+            </a:endParaRPr>
+          </a:p>
+          <a:p>
+            <a:r>
+              <a:rPr lang="en-US" sz="2400" dirty="0">
+                <a:solidFill>
+                  <a:schemeClr val="bg1"/>
+                </a:solidFill>
+                <a:latin typeface="Consolas" panose="020B0609020204030204" pitchFamily="49" charset="0"/>
+              </a:rPr>
+              <a:t>S1(</a:t>
+            </a:r>
+            <a:r>
+              <a:rPr lang="en-US" sz="2400" dirty="0" err="1">
+                <a:solidFill>
+                  <a:schemeClr val="bg1"/>
+                </a:solidFill>
+                <a:latin typeface="Consolas" panose="020B0609020204030204" pitchFamily="49" charset="0"/>
+              </a:rPr>
+              <a:t>config</a:t>
+            </a:r>
+            <a:r>
+              <a:rPr lang="en-US" sz="2400" dirty="0">
+                <a:solidFill>
+                  <a:schemeClr val="bg1"/>
+                </a:solidFill>
+                <a:latin typeface="Consolas" panose="020B0609020204030204" pitchFamily="49" charset="0"/>
+              </a:rPr>
+              <a:t>)#</a:t>
+            </a:r>
+            <a:r>
+              <a:rPr lang="en-US" sz="2400" dirty="0" err="1">
+                <a:solidFill>
+                  <a:schemeClr val="bg1"/>
+                </a:solidFill>
+                <a:latin typeface="Consolas" panose="020B0609020204030204" pitchFamily="49" charset="0"/>
+              </a:rPr>
+              <a:t>ip</a:t>
+            </a:r>
+            <a:r>
+              <a:rPr lang="en-US" sz="2400" dirty="0">
+                <a:solidFill>
+                  <a:schemeClr val="bg1"/>
+                </a:solidFill>
+                <a:latin typeface="Consolas" panose="020B0609020204030204" pitchFamily="49" charset="0"/>
+              </a:rPr>
+              <a:t> </a:t>
+            </a:r>
+            <a:r>
+              <a:rPr lang="en-US" sz="2400" dirty="0" err="1">
+                <a:solidFill>
+                  <a:schemeClr val="bg1"/>
+                </a:solidFill>
+                <a:latin typeface="Consolas" panose="020B0609020204030204" pitchFamily="49" charset="0"/>
+              </a:rPr>
+              <a:t>ssh</a:t>
+            </a:r>
+            <a:r>
+              <a:rPr lang="en-US" sz="2400" dirty="0">
+                <a:solidFill>
+                  <a:schemeClr val="bg1"/>
+                </a:solidFill>
+                <a:latin typeface="Consolas" panose="020B0609020204030204" pitchFamily="49" charset="0"/>
+              </a:rPr>
+              <a:t> version 2</a:t>
+            </a:r>
+          </a:p>
+          <a:p>
+            <a:r>
+              <a:rPr lang="en-US" sz="2400" dirty="0" smtClean="0">
+                <a:solidFill>
+                  <a:schemeClr val="bg1"/>
+                </a:solidFill>
+                <a:latin typeface="Consolas" panose="020B0609020204030204" pitchFamily="49" charset="0"/>
+              </a:rPr>
+              <a:t>S1(</a:t>
+            </a:r>
+            <a:r>
+              <a:rPr lang="en-US" sz="2400" dirty="0" err="1" smtClean="0">
+                <a:solidFill>
+                  <a:schemeClr val="bg1"/>
+                </a:solidFill>
+                <a:latin typeface="Consolas" panose="020B0609020204030204" pitchFamily="49" charset="0"/>
+              </a:rPr>
+              <a:t>config</a:t>
+            </a:r>
+            <a:r>
+              <a:rPr lang="en-US" sz="2400" dirty="0">
+                <a:solidFill>
+                  <a:schemeClr val="bg1"/>
+                </a:solidFill>
+                <a:latin typeface="Consolas" panose="020B0609020204030204" pitchFamily="49" charset="0"/>
+              </a:rPr>
+              <a:t>)#line </a:t>
+            </a:r>
+            <a:r>
+              <a:rPr lang="en-US" sz="2400" dirty="0" err="1">
+                <a:solidFill>
+                  <a:schemeClr val="bg1"/>
+                </a:solidFill>
+                <a:latin typeface="Consolas" panose="020B0609020204030204" pitchFamily="49" charset="0"/>
+              </a:rPr>
+              <a:t>vty</a:t>
+            </a:r>
+            <a:r>
+              <a:rPr lang="en-US" sz="2400" dirty="0">
+                <a:solidFill>
+                  <a:schemeClr val="bg1"/>
+                </a:solidFill>
+                <a:latin typeface="Consolas" panose="020B0609020204030204" pitchFamily="49" charset="0"/>
+              </a:rPr>
+              <a:t> 0 4</a:t>
+            </a:r>
+          </a:p>
+          <a:p>
+            <a:r>
+              <a:rPr lang="en-US" sz="2400" dirty="0">
+                <a:solidFill>
+                  <a:schemeClr val="bg1"/>
+                </a:solidFill>
+                <a:latin typeface="Consolas" panose="020B0609020204030204" pitchFamily="49" charset="0"/>
+              </a:rPr>
+              <a:t>S1(</a:t>
+            </a:r>
+            <a:r>
+              <a:rPr lang="en-US" sz="2400" dirty="0" err="1">
+                <a:solidFill>
+                  <a:schemeClr val="bg1"/>
+                </a:solidFill>
+                <a:latin typeface="Consolas" panose="020B0609020204030204" pitchFamily="49" charset="0"/>
+              </a:rPr>
+              <a:t>config</a:t>
+            </a:r>
+            <a:r>
+              <a:rPr lang="en-US" sz="2400" dirty="0">
+                <a:solidFill>
+                  <a:schemeClr val="bg1"/>
+                </a:solidFill>
+                <a:latin typeface="Consolas" panose="020B0609020204030204" pitchFamily="49" charset="0"/>
+              </a:rPr>
+              <a:t>-line)#transport input </a:t>
+            </a:r>
+            <a:r>
+              <a:rPr lang="en-US" sz="2400" dirty="0" err="1">
+                <a:solidFill>
+                  <a:schemeClr val="bg1"/>
+                </a:solidFill>
+                <a:latin typeface="Consolas" panose="020B0609020204030204" pitchFamily="49" charset="0"/>
+              </a:rPr>
+              <a:t>ssh</a:t>
+            </a:r>
+            <a:endParaRPr lang="en-US" sz="2400" dirty="0">
+              <a:solidFill>
+                <a:schemeClr val="bg1"/>
+              </a:solidFill>
+              <a:latin typeface="Consolas" panose="020B0609020204030204" pitchFamily="49" charset="0"/>
+            </a:endParaRPr>
+          </a:p>
+          <a:p>
+            <a:r>
+              <a:rPr lang="en-US" sz="2400" dirty="0" smtClean="0">
+                <a:solidFill>
+                  <a:schemeClr val="bg1"/>
+                </a:solidFill>
+                <a:latin typeface="Consolas" panose="020B0609020204030204" pitchFamily="49" charset="0"/>
+              </a:rPr>
+              <a:t>S1(</a:t>
+            </a:r>
+            <a:r>
+              <a:rPr lang="en-US" sz="2400" dirty="0" err="1" smtClean="0">
+                <a:solidFill>
+                  <a:schemeClr val="bg1"/>
+                </a:solidFill>
+                <a:latin typeface="Consolas" panose="020B0609020204030204" pitchFamily="49" charset="0"/>
+              </a:rPr>
+              <a:t>config</a:t>
+            </a:r>
+            <a:r>
+              <a:rPr lang="en-US" sz="2400" dirty="0" smtClean="0">
+                <a:solidFill>
+                  <a:schemeClr val="bg1"/>
+                </a:solidFill>
+                <a:latin typeface="Consolas" panose="020B0609020204030204" pitchFamily="49" charset="0"/>
+              </a:rPr>
+              <a:t>-line</a:t>
+            </a:r>
+            <a:r>
+              <a:rPr lang="en-US" sz="2400" dirty="0">
+                <a:solidFill>
+                  <a:schemeClr val="bg1"/>
+                </a:solidFill>
+                <a:latin typeface="Consolas" panose="020B0609020204030204" pitchFamily="49" charset="0"/>
+              </a:rPr>
+              <a:t>)#login </a:t>
+            </a:r>
+            <a:r>
+              <a:rPr lang="en-US" sz="2400" dirty="0" smtClean="0">
+                <a:solidFill>
+                  <a:schemeClr val="bg1"/>
+                </a:solidFill>
+                <a:latin typeface="Consolas" panose="020B0609020204030204" pitchFamily="49" charset="0"/>
+              </a:rPr>
+              <a:t>local</a:t>
+            </a:r>
+            <a:endParaRPr lang="ru-RU" sz="2400" dirty="0">
+              <a:solidFill>
+                <a:schemeClr val="bg1"/>
+              </a:solidFill>
+              <a:latin typeface="Consolas" panose="020B0609020204030204" pitchFamily="49" charset="0"/>
+            </a:endParaRPr>
+          </a:p>
+        </p:txBody>
+      </p:sp>
+      <p:graphicFrame>
+        <p:nvGraphicFramePr>
+          <p:cNvPr id="6" name="Таблица 5"/>
+          <p:cNvGraphicFramePr>
+            <a:graphicFrameLocks noGrp="1"/>
+          </p:cNvGraphicFramePr>
+          <p:nvPr>
+            <p:extLst>
+              <p:ext uri="{D42A27DB-BD31-4B8C-83A1-F6EECF244321}">
+                <p14:modId xmlns:p14="http://schemas.microsoft.com/office/powerpoint/2010/main" val="4145220361"/>
+              </p:ext>
+            </p:extLst>
+          </p:nvPr>
+        </p:nvGraphicFramePr>
+        <p:xfrm>
+          <a:off x="347317" y="3056549"/>
+          <a:ext cx="11626338" cy="3621840"/>
+        </p:xfrm>
+        <a:graphic>
+          <a:graphicData uri="http://schemas.openxmlformats.org/drawingml/2006/table">
+            <a:tbl>
+              <a:tblPr/>
+              <a:tblGrid>
+                <a:gridCol w="2589314">
+                  <a:extLst>
+                    <a:ext uri="{9D8B030D-6E8A-4147-A177-3AD203B41FA5}">
+                      <a16:colId xmlns:a16="http://schemas.microsoft.com/office/drawing/2014/main" val="1071594344"/>
+                    </a:ext>
+                  </a:extLst>
+                </a:gridCol>
+                <a:gridCol w="9037024">
+                  <a:extLst>
+                    <a:ext uri="{9D8B030D-6E8A-4147-A177-3AD203B41FA5}">
+                      <a16:colId xmlns:a16="http://schemas.microsoft.com/office/drawing/2014/main" val="105974424"/>
+                    </a:ext>
+                  </a:extLst>
+                </a:gridCol>
+              </a:tblGrid>
+              <a:tr h="236896">
+                <a:tc>
+                  <a:txBody>
+                    <a:bodyPr/>
+                    <a:lstStyle/>
+                    <a:p>
+                      <a:pPr algn="l"/>
+                      <a:r>
+                        <a:rPr lang="ru-RU" sz="1100" b="1" dirty="0">
+                          <a:effectLst/>
+                          <a:latin typeface="quote-cjk-patch"/>
+                        </a:rPr>
+                        <a:t>Команда / параметр</a:t>
+                      </a:r>
+                    </a:p>
+                  </a:txBody>
+                  <a:tcPr marL="56757" marR="94594" marT="59121" marB="59121" anchor="ctr">
+                    <a:lnL>
+                      <a:noFill/>
+                    </a:lnL>
+                    <a:lnR>
+                      <a:noFill/>
+                    </a:lnR>
+                    <a:lnT>
+                      <a:noFill/>
+                    </a:lnT>
+                    <a:lnB>
+                      <a:noFill/>
+                    </a:lnB>
+                    <a:solidFill>
+                      <a:srgbClr val="FFFFFF"/>
+                    </a:solidFill>
+                  </a:tcPr>
+                </a:tc>
+                <a:tc>
+                  <a:txBody>
+                    <a:bodyPr/>
+                    <a:lstStyle/>
+                    <a:p>
+                      <a:pPr algn="l"/>
+                      <a:r>
+                        <a:rPr lang="ru-RU" sz="1100" b="1" dirty="0">
+                          <a:effectLst/>
+                          <a:latin typeface="quote-cjk-patch"/>
+                        </a:rPr>
+                        <a:t>Пояснение</a:t>
+                      </a:r>
+                    </a:p>
+                  </a:txBody>
+                  <a:tcPr marL="94594" marR="94594" marT="59121" marB="59121" anchor="ctr">
+                    <a:lnL>
+                      <a:noFill/>
+                    </a:lnL>
+                    <a:lnR>
+                      <a:noFill/>
+                    </a:lnR>
+                    <a:lnT>
+                      <a:noFill/>
+                    </a:lnT>
+                    <a:lnB>
+                      <a:noFill/>
+                    </a:lnB>
+                    <a:solidFill>
+                      <a:srgbClr val="FFFFFF"/>
+                    </a:solidFill>
+                  </a:tcPr>
+                </a:tc>
+                <a:extLst>
+                  <a:ext uri="{0D108BD9-81ED-4DB2-BD59-A6C34878D82A}">
+                    <a16:rowId xmlns:a16="http://schemas.microsoft.com/office/drawing/2014/main" val="1532352765"/>
+                  </a:ext>
+                </a:extLst>
+              </a:tr>
+              <a:tr h="376703">
+                <a:tc>
+                  <a:txBody>
+                    <a:bodyPr/>
+                    <a:lstStyle/>
+                    <a:p>
+                      <a:r>
+                        <a:rPr lang="af-ZA" sz="1100" b="0" dirty="0">
+                          <a:effectLst/>
+                          <a:latin typeface="Consolas" panose="020B0609020204030204" pitchFamily="49" charset="0"/>
+                        </a:rPr>
+                        <a:t>ip domain-name</a:t>
+                      </a:r>
+                    </a:p>
+                  </a:txBody>
+                  <a:tcPr marL="56757" marR="94594" marT="59121" marB="59121" anchor="ctr">
+                    <a:lnL>
+                      <a:noFill/>
+                    </a:lnL>
+                    <a:lnR>
+                      <a:noFill/>
+                    </a:lnR>
+                    <a:lnT>
+                      <a:noFill/>
+                    </a:lnT>
+                    <a:lnB>
+                      <a:noFill/>
+                    </a:lnB>
+                    <a:solidFill>
+                      <a:srgbClr val="FFFFFF"/>
+                    </a:solidFill>
+                  </a:tcPr>
+                </a:tc>
+                <a:tc>
+                  <a:txBody>
+                    <a:bodyPr/>
+                    <a:lstStyle/>
+                    <a:p>
+                      <a:r>
+                        <a:rPr lang="ru-RU" sz="1100" b="0">
+                          <a:effectLst/>
+                          <a:latin typeface="quote-cjk-patch"/>
+                        </a:rPr>
+                        <a:t>команда задания доменного имени устройства</a:t>
+                      </a:r>
+                    </a:p>
+                  </a:txBody>
+                  <a:tcPr marL="94594" marR="56757" marT="59121" marB="59121" anchor="ctr">
+                    <a:lnL>
+                      <a:noFill/>
+                    </a:lnL>
+                    <a:lnR>
+                      <a:noFill/>
+                    </a:lnR>
+                    <a:lnT>
+                      <a:noFill/>
+                    </a:lnT>
+                    <a:lnB>
+                      <a:noFill/>
+                    </a:lnB>
+                    <a:solidFill>
+                      <a:srgbClr val="FFFFFF"/>
+                    </a:solidFill>
+                  </a:tcPr>
+                </a:tc>
+                <a:extLst>
+                  <a:ext uri="{0D108BD9-81ED-4DB2-BD59-A6C34878D82A}">
+                    <a16:rowId xmlns:a16="http://schemas.microsoft.com/office/drawing/2014/main" val="3793738791"/>
+                  </a:ext>
+                </a:extLst>
+              </a:tr>
+              <a:tr h="376703">
+                <a:tc>
+                  <a:txBody>
+                    <a:bodyPr/>
+                    <a:lstStyle/>
+                    <a:p>
+                      <a:r>
+                        <a:rPr lang="af-ZA" sz="1100" b="0" dirty="0">
+                          <a:effectLst/>
+                          <a:latin typeface="Consolas" panose="020B0609020204030204" pitchFamily="49" charset="0"/>
+                        </a:rPr>
+                        <a:t>example.lan</a:t>
+                      </a:r>
+                    </a:p>
+                  </a:txBody>
+                  <a:tcPr marL="56757" marR="94594" marT="59121" marB="59121" anchor="ctr">
+                    <a:lnL>
+                      <a:noFill/>
+                    </a:lnL>
+                    <a:lnR>
+                      <a:noFill/>
+                    </a:lnR>
+                    <a:lnT>
+                      <a:noFill/>
+                    </a:lnT>
+                    <a:lnB>
+                      <a:noFill/>
+                    </a:lnB>
+                    <a:solidFill>
+                      <a:srgbClr val="FFFFFF"/>
+                    </a:solidFill>
+                  </a:tcPr>
+                </a:tc>
+                <a:tc>
+                  <a:txBody>
+                    <a:bodyPr/>
+                    <a:lstStyle/>
+                    <a:p>
+                      <a:r>
+                        <a:rPr lang="ru-RU" sz="1100" b="0">
+                          <a:effectLst/>
+                          <a:latin typeface="quote-cjk-patch"/>
+                        </a:rPr>
+                        <a:t>имя домена (нужно для генерации RSA-ключей)</a:t>
+                      </a:r>
+                    </a:p>
+                  </a:txBody>
+                  <a:tcPr marL="94594" marR="56757" marT="59121" marB="59121" anchor="ctr">
+                    <a:lnL>
+                      <a:noFill/>
+                    </a:lnL>
+                    <a:lnR>
+                      <a:noFill/>
+                    </a:lnR>
+                    <a:lnT>
+                      <a:noFill/>
+                    </a:lnT>
+                    <a:lnB>
+                      <a:noFill/>
+                    </a:lnB>
+                    <a:solidFill>
+                      <a:srgbClr val="FFFFFF"/>
+                    </a:solidFill>
+                  </a:tcPr>
+                </a:tc>
+                <a:extLst>
+                  <a:ext uri="{0D108BD9-81ED-4DB2-BD59-A6C34878D82A}">
+                    <a16:rowId xmlns:a16="http://schemas.microsoft.com/office/drawing/2014/main" val="1693047553"/>
+                  </a:ext>
+                </a:extLst>
+              </a:tr>
+              <a:tr h="516510">
+                <a:tc>
+                  <a:txBody>
+                    <a:bodyPr/>
+                    <a:lstStyle/>
+                    <a:p>
+                      <a:r>
+                        <a:rPr lang="af-ZA" sz="1100" b="0" dirty="0">
+                          <a:effectLst/>
+                          <a:latin typeface="Consolas" panose="020B0609020204030204" pitchFamily="49" charset="0"/>
+                        </a:rPr>
+                        <a:t>crypto key generate rsa</a:t>
+                      </a:r>
+                    </a:p>
+                  </a:txBody>
+                  <a:tcPr marL="56757" marR="94594" marT="59121" marB="59121" anchor="ctr">
+                    <a:lnL>
+                      <a:noFill/>
+                    </a:lnL>
+                    <a:lnR>
+                      <a:noFill/>
+                    </a:lnR>
+                    <a:lnT>
+                      <a:noFill/>
+                    </a:lnT>
+                    <a:lnB>
+                      <a:noFill/>
+                    </a:lnB>
+                    <a:solidFill>
+                      <a:srgbClr val="FFFFFF"/>
+                    </a:solidFill>
+                  </a:tcPr>
+                </a:tc>
+                <a:tc>
+                  <a:txBody>
+                    <a:bodyPr/>
+                    <a:lstStyle/>
+                    <a:p>
+                      <a:r>
+                        <a:rPr lang="ru-RU" sz="1100" b="0">
+                          <a:effectLst/>
+                          <a:latin typeface="quote-cjk-patch"/>
+                        </a:rPr>
+                        <a:t>генерация пары RSA-ключей (открытый/закрытый), необходима для работы SSH</a:t>
+                      </a:r>
+                    </a:p>
+                  </a:txBody>
+                  <a:tcPr marL="94594" marR="56757" marT="59121" marB="59121" anchor="ctr">
+                    <a:lnL>
+                      <a:noFill/>
+                    </a:lnL>
+                    <a:lnR>
+                      <a:noFill/>
+                    </a:lnR>
+                    <a:lnT>
+                      <a:noFill/>
+                    </a:lnT>
+                    <a:lnB>
+                      <a:noFill/>
+                    </a:lnB>
+                    <a:solidFill>
+                      <a:srgbClr val="FFFFFF"/>
+                    </a:solidFill>
+                  </a:tcPr>
+                </a:tc>
+                <a:extLst>
+                  <a:ext uri="{0D108BD9-81ED-4DB2-BD59-A6C34878D82A}">
+                    <a16:rowId xmlns:a16="http://schemas.microsoft.com/office/drawing/2014/main" val="3471365541"/>
+                  </a:ext>
+                </a:extLst>
+              </a:tr>
+              <a:tr h="376703">
+                <a:tc>
+                  <a:txBody>
+                    <a:bodyPr/>
+                    <a:lstStyle/>
+                    <a:p>
+                      <a:r>
+                        <a:rPr lang="af-ZA" sz="1100" b="0" dirty="0">
+                          <a:effectLst/>
+                          <a:latin typeface="Consolas" panose="020B0609020204030204" pitchFamily="49" charset="0"/>
+                        </a:rPr>
+                        <a:t>ip ssh version 2</a:t>
+                      </a:r>
+                    </a:p>
+                  </a:txBody>
+                  <a:tcPr marL="56757" marR="94594" marT="59121" marB="59121" anchor="ctr">
+                    <a:lnL>
+                      <a:noFill/>
+                    </a:lnL>
+                    <a:lnR>
+                      <a:noFill/>
+                    </a:lnR>
+                    <a:lnT>
+                      <a:noFill/>
+                    </a:lnT>
+                    <a:lnB>
+                      <a:noFill/>
+                    </a:lnB>
+                    <a:solidFill>
+                      <a:srgbClr val="FFFFFF"/>
+                    </a:solidFill>
+                  </a:tcPr>
+                </a:tc>
+                <a:tc>
+                  <a:txBody>
+                    <a:bodyPr/>
+                    <a:lstStyle/>
+                    <a:p>
+                      <a:r>
+                        <a:rPr lang="ru-RU" sz="1100" b="0">
+                          <a:effectLst/>
+                          <a:latin typeface="quote-cjk-patch"/>
+                        </a:rPr>
+                        <a:t>выбор версии протокола SSH (2 — более безопасная)</a:t>
+                      </a:r>
+                    </a:p>
+                  </a:txBody>
+                  <a:tcPr marL="94594" marR="56757" marT="59121" marB="59121" anchor="ctr">
+                    <a:lnL>
+                      <a:noFill/>
+                    </a:lnL>
+                    <a:lnR>
+                      <a:noFill/>
+                    </a:lnR>
+                    <a:lnT>
+                      <a:noFill/>
+                    </a:lnT>
+                    <a:lnB>
+                      <a:noFill/>
+                    </a:lnB>
+                    <a:solidFill>
+                      <a:srgbClr val="FFFFFF"/>
+                    </a:solidFill>
+                  </a:tcPr>
+                </a:tc>
+                <a:extLst>
+                  <a:ext uri="{0D108BD9-81ED-4DB2-BD59-A6C34878D82A}">
+                    <a16:rowId xmlns:a16="http://schemas.microsoft.com/office/drawing/2014/main" val="3136817870"/>
+                  </a:ext>
+                </a:extLst>
+              </a:tr>
+              <a:tr h="656318">
+                <a:tc>
+                  <a:txBody>
+                    <a:bodyPr/>
+                    <a:lstStyle/>
+                    <a:p>
+                      <a:r>
+                        <a:rPr lang="af-ZA" sz="1100" b="0" dirty="0">
+                          <a:effectLst/>
+                          <a:latin typeface="Consolas" panose="020B0609020204030204" pitchFamily="49" charset="0"/>
+                        </a:rPr>
+                        <a:t>line vty 0 4</a:t>
+                      </a:r>
+                    </a:p>
+                  </a:txBody>
+                  <a:tcPr marL="56757" marR="94594" marT="59121" marB="59121" anchor="ctr">
+                    <a:lnL>
+                      <a:noFill/>
+                    </a:lnL>
+                    <a:lnR>
+                      <a:noFill/>
+                    </a:lnR>
+                    <a:lnT>
+                      <a:noFill/>
+                    </a:lnT>
+                    <a:lnB>
+                      <a:noFill/>
+                    </a:lnB>
+                    <a:solidFill>
+                      <a:srgbClr val="FFFFFF"/>
+                    </a:solidFill>
+                  </a:tcPr>
+                </a:tc>
+                <a:tc>
+                  <a:txBody>
+                    <a:bodyPr/>
+                    <a:lstStyle/>
+                    <a:p>
+                      <a:r>
+                        <a:rPr lang="ru-RU" sz="1100" b="0">
+                          <a:effectLst/>
+                          <a:latin typeface="quote-cjk-patch"/>
+                        </a:rPr>
+                        <a:t>переход в режим конфигурации виртуальных линий (0–4), отвечающих за удалённый доступ</a:t>
+                      </a:r>
+                    </a:p>
+                  </a:txBody>
+                  <a:tcPr marL="94594" marR="56757" marT="59121" marB="59121" anchor="ctr">
+                    <a:lnL>
+                      <a:noFill/>
+                    </a:lnL>
+                    <a:lnR>
+                      <a:noFill/>
+                    </a:lnR>
+                    <a:lnT>
+                      <a:noFill/>
+                    </a:lnT>
+                    <a:lnB>
+                      <a:noFill/>
+                    </a:lnB>
+                    <a:solidFill>
+                      <a:srgbClr val="FFFFFF"/>
+                    </a:solidFill>
+                  </a:tcPr>
+                </a:tc>
+                <a:extLst>
+                  <a:ext uri="{0D108BD9-81ED-4DB2-BD59-A6C34878D82A}">
+                    <a16:rowId xmlns:a16="http://schemas.microsoft.com/office/drawing/2014/main" val="2682225101"/>
+                  </a:ext>
+                </a:extLst>
+              </a:tr>
+              <a:tr h="376703">
+                <a:tc>
+                  <a:txBody>
+                    <a:bodyPr/>
+                    <a:lstStyle/>
+                    <a:p>
+                      <a:r>
+                        <a:rPr lang="af-ZA" sz="1100" b="0" dirty="0">
+                          <a:effectLst/>
+                          <a:latin typeface="Consolas" panose="020B0609020204030204" pitchFamily="49" charset="0"/>
+                        </a:rPr>
+                        <a:t>transport input ssh</a:t>
+                      </a:r>
+                    </a:p>
+                  </a:txBody>
+                  <a:tcPr marL="56757" marR="94594" marT="59121" marB="59121" anchor="ctr">
+                    <a:lnL>
+                      <a:noFill/>
+                    </a:lnL>
+                    <a:lnR>
+                      <a:noFill/>
+                    </a:lnR>
+                    <a:lnT>
+                      <a:noFill/>
+                    </a:lnT>
+                    <a:lnB>
+                      <a:noFill/>
+                    </a:lnB>
+                    <a:solidFill>
+                      <a:srgbClr val="FFFFFF"/>
+                    </a:solidFill>
+                  </a:tcPr>
+                </a:tc>
+                <a:tc>
+                  <a:txBody>
+                    <a:bodyPr/>
+                    <a:lstStyle/>
+                    <a:p>
+                      <a:r>
+                        <a:rPr lang="ru-RU" sz="1100" b="0">
+                          <a:effectLst/>
+                          <a:latin typeface="quote-cjk-patch"/>
+                        </a:rPr>
+                        <a:t>разрешить на VTY-линиях только SSH (telnet запрещён)</a:t>
+                      </a:r>
+                    </a:p>
+                  </a:txBody>
+                  <a:tcPr marL="94594" marR="56757" marT="59121" marB="59121" anchor="ctr">
+                    <a:lnL>
+                      <a:noFill/>
+                    </a:lnL>
+                    <a:lnR>
+                      <a:noFill/>
+                    </a:lnR>
+                    <a:lnT>
+                      <a:noFill/>
+                    </a:lnT>
+                    <a:lnB>
+                      <a:noFill/>
+                    </a:lnB>
+                    <a:solidFill>
+                      <a:srgbClr val="FFFFFF"/>
+                    </a:solidFill>
+                  </a:tcPr>
+                </a:tc>
+                <a:extLst>
+                  <a:ext uri="{0D108BD9-81ED-4DB2-BD59-A6C34878D82A}">
+                    <a16:rowId xmlns:a16="http://schemas.microsoft.com/office/drawing/2014/main" val="273959981"/>
+                  </a:ext>
+                </a:extLst>
+              </a:tr>
+              <a:tr h="656318">
+                <a:tc>
+                  <a:txBody>
+                    <a:bodyPr/>
+                    <a:lstStyle/>
+                    <a:p>
+                      <a:r>
+                        <a:rPr lang="af-ZA" sz="1100" b="0" dirty="0">
+                          <a:effectLst/>
+                          <a:latin typeface="Consolas" panose="020B0609020204030204" pitchFamily="49" charset="0"/>
+                        </a:rPr>
+                        <a:t>login local</a:t>
+                      </a:r>
+                    </a:p>
+                  </a:txBody>
+                  <a:tcPr marL="56757" marR="94594" marT="59121" marB="59121" anchor="ctr">
+                    <a:lnL>
+                      <a:noFill/>
+                    </a:lnL>
+                    <a:lnR>
+                      <a:noFill/>
+                    </a:lnR>
+                    <a:lnT>
+                      <a:noFill/>
+                    </a:lnT>
+                    <a:lnB>
+                      <a:noFill/>
+                    </a:lnB>
+                    <a:solidFill>
+                      <a:srgbClr val="FFFFFF"/>
+                    </a:solidFill>
+                  </a:tcPr>
+                </a:tc>
+                <a:tc>
+                  <a:txBody>
+                    <a:bodyPr/>
+                    <a:lstStyle/>
+                    <a:p>
+                      <a:r>
+                        <a:rPr lang="ru-RU" sz="1100" b="0" dirty="0">
+                          <a:effectLst/>
+                          <a:latin typeface="quote-cjk-patch"/>
+                        </a:rPr>
+                        <a:t>аутентификация по локальной базе пользователей (созданной ранее через </a:t>
+                      </a:r>
+                      <a:r>
+                        <a:rPr lang="ru-RU" sz="1100" b="0" dirty="0" err="1">
+                          <a:effectLst/>
+                          <a:latin typeface="quote-cjk-patch"/>
+                        </a:rPr>
+                        <a:t>username</a:t>
+                      </a:r>
+                      <a:r>
+                        <a:rPr lang="ru-RU" sz="1100" b="0" dirty="0">
+                          <a:effectLst/>
+                          <a:latin typeface="quote-cjk-patch"/>
+                        </a:rPr>
+                        <a:t>)</a:t>
+                      </a:r>
+                    </a:p>
+                  </a:txBody>
+                  <a:tcPr marL="94594" marR="56757" marT="59121" marB="59121" anchor="ctr">
+                    <a:lnL>
+                      <a:noFill/>
+                    </a:lnL>
+                    <a:lnR>
+                      <a:noFill/>
+                    </a:lnR>
+                    <a:lnT>
+                      <a:noFill/>
+                    </a:lnT>
+                    <a:lnB>
+                      <a:noFill/>
+                    </a:lnB>
+                    <a:solidFill>
+                      <a:srgbClr val="FFFFFF"/>
+                    </a:solidFill>
+                  </a:tcPr>
+                </a:tc>
+                <a:extLst>
+                  <a:ext uri="{0D108BD9-81ED-4DB2-BD59-A6C34878D82A}">
+                    <a16:rowId xmlns:a16="http://schemas.microsoft.com/office/drawing/2014/main" val="3212072247"/>
+                  </a:ext>
+                </a:extLst>
+              </a:tr>
+            </a:tbl>
+          </a:graphicData>
+        </a:graphic>
+      </p:graphicFrame>
+    </p:spTree>
+    <p:extLst>
+      <p:ext uri="{BB962C8B-B14F-4D97-AF65-F5344CB8AC3E}">
+        <p14:creationId xmlns:p14="http://schemas.microsoft.com/office/powerpoint/2010/main" val="2944597845"/>
+      </p:ext>
+    </p:extLst>
+  </p:cSld>
+  <p:clrMapOvr>
+    <a:masterClrMapping/>
+  </p:clrMapOvr>
+  <p:timing>
+    <p:tnLst>
+      <p:par>
+        <p:cTn id="1" dur="indefinite" restart="never" nodeType="tmRoot"/>
+      </p:par>
+    </p:tnLst>
+  </p:timing>
+</p:sld>
+</file>
+
+<file path=ppt/slides/slide4.xml><?xml version="1.0" encoding="utf-8"?>
+<p:sld xmlns:a="http://schemas.openxmlformats.org/drawingml/2006/main" xmlns:r="http://schemas.openxmlformats.org/officeDocument/2006/relationships" xmlns:p="http://schemas.openxmlformats.org/presentationml/2006/main">
+  <p:cSld>
+    <p:spTree>
+      <p:nvGrpSpPr>
+        <p:cNvPr id="1" name=""/>
+        <p:cNvGrpSpPr/>
+        <p:nvPr/>
+      </p:nvGrpSpPr>
+      <p:grpSpPr>
+        <a:xfrm>
+          <a:off x="0" y="0"/>
+          <a:ext cx="0" cy="0"/>
+          <a:chOff x="0" y="0"/>
+          <a:chExt cx="0" cy="0"/>
+        </a:xfrm>
+      </p:grpSpPr>
+      <p:sp>
+        <p:nvSpPr>
+          <p:cNvPr id="4" name="Заголовок 3"/>
+          <p:cNvSpPr txBox="1">
+            <a:spLocks/>
+          </p:cNvSpPr>
+          <p:nvPr/>
+        </p:nvSpPr>
+        <p:spPr>
+          <a:xfrm>
+            <a:off x="218341" y="395654"/>
+            <a:ext cx="11755315" cy="1644162"/>
+          </a:xfrm>
+          <a:prstGeom prst="rect">
+            <a:avLst/>
+          </a:prstGeom>
+          <a:solidFill>
+            <a:schemeClr val="tx1"/>
+          </a:solidFill>
+          <a:ln>
+            <a:solidFill>
+              <a:schemeClr val="tx1"/>
+            </a:solidFill>
+          </a:ln>
+        </p:spPr>
+        <p:txBody>
+          <a:bodyPr vert="horz" lIns="91440" tIns="45720" rIns="91440" bIns="45720" rtlCol="0" anchor="ctr">
+            <a:normAutofit/>
+          </a:bodyPr>
+          <a:lstStyle>
+            <a:lvl1pPr algn="l" defTabSz="914400" rtl="0" eaLnBrk="1" latinLnBrk="0" hangingPunct="1">
+              <a:lnSpc>
+                <a:spcPct val="90000"/>
+              </a:lnSpc>
+              <a:spcBef>
+                <a:spcPct val="0"/>
+              </a:spcBef>
+              <a:buNone/>
+              <a:defRPr sz="4400" kern="1200">
+                <a:solidFill>
+                  <a:schemeClr val="tx1"/>
+                </a:solidFill>
+                <a:latin typeface="+mj-lt"/>
+                <a:ea typeface="+mj-ea"/>
+                <a:cs typeface="+mj-cs"/>
+              </a:defRPr>
+            </a:lvl1pPr>
+          </a:lstStyle>
+          <a:p>
+            <a:r>
+              <a:rPr lang="en-US" sz="2400" dirty="0">
+                <a:solidFill>
+                  <a:schemeClr val="bg1"/>
+                </a:solidFill>
+                <a:latin typeface="Consolas" panose="020B0609020204030204" pitchFamily="49" charset="0"/>
+              </a:rPr>
+              <a:t>S1#sh </a:t>
+            </a:r>
+            <a:r>
+              <a:rPr lang="en-US" sz="2400" dirty="0" err="1">
+                <a:solidFill>
+                  <a:schemeClr val="bg1"/>
+                </a:solidFill>
+                <a:latin typeface="Consolas" panose="020B0609020204030204" pitchFamily="49" charset="0"/>
+              </a:rPr>
+              <a:t>ip</a:t>
+            </a:r>
+            <a:r>
+              <a:rPr lang="en-US" sz="2400" dirty="0">
+                <a:solidFill>
+                  <a:schemeClr val="bg1"/>
+                </a:solidFill>
+                <a:latin typeface="Consolas" panose="020B0609020204030204" pitchFamily="49" charset="0"/>
+              </a:rPr>
+              <a:t> </a:t>
+            </a:r>
+            <a:r>
+              <a:rPr lang="en-US" sz="2400" dirty="0" err="1">
+                <a:solidFill>
+                  <a:schemeClr val="bg1"/>
+                </a:solidFill>
+                <a:latin typeface="Consolas" panose="020B0609020204030204" pitchFamily="49" charset="0"/>
+              </a:rPr>
+              <a:t>ssh</a:t>
+            </a:r>
+            <a:endParaRPr lang="en-US" sz="2400" dirty="0">
+              <a:solidFill>
+                <a:schemeClr val="bg1"/>
+              </a:solidFill>
+              <a:latin typeface="Consolas" panose="020B0609020204030204" pitchFamily="49" charset="0"/>
+            </a:endParaRPr>
+          </a:p>
+          <a:p>
+            <a:r>
+              <a:rPr lang="en-US" sz="2400" dirty="0">
+                <a:solidFill>
+                  <a:schemeClr val="bg1"/>
+                </a:solidFill>
+                <a:latin typeface="Consolas" panose="020B0609020204030204" pitchFamily="49" charset="0"/>
+              </a:rPr>
+              <a:t>SSH Enabled - version 1.99</a:t>
+            </a:r>
+          </a:p>
+          <a:p>
+            <a:r>
+              <a:rPr lang="en-US" sz="2400" dirty="0">
+                <a:solidFill>
+                  <a:schemeClr val="bg1"/>
+                </a:solidFill>
+                <a:latin typeface="Consolas" panose="020B0609020204030204" pitchFamily="49" charset="0"/>
+              </a:rPr>
+              <a:t>Authentication timeout: 120 secs; Authentication retries: </a:t>
+            </a:r>
+            <a:r>
+              <a:rPr lang="en-US" sz="2400" dirty="0" smtClean="0">
+                <a:solidFill>
+                  <a:schemeClr val="bg1"/>
+                </a:solidFill>
+                <a:latin typeface="Consolas" panose="020B0609020204030204" pitchFamily="49" charset="0"/>
+              </a:rPr>
+              <a:t>3</a:t>
+            </a:r>
+            <a:endParaRPr lang="ru-RU" sz="2400" dirty="0">
+              <a:solidFill>
+                <a:schemeClr val="bg1"/>
+              </a:solidFill>
+              <a:latin typeface="Consolas" panose="020B0609020204030204" pitchFamily="49" charset="0"/>
+            </a:endParaRPr>
+          </a:p>
+        </p:txBody>
+      </p:sp>
+      <p:sp>
+        <p:nvSpPr>
+          <p:cNvPr id="5" name="Заголовок 3"/>
+          <p:cNvSpPr txBox="1">
+            <a:spLocks/>
+          </p:cNvSpPr>
+          <p:nvPr/>
+        </p:nvSpPr>
+        <p:spPr>
+          <a:xfrm>
+            <a:off x="218340" y="2209800"/>
+            <a:ext cx="11755315" cy="4533900"/>
+          </a:xfrm>
+          <a:prstGeom prst="rect">
+            <a:avLst/>
+          </a:prstGeom>
+          <a:solidFill>
+            <a:schemeClr val="tx1"/>
+          </a:solidFill>
+          <a:ln>
+            <a:solidFill>
+              <a:schemeClr val="tx1"/>
+            </a:solidFill>
+          </a:ln>
+        </p:spPr>
+        <p:txBody>
+          <a:bodyPr vert="horz" lIns="91440" tIns="45720" rIns="91440" bIns="45720" rtlCol="0" anchor="ctr">
+            <a:normAutofit/>
+          </a:bodyPr>
+          <a:lstStyle>
+            <a:lvl1pPr algn="l" defTabSz="914400" rtl="0" eaLnBrk="1" latinLnBrk="0" hangingPunct="1">
+              <a:lnSpc>
+                <a:spcPct val="90000"/>
+              </a:lnSpc>
+              <a:spcBef>
+                <a:spcPct val="0"/>
+              </a:spcBef>
+              <a:buNone/>
+              <a:defRPr sz="4400" kern="1200">
+                <a:solidFill>
+                  <a:schemeClr val="tx1"/>
+                </a:solidFill>
+                <a:latin typeface="+mj-lt"/>
+                <a:ea typeface="+mj-ea"/>
+                <a:cs typeface="+mj-cs"/>
+              </a:defRPr>
+            </a:lvl1pPr>
+          </a:lstStyle>
+          <a:p>
+            <a:r>
+              <a:rPr lang="en-US" sz="2400" dirty="0">
+                <a:solidFill>
+                  <a:schemeClr val="bg1"/>
+                </a:solidFill>
+                <a:latin typeface="Consolas" panose="020B0609020204030204" pitchFamily="49" charset="0"/>
+              </a:rPr>
+              <a:t>C:\&gt;</a:t>
+            </a:r>
+          </a:p>
+          <a:p>
+            <a:r>
+              <a:rPr lang="en-US" sz="2400" dirty="0">
+                <a:solidFill>
+                  <a:schemeClr val="bg1"/>
+                </a:solidFill>
+                <a:latin typeface="Consolas" panose="020B0609020204030204" pitchFamily="49" charset="0"/>
+              </a:rPr>
+              <a:t>C:\&gt;telnet 192.168.1.2</a:t>
+            </a:r>
+          </a:p>
+          <a:p>
+            <a:r>
+              <a:rPr lang="en-US" sz="2400" dirty="0">
+                <a:solidFill>
+                  <a:schemeClr val="bg1"/>
+                </a:solidFill>
+                <a:latin typeface="Consolas" panose="020B0609020204030204" pitchFamily="49" charset="0"/>
+              </a:rPr>
+              <a:t>Trying 192.168.1.2 ...Open</a:t>
+            </a:r>
+          </a:p>
+          <a:p>
+            <a:endParaRPr lang="en-US" sz="2400" dirty="0">
+              <a:solidFill>
+                <a:schemeClr val="bg1"/>
+              </a:solidFill>
+              <a:latin typeface="Consolas" panose="020B0609020204030204" pitchFamily="49" charset="0"/>
+            </a:endParaRPr>
+          </a:p>
+          <a:p>
+            <a:r>
+              <a:rPr lang="en-US" sz="2400" dirty="0">
+                <a:solidFill>
+                  <a:schemeClr val="bg1"/>
+                </a:solidFill>
+                <a:latin typeface="Consolas" panose="020B0609020204030204" pitchFamily="49" charset="0"/>
+              </a:rPr>
+              <a:t>[Connection to 192.168.1.2 closed by foreign host]</a:t>
+            </a:r>
+          </a:p>
+          <a:p>
+            <a:endParaRPr lang="en-US" sz="2400" dirty="0">
+              <a:solidFill>
+                <a:schemeClr val="bg1"/>
+              </a:solidFill>
+              <a:latin typeface="Consolas" panose="020B0609020204030204" pitchFamily="49" charset="0"/>
+            </a:endParaRPr>
+          </a:p>
+          <a:p>
+            <a:r>
+              <a:rPr lang="en-US" sz="2400" dirty="0">
+                <a:solidFill>
+                  <a:schemeClr val="bg1"/>
+                </a:solidFill>
+                <a:latin typeface="Consolas" panose="020B0609020204030204" pitchFamily="49" charset="0"/>
+              </a:rPr>
+              <a:t>C:\&gt;ssh -l admin 192.168.1.2</a:t>
+            </a:r>
+          </a:p>
+          <a:p>
+            <a:endParaRPr lang="en-US" sz="2400" dirty="0">
+              <a:solidFill>
+                <a:schemeClr val="bg1"/>
+              </a:solidFill>
+              <a:latin typeface="Consolas" panose="020B0609020204030204" pitchFamily="49" charset="0"/>
+            </a:endParaRPr>
+          </a:p>
+          <a:p>
+            <a:r>
+              <a:rPr lang="en-US" sz="2400" dirty="0">
+                <a:solidFill>
+                  <a:schemeClr val="bg1"/>
+                </a:solidFill>
+                <a:latin typeface="Consolas" panose="020B0609020204030204" pitchFamily="49" charset="0"/>
+              </a:rPr>
+              <a:t>Password: </a:t>
+            </a:r>
+          </a:p>
+          <a:p>
+            <a:endParaRPr lang="en-US" sz="2400" dirty="0">
+              <a:solidFill>
+                <a:schemeClr val="bg1"/>
+              </a:solidFill>
+              <a:latin typeface="Consolas" panose="020B0609020204030204" pitchFamily="49" charset="0"/>
+            </a:endParaRPr>
+          </a:p>
+          <a:p>
+            <a:endParaRPr lang="en-US" sz="2400" dirty="0">
+              <a:solidFill>
+                <a:schemeClr val="bg1"/>
+              </a:solidFill>
+              <a:latin typeface="Consolas" panose="020B0609020204030204" pitchFamily="49" charset="0"/>
+            </a:endParaRPr>
+          </a:p>
+          <a:p>
+            <a:endParaRPr lang="en-US" sz="2400" dirty="0">
+              <a:solidFill>
+                <a:schemeClr val="bg1"/>
+              </a:solidFill>
+              <a:latin typeface="Consolas" panose="020B0609020204030204" pitchFamily="49" charset="0"/>
+            </a:endParaRPr>
+          </a:p>
+          <a:p>
+            <a:r>
+              <a:rPr lang="en-US" sz="2400" dirty="0">
+                <a:solidFill>
+                  <a:schemeClr val="bg1"/>
+                </a:solidFill>
+                <a:latin typeface="Consolas" panose="020B0609020204030204" pitchFamily="49" charset="0"/>
+              </a:rPr>
+              <a:t>S1#</a:t>
+            </a:r>
+            <a:endParaRPr lang="ru-RU" sz="2400" dirty="0">
+              <a:solidFill>
+                <a:schemeClr val="bg1"/>
+              </a:solidFill>
+              <a:latin typeface="Consolas" panose="020B0609020204030204" pitchFamily="49" charset="0"/>
+            </a:endParaRPr>
+          </a:p>
+        </p:txBody>
+      </p:sp>
+    </p:spTree>
+    <p:extLst>
+      <p:ext uri="{BB962C8B-B14F-4D97-AF65-F5344CB8AC3E}">
+        <p14:creationId xmlns:p14="http://schemas.microsoft.com/office/powerpoint/2010/main" val="318827733"/>
+      </p:ext>
+    </p:extLst>
+  </p:cSld>
+  <p:clrMapOvr>
+    <a:masterClrMapping/>
+  </p:clrMapOvr>
+  <p:timing>
+    <p:tnLst>
+      <p:par>
+        <p:cTn id="1" dur="indefinite" restart="never" nodeType="tmRoot"/>
+      </p:par>
+    </p:tnLst>
+  </p:timing>
+</p:sld>
+</file>
+
+<file path=ppt/slides/slide5.xml><?xml version="1.0" encoding="utf-8"?>
+<p:sld xmlns:a="http://schemas.openxmlformats.org/drawingml/2006/main" xmlns:r="http://schemas.openxmlformats.org/officeDocument/2006/relationships" xmlns:p="http://schemas.openxmlformats.org/presentationml/2006/main">
+  <p:cSld>
+    <p:spTree>
+      <p:nvGrpSpPr>
+        <p:cNvPr id="1" name=""/>
+        <p:cNvGrpSpPr/>
+        <p:nvPr/>
+      </p:nvGrpSpPr>
+      <p:grpSpPr>
+        <a:xfrm>
+          <a:off x="0" y="0"/>
+          <a:ext cx="0" cy="0"/>
+          <a:chOff x="0" y="0"/>
+          <a:chExt cx="0" cy="0"/>
+        </a:xfrm>
+      </p:grpSpPr>
+      <p:sp>
+        <p:nvSpPr>
+          <p:cNvPr id="4" name="Заголовок 3"/>
+          <p:cNvSpPr txBox="1">
+            <a:spLocks/>
+          </p:cNvSpPr>
+          <p:nvPr/>
+        </p:nvSpPr>
+        <p:spPr>
+          <a:xfrm>
+            <a:off x="218341" y="589085"/>
+            <a:ext cx="11755315" cy="817684"/>
+          </a:xfrm>
+          <a:prstGeom prst="rect">
+            <a:avLst/>
+          </a:prstGeom>
+          <a:solidFill>
+            <a:schemeClr val="tx1"/>
+          </a:solidFill>
+          <a:ln>
+            <a:solidFill>
+              <a:schemeClr val="tx1"/>
+            </a:solidFill>
+          </a:ln>
+        </p:spPr>
+        <p:txBody>
+          <a:bodyPr vert="horz" lIns="91440" tIns="45720" rIns="91440" bIns="45720" rtlCol="0" anchor="ctr">
+            <a:normAutofit/>
+          </a:bodyPr>
+          <a:lstStyle>
+            <a:lvl1pPr algn="l" defTabSz="914400" rtl="0" eaLnBrk="1" latinLnBrk="0" hangingPunct="1">
+              <a:lnSpc>
+                <a:spcPct val="90000"/>
+              </a:lnSpc>
+              <a:spcBef>
+                <a:spcPct val="0"/>
+              </a:spcBef>
+              <a:buNone/>
+              <a:defRPr sz="4400" kern="1200">
+                <a:solidFill>
+                  <a:schemeClr val="tx1"/>
+                </a:solidFill>
+                <a:latin typeface="+mj-lt"/>
+                <a:ea typeface="+mj-ea"/>
+                <a:cs typeface="+mj-cs"/>
+              </a:defRPr>
+            </a:lvl1pPr>
+          </a:lstStyle>
+          <a:p>
+            <a:r>
+              <a:rPr lang="en-US" sz="2400" dirty="0">
+                <a:solidFill>
+                  <a:schemeClr val="bg1"/>
+                </a:solidFill>
+                <a:latin typeface="Consolas" panose="020B0609020204030204" pitchFamily="49" charset="0"/>
+              </a:rPr>
+              <a:t>Router(</a:t>
+            </a:r>
+            <a:r>
+              <a:rPr lang="en-US" sz="2400" dirty="0" err="1">
+                <a:solidFill>
+                  <a:schemeClr val="bg1"/>
+                </a:solidFill>
+                <a:latin typeface="Consolas" panose="020B0609020204030204" pitchFamily="49" charset="0"/>
+              </a:rPr>
+              <a:t>config</a:t>
+            </a:r>
+            <a:r>
+              <a:rPr lang="en-US" sz="2400" dirty="0">
+                <a:solidFill>
+                  <a:schemeClr val="bg1"/>
+                </a:solidFill>
+                <a:latin typeface="Consolas" panose="020B0609020204030204" pitchFamily="49" charset="0"/>
+              </a:rPr>
+              <a:t>-if)# </a:t>
+            </a:r>
+            <a:r>
+              <a:rPr lang="en-US" sz="2400" dirty="0" err="1">
+                <a:solidFill>
+                  <a:schemeClr val="bg1"/>
+                </a:solidFill>
+                <a:latin typeface="Consolas" panose="020B0609020204030204" pitchFamily="49" charset="0"/>
+              </a:rPr>
+              <a:t>ip</a:t>
+            </a:r>
+            <a:r>
+              <a:rPr lang="en-US" sz="2400" dirty="0">
+                <a:solidFill>
+                  <a:schemeClr val="bg1"/>
+                </a:solidFill>
+                <a:latin typeface="Consolas" panose="020B0609020204030204" pitchFamily="49" charset="0"/>
+              </a:rPr>
+              <a:t> helper-address &lt;IP_</a:t>
+            </a:r>
+            <a:r>
+              <a:rPr lang="ru-RU" sz="2400" dirty="0">
+                <a:solidFill>
+                  <a:schemeClr val="bg1"/>
+                </a:solidFill>
+                <a:latin typeface="Consolas" panose="020B0609020204030204" pitchFamily="49" charset="0"/>
+              </a:rPr>
+              <a:t>СЕРВЕРА_НАЗНАЧЕНИЯ&gt;</a:t>
+            </a:r>
+          </a:p>
+        </p:txBody>
+      </p:sp>
+      <p:sp>
+        <p:nvSpPr>
+          <p:cNvPr id="3" name="TextBox 2"/>
+          <p:cNvSpPr txBox="1"/>
+          <p:nvPr/>
+        </p:nvSpPr>
+        <p:spPr>
+          <a:xfrm>
+            <a:off x="545123" y="105508"/>
+            <a:ext cx="5787354" cy="369332"/>
+          </a:xfrm>
+          <a:prstGeom prst="rect">
+            <a:avLst/>
+          </a:prstGeom>
+          <a:noFill/>
+        </p:spPr>
+        <p:txBody>
+          <a:bodyPr wrap="none" rtlCol="0">
+            <a:spAutoFit/>
+          </a:bodyPr>
+          <a:lstStyle/>
+          <a:p>
+            <a:r>
+              <a:rPr lang="ru-RU" dirty="0" smtClean="0"/>
+              <a:t>Настройка агента ретрансляции </a:t>
+            </a:r>
+            <a:r>
+              <a:rPr lang="en-US" dirty="0" smtClean="0"/>
+              <a:t>DHCP (DHCP Relay Agent)</a:t>
+            </a:r>
+            <a:endParaRPr lang="ru-RU" dirty="0"/>
+          </a:p>
+        </p:txBody>
+      </p:sp>
+      <p:sp>
+        <p:nvSpPr>
+          <p:cNvPr id="6" name="Заголовок 3"/>
+          <p:cNvSpPr txBox="1">
+            <a:spLocks/>
+          </p:cNvSpPr>
+          <p:nvPr/>
+        </p:nvSpPr>
+        <p:spPr>
+          <a:xfrm>
+            <a:off x="218341" y="2004591"/>
+            <a:ext cx="11755315" cy="817684"/>
+          </a:xfrm>
+          <a:prstGeom prst="rect">
+            <a:avLst/>
+          </a:prstGeom>
+          <a:solidFill>
+            <a:schemeClr val="tx1"/>
+          </a:solidFill>
+          <a:ln>
+            <a:solidFill>
+              <a:schemeClr val="tx1"/>
+            </a:solidFill>
+          </a:ln>
+        </p:spPr>
+        <p:txBody>
+          <a:bodyPr vert="horz" lIns="91440" tIns="45720" rIns="91440" bIns="45720" rtlCol="0" anchor="ctr">
+            <a:normAutofit/>
+          </a:bodyPr>
+          <a:lstStyle>
+            <a:lvl1pPr algn="l" defTabSz="914400" rtl="0" eaLnBrk="1" latinLnBrk="0" hangingPunct="1">
+              <a:lnSpc>
+                <a:spcPct val="90000"/>
+              </a:lnSpc>
+              <a:spcBef>
+                <a:spcPct val="0"/>
+              </a:spcBef>
+              <a:buNone/>
+              <a:defRPr sz="4400" kern="1200">
+                <a:solidFill>
+                  <a:schemeClr val="tx1"/>
+                </a:solidFill>
+                <a:latin typeface="+mj-lt"/>
+                <a:ea typeface="+mj-ea"/>
+                <a:cs typeface="+mj-cs"/>
+              </a:defRPr>
+            </a:lvl1pPr>
+          </a:lstStyle>
+          <a:p>
+            <a:r>
+              <a:rPr lang="en-US" sz="2400" dirty="0">
+                <a:solidFill>
+                  <a:schemeClr val="bg1"/>
+                </a:solidFill>
+                <a:latin typeface="Consolas" panose="020B0609020204030204" pitchFamily="49" charset="0"/>
+              </a:rPr>
+              <a:t>Router(</a:t>
+            </a:r>
+            <a:r>
+              <a:rPr lang="en-US" sz="2400" dirty="0" err="1">
+                <a:solidFill>
+                  <a:schemeClr val="bg1"/>
+                </a:solidFill>
+                <a:latin typeface="Consolas" panose="020B0609020204030204" pitchFamily="49" charset="0"/>
+              </a:rPr>
+              <a:t>config</a:t>
+            </a:r>
+            <a:r>
+              <a:rPr lang="en-US" sz="2400" dirty="0">
+                <a:solidFill>
+                  <a:schemeClr val="bg1"/>
+                </a:solidFill>
+                <a:latin typeface="Consolas" panose="020B0609020204030204" pitchFamily="49" charset="0"/>
+              </a:rPr>
+              <a:t>-if)# </a:t>
+            </a:r>
+            <a:r>
+              <a:rPr lang="en-US" sz="2400" dirty="0" err="1">
+                <a:solidFill>
+                  <a:schemeClr val="bg1"/>
+                </a:solidFill>
+                <a:latin typeface="Consolas" panose="020B0609020204030204" pitchFamily="49" charset="0"/>
+              </a:rPr>
+              <a:t>ip</a:t>
+            </a:r>
+            <a:r>
+              <a:rPr lang="en-US" sz="2400" dirty="0">
+                <a:solidFill>
+                  <a:schemeClr val="bg1"/>
+                </a:solidFill>
+                <a:latin typeface="Consolas" panose="020B0609020204030204" pitchFamily="49" charset="0"/>
+              </a:rPr>
+              <a:t> address </a:t>
+            </a:r>
+            <a:r>
+              <a:rPr lang="en-US" sz="2400" dirty="0" err="1">
+                <a:solidFill>
+                  <a:schemeClr val="bg1"/>
+                </a:solidFill>
+                <a:latin typeface="Consolas" panose="020B0609020204030204" pitchFamily="49" charset="0"/>
+              </a:rPr>
+              <a:t>dhcp</a:t>
+            </a:r>
+            <a:endParaRPr lang="en-US" sz="2400" dirty="0">
+              <a:solidFill>
+                <a:schemeClr val="bg1"/>
+              </a:solidFill>
+              <a:latin typeface="Consolas" panose="020B0609020204030204" pitchFamily="49" charset="0"/>
+            </a:endParaRPr>
+          </a:p>
+        </p:txBody>
+      </p:sp>
+      <p:sp>
+        <p:nvSpPr>
+          <p:cNvPr id="7" name="TextBox 6"/>
+          <p:cNvSpPr txBox="1"/>
+          <p:nvPr/>
+        </p:nvSpPr>
+        <p:spPr>
+          <a:xfrm>
+            <a:off x="545123" y="1521014"/>
+            <a:ext cx="5953809" cy="369332"/>
+          </a:xfrm>
+          <a:prstGeom prst="rect">
+            <a:avLst/>
+          </a:prstGeom>
+          <a:noFill/>
+        </p:spPr>
+        <p:txBody>
+          <a:bodyPr wrap="none" rtlCol="0">
+            <a:spAutoFit/>
+          </a:bodyPr>
+          <a:lstStyle/>
+          <a:p>
+            <a:r>
+              <a:rPr lang="ru-RU" dirty="0"/>
+              <a:t>Получение адреса интерфейсом </a:t>
+            </a:r>
+            <a:r>
+              <a:rPr lang="ru-RU" dirty="0" smtClean="0"/>
+              <a:t>маршрутизатора</a:t>
+            </a:r>
+            <a:r>
+              <a:rPr lang="en-US" dirty="0" smtClean="0"/>
+              <a:t> </a:t>
+            </a:r>
+            <a:r>
+              <a:rPr lang="ru-RU" dirty="0" smtClean="0"/>
+              <a:t>по </a:t>
+            </a:r>
+            <a:r>
+              <a:rPr lang="en-US" dirty="0" smtClean="0"/>
+              <a:t>DCHP</a:t>
+            </a:r>
+            <a:endParaRPr lang="ru-RU" dirty="0"/>
+          </a:p>
+        </p:txBody>
+      </p:sp>
+      <p:sp>
+        <p:nvSpPr>
+          <p:cNvPr id="8" name="Заголовок 3"/>
+          <p:cNvSpPr txBox="1">
+            <a:spLocks/>
+          </p:cNvSpPr>
+          <p:nvPr/>
+        </p:nvSpPr>
+        <p:spPr>
+          <a:xfrm>
+            <a:off x="218341" y="3420096"/>
+            <a:ext cx="11755315" cy="3279641"/>
+          </a:xfrm>
+          <a:prstGeom prst="rect">
+            <a:avLst/>
+          </a:prstGeom>
+          <a:solidFill>
+            <a:schemeClr val="tx1"/>
+          </a:solidFill>
+          <a:ln>
+            <a:solidFill>
+              <a:schemeClr val="tx1"/>
+            </a:solidFill>
+          </a:ln>
+        </p:spPr>
+        <p:txBody>
+          <a:bodyPr vert="horz" lIns="91440" tIns="45720" rIns="91440" bIns="45720" rtlCol="0" anchor="ctr">
+            <a:normAutofit/>
+          </a:bodyPr>
+          <a:lstStyle>
+            <a:lvl1pPr algn="l" defTabSz="914400" rtl="0" eaLnBrk="1" latinLnBrk="0" hangingPunct="1">
+              <a:lnSpc>
+                <a:spcPct val="90000"/>
+              </a:lnSpc>
+              <a:spcBef>
+                <a:spcPct val="0"/>
+              </a:spcBef>
+              <a:buNone/>
+              <a:defRPr sz="4400" kern="1200">
+                <a:solidFill>
+                  <a:schemeClr val="tx1"/>
+                </a:solidFill>
+                <a:latin typeface="+mj-lt"/>
+                <a:ea typeface="+mj-ea"/>
+                <a:cs typeface="+mj-cs"/>
+              </a:defRPr>
+            </a:lvl1pPr>
+          </a:lstStyle>
+          <a:p>
+            <a:r>
+              <a:rPr lang="ru-RU" sz="2400" dirty="0">
+                <a:solidFill>
+                  <a:schemeClr val="bg1"/>
+                </a:solidFill>
+                <a:latin typeface="Consolas" panose="020B0609020204030204" pitchFamily="49" charset="0"/>
+              </a:rPr>
+              <a:t>! Исключение одного адреса или диапазона</a:t>
+            </a:r>
+          </a:p>
+          <a:p>
+            <a:r>
+              <a:rPr lang="en-US" sz="2400" dirty="0">
+                <a:solidFill>
+                  <a:schemeClr val="bg1"/>
+                </a:solidFill>
+                <a:latin typeface="Consolas" panose="020B0609020204030204" pitchFamily="49" charset="0"/>
+              </a:rPr>
+              <a:t>Router(</a:t>
+            </a:r>
+            <a:r>
+              <a:rPr lang="en-US" sz="2400" dirty="0" err="1">
+                <a:solidFill>
+                  <a:schemeClr val="bg1"/>
+                </a:solidFill>
+                <a:latin typeface="Consolas" panose="020B0609020204030204" pitchFamily="49" charset="0"/>
+              </a:rPr>
+              <a:t>config</a:t>
+            </a:r>
+            <a:r>
+              <a:rPr lang="en-US" sz="2400" dirty="0">
+                <a:solidFill>
+                  <a:schemeClr val="bg1"/>
+                </a:solidFill>
+                <a:latin typeface="Consolas" panose="020B0609020204030204" pitchFamily="49" charset="0"/>
+              </a:rPr>
+              <a:t>)# </a:t>
+            </a:r>
+            <a:r>
+              <a:rPr lang="en-US" sz="2400" dirty="0" err="1">
+                <a:solidFill>
+                  <a:schemeClr val="bg1"/>
+                </a:solidFill>
+                <a:latin typeface="Consolas" panose="020B0609020204030204" pitchFamily="49" charset="0"/>
+              </a:rPr>
+              <a:t>ip</a:t>
+            </a:r>
+            <a:r>
+              <a:rPr lang="en-US" sz="2400" dirty="0">
+                <a:solidFill>
+                  <a:schemeClr val="bg1"/>
+                </a:solidFill>
+                <a:latin typeface="Consolas" panose="020B0609020204030204" pitchFamily="49" charset="0"/>
+              </a:rPr>
+              <a:t> </a:t>
+            </a:r>
+            <a:r>
+              <a:rPr lang="en-US" sz="2400" dirty="0" err="1">
+                <a:solidFill>
+                  <a:schemeClr val="bg1"/>
+                </a:solidFill>
+                <a:latin typeface="Consolas" panose="020B0609020204030204" pitchFamily="49" charset="0"/>
+              </a:rPr>
+              <a:t>dhcp</a:t>
+            </a:r>
+            <a:r>
+              <a:rPr lang="en-US" sz="2400" dirty="0">
+                <a:solidFill>
+                  <a:schemeClr val="bg1"/>
+                </a:solidFill>
+                <a:latin typeface="Consolas" panose="020B0609020204030204" pitchFamily="49" charset="0"/>
+              </a:rPr>
+              <a:t> excluded-address </a:t>
+            </a:r>
+            <a:r>
+              <a:rPr lang="en-US" sz="2400" dirty="0" smtClean="0">
+                <a:solidFill>
+                  <a:schemeClr val="bg1"/>
+                </a:solidFill>
+                <a:latin typeface="Consolas" panose="020B0609020204030204" pitchFamily="49" charset="0"/>
+              </a:rPr>
+              <a:t>&lt;IP&gt;</a:t>
+            </a:r>
+            <a:endParaRPr lang="en-US" sz="2400" dirty="0">
+              <a:solidFill>
+                <a:schemeClr val="bg1"/>
+              </a:solidFill>
+              <a:latin typeface="Consolas" panose="020B0609020204030204" pitchFamily="49" charset="0"/>
+            </a:endParaRPr>
+          </a:p>
+          <a:p>
+            <a:r>
+              <a:rPr lang="en-US" sz="2400" dirty="0">
+                <a:solidFill>
+                  <a:schemeClr val="bg1"/>
+                </a:solidFill>
+                <a:latin typeface="Consolas" panose="020B0609020204030204" pitchFamily="49" charset="0"/>
+              </a:rPr>
+              <a:t>! </a:t>
+            </a:r>
+            <a:r>
+              <a:rPr lang="ru-RU" sz="2400" dirty="0">
+                <a:solidFill>
+                  <a:schemeClr val="bg1"/>
+                </a:solidFill>
+                <a:latin typeface="Consolas" panose="020B0609020204030204" pitchFamily="49" charset="0"/>
+              </a:rPr>
+              <a:t>Создание пула и параметров аренды</a:t>
+            </a:r>
+          </a:p>
+          <a:p>
+            <a:r>
+              <a:rPr lang="en-US" sz="2400" dirty="0">
+                <a:solidFill>
+                  <a:schemeClr val="bg1"/>
+                </a:solidFill>
+                <a:latin typeface="Consolas" panose="020B0609020204030204" pitchFamily="49" charset="0"/>
+              </a:rPr>
+              <a:t>Router(</a:t>
+            </a:r>
+            <a:r>
+              <a:rPr lang="en-US" sz="2400" dirty="0" err="1">
+                <a:solidFill>
+                  <a:schemeClr val="bg1"/>
+                </a:solidFill>
+                <a:latin typeface="Consolas" panose="020B0609020204030204" pitchFamily="49" charset="0"/>
+              </a:rPr>
+              <a:t>config</a:t>
+            </a:r>
+            <a:r>
+              <a:rPr lang="en-US" sz="2400" dirty="0">
+                <a:solidFill>
+                  <a:schemeClr val="bg1"/>
+                </a:solidFill>
+                <a:latin typeface="Consolas" panose="020B0609020204030204" pitchFamily="49" charset="0"/>
+              </a:rPr>
+              <a:t>)# </a:t>
+            </a:r>
+            <a:r>
+              <a:rPr lang="en-US" sz="2400" dirty="0" err="1">
+                <a:solidFill>
+                  <a:schemeClr val="bg1"/>
+                </a:solidFill>
+                <a:latin typeface="Consolas" panose="020B0609020204030204" pitchFamily="49" charset="0"/>
+              </a:rPr>
+              <a:t>ip</a:t>
+            </a:r>
+            <a:r>
+              <a:rPr lang="en-US" sz="2400" dirty="0">
+                <a:solidFill>
+                  <a:schemeClr val="bg1"/>
+                </a:solidFill>
+                <a:latin typeface="Consolas" panose="020B0609020204030204" pitchFamily="49" charset="0"/>
+              </a:rPr>
+              <a:t> </a:t>
+            </a:r>
+            <a:r>
+              <a:rPr lang="en-US" sz="2400" dirty="0" err="1">
+                <a:solidFill>
+                  <a:schemeClr val="bg1"/>
+                </a:solidFill>
+                <a:latin typeface="Consolas" panose="020B0609020204030204" pitchFamily="49" charset="0"/>
+              </a:rPr>
+              <a:t>dhcp</a:t>
+            </a:r>
+            <a:r>
+              <a:rPr lang="en-US" sz="2400" dirty="0">
+                <a:solidFill>
+                  <a:schemeClr val="bg1"/>
+                </a:solidFill>
+                <a:latin typeface="Consolas" panose="020B0609020204030204" pitchFamily="49" charset="0"/>
+              </a:rPr>
+              <a:t> pool &lt;</a:t>
+            </a:r>
+            <a:r>
+              <a:rPr lang="ru-RU" sz="2400" dirty="0">
+                <a:solidFill>
+                  <a:schemeClr val="bg1"/>
+                </a:solidFill>
+                <a:latin typeface="Consolas" panose="020B0609020204030204" pitchFamily="49" charset="0"/>
+              </a:rPr>
+              <a:t>ИМЯ_ПУЛА&gt;</a:t>
+            </a:r>
+          </a:p>
+          <a:p>
+            <a:r>
+              <a:rPr lang="en-US" sz="2400" dirty="0">
+                <a:solidFill>
+                  <a:schemeClr val="bg1"/>
+                </a:solidFill>
+                <a:latin typeface="Consolas" panose="020B0609020204030204" pitchFamily="49" charset="0"/>
+              </a:rPr>
+              <a:t>Router(</a:t>
+            </a:r>
+            <a:r>
+              <a:rPr lang="en-US" sz="2400" dirty="0" err="1">
+                <a:solidFill>
+                  <a:schemeClr val="bg1"/>
+                </a:solidFill>
+                <a:latin typeface="Consolas" panose="020B0609020204030204" pitchFamily="49" charset="0"/>
+              </a:rPr>
+              <a:t>dhcp-config</a:t>
+            </a:r>
+            <a:r>
+              <a:rPr lang="en-US" sz="2400" dirty="0">
+                <a:solidFill>
+                  <a:schemeClr val="bg1"/>
+                </a:solidFill>
+                <a:latin typeface="Consolas" panose="020B0609020204030204" pitchFamily="49" charset="0"/>
+              </a:rPr>
+              <a:t>)# network &lt;</a:t>
+            </a:r>
+            <a:r>
+              <a:rPr lang="ru-RU" sz="2400" dirty="0">
+                <a:solidFill>
+                  <a:schemeClr val="bg1"/>
+                </a:solidFill>
+                <a:latin typeface="Consolas" panose="020B0609020204030204" pitchFamily="49" charset="0"/>
+              </a:rPr>
+              <a:t>АДРЕС_СЕТИ&gt; &lt;МАСКА_ПОДСЕТИ&gt;</a:t>
+            </a:r>
+          </a:p>
+          <a:p>
+            <a:r>
+              <a:rPr lang="en-US" sz="2400" dirty="0">
+                <a:solidFill>
+                  <a:schemeClr val="bg1"/>
+                </a:solidFill>
+                <a:latin typeface="Consolas" panose="020B0609020204030204" pitchFamily="49" charset="0"/>
+              </a:rPr>
+              <a:t>Router(</a:t>
+            </a:r>
+            <a:r>
+              <a:rPr lang="en-US" sz="2400" dirty="0" err="1">
+                <a:solidFill>
+                  <a:schemeClr val="bg1"/>
+                </a:solidFill>
+                <a:latin typeface="Consolas" panose="020B0609020204030204" pitchFamily="49" charset="0"/>
+              </a:rPr>
+              <a:t>dhcp-config</a:t>
+            </a:r>
+            <a:r>
+              <a:rPr lang="en-US" sz="2400" dirty="0">
+                <a:solidFill>
+                  <a:schemeClr val="bg1"/>
+                </a:solidFill>
+                <a:latin typeface="Consolas" panose="020B0609020204030204" pitchFamily="49" charset="0"/>
+              </a:rPr>
+              <a:t>)# default-router &lt;IP_</a:t>
+            </a:r>
+            <a:r>
+              <a:rPr lang="ru-RU" sz="2400" dirty="0">
+                <a:solidFill>
+                  <a:schemeClr val="bg1"/>
+                </a:solidFill>
+                <a:latin typeface="Consolas" panose="020B0609020204030204" pitchFamily="49" charset="0"/>
+              </a:rPr>
+              <a:t>ШЛЮЗА&gt;</a:t>
+            </a:r>
+          </a:p>
+          <a:p>
+            <a:r>
+              <a:rPr lang="en-US" sz="2400" dirty="0">
+                <a:solidFill>
+                  <a:schemeClr val="bg1"/>
+                </a:solidFill>
+                <a:latin typeface="Consolas" panose="020B0609020204030204" pitchFamily="49" charset="0"/>
+              </a:rPr>
+              <a:t>Router(</a:t>
+            </a:r>
+            <a:r>
+              <a:rPr lang="en-US" sz="2400" dirty="0" err="1">
+                <a:solidFill>
+                  <a:schemeClr val="bg1"/>
+                </a:solidFill>
+                <a:latin typeface="Consolas" panose="020B0609020204030204" pitchFamily="49" charset="0"/>
+              </a:rPr>
+              <a:t>dhcp-config</a:t>
+            </a:r>
+            <a:r>
+              <a:rPr lang="en-US" sz="2400" dirty="0">
+                <a:solidFill>
+                  <a:schemeClr val="bg1"/>
+                </a:solidFill>
+                <a:latin typeface="Consolas" panose="020B0609020204030204" pitchFamily="49" charset="0"/>
+              </a:rPr>
+              <a:t>)# </a:t>
+            </a:r>
+            <a:r>
+              <a:rPr lang="en-US" sz="2400" dirty="0" err="1">
+                <a:solidFill>
+                  <a:schemeClr val="bg1"/>
+                </a:solidFill>
+                <a:latin typeface="Consolas" panose="020B0609020204030204" pitchFamily="49" charset="0"/>
+              </a:rPr>
+              <a:t>dns</a:t>
+            </a:r>
+            <a:r>
+              <a:rPr lang="en-US" sz="2400" dirty="0">
+                <a:solidFill>
+                  <a:schemeClr val="bg1"/>
+                </a:solidFill>
+                <a:latin typeface="Consolas" panose="020B0609020204030204" pitchFamily="49" charset="0"/>
+              </a:rPr>
+              <a:t>-server &lt;IP_DNS_1&gt; [&lt;IP_DNS_2</a:t>
+            </a:r>
+            <a:r>
+              <a:rPr lang="en-US" sz="2400" dirty="0" smtClean="0">
+                <a:solidFill>
+                  <a:schemeClr val="bg1"/>
+                </a:solidFill>
+                <a:latin typeface="Consolas" panose="020B0609020204030204" pitchFamily="49" charset="0"/>
+              </a:rPr>
+              <a:t>&gt;]c</a:t>
+            </a:r>
+            <a:endParaRPr lang="en-US" sz="2400" dirty="0">
+              <a:solidFill>
+                <a:schemeClr val="bg1"/>
+              </a:solidFill>
+              <a:latin typeface="Consolas" panose="020B0609020204030204" pitchFamily="49" charset="0"/>
+            </a:endParaRPr>
+          </a:p>
+        </p:txBody>
+      </p:sp>
+      <p:sp>
+        <p:nvSpPr>
+          <p:cNvPr id="9" name="TextBox 8"/>
+          <p:cNvSpPr txBox="1"/>
+          <p:nvPr/>
+        </p:nvSpPr>
+        <p:spPr>
+          <a:xfrm>
+            <a:off x="545123" y="2936520"/>
+            <a:ext cx="4219810" cy="369332"/>
+          </a:xfrm>
+          <a:prstGeom prst="rect">
+            <a:avLst/>
+          </a:prstGeom>
+          <a:noFill/>
+        </p:spPr>
+        <p:txBody>
+          <a:bodyPr wrap="none" rtlCol="0">
+            <a:spAutoFit/>
+          </a:bodyPr>
+          <a:lstStyle/>
+          <a:p>
+            <a:r>
+              <a:rPr lang="ru-RU" dirty="0"/>
+              <a:t>Конфигурация локального </a:t>
+            </a:r>
+            <a:r>
+              <a:rPr lang="af-ZA" dirty="0"/>
+              <a:t>DHCP-</a:t>
+            </a:r>
+            <a:r>
+              <a:rPr lang="ru-RU" dirty="0"/>
+              <a:t>сервера</a:t>
+            </a:r>
+          </a:p>
+        </p:txBody>
+      </p:sp>
+    </p:spTree>
+    <p:extLst>
+      <p:ext uri="{BB962C8B-B14F-4D97-AF65-F5344CB8AC3E}">
+        <p14:creationId xmlns:p14="http://schemas.microsoft.com/office/powerpoint/2010/main" val="2635534687"/>
+      </p:ext>
+    </p:extLst>
+  </p:cSld>
+  <p:clrMapOvr>
+    <a:masterClrMapping/>
+  </p:clrMapOvr>
+  <p:timing>
+    <p:tnLst>
+      <p:par>
+        <p:cTn id="1" dur="indefinite" restart="never" nodeType="tmRoot"/>
+      </p:par>
+    </p:tnLst>
+  </p:timing>
+</p:sld>
+</file>
+
+<file path=ppt/slides/slide6.xml><?xml version="1.0" encoding="utf-8"?>
+<p:sld xmlns:a="http://schemas.openxmlformats.org/drawingml/2006/main" xmlns:r="http://schemas.openxmlformats.org/officeDocument/2006/relationships" xmlns:p="http://schemas.openxmlformats.org/presentationml/2006/main">
+  <p:cSld>
+    <p:spTree>
+      <p:nvGrpSpPr>
+        <p:cNvPr id="1" name=""/>
+        <p:cNvGrpSpPr/>
+        <p:nvPr/>
+      </p:nvGrpSpPr>
+      <p:grpSpPr>
+        <a:xfrm>
+          <a:off x="0" y="0"/>
+          <a:ext cx="0" cy="0"/>
+          <a:chOff x="0" y="0"/>
+          <a:chExt cx="0" cy="0"/>
+        </a:xfrm>
+      </p:grpSpPr>
+      <p:sp>
+        <p:nvSpPr>
+          <p:cNvPr id="2" name="Заголовок 1"/>
+          <p:cNvSpPr>
+            <a:spLocks noGrp="1"/>
+          </p:cNvSpPr>
+          <p:nvPr>
+            <p:ph type="title"/>
+          </p:nvPr>
+        </p:nvSpPr>
+        <p:spPr>
+          <a:xfrm>
+            <a:off x="218342" y="206864"/>
+            <a:ext cx="10515600" cy="628406"/>
+          </a:xfrm>
+        </p:spPr>
+        <p:txBody>
+          <a:bodyPr>
+            <a:normAutofit fontScale="90000"/>
+          </a:bodyPr>
+          <a:lstStyle/>
+          <a:p>
+            <a:r>
+              <a:rPr lang="ru-RU" dirty="0" smtClean="0"/>
+              <a:t>Стандартные списки доступа</a:t>
+            </a:r>
+            <a:endParaRPr lang="ru-RU" dirty="0"/>
+          </a:p>
+        </p:txBody>
+      </p:sp>
+      <p:sp>
+        <p:nvSpPr>
+          <p:cNvPr id="4" name="Заголовок 3"/>
+          <p:cNvSpPr txBox="1">
+            <a:spLocks/>
+          </p:cNvSpPr>
+          <p:nvPr/>
+        </p:nvSpPr>
+        <p:spPr>
+          <a:xfrm>
+            <a:off x="218342" y="993532"/>
+            <a:ext cx="11755315" cy="5591906"/>
+          </a:xfrm>
+          <a:prstGeom prst="rect">
+            <a:avLst/>
+          </a:prstGeom>
+          <a:solidFill>
+            <a:schemeClr val="tx1"/>
+          </a:solidFill>
+          <a:ln>
+            <a:solidFill>
+              <a:schemeClr val="tx1"/>
+            </a:solidFill>
+          </a:ln>
+        </p:spPr>
+        <p:txBody>
+          <a:bodyPr vert="horz" lIns="91440" tIns="45720" rIns="91440" bIns="45720" rtlCol="0" anchor="ctr">
+            <a:normAutofit/>
+          </a:bodyPr>
+          <a:lstStyle>
+            <a:lvl1pPr algn="l" defTabSz="914400" rtl="0" eaLnBrk="1" latinLnBrk="0" hangingPunct="1">
+              <a:lnSpc>
+                <a:spcPct val="90000"/>
+              </a:lnSpc>
+              <a:spcBef>
+                <a:spcPct val="0"/>
+              </a:spcBef>
+              <a:buNone/>
+              <a:defRPr sz="4400" kern="1200">
+                <a:solidFill>
+                  <a:schemeClr val="tx1"/>
+                </a:solidFill>
+                <a:latin typeface="+mj-lt"/>
+                <a:ea typeface="+mj-ea"/>
+                <a:cs typeface="+mj-cs"/>
+              </a:defRPr>
+            </a:lvl1pPr>
+          </a:lstStyle>
+          <a:p>
+            <a:endParaRPr lang="ru-RU" sz="2400" dirty="0" smtClean="0">
+              <a:solidFill>
+                <a:schemeClr val="bg1"/>
+              </a:solidFill>
+              <a:latin typeface="Consolas" panose="020B0609020204030204" pitchFamily="49" charset="0"/>
+            </a:endParaRPr>
+          </a:p>
+          <a:p>
+            <a:r>
+              <a:rPr lang="en-US" sz="2400" dirty="0">
+                <a:solidFill>
+                  <a:schemeClr val="bg1"/>
+                </a:solidFill>
+                <a:latin typeface="Consolas" panose="020B0609020204030204" pitchFamily="49" charset="0"/>
+              </a:rPr>
+              <a:t>Router(</a:t>
+            </a:r>
+            <a:r>
+              <a:rPr lang="en-US" sz="2400" dirty="0" err="1">
+                <a:solidFill>
+                  <a:schemeClr val="bg1"/>
+                </a:solidFill>
+                <a:latin typeface="Consolas" panose="020B0609020204030204" pitchFamily="49" charset="0"/>
+              </a:rPr>
+              <a:t>config</a:t>
+            </a:r>
+            <a:r>
+              <a:rPr lang="en-US" sz="2400" dirty="0">
+                <a:solidFill>
+                  <a:schemeClr val="bg1"/>
+                </a:solidFill>
+                <a:latin typeface="Consolas" panose="020B0609020204030204" pitchFamily="49" charset="0"/>
+              </a:rPr>
+              <a:t>)#(</a:t>
+            </a:r>
+            <a:r>
+              <a:rPr lang="en-US" sz="2400" dirty="0" err="1">
+                <a:solidFill>
+                  <a:schemeClr val="bg1"/>
+                </a:solidFill>
+                <a:latin typeface="Consolas" panose="020B0609020204030204" pitchFamily="49" charset="0"/>
+              </a:rPr>
+              <a:t>config</a:t>
+            </a:r>
+            <a:r>
+              <a:rPr lang="en-US" sz="2400" dirty="0">
+                <a:solidFill>
+                  <a:schemeClr val="bg1"/>
+                </a:solidFill>
+                <a:latin typeface="Consolas" panose="020B0609020204030204" pitchFamily="49" charset="0"/>
+              </a:rPr>
+              <a:t>)#</a:t>
+            </a:r>
+            <a:r>
+              <a:rPr lang="en-US" sz="2400" dirty="0" err="1">
+                <a:solidFill>
+                  <a:schemeClr val="bg1"/>
+                </a:solidFill>
+                <a:latin typeface="Consolas" panose="020B0609020204030204" pitchFamily="49" charset="0"/>
+              </a:rPr>
+              <a:t>ip</a:t>
+            </a:r>
+            <a:r>
+              <a:rPr lang="en-US" sz="2400" dirty="0">
+                <a:solidFill>
+                  <a:schemeClr val="bg1"/>
+                </a:solidFill>
+                <a:latin typeface="Consolas" panose="020B0609020204030204" pitchFamily="49" charset="0"/>
+              </a:rPr>
+              <a:t> access-list standard ?</a:t>
+            </a:r>
+          </a:p>
+          <a:p>
+            <a:r>
+              <a:rPr lang="en-US" sz="2400" dirty="0">
+                <a:solidFill>
+                  <a:schemeClr val="bg1"/>
+                </a:solidFill>
+                <a:latin typeface="Consolas" panose="020B0609020204030204" pitchFamily="49" charset="0"/>
+              </a:rPr>
+              <a:t>  &lt;1-99&gt;       Standard IP access-list number</a:t>
+            </a:r>
+          </a:p>
+          <a:p>
+            <a:r>
+              <a:rPr lang="en-US" sz="2400" dirty="0">
+                <a:solidFill>
+                  <a:schemeClr val="bg1"/>
+                </a:solidFill>
+                <a:latin typeface="Consolas" panose="020B0609020204030204" pitchFamily="49" charset="0"/>
+              </a:rPr>
+              <a:t>  &lt;1300-1999&gt;  Standard IP access-list number (expanded range)</a:t>
+            </a:r>
+          </a:p>
+          <a:p>
+            <a:r>
+              <a:rPr lang="en-US" sz="2400" dirty="0">
+                <a:solidFill>
+                  <a:schemeClr val="bg1"/>
+                </a:solidFill>
+                <a:latin typeface="Consolas" panose="020B0609020204030204" pitchFamily="49" charset="0"/>
+              </a:rPr>
+              <a:t>  WORD         Access-list name</a:t>
+            </a:r>
+          </a:p>
+          <a:p>
+            <a:endParaRPr lang="ru-RU" sz="2400" dirty="0">
+              <a:solidFill>
+                <a:schemeClr val="bg1"/>
+              </a:solidFill>
+              <a:latin typeface="Consolas" panose="020B0609020204030204" pitchFamily="49" charset="0"/>
+            </a:endParaRPr>
+          </a:p>
+          <a:p>
+            <a:r>
+              <a:rPr lang="en-US" sz="2400" dirty="0" smtClean="0">
+                <a:solidFill>
+                  <a:schemeClr val="bg1"/>
+                </a:solidFill>
+                <a:latin typeface="Consolas" panose="020B0609020204030204" pitchFamily="49" charset="0"/>
+              </a:rPr>
+              <a:t>Router(</a:t>
+            </a:r>
+            <a:r>
+              <a:rPr lang="en-US" sz="2400" dirty="0" err="1" smtClean="0">
+                <a:solidFill>
+                  <a:schemeClr val="bg1"/>
+                </a:solidFill>
+                <a:latin typeface="Consolas" panose="020B0609020204030204" pitchFamily="49" charset="0"/>
+              </a:rPr>
+              <a:t>config</a:t>
+            </a:r>
+            <a:r>
+              <a:rPr lang="en-US" sz="2400" dirty="0">
+                <a:solidFill>
+                  <a:schemeClr val="bg1"/>
+                </a:solidFill>
+                <a:latin typeface="Consolas" panose="020B0609020204030204" pitchFamily="49" charset="0"/>
+              </a:rPr>
+              <a:t>)# </a:t>
+            </a:r>
+            <a:r>
+              <a:rPr lang="en-US" sz="2400" dirty="0" err="1">
+                <a:solidFill>
+                  <a:schemeClr val="bg1"/>
+                </a:solidFill>
+                <a:latin typeface="Consolas" panose="020B0609020204030204" pitchFamily="49" charset="0"/>
+              </a:rPr>
+              <a:t>ip</a:t>
+            </a:r>
+            <a:r>
+              <a:rPr lang="en-US" sz="2400" dirty="0">
+                <a:solidFill>
+                  <a:schemeClr val="bg1"/>
+                </a:solidFill>
+                <a:latin typeface="Consolas" panose="020B0609020204030204" pitchFamily="49" charset="0"/>
+              </a:rPr>
+              <a:t> access-list standard &lt;</a:t>
+            </a:r>
+            <a:r>
+              <a:rPr lang="ru-RU" sz="2400" dirty="0">
+                <a:solidFill>
+                  <a:schemeClr val="bg1"/>
+                </a:solidFill>
+                <a:latin typeface="Consolas" panose="020B0609020204030204" pitchFamily="49" charset="0"/>
+              </a:rPr>
+              <a:t>ИМЯ_ИЛИ_НОМЕР&gt;</a:t>
+            </a:r>
+          </a:p>
+          <a:p>
+            <a:r>
+              <a:rPr lang="en-US" sz="2400" dirty="0">
+                <a:solidFill>
+                  <a:schemeClr val="bg1"/>
+                </a:solidFill>
+                <a:latin typeface="Consolas" panose="020B0609020204030204" pitchFamily="49" charset="0"/>
+              </a:rPr>
+              <a:t>Router(</a:t>
+            </a:r>
+            <a:r>
+              <a:rPr lang="en-US" sz="2400" dirty="0" err="1">
+                <a:solidFill>
+                  <a:schemeClr val="bg1"/>
+                </a:solidFill>
+                <a:latin typeface="Consolas" panose="020B0609020204030204" pitchFamily="49" charset="0"/>
+              </a:rPr>
+              <a:t>config-std-nacl</a:t>
+            </a:r>
+            <a:r>
+              <a:rPr lang="en-US" sz="2400" dirty="0">
+                <a:solidFill>
+                  <a:schemeClr val="bg1"/>
+                </a:solidFill>
+                <a:latin typeface="Consolas" panose="020B0609020204030204" pitchFamily="49" charset="0"/>
+              </a:rPr>
+              <a:t>)# [permit | deny] &lt;IP_</a:t>
+            </a:r>
+            <a:r>
+              <a:rPr lang="ru-RU" sz="2400" dirty="0">
+                <a:solidFill>
+                  <a:schemeClr val="bg1"/>
+                </a:solidFill>
+                <a:latin typeface="Consolas" panose="020B0609020204030204" pitchFamily="49" charset="0"/>
+              </a:rPr>
+              <a:t>ИСТОЧНИКА&gt; &lt;</a:t>
+            </a:r>
+            <a:r>
+              <a:rPr lang="en-US" sz="2400" dirty="0">
+                <a:solidFill>
+                  <a:schemeClr val="bg1"/>
+                </a:solidFill>
+                <a:latin typeface="Consolas" panose="020B0609020204030204" pitchFamily="49" charset="0"/>
+              </a:rPr>
+              <a:t>WILDCARD_</a:t>
+            </a:r>
+            <a:r>
+              <a:rPr lang="ru-RU" sz="2400" dirty="0">
+                <a:solidFill>
+                  <a:schemeClr val="bg1"/>
+                </a:solidFill>
+                <a:latin typeface="Consolas" panose="020B0609020204030204" pitchFamily="49" charset="0"/>
+              </a:rPr>
+              <a:t>МАСКА&gt;</a:t>
+            </a:r>
+          </a:p>
+          <a:p>
+            <a:r>
+              <a:rPr lang="en-US" sz="2400" dirty="0">
+                <a:solidFill>
+                  <a:schemeClr val="bg1"/>
+                </a:solidFill>
+                <a:latin typeface="Consolas" panose="020B0609020204030204" pitchFamily="49" charset="0"/>
+              </a:rPr>
+              <a:t>Router(</a:t>
+            </a:r>
+            <a:r>
+              <a:rPr lang="en-US" sz="2400" dirty="0" err="1">
+                <a:solidFill>
+                  <a:schemeClr val="bg1"/>
+                </a:solidFill>
+                <a:latin typeface="Consolas" panose="020B0609020204030204" pitchFamily="49" charset="0"/>
+              </a:rPr>
+              <a:t>config-std-nacl</a:t>
+            </a:r>
+            <a:r>
+              <a:rPr lang="en-US" sz="2400" dirty="0">
+                <a:solidFill>
+                  <a:schemeClr val="bg1"/>
+                </a:solidFill>
+                <a:latin typeface="Consolas" panose="020B0609020204030204" pitchFamily="49" charset="0"/>
+              </a:rPr>
+              <a:t>)# [permit | deny] host &lt;IP_</a:t>
+            </a:r>
+            <a:r>
+              <a:rPr lang="ru-RU" sz="2400" dirty="0">
+                <a:solidFill>
+                  <a:schemeClr val="bg1"/>
+                </a:solidFill>
+                <a:latin typeface="Consolas" panose="020B0609020204030204" pitchFamily="49" charset="0"/>
+              </a:rPr>
+              <a:t>ИСТОЧНИКА&gt;</a:t>
+            </a:r>
+          </a:p>
+          <a:p>
+            <a:r>
+              <a:rPr lang="en-US" sz="2400" dirty="0">
+                <a:solidFill>
+                  <a:schemeClr val="bg1"/>
+                </a:solidFill>
+                <a:latin typeface="Consolas" panose="020B0609020204030204" pitchFamily="49" charset="0"/>
+              </a:rPr>
+              <a:t>Router(</a:t>
+            </a:r>
+            <a:r>
+              <a:rPr lang="en-US" sz="2400" dirty="0" err="1">
+                <a:solidFill>
+                  <a:schemeClr val="bg1"/>
+                </a:solidFill>
+                <a:latin typeface="Consolas" panose="020B0609020204030204" pitchFamily="49" charset="0"/>
+              </a:rPr>
+              <a:t>config-std-nacl</a:t>
+            </a:r>
+            <a:r>
+              <a:rPr lang="en-US" sz="2400" dirty="0">
+                <a:solidFill>
+                  <a:schemeClr val="bg1"/>
+                </a:solidFill>
+                <a:latin typeface="Consolas" panose="020B0609020204030204" pitchFamily="49" charset="0"/>
+              </a:rPr>
+              <a:t>)# [permit | deny] </a:t>
+            </a:r>
+            <a:r>
+              <a:rPr lang="en-US" sz="2400" dirty="0" smtClean="0">
+                <a:solidFill>
+                  <a:schemeClr val="bg1"/>
+                </a:solidFill>
+                <a:latin typeface="Consolas" panose="020B0609020204030204" pitchFamily="49" charset="0"/>
+              </a:rPr>
+              <a:t>any</a:t>
+            </a:r>
+          </a:p>
+          <a:p>
+            <a:endParaRPr lang="en-US" sz="2400" dirty="0">
+              <a:solidFill>
+                <a:schemeClr val="bg1"/>
+              </a:solidFill>
+              <a:latin typeface="Consolas" panose="020B0609020204030204" pitchFamily="49" charset="0"/>
+            </a:endParaRPr>
+          </a:p>
+          <a:p>
+            <a:r>
+              <a:rPr lang="af-ZA" sz="2400" dirty="0">
+                <a:solidFill>
+                  <a:schemeClr val="bg1"/>
+                </a:solidFill>
+                <a:latin typeface="Consolas" panose="020B0609020204030204" pitchFamily="49" charset="0"/>
+              </a:rPr>
+              <a:t>Router#show ip access-lists </a:t>
+            </a:r>
+            <a:r>
+              <a:rPr lang="en-US" sz="2400" dirty="0">
+                <a:solidFill>
+                  <a:schemeClr val="bg1"/>
+                </a:solidFill>
+                <a:latin typeface="Consolas" panose="020B0609020204030204" pitchFamily="49" charset="0"/>
+              </a:rPr>
+              <a:t>&lt;</a:t>
+            </a:r>
+            <a:r>
+              <a:rPr lang="ru-RU" sz="2400" dirty="0">
+                <a:solidFill>
+                  <a:schemeClr val="bg1"/>
+                </a:solidFill>
+                <a:latin typeface="Consolas" panose="020B0609020204030204" pitchFamily="49" charset="0"/>
+              </a:rPr>
+              <a:t>ИМЯ_ИЛИ_НОМЕР&gt;</a:t>
+            </a:r>
+          </a:p>
+          <a:p>
+            <a:endParaRPr lang="en-US" sz="2400" dirty="0">
+              <a:solidFill>
+                <a:schemeClr val="bg1"/>
+              </a:solidFill>
+              <a:latin typeface="Consolas" panose="020B0609020204030204" pitchFamily="49" charset="0"/>
+            </a:endParaRPr>
+          </a:p>
+        </p:txBody>
+      </p:sp>
+    </p:spTree>
+    <p:extLst>
+      <p:ext uri="{BB962C8B-B14F-4D97-AF65-F5344CB8AC3E}">
+        <p14:creationId xmlns:p14="http://schemas.microsoft.com/office/powerpoint/2010/main" val="3798248272"/>
+      </p:ext>
+    </p:extLst>
+  </p:cSld>
+  <p:clrMapOvr>
+    <a:masterClrMapping/>
+  </p:clrMapOvr>
+  <p:timing>
+    <p:tnLst>
+      <p:par>
+        <p:cTn id="1" dur="indefinite" restart="never" nodeType="tmRoot"/>
+      </p:par>
+    </p:tnLst>
+  </p:timing>
+</p:sld>
+</file>
+
+<file path=ppt/slides/slide7.xml><?xml version="1.0" encoding="utf-8"?>
+<p:sld xmlns:a="http://schemas.openxmlformats.org/drawingml/2006/main" xmlns:r="http://schemas.openxmlformats.org/officeDocument/2006/relationships" xmlns:p="http://schemas.openxmlformats.org/presentationml/2006/main">
+  <p:cSld>
+    <p:spTree>
+      <p:nvGrpSpPr>
+        <p:cNvPr id="1" name=""/>
+        <p:cNvGrpSpPr/>
+        <p:nvPr/>
+      </p:nvGrpSpPr>
+      <p:grpSpPr>
+        <a:xfrm>
+          <a:off x="0" y="0"/>
+          <a:ext cx="0" cy="0"/>
+          <a:chOff x="0" y="0"/>
+          <a:chExt cx="0" cy="0"/>
+        </a:xfrm>
+      </p:grpSpPr>
+      <p:sp>
+        <p:nvSpPr>
+          <p:cNvPr id="2" name="Заголовок 1"/>
+          <p:cNvSpPr>
+            <a:spLocks noGrp="1"/>
+          </p:cNvSpPr>
+          <p:nvPr>
+            <p:ph type="title"/>
+          </p:nvPr>
+        </p:nvSpPr>
+        <p:spPr>
+          <a:xfrm>
+            <a:off x="218342" y="206864"/>
+            <a:ext cx="10515600" cy="628406"/>
+          </a:xfrm>
+        </p:spPr>
+        <p:txBody>
+          <a:bodyPr>
+            <a:normAutofit fontScale="90000"/>
+          </a:bodyPr>
+          <a:lstStyle/>
+          <a:p>
+            <a:r>
+              <a:rPr lang="ru-RU" dirty="0" smtClean="0"/>
+              <a:t>Стандартные списки доступа</a:t>
+            </a:r>
+            <a:endParaRPr lang="ru-RU" dirty="0"/>
+          </a:p>
+        </p:txBody>
+      </p:sp>
+      <p:sp>
+        <p:nvSpPr>
+          <p:cNvPr id="4" name="Заголовок 3"/>
+          <p:cNvSpPr txBox="1">
+            <a:spLocks/>
+          </p:cNvSpPr>
+          <p:nvPr/>
+        </p:nvSpPr>
+        <p:spPr>
+          <a:xfrm>
+            <a:off x="218342" y="1652955"/>
+            <a:ext cx="11755315" cy="4211514"/>
+          </a:xfrm>
+          <a:prstGeom prst="rect">
+            <a:avLst/>
+          </a:prstGeom>
+          <a:solidFill>
+            <a:schemeClr val="tx1"/>
+          </a:solidFill>
+          <a:ln>
+            <a:solidFill>
+              <a:schemeClr val="tx1"/>
+            </a:solidFill>
+          </a:ln>
+        </p:spPr>
+        <p:txBody>
+          <a:bodyPr vert="horz" lIns="91440" tIns="45720" rIns="91440" bIns="45720" rtlCol="0" anchor="ctr">
+            <a:normAutofit/>
+          </a:bodyPr>
+          <a:lstStyle>
+            <a:lvl1pPr algn="l" defTabSz="914400" rtl="0" eaLnBrk="1" latinLnBrk="0" hangingPunct="1">
+              <a:lnSpc>
+                <a:spcPct val="90000"/>
+              </a:lnSpc>
+              <a:spcBef>
+                <a:spcPct val="0"/>
+              </a:spcBef>
+              <a:buNone/>
+              <a:defRPr sz="4400" kern="1200">
+                <a:solidFill>
+                  <a:schemeClr val="tx1"/>
+                </a:solidFill>
+                <a:latin typeface="+mj-lt"/>
+                <a:ea typeface="+mj-ea"/>
+                <a:cs typeface="+mj-cs"/>
+              </a:defRPr>
+            </a:lvl1pPr>
+          </a:lstStyle>
+          <a:p>
+            <a:endParaRPr lang="ru-RU" sz="2400" dirty="0" smtClean="0">
+              <a:solidFill>
+                <a:schemeClr val="bg1"/>
+              </a:solidFill>
+              <a:latin typeface="Consolas" panose="020B0609020204030204" pitchFamily="49" charset="0"/>
+            </a:endParaRPr>
+          </a:p>
+          <a:p>
+            <a:r>
+              <a:rPr lang="en-US" sz="2400" dirty="0">
+                <a:solidFill>
+                  <a:schemeClr val="bg1"/>
+                </a:solidFill>
+                <a:latin typeface="Consolas" panose="020B0609020204030204" pitchFamily="49" charset="0"/>
+              </a:rPr>
+              <a:t>Router(</a:t>
+            </a:r>
+            <a:r>
+              <a:rPr lang="en-US" sz="2400" dirty="0" err="1">
+                <a:solidFill>
+                  <a:schemeClr val="bg1"/>
+                </a:solidFill>
+                <a:latin typeface="Consolas" panose="020B0609020204030204" pitchFamily="49" charset="0"/>
+              </a:rPr>
+              <a:t>config</a:t>
+            </a:r>
+            <a:r>
+              <a:rPr lang="en-US" sz="2400" dirty="0">
+                <a:solidFill>
+                  <a:schemeClr val="bg1"/>
+                </a:solidFill>
+                <a:latin typeface="Consolas" panose="020B0609020204030204" pitchFamily="49" charset="0"/>
+              </a:rPr>
+              <a:t>)#</a:t>
+            </a:r>
+            <a:r>
+              <a:rPr lang="en-US" sz="2400" dirty="0" err="1">
+                <a:solidFill>
+                  <a:schemeClr val="bg1"/>
+                </a:solidFill>
+                <a:latin typeface="Consolas" panose="020B0609020204030204" pitchFamily="49" charset="0"/>
+              </a:rPr>
+              <a:t>ip</a:t>
+            </a:r>
+            <a:r>
+              <a:rPr lang="en-US" sz="2400" dirty="0">
+                <a:solidFill>
+                  <a:schemeClr val="bg1"/>
+                </a:solidFill>
+                <a:latin typeface="Consolas" panose="020B0609020204030204" pitchFamily="49" charset="0"/>
+              </a:rPr>
+              <a:t> access-list standard </a:t>
+            </a:r>
+            <a:r>
+              <a:rPr lang="en-US" sz="2400" dirty="0" smtClean="0">
+                <a:solidFill>
+                  <a:schemeClr val="bg1"/>
+                </a:solidFill>
+                <a:latin typeface="Consolas" panose="020B0609020204030204" pitchFamily="49" charset="0"/>
+              </a:rPr>
+              <a:t>99</a:t>
+            </a:r>
+          </a:p>
+          <a:p>
+            <a:r>
+              <a:rPr lang="en-US" sz="2400" dirty="0">
+                <a:solidFill>
+                  <a:schemeClr val="bg1"/>
+                </a:solidFill>
+                <a:latin typeface="Consolas" panose="020B0609020204030204" pitchFamily="49" charset="0"/>
+              </a:rPr>
+              <a:t>Router(</a:t>
+            </a:r>
+            <a:r>
+              <a:rPr lang="en-US" sz="2400" dirty="0" err="1">
+                <a:solidFill>
+                  <a:schemeClr val="bg1"/>
+                </a:solidFill>
+                <a:latin typeface="Consolas" panose="020B0609020204030204" pitchFamily="49" charset="0"/>
+              </a:rPr>
+              <a:t>config-std-nacl</a:t>
+            </a:r>
+            <a:r>
+              <a:rPr lang="en-US" sz="2400" dirty="0">
+                <a:solidFill>
+                  <a:schemeClr val="bg1"/>
+                </a:solidFill>
+                <a:latin typeface="Consolas" panose="020B0609020204030204" pitchFamily="49" charset="0"/>
+              </a:rPr>
+              <a:t>)#permit 192.168.10.0 0.0.0.255</a:t>
+            </a:r>
+          </a:p>
+          <a:p>
+            <a:r>
+              <a:rPr lang="en-US" sz="2400" dirty="0" smtClean="0">
+                <a:solidFill>
+                  <a:schemeClr val="bg1"/>
+                </a:solidFill>
+                <a:latin typeface="Consolas" panose="020B0609020204030204" pitchFamily="49" charset="0"/>
+              </a:rPr>
+              <a:t>Router(</a:t>
+            </a:r>
+            <a:r>
+              <a:rPr lang="en-US" sz="2400" dirty="0" err="1" smtClean="0">
+                <a:solidFill>
+                  <a:schemeClr val="bg1"/>
+                </a:solidFill>
+                <a:latin typeface="Consolas" panose="020B0609020204030204" pitchFamily="49" charset="0"/>
+              </a:rPr>
+              <a:t>config-std-nacl</a:t>
+            </a:r>
+            <a:r>
+              <a:rPr lang="en-US" sz="2400" dirty="0">
+                <a:solidFill>
+                  <a:schemeClr val="bg1"/>
+                </a:solidFill>
+                <a:latin typeface="Consolas" panose="020B0609020204030204" pitchFamily="49" charset="0"/>
+              </a:rPr>
+              <a:t>)#deny 172.16.0.0 0.0.127.255</a:t>
+            </a:r>
+          </a:p>
+          <a:p>
+            <a:r>
+              <a:rPr lang="en-US" sz="2400" dirty="0">
+                <a:solidFill>
+                  <a:schemeClr val="bg1"/>
+                </a:solidFill>
+                <a:latin typeface="Consolas" panose="020B0609020204030204" pitchFamily="49" charset="0"/>
+              </a:rPr>
+              <a:t>Router(</a:t>
+            </a:r>
+            <a:r>
+              <a:rPr lang="en-US" sz="2400" dirty="0" err="1">
+                <a:solidFill>
+                  <a:schemeClr val="bg1"/>
+                </a:solidFill>
+                <a:latin typeface="Consolas" panose="020B0609020204030204" pitchFamily="49" charset="0"/>
+              </a:rPr>
+              <a:t>config-std-nacl</a:t>
+            </a:r>
+            <a:r>
+              <a:rPr lang="en-US" sz="2400" dirty="0">
+                <a:solidFill>
+                  <a:schemeClr val="bg1"/>
+                </a:solidFill>
+                <a:latin typeface="Consolas" panose="020B0609020204030204" pitchFamily="49" charset="0"/>
+              </a:rPr>
+              <a:t>)#end</a:t>
+            </a:r>
+          </a:p>
+          <a:p>
+            <a:r>
+              <a:rPr lang="en-US" sz="2400" dirty="0">
+                <a:solidFill>
+                  <a:schemeClr val="bg1"/>
+                </a:solidFill>
+                <a:latin typeface="Consolas" panose="020B0609020204030204" pitchFamily="49" charset="0"/>
+              </a:rPr>
+              <a:t>Router</a:t>
+            </a:r>
+            <a:r>
+              <a:rPr lang="en-US" sz="2400" dirty="0" smtClean="0">
+                <a:solidFill>
+                  <a:schemeClr val="bg1"/>
+                </a:solidFill>
+                <a:latin typeface="Consolas" panose="020B0609020204030204" pitchFamily="49" charset="0"/>
+              </a:rPr>
+              <a:t>#</a:t>
+            </a:r>
+          </a:p>
+          <a:p>
+            <a:r>
+              <a:rPr lang="en-US" sz="2400" dirty="0" err="1">
+                <a:solidFill>
+                  <a:schemeClr val="bg1"/>
+                </a:solidFill>
+                <a:latin typeface="Consolas" panose="020B0609020204030204" pitchFamily="49" charset="0"/>
+              </a:rPr>
+              <a:t>Router#show</a:t>
+            </a:r>
+            <a:r>
+              <a:rPr lang="en-US" sz="2400" dirty="0">
+                <a:solidFill>
+                  <a:schemeClr val="bg1"/>
+                </a:solidFill>
+                <a:latin typeface="Consolas" panose="020B0609020204030204" pitchFamily="49" charset="0"/>
+              </a:rPr>
+              <a:t> </a:t>
+            </a:r>
+            <a:r>
+              <a:rPr lang="en-US" sz="2400" dirty="0" err="1">
+                <a:solidFill>
+                  <a:schemeClr val="bg1"/>
+                </a:solidFill>
+                <a:latin typeface="Consolas" panose="020B0609020204030204" pitchFamily="49" charset="0"/>
+              </a:rPr>
+              <a:t>ip</a:t>
+            </a:r>
+            <a:r>
+              <a:rPr lang="en-US" sz="2400" dirty="0">
+                <a:solidFill>
+                  <a:schemeClr val="bg1"/>
+                </a:solidFill>
+                <a:latin typeface="Consolas" panose="020B0609020204030204" pitchFamily="49" charset="0"/>
+              </a:rPr>
+              <a:t> access-lists 99</a:t>
+            </a:r>
+          </a:p>
+          <a:p>
+            <a:r>
+              <a:rPr lang="en-US" sz="2400" dirty="0">
+                <a:solidFill>
+                  <a:schemeClr val="bg1"/>
+                </a:solidFill>
+                <a:latin typeface="Consolas" panose="020B0609020204030204" pitchFamily="49" charset="0"/>
+              </a:rPr>
+              <a:t>Standard IP access list 99</a:t>
+            </a:r>
+          </a:p>
+          <a:p>
+            <a:r>
+              <a:rPr lang="en-US" sz="2400" dirty="0">
+                <a:solidFill>
+                  <a:schemeClr val="bg1"/>
+                </a:solidFill>
+                <a:latin typeface="Consolas" panose="020B0609020204030204" pitchFamily="49" charset="0"/>
+              </a:rPr>
+              <a:t>    permit 192.168.10.0 0.0.0.255</a:t>
+            </a:r>
+          </a:p>
+          <a:p>
+            <a:r>
+              <a:rPr lang="en-US" sz="2400" dirty="0">
+                <a:solidFill>
+                  <a:schemeClr val="bg1"/>
+                </a:solidFill>
+                <a:latin typeface="Consolas" panose="020B0609020204030204" pitchFamily="49" charset="0"/>
+              </a:rPr>
+              <a:t>    deny 172.16.0.0 0.0.127.255</a:t>
+            </a:r>
+            <a:endParaRPr lang="ru-RU" sz="2400" dirty="0" smtClean="0">
+              <a:solidFill>
+                <a:schemeClr val="bg1"/>
+              </a:solidFill>
+              <a:latin typeface="Consolas" panose="020B0609020204030204" pitchFamily="49" charset="0"/>
+            </a:endParaRPr>
+          </a:p>
+          <a:p>
+            <a:endParaRPr lang="en-US" sz="2400" dirty="0">
+              <a:solidFill>
+                <a:schemeClr val="bg1"/>
+              </a:solidFill>
+              <a:latin typeface="Consolas" panose="020B0609020204030204" pitchFamily="49" charset="0"/>
+            </a:endParaRPr>
+          </a:p>
+        </p:txBody>
+      </p:sp>
+    </p:spTree>
+    <p:extLst>
+      <p:ext uri="{BB962C8B-B14F-4D97-AF65-F5344CB8AC3E}">
+        <p14:creationId xmlns:p14="http://schemas.microsoft.com/office/powerpoint/2010/main" val="4175971484"/>
+      </p:ext>
+    </p:extLst>
+  </p:cSld>
+  <p:clrMapOvr>
+    <a:masterClrMapping/>
+  </p:clrMapOvr>
+  <p:timing>
+    <p:tnLst>
+      <p:par>
+        <p:cTn id="1" dur="indefinite" restart="never" nodeType="tmRoot"/>
+      </p:par>
+    </p:tnLst>
+  </p:timing>
+</p:sld>
+</file>
+
+<file path=ppt/slides/slide8.xml><?xml version="1.0" encoding="utf-8"?>
+<p:sld xmlns:a="http://schemas.openxmlformats.org/drawingml/2006/main" xmlns:r="http://schemas.openxmlformats.org/officeDocument/2006/relationships" xmlns:p="http://schemas.openxmlformats.org/presentationml/2006/main">
+  <p:cSld>
+    <p:spTree>
+      <p:nvGrpSpPr>
+        <p:cNvPr id="1" name=""/>
+        <p:cNvGrpSpPr/>
+        <p:nvPr/>
+      </p:nvGrpSpPr>
+      <p:grpSpPr>
+        <a:xfrm>
+          <a:off x="0" y="0"/>
+          <a:ext cx="0" cy="0"/>
+          <a:chOff x="0" y="0"/>
+          <a:chExt cx="0" cy="0"/>
+        </a:xfrm>
+      </p:grpSpPr>
+      <p:sp>
+        <p:nvSpPr>
+          <p:cNvPr id="2" name="Заголовок 1"/>
+          <p:cNvSpPr>
+            <a:spLocks noGrp="1"/>
+          </p:cNvSpPr>
+          <p:nvPr>
+            <p:ph type="title"/>
+          </p:nvPr>
+        </p:nvSpPr>
+        <p:spPr>
+          <a:xfrm>
+            <a:off x="218342" y="206864"/>
+            <a:ext cx="10515600" cy="628406"/>
+          </a:xfrm>
+        </p:spPr>
+        <p:txBody>
+          <a:bodyPr>
+            <a:normAutofit fontScale="90000"/>
+          </a:bodyPr>
+          <a:lstStyle/>
+          <a:p>
+            <a:r>
+              <a:rPr lang="ru-RU" dirty="0"/>
+              <a:t>Расширенные списки доступа</a:t>
+            </a:r>
+          </a:p>
+        </p:txBody>
+      </p:sp>
+      <p:sp>
+        <p:nvSpPr>
+          <p:cNvPr id="4" name="Заголовок 3"/>
+          <p:cNvSpPr txBox="1">
+            <a:spLocks/>
+          </p:cNvSpPr>
+          <p:nvPr/>
+        </p:nvSpPr>
+        <p:spPr>
+          <a:xfrm>
+            <a:off x="218342" y="1424355"/>
+            <a:ext cx="11755315" cy="4607168"/>
+          </a:xfrm>
+          <a:prstGeom prst="rect">
+            <a:avLst/>
+          </a:prstGeom>
+          <a:solidFill>
+            <a:schemeClr val="tx1"/>
+          </a:solidFill>
+          <a:ln>
+            <a:solidFill>
+              <a:schemeClr val="tx1"/>
+            </a:solidFill>
+          </a:ln>
+        </p:spPr>
+        <p:txBody>
+          <a:bodyPr vert="horz" lIns="91440" tIns="45720" rIns="91440" bIns="45720" rtlCol="0" anchor="ctr">
+            <a:normAutofit/>
+          </a:bodyPr>
+          <a:lstStyle>
+            <a:lvl1pPr algn="l" defTabSz="914400" rtl="0" eaLnBrk="1" latinLnBrk="0" hangingPunct="1">
+              <a:lnSpc>
+                <a:spcPct val="90000"/>
+              </a:lnSpc>
+              <a:spcBef>
+                <a:spcPct val="0"/>
+              </a:spcBef>
+              <a:buNone/>
+              <a:defRPr sz="4400" kern="1200">
+                <a:solidFill>
+                  <a:schemeClr val="tx1"/>
+                </a:solidFill>
+                <a:latin typeface="+mj-lt"/>
+                <a:ea typeface="+mj-ea"/>
+                <a:cs typeface="+mj-cs"/>
+              </a:defRPr>
+            </a:lvl1pPr>
+          </a:lstStyle>
+          <a:p>
+            <a:endParaRPr lang="ru-RU" sz="2400" dirty="0" smtClean="0">
+              <a:solidFill>
+                <a:schemeClr val="bg1"/>
+              </a:solidFill>
+              <a:latin typeface="Consolas" panose="020B0609020204030204" pitchFamily="49" charset="0"/>
+            </a:endParaRPr>
+          </a:p>
+          <a:p>
+            <a:r>
+              <a:rPr lang="en-US" sz="2400" dirty="0">
+                <a:solidFill>
+                  <a:schemeClr val="bg1"/>
+                </a:solidFill>
+                <a:latin typeface="Consolas" panose="020B0609020204030204" pitchFamily="49" charset="0"/>
+              </a:rPr>
+              <a:t>Router(</a:t>
+            </a:r>
+            <a:r>
+              <a:rPr lang="en-US" sz="2400" dirty="0" err="1">
+                <a:solidFill>
+                  <a:schemeClr val="bg1"/>
+                </a:solidFill>
+                <a:latin typeface="Consolas" panose="020B0609020204030204" pitchFamily="49" charset="0"/>
+              </a:rPr>
+              <a:t>config</a:t>
+            </a:r>
+            <a:r>
+              <a:rPr lang="en-US" sz="2400" dirty="0">
+                <a:solidFill>
+                  <a:schemeClr val="bg1"/>
+                </a:solidFill>
+                <a:latin typeface="Consolas" panose="020B0609020204030204" pitchFamily="49" charset="0"/>
+              </a:rPr>
+              <a:t>)#(</a:t>
+            </a:r>
+            <a:r>
+              <a:rPr lang="en-US" sz="2400" dirty="0" err="1">
+                <a:solidFill>
+                  <a:schemeClr val="bg1"/>
+                </a:solidFill>
+                <a:latin typeface="Consolas" panose="020B0609020204030204" pitchFamily="49" charset="0"/>
+              </a:rPr>
+              <a:t>config</a:t>
+            </a:r>
+            <a:r>
+              <a:rPr lang="en-US" sz="2400" dirty="0">
+                <a:solidFill>
+                  <a:schemeClr val="bg1"/>
+                </a:solidFill>
+                <a:latin typeface="Consolas" panose="020B0609020204030204" pitchFamily="49" charset="0"/>
+              </a:rPr>
+              <a:t>)#</a:t>
+            </a:r>
+            <a:r>
+              <a:rPr lang="en-US" sz="2400" dirty="0" err="1">
+                <a:solidFill>
+                  <a:schemeClr val="bg1"/>
+                </a:solidFill>
+                <a:latin typeface="Consolas" panose="020B0609020204030204" pitchFamily="49" charset="0"/>
+              </a:rPr>
+              <a:t>ip</a:t>
+            </a:r>
+            <a:r>
+              <a:rPr lang="en-US" sz="2400" dirty="0">
+                <a:solidFill>
+                  <a:schemeClr val="bg1"/>
+                </a:solidFill>
+                <a:latin typeface="Consolas" panose="020B0609020204030204" pitchFamily="49" charset="0"/>
+              </a:rPr>
+              <a:t> access-list extended ?</a:t>
+            </a:r>
+          </a:p>
+          <a:p>
+            <a:r>
+              <a:rPr lang="en-US" sz="2400" dirty="0">
+                <a:solidFill>
+                  <a:schemeClr val="bg1"/>
+                </a:solidFill>
+                <a:latin typeface="Consolas" panose="020B0609020204030204" pitchFamily="49" charset="0"/>
+              </a:rPr>
+              <a:t>  &lt;100-199&gt;    Extended IP access-list number</a:t>
+            </a:r>
+          </a:p>
+          <a:p>
+            <a:r>
+              <a:rPr lang="en-US" sz="2400" dirty="0">
+                <a:solidFill>
+                  <a:schemeClr val="bg1"/>
+                </a:solidFill>
+                <a:latin typeface="Consolas" panose="020B0609020204030204" pitchFamily="49" charset="0"/>
+              </a:rPr>
+              <a:t>  &lt;2000-2699&gt;  Extended IP access-list number (expanded range)</a:t>
+            </a:r>
+          </a:p>
+          <a:p>
+            <a:r>
+              <a:rPr lang="en-US" sz="2400" dirty="0">
+                <a:solidFill>
+                  <a:schemeClr val="bg1"/>
+                </a:solidFill>
+                <a:latin typeface="Consolas" panose="020B0609020204030204" pitchFamily="49" charset="0"/>
+              </a:rPr>
+              <a:t>  WORD         Access-list name</a:t>
+            </a:r>
+          </a:p>
+          <a:p>
+            <a:endParaRPr lang="ru-RU" sz="2400" dirty="0">
+              <a:solidFill>
+                <a:schemeClr val="bg1"/>
+              </a:solidFill>
+              <a:latin typeface="Consolas" panose="020B0609020204030204" pitchFamily="49" charset="0"/>
+            </a:endParaRPr>
+          </a:p>
+          <a:p>
+            <a:endParaRPr lang="ru-RU" sz="2400" dirty="0">
+              <a:solidFill>
+                <a:schemeClr val="bg1"/>
+              </a:solidFill>
+              <a:latin typeface="Consolas" panose="020B0609020204030204" pitchFamily="49" charset="0"/>
+            </a:endParaRPr>
+          </a:p>
+          <a:p>
+            <a:r>
+              <a:rPr lang="en-US" sz="2400" dirty="0">
+                <a:solidFill>
+                  <a:schemeClr val="bg1"/>
+                </a:solidFill>
+                <a:latin typeface="Consolas" panose="020B0609020204030204" pitchFamily="49" charset="0"/>
+              </a:rPr>
+              <a:t>Router(</a:t>
+            </a:r>
+            <a:r>
+              <a:rPr lang="en-US" sz="2400" dirty="0" err="1">
+                <a:solidFill>
+                  <a:schemeClr val="bg1"/>
+                </a:solidFill>
+                <a:latin typeface="Consolas" panose="020B0609020204030204" pitchFamily="49" charset="0"/>
+              </a:rPr>
+              <a:t>config</a:t>
+            </a:r>
+            <a:r>
+              <a:rPr lang="en-US" sz="2400" dirty="0">
+                <a:solidFill>
+                  <a:schemeClr val="bg1"/>
+                </a:solidFill>
+                <a:latin typeface="Consolas" panose="020B0609020204030204" pitchFamily="49" charset="0"/>
+              </a:rPr>
+              <a:t>)# </a:t>
+            </a:r>
+            <a:r>
+              <a:rPr lang="en-US" sz="2400" dirty="0" err="1">
+                <a:solidFill>
+                  <a:schemeClr val="bg1"/>
+                </a:solidFill>
+                <a:latin typeface="Consolas" panose="020B0609020204030204" pitchFamily="49" charset="0"/>
+              </a:rPr>
+              <a:t>ip</a:t>
+            </a:r>
+            <a:r>
+              <a:rPr lang="en-US" sz="2400" dirty="0">
+                <a:solidFill>
+                  <a:schemeClr val="bg1"/>
+                </a:solidFill>
+                <a:latin typeface="Consolas" panose="020B0609020204030204" pitchFamily="49" charset="0"/>
+              </a:rPr>
+              <a:t> access-list extended &lt;</a:t>
+            </a:r>
+            <a:r>
+              <a:rPr lang="ru-RU" sz="2400" dirty="0">
+                <a:solidFill>
+                  <a:schemeClr val="bg1"/>
+                </a:solidFill>
+                <a:latin typeface="Consolas" panose="020B0609020204030204" pitchFamily="49" charset="0"/>
+              </a:rPr>
+              <a:t>ИМЯ_ИЛИ_НОМЕР&gt;</a:t>
+            </a:r>
+          </a:p>
+          <a:p>
+            <a:endParaRPr lang="ru-RU" sz="2400" dirty="0">
+              <a:solidFill>
+                <a:schemeClr val="bg1"/>
+              </a:solidFill>
+              <a:latin typeface="Consolas" panose="020B0609020204030204" pitchFamily="49" charset="0"/>
+            </a:endParaRPr>
+          </a:p>
+          <a:p>
+            <a:r>
+              <a:rPr lang="en-US" sz="2400" dirty="0">
+                <a:solidFill>
+                  <a:schemeClr val="bg1"/>
+                </a:solidFill>
+                <a:latin typeface="Consolas" panose="020B0609020204030204" pitchFamily="49" charset="0"/>
+              </a:rPr>
+              <a:t>Router(</a:t>
+            </a:r>
+            <a:r>
+              <a:rPr lang="en-US" sz="2400" dirty="0" err="1">
+                <a:solidFill>
+                  <a:schemeClr val="bg1"/>
+                </a:solidFill>
+                <a:latin typeface="Consolas" panose="020B0609020204030204" pitchFamily="49" charset="0"/>
+              </a:rPr>
+              <a:t>config-ext-nacl</a:t>
+            </a:r>
+            <a:r>
+              <a:rPr lang="en-US" sz="2400" dirty="0">
+                <a:solidFill>
+                  <a:schemeClr val="bg1"/>
+                </a:solidFill>
+                <a:latin typeface="Consolas" panose="020B0609020204030204" pitchFamily="49" charset="0"/>
+              </a:rPr>
+              <a:t>)# [permit | deny] &lt;</a:t>
+            </a:r>
+            <a:r>
+              <a:rPr lang="ru-RU" sz="2400" dirty="0">
+                <a:solidFill>
+                  <a:schemeClr val="bg1"/>
+                </a:solidFill>
+                <a:latin typeface="Consolas" panose="020B0609020204030204" pitchFamily="49" charset="0"/>
+              </a:rPr>
+              <a:t>ПРОТОКОЛ&gt; \</a:t>
+            </a:r>
+          </a:p>
+          <a:p>
+            <a:r>
+              <a:rPr lang="ru-RU" sz="2400" dirty="0">
+                <a:solidFill>
+                  <a:schemeClr val="bg1"/>
+                </a:solidFill>
+                <a:latin typeface="Consolas" panose="020B0609020204030204" pitchFamily="49" charset="0"/>
+              </a:rPr>
+              <a:t>    &lt;ИСТОЧНИК&gt; &lt;</a:t>
+            </a:r>
+            <a:r>
+              <a:rPr lang="en-US" sz="2400" dirty="0">
+                <a:solidFill>
+                  <a:schemeClr val="bg1"/>
+                </a:solidFill>
+                <a:latin typeface="Consolas" panose="020B0609020204030204" pitchFamily="49" charset="0"/>
+              </a:rPr>
+              <a:t>WILDCARD_</a:t>
+            </a:r>
+            <a:r>
+              <a:rPr lang="ru-RU" sz="2400" dirty="0">
+                <a:solidFill>
+                  <a:schemeClr val="bg1"/>
+                </a:solidFill>
+                <a:latin typeface="Consolas" panose="020B0609020204030204" pitchFamily="49" charset="0"/>
+              </a:rPr>
+              <a:t>ИСТОЧНИКА&gt; [ОПЕРАТОР ПОРТ_ИСТОЧНИКА] \</a:t>
+            </a:r>
+          </a:p>
+          <a:p>
+            <a:r>
+              <a:rPr lang="ru-RU" sz="2400" dirty="0">
+                <a:solidFill>
+                  <a:schemeClr val="bg1"/>
+                </a:solidFill>
+                <a:latin typeface="Consolas" panose="020B0609020204030204" pitchFamily="49" charset="0"/>
+              </a:rPr>
+              <a:t>    &lt;НАЗНАЧЕНИЕ&gt; &lt;</a:t>
+            </a:r>
+            <a:r>
+              <a:rPr lang="en-US" sz="2400" dirty="0">
+                <a:solidFill>
+                  <a:schemeClr val="bg1"/>
+                </a:solidFill>
+                <a:latin typeface="Consolas" panose="020B0609020204030204" pitchFamily="49" charset="0"/>
+              </a:rPr>
+              <a:t>WILDCARD_</a:t>
+            </a:r>
+            <a:r>
+              <a:rPr lang="ru-RU" sz="2400" dirty="0">
+                <a:solidFill>
+                  <a:schemeClr val="bg1"/>
+                </a:solidFill>
+                <a:latin typeface="Consolas" panose="020B0609020204030204" pitchFamily="49" charset="0"/>
+              </a:rPr>
+              <a:t>НАЗНАЧЕНИЯ&gt; [ОПЕРАТОР ПОРТ_НАЗНАЧЕНИЯ]</a:t>
+            </a:r>
+          </a:p>
+          <a:p>
+            <a:endParaRPr lang="ru-RU" sz="2400" dirty="0">
+              <a:solidFill>
+                <a:schemeClr val="bg1"/>
+              </a:solidFill>
+              <a:latin typeface="Consolas" panose="020B0609020204030204" pitchFamily="49" charset="0"/>
+            </a:endParaRPr>
+          </a:p>
+          <a:p>
+            <a:endParaRPr lang="en-US" sz="2400" dirty="0">
+              <a:solidFill>
+                <a:schemeClr val="bg1"/>
+              </a:solidFill>
+              <a:latin typeface="Consolas" panose="020B0609020204030204" pitchFamily="49" charset="0"/>
+            </a:endParaRPr>
+          </a:p>
+        </p:txBody>
+      </p:sp>
+    </p:spTree>
+    <p:extLst>
+      <p:ext uri="{BB962C8B-B14F-4D97-AF65-F5344CB8AC3E}">
+        <p14:creationId xmlns:p14="http://schemas.microsoft.com/office/powerpoint/2010/main" val="3383313223"/>
+      </p:ext>
+    </p:extLst>
+  </p:cSld>
+  <p:clrMapOvr>
+    <a:masterClrMapping/>
+  </p:clrMapOvr>
+  <p:timing>
+    <p:tnLst>
+      <p:par>
+        <p:cTn id="1" dur="indefinite" restart="never" nodeType="tmRoot"/>
+      </p:par>
+    </p:tnLst>
+  </p:timing>
+</p:sld>
+</file>
+
+<file path=ppt/slides/slide9.xml><?xml version="1.0" encoding="utf-8"?>
+<p:sld xmlns:a="http://schemas.openxmlformats.org/drawingml/2006/main" xmlns:r="http://schemas.openxmlformats.org/officeDocument/2006/relationships" xmlns:p="http://schemas.openxmlformats.org/presentationml/2006/main">
+  <p:cSld>
+    <p:spTree>
+      <p:nvGrpSpPr>
+        <p:cNvPr id="1" name=""/>
+        <p:cNvGrpSpPr/>
+        <p:nvPr/>
+      </p:nvGrpSpPr>
+      <p:grpSpPr>
+        <a:xfrm>
+          <a:off x="0" y="0"/>
+          <a:ext cx="0" cy="0"/>
+          <a:chOff x="0" y="0"/>
+          <a:chExt cx="0" cy="0"/>
+        </a:xfrm>
+      </p:grpSpPr>
+      <p:sp>
+        <p:nvSpPr>
+          <p:cNvPr id="2" name="Заголовок 1"/>
+          <p:cNvSpPr>
+            <a:spLocks noGrp="1"/>
+          </p:cNvSpPr>
+          <p:nvPr>
+            <p:ph type="title"/>
+          </p:nvPr>
+        </p:nvSpPr>
+        <p:spPr/>
+        <p:txBody>
+          <a:bodyPr/>
+          <a:lstStyle/>
+          <a:p>
+            <a:r>
+              <a:rPr lang="ru-RU" dirty="0" smtClean="0"/>
+              <a:t>Операторы портов в </a:t>
+            </a:r>
+            <a:r>
+              <a:rPr lang="en-US" dirty="0" smtClean="0"/>
+              <a:t>Extended ACL</a:t>
+            </a:r>
+            <a:endParaRPr lang="ru-RU" dirty="0"/>
+          </a:p>
+        </p:txBody>
+      </p:sp>
+      <p:sp>
+        <p:nvSpPr>
+          <p:cNvPr id="4" name="Rectangle 1"/>
+          <p:cNvSpPr>
+            <a:spLocks noGrp="1" noChangeArrowheads="1"/>
+          </p:cNvSpPr>
+          <p:nvPr>
+            <p:ph idx="1"/>
+          </p:nvPr>
+        </p:nvSpPr>
+        <p:spPr bwMode="auto">
+          <a:xfrm>
+            <a:off x="838200" y="2437105"/>
+            <a:ext cx="10835402" cy="3128385"/>
+          </a:xfrm>
+          <a:prstGeom prst="rect">
+            <a:avLst/>
+          </a:prstGeom>
+          <a:solidFill>
+            <a:schemeClr val="bg1"/>
+          </a:solidFill>
+          <a:ln>
+            <a:noFill/>
+          </a:ln>
+          <a:effectLst/>
+        </p:spPr>
+        <p:txBody>
+          <a:bodyPr vert="horz" wrap="none" lIns="91440" tIns="0" rIns="91440" bIns="111090" numCol="1" anchor="ctr" anchorCtr="0" compatLnSpc="1">
+            <a:prstTxWarp prst="textNoShape">
+              <a:avLst/>
+            </a:prstTxWarp>
+            <a:spAutoFit/>
+          </a:bodyPr>
+          <a:lstStyle/>
+          <a:p>
+            <a:pPr marL="0" marR="0" lvl="0" indent="0" algn="l" defTabSz="914400" rtl="0" eaLnBrk="0" fontAlgn="base" latinLnBrk="0" hangingPunct="0">
+              <a:lnSpc>
+                <a:spcPct val="100000"/>
+              </a:lnSpc>
+              <a:spcBef>
+                <a:spcPct val="0"/>
+              </a:spcBef>
+              <a:spcAft>
+                <a:spcPct val="0"/>
+              </a:spcAft>
+              <a:buClrTx/>
+              <a:buSzTx/>
+              <a:buFontTx/>
+              <a:buNone/>
+              <a:tabLst/>
+            </a:pPr>
+            <a:endParaRPr kumimoji="0" lang="ru-RU" altLang="ru-RU" sz="1800" b="0" i="0" u="none" strike="noStrike" cap="none" normalizeH="0" baseline="0" dirty="0" smtClean="0">
+              <a:ln>
+                <a:noFill/>
+              </a:ln>
+              <a:solidFill>
+                <a:schemeClr val="tx1"/>
+              </a:solidFill>
+              <a:effectLst/>
+              <a:latin typeface="Arial" panose="020B0604020202020204" pitchFamily="34" charset="0"/>
+            </a:endParaRPr>
+          </a:p>
+          <a:p>
+            <a:pPr marL="0" marR="0" lvl="0" indent="0" algn="l" defTabSz="914400" rtl="0" eaLnBrk="0" fontAlgn="base" latinLnBrk="0" hangingPunct="0">
+              <a:lnSpc>
+                <a:spcPct val="100000"/>
+              </a:lnSpc>
+              <a:spcBef>
+                <a:spcPct val="0"/>
+              </a:spcBef>
+              <a:spcAft>
+                <a:spcPct val="0"/>
+              </a:spcAft>
+              <a:buClrTx/>
+              <a:buSzTx/>
+              <a:buFontTx/>
+              <a:buChar char="•"/>
+              <a:tabLst/>
+            </a:pPr>
+            <a:r>
+              <a:rPr kumimoji="0" lang="ru-RU" altLang="ru-RU" sz="3200" b="0" i="0" u="none" strike="noStrike" cap="none" normalizeH="0" baseline="0" dirty="0" err="1" smtClean="0">
+                <a:ln>
+                  <a:noFill/>
+                </a:ln>
+                <a:effectLst/>
+                <a:latin typeface="Consolas" panose="020B0609020204030204" pitchFamily="49" charset="0"/>
+              </a:rPr>
+              <a:t>eq</a:t>
+            </a:r>
+            <a:r>
+              <a:rPr kumimoji="0" lang="ru-RU" altLang="ru-RU" sz="3200" b="0" i="0" u="none" strike="noStrike" cap="none" normalizeH="0" baseline="0" dirty="0" smtClean="0">
+                <a:ln>
+                  <a:noFill/>
+                </a:ln>
+                <a:effectLst/>
+                <a:latin typeface="Consolas" panose="020B0609020204030204" pitchFamily="49" charset="0"/>
+              </a:rPr>
+              <a:t> &lt;</a:t>
+            </a:r>
+            <a:r>
+              <a:rPr kumimoji="0" lang="ru-RU" altLang="ru-RU" sz="3200" b="0" i="0" u="none" strike="noStrike" cap="none" normalizeH="0" baseline="0" dirty="0" err="1" smtClean="0">
+                <a:ln>
+                  <a:noFill/>
+                </a:ln>
+                <a:effectLst/>
+                <a:latin typeface="Consolas" panose="020B0609020204030204" pitchFamily="49" charset="0"/>
+              </a:rPr>
+              <a:t>номер|имя</a:t>
+            </a:r>
+            <a:r>
+              <a:rPr kumimoji="0" lang="ru-RU" altLang="ru-RU" sz="3200" b="0" i="0" u="none" strike="noStrike" cap="none" normalizeH="0" baseline="0" dirty="0" smtClean="0">
+                <a:ln>
+                  <a:noFill/>
+                </a:ln>
+                <a:effectLst/>
+                <a:latin typeface="Consolas" panose="020B0609020204030204" pitchFamily="49" charset="0"/>
+              </a:rPr>
+              <a:t>&gt;</a:t>
+            </a:r>
+            <a:r>
+              <a:rPr kumimoji="0" lang="ru-RU" altLang="ru-RU" sz="3200" b="0" i="0" u="none" strike="noStrike" cap="none" normalizeH="0" baseline="0" dirty="0" smtClean="0">
+                <a:ln>
+                  <a:noFill/>
+                </a:ln>
+                <a:effectLst/>
+                <a:latin typeface="-apple-system"/>
+              </a:rPr>
+              <a:t> — строгое равенство (</a:t>
+            </a:r>
+            <a:r>
+              <a:rPr kumimoji="0" lang="ru-RU" altLang="ru-RU" sz="3200" b="0" i="0" u="none" strike="noStrike" cap="none" normalizeH="0" baseline="0" dirty="0" err="1" smtClean="0">
+                <a:ln>
+                  <a:noFill/>
+                </a:ln>
+                <a:effectLst/>
+                <a:latin typeface="-apple-system"/>
+              </a:rPr>
+              <a:t>equal</a:t>
+            </a:r>
+            <a:r>
+              <a:rPr kumimoji="0" lang="ru-RU" altLang="ru-RU" sz="3200" b="0" i="0" u="none" strike="noStrike" cap="none" normalizeH="0" baseline="0" dirty="0" smtClean="0">
+                <a:ln>
+                  <a:noFill/>
+                </a:ln>
+                <a:effectLst/>
+                <a:latin typeface="-apple-system"/>
+              </a:rPr>
+              <a:t>).</a:t>
+            </a:r>
+          </a:p>
+          <a:p>
+            <a:pPr marL="0" marR="0" lvl="0" indent="0" algn="l" defTabSz="914400" rtl="0" eaLnBrk="0" fontAlgn="base" latinLnBrk="0" hangingPunct="0">
+              <a:lnSpc>
+                <a:spcPct val="100000"/>
+              </a:lnSpc>
+              <a:spcBef>
+                <a:spcPct val="0"/>
+              </a:spcBef>
+              <a:spcAft>
+                <a:spcPct val="0"/>
+              </a:spcAft>
+              <a:buClrTx/>
+              <a:buSzTx/>
+              <a:buFontTx/>
+              <a:buChar char="•"/>
+              <a:tabLst/>
+            </a:pPr>
+            <a:r>
+              <a:rPr kumimoji="0" lang="ru-RU" altLang="ru-RU" sz="3200" b="0" i="0" u="none" strike="noStrike" cap="none" normalizeH="0" baseline="0" dirty="0" err="1" smtClean="0">
+                <a:ln>
+                  <a:noFill/>
+                </a:ln>
+                <a:effectLst/>
+                <a:latin typeface="Consolas" panose="020B0609020204030204" pitchFamily="49" charset="0"/>
+              </a:rPr>
+              <a:t>neq</a:t>
+            </a:r>
+            <a:r>
+              <a:rPr kumimoji="0" lang="ru-RU" altLang="ru-RU" sz="3200" b="0" i="0" u="none" strike="noStrike" cap="none" normalizeH="0" baseline="0" dirty="0" smtClean="0">
+                <a:ln>
+                  <a:noFill/>
+                </a:ln>
+                <a:effectLst/>
+                <a:latin typeface="Consolas" panose="020B0609020204030204" pitchFamily="49" charset="0"/>
+              </a:rPr>
+              <a:t> &lt;</a:t>
+            </a:r>
+            <a:r>
+              <a:rPr kumimoji="0" lang="ru-RU" altLang="ru-RU" sz="3200" b="0" i="0" u="none" strike="noStrike" cap="none" normalizeH="0" baseline="0" dirty="0" err="1" smtClean="0">
+                <a:ln>
+                  <a:noFill/>
+                </a:ln>
+                <a:effectLst/>
+                <a:latin typeface="Consolas" panose="020B0609020204030204" pitchFamily="49" charset="0"/>
+              </a:rPr>
+              <a:t>номер|имя</a:t>
+            </a:r>
+            <a:r>
+              <a:rPr kumimoji="0" lang="ru-RU" altLang="ru-RU" sz="3200" b="0" i="0" u="none" strike="noStrike" cap="none" normalizeH="0" baseline="0" dirty="0" smtClean="0">
+                <a:ln>
+                  <a:noFill/>
+                </a:ln>
+                <a:effectLst/>
+                <a:latin typeface="Consolas" panose="020B0609020204030204" pitchFamily="49" charset="0"/>
+              </a:rPr>
+              <a:t>&gt;</a:t>
+            </a:r>
+            <a:r>
+              <a:rPr kumimoji="0" lang="ru-RU" altLang="ru-RU" sz="3200" b="0" i="0" u="none" strike="noStrike" cap="none" normalizeH="0" baseline="0" dirty="0" smtClean="0">
+                <a:ln>
+                  <a:noFill/>
+                </a:ln>
+                <a:effectLst/>
+                <a:latin typeface="-apple-system"/>
+              </a:rPr>
+              <a:t> — все, кроме указанного (</a:t>
+            </a:r>
+            <a:r>
+              <a:rPr kumimoji="0" lang="ru-RU" altLang="ru-RU" sz="3200" b="0" i="0" u="none" strike="noStrike" cap="none" normalizeH="0" baseline="0" dirty="0" err="1" smtClean="0">
+                <a:ln>
+                  <a:noFill/>
+                </a:ln>
+                <a:effectLst/>
+                <a:latin typeface="-apple-system"/>
+              </a:rPr>
+              <a:t>not</a:t>
+            </a:r>
+            <a:r>
+              <a:rPr kumimoji="0" lang="ru-RU" altLang="ru-RU" sz="3200" b="0" i="0" u="none" strike="noStrike" cap="none" normalizeH="0" baseline="0" dirty="0" smtClean="0">
+                <a:ln>
+                  <a:noFill/>
+                </a:ln>
+                <a:effectLst/>
+                <a:latin typeface="-apple-system"/>
+              </a:rPr>
+              <a:t> </a:t>
+            </a:r>
+            <a:r>
+              <a:rPr kumimoji="0" lang="ru-RU" altLang="ru-RU" sz="3200" b="0" i="0" u="none" strike="noStrike" cap="none" normalizeH="0" baseline="0" dirty="0" err="1" smtClean="0">
+                <a:ln>
+                  <a:noFill/>
+                </a:ln>
+                <a:effectLst/>
+                <a:latin typeface="-apple-system"/>
+              </a:rPr>
+              <a:t>equal</a:t>
+            </a:r>
+            <a:r>
+              <a:rPr kumimoji="0" lang="ru-RU" altLang="ru-RU" sz="3200" b="0" i="0" u="none" strike="noStrike" cap="none" normalizeH="0" baseline="0" dirty="0" smtClean="0">
+                <a:ln>
+                  <a:noFill/>
+                </a:ln>
+                <a:effectLst/>
+                <a:latin typeface="-apple-system"/>
+              </a:rPr>
+              <a:t>).</a:t>
+            </a:r>
+          </a:p>
+          <a:p>
+            <a:pPr marL="0" marR="0" lvl="0" indent="0" algn="l" defTabSz="914400" rtl="0" eaLnBrk="0" fontAlgn="base" latinLnBrk="0" hangingPunct="0">
+              <a:lnSpc>
+                <a:spcPct val="100000"/>
+              </a:lnSpc>
+              <a:spcBef>
+                <a:spcPct val="0"/>
+              </a:spcBef>
+              <a:spcAft>
+                <a:spcPct val="0"/>
+              </a:spcAft>
+              <a:buClrTx/>
+              <a:buSzTx/>
+              <a:buFontTx/>
+              <a:buChar char="•"/>
+              <a:tabLst/>
+            </a:pPr>
+            <a:r>
+              <a:rPr kumimoji="0" lang="ru-RU" altLang="ru-RU" sz="3200" b="0" i="0" u="none" strike="noStrike" cap="none" normalizeH="0" baseline="0" dirty="0" err="1" smtClean="0">
+                <a:ln>
+                  <a:noFill/>
+                </a:ln>
+                <a:effectLst/>
+                <a:latin typeface="Consolas" panose="020B0609020204030204" pitchFamily="49" charset="0"/>
+              </a:rPr>
+              <a:t>gt</a:t>
+            </a:r>
+            <a:r>
+              <a:rPr kumimoji="0" lang="ru-RU" altLang="ru-RU" sz="3200" b="0" i="0" u="none" strike="noStrike" cap="none" normalizeH="0" baseline="0" dirty="0" smtClean="0">
+                <a:ln>
+                  <a:noFill/>
+                </a:ln>
+                <a:effectLst/>
+                <a:latin typeface="Consolas" panose="020B0609020204030204" pitchFamily="49" charset="0"/>
+              </a:rPr>
+              <a:t> &lt;номер&gt;</a:t>
+            </a:r>
+            <a:r>
+              <a:rPr kumimoji="0" lang="ru-RU" altLang="ru-RU" sz="3200" b="0" i="0" u="none" strike="noStrike" cap="none" normalizeH="0" baseline="0" dirty="0" smtClean="0">
+                <a:ln>
+                  <a:noFill/>
+                </a:ln>
+                <a:effectLst/>
+                <a:latin typeface="-apple-system"/>
+              </a:rPr>
+              <a:t> — строго больше (</a:t>
+            </a:r>
+            <a:r>
+              <a:rPr kumimoji="0" lang="ru-RU" altLang="ru-RU" sz="3200" b="0" i="0" u="none" strike="noStrike" cap="none" normalizeH="0" baseline="0" dirty="0" err="1" smtClean="0">
+                <a:ln>
+                  <a:noFill/>
+                </a:ln>
+                <a:effectLst/>
+                <a:latin typeface="-apple-system"/>
+              </a:rPr>
+              <a:t>greater</a:t>
+            </a:r>
+            <a:r>
+              <a:rPr kumimoji="0" lang="ru-RU" altLang="ru-RU" sz="3200" b="0" i="0" u="none" strike="noStrike" cap="none" normalizeH="0" baseline="0" dirty="0" smtClean="0">
+                <a:ln>
+                  <a:noFill/>
+                </a:ln>
+                <a:effectLst/>
+                <a:latin typeface="-apple-system"/>
+              </a:rPr>
+              <a:t> </a:t>
+            </a:r>
+            <a:r>
+              <a:rPr kumimoji="0" lang="ru-RU" altLang="ru-RU" sz="3200" b="0" i="0" u="none" strike="noStrike" cap="none" normalizeH="0" baseline="0" dirty="0" err="1" smtClean="0">
+                <a:ln>
+                  <a:noFill/>
+                </a:ln>
+                <a:effectLst/>
+                <a:latin typeface="-apple-system"/>
+              </a:rPr>
+              <a:t>than</a:t>
+            </a:r>
+            <a:r>
+              <a:rPr kumimoji="0" lang="ru-RU" altLang="ru-RU" sz="3200" b="0" i="0" u="none" strike="noStrike" cap="none" normalizeH="0" baseline="0" dirty="0" smtClean="0">
+                <a:ln>
+                  <a:noFill/>
+                </a:ln>
+                <a:effectLst/>
+                <a:latin typeface="-apple-system"/>
+              </a:rPr>
+              <a:t>).</a:t>
+            </a:r>
+          </a:p>
+          <a:p>
+            <a:pPr marL="0" marR="0" lvl="0" indent="0" algn="l" defTabSz="914400" rtl="0" eaLnBrk="0" fontAlgn="base" latinLnBrk="0" hangingPunct="0">
+              <a:lnSpc>
+                <a:spcPct val="100000"/>
+              </a:lnSpc>
+              <a:spcBef>
+                <a:spcPct val="0"/>
+              </a:spcBef>
+              <a:spcAft>
+                <a:spcPct val="0"/>
+              </a:spcAft>
+              <a:buClrTx/>
+              <a:buSzTx/>
+              <a:buFontTx/>
+              <a:buChar char="•"/>
+              <a:tabLst/>
+            </a:pPr>
+            <a:r>
+              <a:rPr kumimoji="0" lang="ru-RU" altLang="ru-RU" sz="3200" b="0" i="0" u="none" strike="noStrike" cap="none" normalizeH="0" baseline="0" dirty="0" err="1" smtClean="0">
+                <a:ln>
+                  <a:noFill/>
+                </a:ln>
+                <a:effectLst/>
+                <a:latin typeface="Consolas" panose="020B0609020204030204" pitchFamily="49" charset="0"/>
+              </a:rPr>
+              <a:t>lt</a:t>
+            </a:r>
+            <a:r>
+              <a:rPr kumimoji="0" lang="ru-RU" altLang="ru-RU" sz="3200" b="0" i="0" u="none" strike="noStrike" cap="none" normalizeH="0" baseline="0" dirty="0" smtClean="0">
+                <a:ln>
+                  <a:noFill/>
+                </a:ln>
+                <a:effectLst/>
+                <a:latin typeface="Consolas" panose="020B0609020204030204" pitchFamily="49" charset="0"/>
+              </a:rPr>
+              <a:t> &lt;номер&gt;</a:t>
+            </a:r>
+            <a:r>
+              <a:rPr kumimoji="0" lang="ru-RU" altLang="ru-RU" sz="3200" b="0" i="0" u="none" strike="noStrike" cap="none" normalizeH="0" baseline="0" dirty="0" smtClean="0">
+                <a:ln>
+                  <a:noFill/>
+                </a:ln>
+                <a:effectLst/>
+                <a:latin typeface="-apple-system"/>
+              </a:rPr>
+              <a:t> — строго меньше (</a:t>
+            </a:r>
+            <a:r>
+              <a:rPr kumimoji="0" lang="ru-RU" altLang="ru-RU" sz="3200" b="0" i="0" u="none" strike="noStrike" cap="none" normalizeH="0" baseline="0" dirty="0" err="1" smtClean="0">
+                <a:ln>
+                  <a:noFill/>
+                </a:ln>
+                <a:effectLst/>
+                <a:latin typeface="-apple-system"/>
+              </a:rPr>
+              <a:t>less</a:t>
+            </a:r>
+            <a:r>
+              <a:rPr kumimoji="0" lang="ru-RU" altLang="ru-RU" sz="3200" b="0" i="0" u="none" strike="noStrike" cap="none" normalizeH="0" baseline="0" dirty="0" smtClean="0">
+                <a:ln>
+                  <a:noFill/>
+                </a:ln>
+                <a:effectLst/>
+                <a:latin typeface="-apple-system"/>
+              </a:rPr>
+              <a:t> </a:t>
+            </a:r>
+            <a:r>
+              <a:rPr kumimoji="0" lang="ru-RU" altLang="ru-RU" sz="3200" b="0" i="0" u="none" strike="noStrike" cap="none" normalizeH="0" baseline="0" dirty="0" err="1" smtClean="0">
+                <a:ln>
+                  <a:noFill/>
+                </a:ln>
+                <a:effectLst/>
+                <a:latin typeface="-apple-system"/>
+              </a:rPr>
+              <a:t>than</a:t>
+            </a:r>
+            <a:r>
+              <a:rPr kumimoji="0" lang="ru-RU" altLang="ru-RU" sz="3200" b="0" i="0" u="none" strike="noStrike" cap="none" normalizeH="0" baseline="0" dirty="0" smtClean="0">
+                <a:ln>
+                  <a:noFill/>
+                </a:ln>
+                <a:effectLst/>
+                <a:latin typeface="-apple-system"/>
+              </a:rPr>
+              <a:t>).</a:t>
+            </a:r>
+          </a:p>
+          <a:p>
+            <a:pPr marL="0" marR="0" lvl="0" indent="0" algn="l" defTabSz="914400" rtl="0" eaLnBrk="0" fontAlgn="base" latinLnBrk="0" hangingPunct="0">
+              <a:lnSpc>
+                <a:spcPct val="100000"/>
+              </a:lnSpc>
+              <a:spcBef>
+                <a:spcPct val="0"/>
+              </a:spcBef>
+              <a:spcAft>
+                <a:spcPct val="0"/>
+              </a:spcAft>
+              <a:buClrTx/>
+              <a:buSzTx/>
+              <a:buFontTx/>
+              <a:buChar char="•"/>
+              <a:tabLst/>
+            </a:pPr>
+            <a:r>
+              <a:rPr kumimoji="0" lang="ru-RU" altLang="ru-RU" sz="3200" b="0" i="0" u="none" strike="noStrike" cap="none" normalizeH="0" baseline="0" dirty="0" err="1" smtClean="0">
+                <a:ln>
+                  <a:noFill/>
+                </a:ln>
+                <a:effectLst/>
+                <a:latin typeface="Consolas" panose="020B0609020204030204" pitchFamily="49" charset="0"/>
+              </a:rPr>
+              <a:t>range</a:t>
+            </a:r>
+            <a:r>
+              <a:rPr kumimoji="0" lang="ru-RU" altLang="ru-RU" sz="3200" b="0" i="0" u="none" strike="noStrike" cap="none" normalizeH="0" baseline="0" dirty="0" smtClean="0">
+                <a:ln>
+                  <a:noFill/>
+                </a:ln>
+                <a:effectLst/>
+                <a:latin typeface="Consolas" panose="020B0609020204030204" pitchFamily="49" charset="0"/>
+              </a:rPr>
+              <a:t> &lt;старт&gt; &lt;конец&gt;</a:t>
+            </a:r>
+            <a:r>
+              <a:rPr kumimoji="0" lang="ru-RU" altLang="ru-RU" sz="3200" b="0" i="0" u="none" strike="noStrike" cap="none" normalizeH="0" baseline="0" dirty="0" smtClean="0">
+                <a:ln>
+                  <a:noFill/>
+                </a:ln>
+                <a:effectLst/>
+                <a:latin typeface="-apple-system"/>
+              </a:rPr>
+              <a:t> — диапазон портов.</a:t>
+            </a:r>
+          </a:p>
+          <a:p>
+            <a:pPr marL="0" marR="0" lvl="0" indent="0" algn="l" defTabSz="914400" rtl="0" eaLnBrk="0" fontAlgn="base" latinLnBrk="0" hangingPunct="0">
+              <a:lnSpc>
+                <a:spcPct val="100000"/>
+              </a:lnSpc>
+              <a:spcBef>
+                <a:spcPct val="0"/>
+              </a:spcBef>
+              <a:spcAft>
+                <a:spcPct val="0"/>
+              </a:spcAft>
+              <a:buClrTx/>
+              <a:buSzTx/>
+              <a:buFontTx/>
+              <a:buNone/>
+              <a:tabLst/>
+            </a:pPr>
+            <a:endParaRPr kumimoji="0" lang="ru-RU" altLang="ru-RU" sz="1800" b="0" i="0" u="none" strike="noStrike" cap="none" normalizeH="0" baseline="0" dirty="0" smtClean="0">
+              <a:ln>
+                <a:noFill/>
+              </a:ln>
+              <a:solidFill>
+                <a:schemeClr val="tx1"/>
+              </a:solidFill>
+              <a:effectLst/>
+              <a:latin typeface="Arial" panose="020B0604020202020204" pitchFamily="34" charset="0"/>
+            </a:endParaRPr>
+          </a:p>
+        </p:txBody>
+      </p:sp>
+    </p:spTree>
+    <p:extLst>
+      <p:ext uri="{BB962C8B-B14F-4D97-AF65-F5344CB8AC3E}">
+        <p14:creationId xmlns:p14="http://schemas.microsoft.com/office/powerpoint/2010/main" val="222020583"/>
       </p:ext>
     </p:extLst>
   </p:cSld>

--- a/1.10 Practice/1.10 Practice.pptx
+++ b/1.10 Practice/1.10 Practice.pptx
@@ -10,14 +10,16 @@
     <p:sldId id="259" r:id="rId4"/>
     <p:sldId id="260" r:id="rId5"/>
     <p:sldId id="261" r:id="rId6"/>
-    <p:sldId id="262" r:id="rId7"/>
-    <p:sldId id="264" r:id="rId8"/>
-    <p:sldId id="263" r:id="rId9"/>
-    <p:sldId id="265" r:id="rId10"/>
-    <p:sldId id="266" r:id="rId11"/>
-    <p:sldId id="267" r:id="rId12"/>
-    <p:sldId id="268" r:id="rId13"/>
-    <p:sldId id="269" r:id="rId14"/>
+    <p:sldId id="271" r:id="rId7"/>
+    <p:sldId id="273" r:id="rId8"/>
+    <p:sldId id="262" r:id="rId9"/>
+    <p:sldId id="264" r:id="rId10"/>
+    <p:sldId id="263" r:id="rId11"/>
+    <p:sldId id="265" r:id="rId12"/>
+    <p:sldId id="266" r:id="rId13"/>
+    <p:sldId id="267" r:id="rId14"/>
+    <p:sldId id="268" r:id="rId15"/>
+    <p:sldId id="269" r:id="rId16"/>
   </p:sldIdLst>
   <p:sldSz cx="12192000" cy="6858000"/>
   <p:notesSz cx="6858000" cy="9144000"/>
@@ -255,7 +257,7 @@
           <a:p>
             <a:fld id="{6ED376EB-5FF0-47A5-9975-500A3B41E1BB}" type="datetimeFigureOut">
               <a:rPr lang="ru-RU" smtClean="0"/>
-              <a:t>02.10.2026</a:t>
+              <a:t>07.10.2026</a:t>
             </a:fld>
             <a:endParaRPr lang="ru-RU"/>
           </a:p>
@@ -425,7 +427,7 @@
           <a:p>
             <a:fld id="{6ED376EB-5FF0-47A5-9975-500A3B41E1BB}" type="datetimeFigureOut">
               <a:rPr lang="ru-RU" smtClean="0"/>
-              <a:t>02.10.2026</a:t>
+              <a:t>07.10.2026</a:t>
             </a:fld>
             <a:endParaRPr lang="ru-RU"/>
           </a:p>
@@ -605,7 +607,7 @@
           <a:p>
             <a:fld id="{6ED376EB-5FF0-47A5-9975-500A3B41E1BB}" type="datetimeFigureOut">
               <a:rPr lang="ru-RU" smtClean="0"/>
-              <a:t>02.10.2026</a:t>
+              <a:t>07.10.2026</a:t>
             </a:fld>
             <a:endParaRPr lang="ru-RU"/>
           </a:p>
@@ -775,7 +777,7 @@
           <a:p>
             <a:fld id="{6ED376EB-5FF0-47A5-9975-500A3B41E1BB}" type="datetimeFigureOut">
               <a:rPr lang="ru-RU" smtClean="0"/>
-              <a:t>02.10.2026</a:t>
+              <a:t>07.10.2026</a:t>
             </a:fld>
             <a:endParaRPr lang="ru-RU"/>
           </a:p>
@@ -1021,7 +1023,7 @@
           <a:p>
             <a:fld id="{6ED376EB-5FF0-47A5-9975-500A3B41E1BB}" type="datetimeFigureOut">
               <a:rPr lang="ru-RU" smtClean="0"/>
-              <a:t>02.10.2026</a:t>
+              <a:t>07.10.2026</a:t>
             </a:fld>
             <a:endParaRPr lang="ru-RU"/>
           </a:p>
@@ -1253,7 +1255,7 @@
           <a:p>
             <a:fld id="{6ED376EB-5FF0-47A5-9975-500A3B41E1BB}" type="datetimeFigureOut">
               <a:rPr lang="ru-RU" smtClean="0"/>
-              <a:t>02.10.2026</a:t>
+              <a:t>07.10.2026</a:t>
             </a:fld>
             <a:endParaRPr lang="ru-RU"/>
           </a:p>
@@ -1620,7 +1622,7 @@
           <a:p>
             <a:fld id="{6ED376EB-5FF0-47A5-9975-500A3B41E1BB}" type="datetimeFigureOut">
               <a:rPr lang="ru-RU" smtClean="0"/>
-              <a:t>02.10.2026</a:t>
+              <a:t>07.10.2026</a:t>
             </a:fld>
             <a:endParaRPr lang="ru-RU"/>
           </a:p>
@@ -1738,7 +1740,7 @@
           <a:p>
             <a:fld id="{6ED376EB-5FF0-47A5-9975-500A3B41E1BB}" type="datetimeFigureOut">
               <a:rPr lang="ru-RU" smtClean="0"/>
-              <a:t>02.10.2026</a:t>
+              <a:t>07.10.2026</a:t>
             </a:fld>
             <a:endParaRPr lang="ru-RU"/>
           </a:p>
@@ -1833,7 +1835,7 @@
           <a:p>
             <a:fld id="{6ED376EB-5FF0-47A5-9975-500A3B41E1BB}" type="datetimeFigureOut">
               <a:rPr lang="ru-RU" smtClean="0"/>
-              <a:t>02.10.2026</a:t>
+              <a:t>07.10.2026</a:t>
             </a:fld>
             <a:endParaRPr lang="ru-RU"/>
           </a:p>
@@ -2110,7 +2112,7 @@
           <a:p>
             <a:fld id="{6ED376EB-5FF0-47A5-9975-500A3B41E1BB}" type="datetimeFigureOut">
               <a:rPr lang="ru-RU" smtClean="0"/>
-              <a:t>02.10.2026</a:t>
+              <a:t>07.10.2026</a:t>
             </a:fld>
             <a:endParaRPr lang="ru-RU"/>
           </a:p>
@@ -2363,7 +2365,7 @@
           <a:p>
             <a:fld id="{6ED376EB-5FF0-47A5-9975-500A3B41E1BB}" type="datetimeFigureOut">
               <a:rPr lang="ru-RU" smtClean="0"/>
-              <a:t>02.10.2026</a:t>
+              <a:t>07.10.2026</a:t>
             </a:fld>
             <a:endParaRPr lang="ru-RU"/>
           </a:p>
@@ -2576,7 +2578,7 @@
           <a:p>
             <a:fld id="{6ED376EB-5FF0-47A5-9975-500A3B41E1BB}" type="datetimeFigureOut">
               <a:rPr lang="ru-RU" smtClean="0"/>
-              <a:t>02.10.2026</a:t>
+              <a:t>07.10.2026</a:t>
             </a:fld>
             <a:endParaRPr lang="ru-RU"/>
           </a:p>
@@ -3703,6 +3705,996 @@
         </p:nvSpPr>
         <p:spPr>
           <a:xfrm>
+            <a:off x="218342" y="1424355"/>
+            <a:ext cx="11755315" cy="4607168"/>
+          </a:xfrm>
+          <a:prstGeom prst="rect">
+            <a:avLst/>
+          </a:prstGeom>
+          <a:solidFill>
+            <a:schemeClr val="tx1"/>
+          </a:solidFill>
+          <a:ln>
+            <a:solidFill>
+              <a:schemeClr val="tx1"/>
+            </a:solidFill>
+          </a:ln>
+        </p:spPr>
+        <p:txBody>
+          <a:bodyPr vert="horz" lIns="91440" tIns="45720" rIns="91440" bIns="45720" rtlCol="0" anchor="ctr">
+            <a:normAutofit/>
+          </a:bodyPr>
+          <a:lstStyle>
+            <a:lvl1pPr algn="l" defTabSz="914400" rtl="0" eaLnBrk="1" latinLnBrk="0" hangingPunct="1">
+              <a:lnSpc>
+                <a:spcPct val="90000"/>
+              </a:lnSpc>
+              <a:spcBef>
+                <a:spcPct val="0"/>
+              </a:spcBef>
+              <a:buNone/>
+              <a:defRPr sz="4400" kern="1200">
+                <a:solidFill>
+                  <a:schemeClr val="tx1"/>
+                </a:solidFill>
+                <a:latin typeface="+mj-lt"/>
+                <a:ea typeface="+mj-ea"/>
+                <a:cs typeface="+mj-cs"/>
+              </a:defRPr>
+            </a:lvl1pPr>
+          </a:lstStyle>
+          <a:p>
+            <a:endParaRPr lang="ru-RU" sz="2400" dirty="0" smtClean="0">
+              <a:solidFill>
+                <a:schemeClr val="bg1"/>
+              </a:solidFill>
+              <a:latin typeface="Consolas" panose="020B0609020204030204" pitchFamily="49" charset="0"/>
+            </a:endParaRPr>
+          </a:p>
+          <a:p>
+            <a:r>
+              <a:rPr lang="en-US" sz="2400" dirty="0">
+                <a:solidFill>
+                  <a:schemeClr val="bg1"/>
+                </a:solidFill>
+                <a:latin typeface="Consolas" panose="020B0609020204030204" pitchFamily="49" charset="0"/>
+              </a:rPr>
+              <a:t>Router(</a:t>
+            </a:r>
+            <a:r>
+              <a:rPr lang="en-US" sz="2400" dirty="0" err="1">
+                <a:solidFill>
+                  <a:schemeClr val="bg1"/>
+                </a:solidFill>
+                <a:latin typeface="Consolas" panose="020B0609020204030204" pitchFamily="49" charset="0"/>
+              </a:rPr>
+              <a:t>config</a:t>
+            </a:r>
+            <a:r>
+              <a:rPr lang="en-US" sz="2400" dirty="0">
+                <a:solidFill>
+                  <a:schemeClr val="bg1"/>
+                </a:solidFill>
+                <a:latin typeface="Consolas" panose="020B0609020204030204" pitchFamily="49" charset="0"/>
+              </a:rPr>
+              <a:t>)#(</a:t>
+            </a:r>
+            <a:r>
+              <a:rPr lang="en-US" sz="2400" dirty="0" err="1">
+                <a:solidFill>
+                  <a:schemeClr val="bg1"/>
+                </a:solidFill>
+                <a:latin typeface="Consolas" panose="020B0609020204030204" pitchFamily="49" charset="0"/>
+              </a:rPr>
+              <a:t>config</a:t>
+            </a:r>
+            <a:r>
+              <a:rPr lang="en-US" sz="2400" dirty="0">
+                <a:solidFill>
+                  <a:schemeClr val="bg1"/>
+                </a:solidFill>
+                <a:latin typeface="Consolas" panose="020B0609020204030204" pitchFamily="49" charset="0"/>
+              </a:rPr>
+              <a:t>)#</a:t>
+            </a:r>
+            <a:r>
+              <a:rPr lang="en-US" sz="2400" dirty="0" err="1">
+                <a:solidFill>
+                  <a:schemeClr val="bg1"/>
+                </a:solidFill>
+                <a:latin typeface="Consolas" panose="020B0609020204030204" pitchFamily="49" charset="0"/>
+              </a:rPr>
+              <a:t>ip</a:t>
+            </a:r>
+            <a:r>
+              <a:rPr lang="en-US" sz="2400" dirty="0">
+                <a:solidFill>
+                  <a:schemeClr val="bg1"/>
+                </a:solidFill>
+                <a:latin typeface="Consolas" panose="020B0609020204030204" pitchFamily="49" charset="0"/>
+              </a:rPr>
+              <a:t> access-list extended ?</a:t>
+            </a:r>
+          </a:p>
+          <a:p>
+            <a:r>
+              <a:rPr lang="en-US" sz="2400" dirty="0">
+                <a:solidFill>
+                  <a:schemeClr val="bg1"/>
+                </a:solidFill>
+                <a:latin typeface="Consolas" panose="020B0609020204030204" pitchFamily="49" charset="0"/>
+              </a:rPr>
+              <a:t>  &lt;100-199&gt;    Extended IP access-list number</a:t>
+            </a:r>
+          </a:p>
+          <a:p>
+            <a:r>
+              <a:rPr lang="en-US" sz="2400" dirty="0">
+                <a:solidFill>
+                  <a:schemeClr val="bg1"/>
+                </a:solidFill>
+                <a:latin typeface="Consolas" panose="020B0609020204030204" pitchFamily="49" charset="0"/>
+              </a:rPr>
+              <a:t>  &lt;2000-2699&gt;  Extended IP access-list number (expanded range)</a:t>
+            </a:r>
+          </a:p>
+          <a:p>
+            <a:r>
+              <a:rPr lang="en-US" sz="2400" dirty="0">
+                <a:solidFill>
+                  <a:schemeClr val="bg1"/>
+                </a:solidFill>
+                <a:latin typeface="Consolas" panose="020B0609020204030204" pitchFamily="49" charset="0"/>
+              </a:rPr>
+              <a:t>  WORD         Access-list name</a:t>
+            </a:r>
+          </a:p>
+          <a:p>
+            <a:endParaRPr lang="ru-RU" sz="2400" dirty="0">
+              <a:solidFill>
+                <a:schemeClr val="bg1"/>
+              </a:solidFill>
+              <a:latin typeface="Consolas" panose="020B0609020204030204" pitchFamily="49" charset="0"/>
+            </a:endParaRPr>
+          </a:p>
+          <a:p>
+            <a:endParaRPr lang="ru-RU" sz="2400" dirty="0">
+              <a:solidFill>
+                <a:schemeClr val="bg1"/>
+              </a:solidFill>
+              <a:latin typeface="Consolas" panose="020B0609020204030204" pitchFamily="49" charset="0"/>
+            </a:endParaRPr>
+          </a:p>
+          <a:p>
+            <a:r>
+              <a:rPr lang="en-US" sz="2400" dirty="0">
+                <a:solidFill>
+                  <a:schemeClr val="bg1"/>
+                </a:solidFill>
+                <a:latin typeface="Consolas" panose="020B0609020204030204" pitchFamily="49" charset="0"/>
+              </a:rPr>
+              <a:t>Router(</a:t>
+            </a:r>
+            <a:r>
+              <a:rPr lang="en-US" sz="2400" dirty="0" err="1">
+                <a:solidFill>
+                  <a:schemeClr val="bg1"/>
+                </a:solidFill>
+                <a:latin typeface="Consolas" panose="020B0609020204030204" pitchFamily="49" charset="0"/>
+              </a:rPr>
+              <a:t>config</a:t>
+            </a:r>
+            <a:r>
+              <a:rPr lang="en-US" sz="2400" dirty="0">
+                <a:solidFill>
+                  <a:schemeClr val="bg1"/>
+                </a:solidFill>
+                <a:latin typeface="Consolas" panose="020B0609020204030204" pitchFamily="49" charset="0"/>
+              </a:rPr>
+              <a:t>)# </a:t>
+            </a:r>
+            <a:r>
+              <a:rPr lang="en-US" sz="2400" dirty="0" err="1">
+                <a:solidFill>
+                  <a:schemeClr val="bg1"/>
+                </a:solidFill>
+                <a:latin typeface="Consolas" panose="020B0609020204030204" pitchFamily="49" charset="0"/>
+              </a:rPr>
+              <a:t>ip</a:t>
+            </a:r>
+            <a:r>
+              <a:rPr lang="en-US" sz="2400" dirty="0">
+                <a:solidFill>
+                  <a:schemeClr val="bg1"/>
+                </a:solidFill>
+                <a:latin typeface="Consolas" panose="020B0609020204030204" pitchFamily="49" charset="0"/>
+              </a:rPr>
+              <a:t> access-list extended &lt;</a:t>
+            </a:r>
+            <a:r>
+              <a:rPr lang="ru-RU" sz="2400" dirty="0">
+                <a:solidFill>
+                  <a:schemeClr val="bg1"/>
+                </a:solidFill>
+                <a:latin typeface="Consolas" panose="020B0609020204030204" pitchFamily="49" charset="0"/>
+              </a:rPr>
+              <a:t>ИМЯ_ИЛИ_НОМЕР&gt;</a:t>
+            </a:r>
+          </a:p>
+          <a:p>
+            <a:endParaRPr lang="ru-RU" sz="2400" dirty="0">
+              <a:solidFill>
+                <a:schemeClr val="bg1"/>
+              </a:solidFill>
+              <a:latin typeface="Consolas" panose="020B0609020204030204" pitchFamily="49" charset="0"/>
+            </a:endParaRPr>
+          </a:p>
+          <a:p>
+            <a:r>
+              <a:rPr lang="en-US" sz="2400" dirty="0">
+                <a:solidFill>
+                  <a:schemeClr val="bg1"/>
+                </a:solidFill>
+                <a:latin typeface="Consolas" panose="020B0609020204030204" pitchFamily="49" charset="0"/>
+              </a:rPr>
+              <a:t>Router(</a:t>
+            </a:r>
+            <a:r>
+              <a:rPr lang="en-US" sz="2400" dirty="0" err="1">
+                <a:solidFill>
+                  <a:schemeClr val="bg1"/>
+                </a:solidFill>
+                <a:latin typeface="Consolas" panose="020B0609020204030204" pitchFamily="49" charset="0"/>
+              </a:rPr>
+              <a:t>config-ext-nacl</a:t>
+            </a:r>
+            <a:r>
+              <a:rPr lang="en-US" sz="2400" dirty="0">
+                <a:solidFill>
+                  <a:schemeClr val="bg1"/>
+                </a:solidFill>
+                <a:latin typeface="Consolas" panose="020B0609020204030204" pitchFamily="49" charset="0"/>
+              </a:rPr>
+              <a:t>)# [permit | deny] &lt;</a:t>
+            </a:r>
+            <a:r>
+              <a:rPr lang="ru-RU" sz="2400" dirty="0">
+                <a:solidFill>
+                  <a:schemeClr val="bg1"/>
+                </a:solidFill>
+                <a:latin typeface="Consolas" panose="020B0609020204030204" pitchFamily="49" charset="0"/>
+              </a:rPr>
+              <a:t>ПРОТОКОЛ&gt; \</a:t>
+            </a:r>
+          </a:p>
+          <a:p>
+            <a:r>
+              <a:rPr lang="ru-RU" sz="2400" dirty="0">
+                <a:solidFill>
+                  <a:schemeClr val="bg1"/>
+                </a:solidFill>
+                <a:latin typeface="Consolas" panose="020B0609020204030204" pitchFamily="49" charset="0"/>
+              </a:rPr>
+              <a:t>    &lt;ИСТОЧНИК&gt; &lt;</a:t>
+            </a:r>
+            <a:r>
+              <a:rPr lang="en-US" sz="2400" dirty="0">
+                <a:solidFill>
+                  <a:schemeClr val="bg1"/>
+                </a:solidFill>
+                <a:latin typeface="Consolas" panose="020B0609020204030204" pitchFamily="49" charset="0"/>
+              </a:rPr>
+              <a:t>WILDCARD_</a:t>
+            </a:r>
+            <a:r>
+              <a:rPr lang="ru-RU" sz="2400" dirty="0">
+                <a:solidFill>
+                  <a:schemeClr val="bg1"/>
+                </a:solidFill>
+                <a:latin typeface="Consolas" panose="020B0609020204030204" pitchFamily="49" charset="0"/>
+              </a:rPr>
+              <a:t>ИСТОЧНИКА&gt; [ОПЕРАТОР ПОРТ_ИСТОЧНИКА] \</a:t>
+            </a:r>
+          </a:p>
+          <a:p>
+            <a:r>
+              <a:rPr lang="ru-RU" sz="2400" dirty="0">
+                <a:solidFill>
+                  <a:schemeClr val="bg1"/>
+                </a:solidFill>
+                <a:latin typeface="Consolas" panose="020B0609020204030204" pitchFamily="49" charset="0"/>
+              </a:rPr>
+              <a:t>    &lt;НАЗНАЧЕНИЕ&gt; &lt;</a:t>
+            </a:r>
+            <a:r>
+              <a:rPr lang="en-US" sz="2400" dirty="0">
+                <a:solidFill>
+                  <a:schemeClr val="bg1"/>
+                </a:solidFill>
+                <a:latin typeface="Consolas" panose="020B0609020204030204" pitchFamily="49" charset="0"/>
+              </a:rPr>
+              <a:t>WILDCARD_</a:t>
+            </a:r>
+            <a:r>
+              <a:rPr lang="ru-RU" sz="2400" dirty="0">
+                <a:solidFill>
+                  <a:schemeClr val="bg1"/>
+                </a:solidFill>
+                <a:latin typeface="Consolas" panose="020B0609020204030204" pitchFamily="49" charset="0"/>
+              </a:rPr>
+              <a:t>НАЗНАЧЕНИЯ&gt; [ОПЕРАТОР ПОРТ_НАЗНАЧЕНИЯ]</a:t>
+            </a:r>
+          </a:p>
+          <a:p>
+            <a:endParaRPr lang="ru-RU" sz="2400" dirty="0">
+              <a:solidFill>
+                <a:schemeClr val="bg1"/>
+              </a:solidFill>
+              <a:latin typeface="Consolas" panose="020B0609020204030204" pitchFamily="49" charset="0"/>
+            </a:endParaRPr>
+          </a:p>
+          <a:p>
+            <a:endParaRPr lang="en-US" sz="2400" dirty="0">
+              <a:solidFill>
+                <a:schemeClr val="bg1"/>
+              </a:solidFill>
+              <a:latin typeface="Consolas" panose="020B0609020204030204" pitchFamily="49" charset="0"/>
+            </a:endParaRPr>
+          </a:p>
+        </p:txBody>
+      </p:sp>
+    </p:spTree>
+    <p:extLst>
+      <p:ext uri="{BB962C8B-B14F-4D97-AF65-F5344CB8AC3E}">
+        <p14:creationId xmlns:p14="http://schemas.microsoft.com/office/powerpoint/2010/main" val="3383313223"/>
+      </p:ext>
+    </p:extLst>
+  </p:cSld>
+  <p:clrMapOvr>
+    <a:masterClrMapping/>
+  </p:clrMapOvr>
+  <p:timing>
+    <p:tnLst>
+      <p:par>
+        <p:cTn id="1" dur="indefinite" restart="never" nodeType="tmRoot"/>
+      </p:par>
+    </p:tnLst>
+  </p:timing>
+</p:sld>
+</file>
+
+<file path=ppt/slides/slide11.xml><?xml version="1.0" encoding="utf-8"?>
+<p:sld xmlns:a="http://schemas.openxmlformats.org/drawingml/2006/main" xmlns:r="http://schemas.openxmlformats.org/officeDocument/2006/relationships" xmlns:p="http://schemas.openxmlformats.org/presentationml/2006/main">
+  <p:cSld>
+    <p:spTree>
+      <p:nvGrpSpPr>
+        <p:cNvPr id="1" name=""/>
+        <p:cNvGrpSpPr/>
+        <p:nvPr/>
+      </p:nvGrpSpPr>
+      <p:grpSpPr>
+        <a:xfrm>
+          <a:off x="0" y="0"/>
+          <a:ext cx="0" cy="0"/>
+          <a:chOff x="0" y="0"/>
+          <a:chExt cx="0" cy="0"/>
+        </a:xfrm>
+      </p:grpSpPr>
+      <p:sp>
+        <p:nvSpPr>
+          <p:cNvPr id="2" name="Заголовок 1"/>
+          <p:cNvSpPr>
+            <a:spLocks noGrp="1"/>
+          </p:cNvSpPr>
+          <p:nvPr>
+            <p:ph type="title"/>
+          </p:nvPr>
+        </p:nvSpPr>
+        <p:spPr/>
+        <p:txBody>
+          <a:bodyPr/>
+          <a:lstStyle/>
+          <a:p>
+            <a:r>
+              <a:rPr lang="ru-RU" dirty="0" smtClean="0"/>
+              <a:t>Операторы портов в </a:t>
+            </a:r>
+            <a:r>
+              <a:rPr lang="en-US" dirty="0" smtClean="0"/>
+              <a:t>Extended ACL</a:t>
+            </a:r>
+            <a:endParaRPr lang="ru-RU" dirty="0"/>
+          </a:p>
+        </p:txBody>
+      </p:sp>
+      <p:sp>
+        <p:nvSpPr>
+          <p:cNvPr id="4" name="Rectangle 1"/>
+          <p:cNvSpPr>
+            <a:spLocks noGrp="1" noChangeArrowheads="1"/>
+          </p:cNvSpPr>
+          <p:nvPr>
+            <p:ph idx="1"/>
+          </p:nvPr>
+        </p:nvSpPr>
+        <p:spPr bwMode="auto">
+          <a:xfrm>
+            <a:off x="838200" y="2437105"/>
+            <a:ext cx="10835402" cy="3128385"/>
+          </a:xfrm>
+          <a:prstGeom prst="rect">
+            <a:avLst/>
+          </a:prstGeom>
+          <a:solidFill>
+            <a:schemeClr val="bg1"/>
+          </a:solidFill>
+          <a:ln>
+            <a:noFill/>
+          </a:ln>
+          <a:effectLst/>
+        </p:spPr>
+        <p:txBody>
+          <a:bodyPr vert="horz" wrap="none" lIns="91440" tIns="0" rIns="91440" bIns="111090" numCol="1" anchor="ctr" anchorCtr="0" compatLnSpc="1">
+            <a:prstTxWarp prst="textNoShape">
+              <a:avLst/>
+            </a:prstTxWarp>
+            <a:spAutoFit/>
+          </a:bodyPr>
+          <a:lstStyle/>
+          <a:p>
+            <a:pPr marL="0" marR="0" lvl="0" indent="0" algn="l" defTabSz="914400" rtl="0" eaLnBrk="0" fontAlgn="base" latinLnBrk="0" hangingPunct="0">
+              <a:lnSpc>
+                <a:spcPct val="100000"/>
+              </a:lnSpc>
+              <a:spcBef>
+                <a:spcPct val="0"/>
+              </a:spcBef>
+              <a:spcAft>
+                <a:spcPct val="0"/>
+              </a:spcAft>
+              <a:buClrTx/>
+              <a:buSzTx/>
+              <a:buFontTx/>
+              <a:buNone/>
+              <a:tabLst/>
+            </a:pPr>
+            <a:endParaRPr kumimoji="0" lang="ru-RU" altLang="ru-RU" sz="1800" b="0" i="0" u="none" strike="noStrike" cap="none" normalizeH="0" baseline="0" dirty="0" smtClean="0">
+              <a:ln>
+                <a:noFill/>
+              </a:ln>
+              <a:solidFill>
+                <a:schemeClr val="tx1"/>
+              </a:solidFill>
+              <a:effectLst/>
+              <a:latin typeface="Arial" panose="020B0604020202020204" pitchFamily="34" charset="0"/>
+            </a:endParaRPr>
+          </a:p>
+          <a:p>
+            <a:pPr marL="0" marR="0" lvl="0" indent="0" algn="l" defTabSz="914400" rtl="0" eaLnBrk="0" fontAlgn="base" latinLnBrk="0" hangingPunct="0">
+              <a:lnSpc>
+                <a:spcPct val="100000"/>
+              </a:lnSpc>
+              <a:spcBef>
+                <a:spcPct val="0"/>
+              </a:spcBef>
+              <a:spcAft>
+                <a:spcPct val="0"/>
+              </a:spcAft>
+              <a:buClrTx/>
+              <a:buSzTx/>
+              <a:buFontTx/>
+              <a:buChar char="•"/>
+              <a:tabLst/>
+            </a:pPr>
+            <a:r>
+              <a:rPr kumimoji="0" lang="ru-RU" altLang="ru-RU" sz="3200" b="0" i="0" u="none" strike="noStrike" cap="none" normalizeH="0" baseline="0" dirty="0" err="1" smtClean="0">
+                <a:ln>
+                  <a:noFill/>
+                </a:ln>
+                <a:effectLst/>
+                <a:latin typeface="Consolas" panose="020B0609020204030204" pitchFamily="49" charset="0"/>
+              </a:rPr>
+              <a:t>eq</a:t>
+            </a:r>
+            <a:r>
+              <a:rPr kumimoji="0" lang="ru-RU" altLang="ru-RU" sz="3200" b="0" i="0" u="none" strike="noStrike" cap="none" normalizeH="0" baseline="0" dirty="0" smtClean="0">
+                <a:ln>
+                  <a:noFill/>
+                </a:ln>
+                <a:effectLst/>
+                <a:latin typeface="Consolas" panose="020B0609020204030204" pitchFamily="49" charset="0"/>
+              </a:rPr>
+              <a:t> &lt;</a:t>
+            </a:r>
+            <a:r>
+              <a:rPr kumimoji="0" lang="ru-RU" altLang="ru-RU" sz="3200" b="0" i="0" u="none" strike="noStrike" cap="none" normalizeH="0" baseline="0" dirty="0" err="1" smtClean="0">
+                <a:ln>
+                  <a:noFill/>
+                </a:ln>
+                <a:effectLst/>
+                <a:latin typeface="Consolas" panose="020B0609020204030204" pitchFamily="49" charset="0"/>
+              </a:rPr>
+              <a:t>номер|имя</a:t>
+            </a:r>
+            <a:r>
+              <a:rPr kumimoji="0" lang="ru-RU" altLang="ru-RU" sz="3200" b="0" i="0" u="none" strike="noStrike" cap="none" normalizeH="0" baseline="0" dirty="0" smtClean="0">
+                <a:ln>
+                  <a:noFill/>
+                </a:ln>
+                <a:effectLst/>
+                <a:latin typeface="Consolas" panose="020B0609020204030204" pitchFamily="49" charset="0"/>
+              </a:rPr>
+              <a:t>&gt;</a:t>
+            </a:r>
+            <a:r>
+              <a:rPr kumimoji="0" lang="ru-RU" altLang="ru-RU" sz="3200" b="0" i="0" u="none" strike="noStrike" cap="none" normalizeH="0" baseline="0" dirty="0" smtClean="0">
+                <a:ln>
+                  <a:noFill/>
+                </a:ln>
+                <a:effectLst/>
+                <a:latin typeface="-apple-system"/>
+              </a:rPr>
+              <a:t> — строгое равенство (</a:t>
+            </a:r>
+            <a:r>
+              <a:rPr kumimoji="0" lang="ru-RU" altLang="ru-RU" sz="3200" b="0" i="0" u="none" strike="noStrike" cap="none" normalizeH="0" baseline="0" dirty="0" err="1" smtClean="0">
+                <a:ln>
+                  <a:noFill/>
+                </a:ln>
+                <a:effectLst/>
+                <a:latin typeface="-apple-system"/>
+              </a:rPr>
+              <a:t>equal</a:t>
+            </a:r>
+            <a:r>
+              <a:rPr kumimoji="0" lang="ru-RU" altLang="ru-RU" sz="3200" b="0" i="0" u="none" strike="noStrike" cap="none" normalizeH="0" baseline="0" dirty="0" smtClean="0">
+                <a:ln>
+                  <a:noFill/>
+                </a:ln>
+                <a:effectLst/>
+                <a:latin typeface="-apple-system"/>
+              </a:rPr>
+              <a:t>).</a:t>
+            </a:r>
+          </a:p>
+          <a:p>
+            <a:pPr marL="0" marR="0" lvl="0" indent="0" algn="l" defTabSz="914400" rtl="0" eaLnBrk="0" fontAlgn="base" latinLnBrk="0" hangingPunct="0">
+              <a:lnSpc>
+                <a:spcPct val="100000"/>
+              </a:lnSpc>
+              <a:spcBef>
+                <a:spcPct val="0"/>
+              </a:spcBef>
+              <a:spcAft>
+                <a:spcPct val="0"/>
+              </a:spcAft>
+              <a:buClrTx/>
+              <a:buSzTx/>
+              <a:buFontTx/>
+              <a:buChar char="•"/>
+              <a:tabLst/>
+            </a:pPr>
+            <a:r>
+              <a:rPr kumimoji="0" lang="ru-RU" altLang="ru-RU" sz="3200" b="0" i="0" u="none" strike="noStrike" cap="none" normalizeH="0" baseline="0" dirty="0" err="1" smtClean="0">
+                <a:ln>
+                  <a:noFill/>
+                </a:ln>
+                <a:effectLst/>
+                <a:latin typeface="Consolas" panose="020B0609020204030204" pitchFamily="49" charset="0"/>
+              </a:rPr>
+              <a:t>neq</a:t>
+            </a:r>
+            <a:r>
+              <a:rPr kumimoji="0" lang="ru-RU" altLang="ru-RU" sz="3200" b="0" i="0" u="none" strike="noStrike" cap="none" normalizeH="0" baseline="0" dirty="0" smtClean="0">
+                <a:ln>
+                  <a:noFill/>
+                </a:ln>
+                <a:effectLst/>
+                <a:latin typeface="Consolas" panose="020B0609020204030204" pitchFamily="49" charset="0"/>
+              </a:rPr>
+              <a:t> &lt;</a:t>
+            </a:r>
+            <a:r>
+              <a:rPr kumimoji="0" lang="ru-RU" altLang="ru-RU" sz="3200" b="0" i="0" u="none" strike="noStrike" cap="none" normalizeH="0" baseline="0" dirty="0" err="1" smtClean="0">
+                <a:ln>
+                  <a:noFill/>
+                </a:ln>
+                <a:effectLst/>
+                <a:latin typeface="Consolas" panose="020B0609020204030204" pitchFamily="49" charset="0"/>
+              </a:rPr>
+              <a:t>номер|имя</a:t>
+            </a:r>
+            <a:r>
+              <a:rPr kumimoji="0" lang="ru-RU" altLang="ru-RU" sz="3200" b="0" i="0" u="none" strike="noStrike" cap="none" normalizeH="0" baseline="0" dirty="0" smtClean="0">
+                <a:ln>
+                  <a:noFill/>
+                </a:ln>
+                <a:effectLst/>
+                <a:latin typeface="Consolas" panose="020B0609020204030204" pitchFamily="49" charset="0"/>
+              </a:rPr>
+              <a:t>&gt;</a:t>
+            </a:r>
+            <a:r>
+              <a:rPr kumimoji="0" lang="ru-RU" altLang="ru-RU" sz="3200" b="0" i="0" u="none" strike="noStrike" cap="none" normalizeH="0" baseline="0" dirty="0" smtClean="0">
+                <a:ln>
+                  <a:noFill/>
+                </a:ln>
+                <a:effectLst/>
+                <a:latin typeface="-apple-system"/>
+              </a:rPr>
+              <a:t> — все, кроме указанного (</a:t>
+            </a:r>
+            <a:r>
+              <a:rPr kumimoji="0" lang="ru-RU" altLang="ru-RU" sz="3200" b="0" i="0" u="none" strike="noStrike" cap="none" normalizeH="0" baseline="0" dirty="0" err="1" smtClean="0">
+                <a:ln>
+                  <a:noFill/>
+                </a:ln>
+                <a:effectLst/>
+                <a:latin typeface="-apple-system"/>
+              </a:rPr>
+              <a:t>not</a:t>
+            </a:r>
+            <a:r>
+              <a:rPr kumimoji="0" lang="ru-RU" altLang="ru-RU" sz="3200" b="0" i="0" u="none" strike="noStrike" cap="none" normalizeH="0" baseline="0" dirty="0" smtClean="0">
+                <a:ln>
+                  <a:noFill/>
+                </a:ln>
+                <a:effectLst/>
+                <a:latin typeface="-apple-system"/>
+              </a:rPr>
+              <a:t> </a:t>
+            </a:r>
+            <a:r>
+              <a:rPr kumimoji="0" lang="ru-RU" altLang="ru-RU" sz="3200" b="0" i="0" u="none" strike="noStrike" cap="none" normalizeH="0" baseline="0" dirty="0" err="1" smtClean="0">
+                <a:ln>
+                  <a:noFill/>
+                </a:ln>
+                <a:effectLst/>
+                <a:latin typeface="-apple-system"/>
+              </a:rPr>
+              <a:t>equal</a:t>
+            </a:r>
+            <a:r>
+              <a:rPr kumimoji="0" lang="ru-RU" altLang="ru-RU" sz="3200" b="0" i="0" u="none" strike="noStrike" cap="none" normalizeH="0" baseline="0" dirty="0" smtClean="0">
+                <a:ln>
+                  <a:noFill/>
+                </a:ln>
+                <a:effectLst/>
+                <a:latin typeface="-apple-system"/>
+              </a:rPr>
+              <a:t>).</a:t>
+            </a:r>
+          </a:p>
+          <a:p>
+            <a:pPr marL="0" marR="0" lvl="0" indent="0" algn="l" defTabSz="914400" rtl="0" eaLnBrk="0" fontAlgn="base" latinLnBrk="0" hangingPunct="0">
+              <a:lnSpc>
+                <a:spcPct val="100000"/>
+              </a:lnSpc>
+              <a:spcBef>
+                <a:spcPct val="0"/>
+              </a:spcBef>
+              <a:spcAft>
+                <a:spcPct val="0"/>
+              </a:spcAft>
+              <a:buClrTx/>
+              <a:buSzTx/>
+              <a:buFontTx/>
+              <a:buChar char="•"/>
+              <a:tabLst/>
+            </a:pPr>
+            <a:r>
+              <a:rPr kumimoji="0" lang="ru-RU" altLang="ru-RU" sz="3200" b="0" i="0" u="none" strike="noStrike" cap="none" normalizeH="0" baseline="0" dirty="0" err="1" smtClean="0">
+                <a:ln>
+                  <a:noFill/>
+                </a:ln>
+                <a:effectLst/>
+                <a:latin typeface="Consolas" panose="020B0609020204030204" pitchFamily="49" charset="0"/>
+              </a:rPr>
+              <a:t>gt</a:t>
+            </a:r>
+            <a:r>
+              <a:rPr kumimoji="0" lang="ru-RU" altLang="ru-RU" sz="3200" b="0" i="0" u="none" strike="noStrike" cap="none" normalizeH="0" baseline="0" dirty="0" smtClean="0">
+                <a:ln>
+                  <a:noFill/>
+                </a:ln>
+                <a:effectLst/>
+                <a:latin typeface="Consolas" panose="020B0609020204030204" pitchFamily="49" charset="0"/>
+              </a:rPr>
+              <a:t> &lt;номер&gt;</a:t>
+            </a:r>
+            <a:r>
+              <a:rPr kumimoji="0" lang="ru-RU" altLang="ru-RU" sz="3200" b="0" i="0" u="none" strike="noStrike" cap="none" normalizeH="0" baseline="0" dirty="0" smtClean="0">
+                <a:ln>
+                  <a:noFill/>
+                </a:ln>
+                <a:effectLst/>
+                <a:latin typeface="-apple-system"/>
+              </a:rPr>
+              <a:t> — строго больше (</a:t>
+            </a:r>
+            <a:r>
+              <a:rPr kumimoji="0" lang="ru-RU" altLang="ru-RU" sz="3200" b="0" i="0" u="none" strike="noStrike" cap="none" normalizeH="0" baseline="0" dirty="0" err="1" smtClean="0">
+                <a:ln>
+                  <a:noFill/>
+                </a:ln>
+                <a:effectLst/>
+                <a:latin typeface="-apple-system"/>
+              </a:rPr>
+              <a:t>greater</a:t>
+            </a:r>
+            <a:r>
+              <a:rPr kumimoji="0" lang="ru-RU" altLang="ru-RU" sz="3200" b="0" i="0" u="none" strike="noStrike" cap="none" normalizeH="0" baseline="0" dirty="0" smtClean="0">
+                <a:ln>
+                  <a:noFill/>
+                </a:ln>
+                <a:effectLst/>
+                <a:latin typeface="-apple-system"/>
+              </a:rPr>
+              <a:t> </a:t>
+            </a:r>
+            <a:r>
+              <a:rPr kumimoji="0" lang="ru-RU" altLang="ru-RU" sz="3200" b="0" i="0" u="none" strike="noStrike" cap="none" normalizeH="0" baseline="0" dirty="0" err="1" smtClean="0">
+                <a:ln>
+                  <a:noFill/>
+                </a:ln>
+                <a:effectLst/>
+                <a:latin typeface="-apple-system"/>
+              </a:rPr>
+              <a:t>than</a:t>
+            </a:r>
+            <a:r>
+              <a:rPr kumimoji="0" lang="ru-RU" altLang="ru-RU" sz="3200" b="0" i="0" u="none" strike="noStrike" cap="none" normalizeH="0" baseline="0" dirty="0" smtClean="0">
+                <a:ln>
+                  <a:noFill/>
+                </a:ln>
+                <a:effectLst/>
+                <a:latin typeface="-apple-system"/>
+              </a:rPr>
+              <a:t>).</a:t>
+            </a:r>
+          </a:p>
+          <a:p>
+            <a:pPr marL="0" marR="0" lvl="0" indent="0" algn="l" defTabSz="914400" rtl="0" eaLnBrk="0" fontAlgn="base" latinLnBrk="0" hangingPunct="0">
+              <a:lnSpc>
+                <a:spcPct val="100000"/>
+              </a:lnSpc>
+              <a:spcBef>
+                <a:spcPct val="0"/>
+              </a:spcBef>
+              <a:spcAft>
+                <a:spcPct val="0"/>
+              </a:spcAft>
+              <a:buClrTx/>
+              <a:buSzTx/>
+              <a:buFontTx/>
+              <a:buChar char="•"/>
+              <a:tabLst/>
+            </a:pPr>
+            <a:r>
+              <a:rPr kumimoji="0" lang="ru-RU" altLang="ru-RU" sz="3200" b="0" i="0" u="none" strike="noStrike" cap="none" normalizeH="0" baseline="0" dirty="0" err="1" smtClean="0">
+                <a:ln>
+                  <a:noFill/>
+                </a:ln>
+                <a:effectLst/>
+                <a:latin typeface="Consolas" panose="020B0609020204030204" pitchFamily="49" charset="0"/>
+              </a:rPr>
+              <a:t>lt</a:t>
+            </a:r>
+            <a:r>
+              <a:rPr kumimoji="0" lang="ru-RU" altLang="ru-RU" sz="3200" b="0" i="0" u="none" strike="noStrike" cap="none" normalizeH="0" baseline="0" dirty="0" smtClean="0">
+                <a:ln>
+                  <a:noFill/>
+                </a:ln>
+                <a:effectLst/>
+                <a:latin typeface="Consolas" panose="020B0609020204030204" pitchFamily="49" charset="0"/>
+              </a:rPr>
+              <a:t> &lt;номер&gt;</a:t>
+            </a:r>
+            <a:r>
+              <a:rPr kumimoji="0" lang="ru-RU" altLang="ru-RU" sz="3200" b="0" i="0" u="none" strike="noStrike" cap="none" normalizeH="0" baseline="0" dirty="0" smtClean="0">
+                <a:ln>
+                  <a:noFill/>
+                </a:ln>
+                <a:effectLst/>
+                <a:latin typeface="-apple-system"/>
+              </a:rPr>
+              <a:t> — строго меньше (</a:t>
+            </a:r>
+            <a:r>
+              <a:rPr kumimoji="0" lang="ru-RU" altLang="ru-RU" sz="3200" b="0" i="0" u="none" strike="noStrike" cap="none" normalizeH="0" baseline="0" dirty="0" err="1" smtClean="0">
+                <a:ln>
+                  <a:noFill/>
+                </a:ln>
+                <a:effectLst/>
+                <a:latin typeface="-apple-system"/>
+              </a:rPr>
+              <a:t>less</a:t>
+            </a:r>
+            <a:r>
+              <a:rPr kumimoji="0" lang="ru-RU" altLang="ru-RU" sz="3200" b="0" i="0" u="none" strike="noStrike" cap="none" normalizeH="0" baseline="0" dirty="0" smtClean="0">
+                <a:ln>
+                  <a:noFill/>
+                </a:ln>
+                <a:effectLst/>
+                <a:latin typeface="-apple-system"/>
+              </a:rPr>
+              <a:t> </a:t>
+            </a:r>
+            <a:r>
+              <a:rPr kumimoji="0" lang="ru-RU" altLang="ru-RU" sz="3200" b="0" i="0" u="none" strike="noStrike" cap="none" normalizeH="0" baseline="0" dirty="0" err="1" smtClean="0">
+                <a:ln>
+                  <a:noFill/>
+                </a:ln>
+                <a:effectLst/>
+                <a:latin typeface="-apple-system"/>
+              </a:rPr>
+              <a:t>than</a:t>
+            </a:r>
+            <a:r>
+              <a:rPr kumimoji="0" lang="ru-RU" altLang="ru-RU" sz="3200" b="0" i="0" u="none" strike="noStrike" cap="none" normalizeH="0" baseline="0" dirty="0" smtClean="0">
+                <a:ln>
+                  <a:noFill/>
+                </a:ln>
+                <a:effectLst/>
+                <a:latin typeface="-apple-system"/>
+              </a:rPr>
+              <a:t>).</a:t>
+            </a:r>
+          </a:p>
+          <a:p>
+            <a:pPr marL="0" marR="0" lvl="0" indent="0" algn="l" defTabSz="914400" rtl="0" eaLnBrk="0" fontAlgn="base" latinLnBrk="0" hangingPunct="0">
+              <a:lnSpc>
+                <a:spcPct val="100000"/>
+              </a:lnSpc>
+              <a:spcBef>
+                <a:spcPct val="0"/>
+              </a:spcBef>
+              <a:spcAft>
+                <a:spcPct val="0"/>
+              </a:spcAft>
+              <a:buClrTx/>
+              <a:buSzTx/>
+              <a:buFontTx/>
+              <a:buChar char="•"/>
+              <a:tabLst/>
+            </a:pPr>
+            <a:r>
+              <a:rPr kumimoji="0" lang="ru-RU" altLang="ru-RU" sz="3200" b="0" i="0" u="none" strike="noStrike" cap="none" normalizeH="0" baseline="0" dirty="0" err="1" smtClean="0">
+                <a:ln>
+                  <a:noFill/>
+                </a:ln>
+                <a:effectLst/>
+                <a:latin typeface="Consolas" panose="020B0609020204030204" pitchFamily="49" charset="0"/>
+              </a:rPr>
+              <a:t>range</a:t>
+            </a:r>
+            <a:r>
+              <a:rPr kumimoji="0" lang="ru-RU" altLang="ru-RU" sz="3200" b="0" i="0" u="none" strike="noStrike" cap="none" normalizeH="0" baseline="0" dirty="0" smtClean="0">
+                <a:ln>
+                  <a:noFill/>
+                </a:ln>
+                <a:effectLst/>
+                <a:latin typeface="Consolas" panose="020B0609020204030204" pitchFamily="49" charset="0"/>
+              </a:rPr>
+              <a:t> &lt;старт&gt; &lt;конец&gt;</a:t>
+            </a:r>
+            <a:r>
+              <a:rPr kumimoji="0" lang="ru-RU" altLang="ru-RU" sz="3200" b="0" i="0" u="none" strike="noStrike" cap="none" normalizeH="0" baseline="0" dirty="0" smtClean="0">
+                <a:ln>
+                  <a:noFill/>
+                </a:ln>
+                <a:effectLst/>
+                <a:latin typeface="-apple-system"/>
+              </a:rPr>
+              <a:t> — диапазон портов.</a:t>
+            </a:r>
+          </a:p>
+          <a:p>
+            <a:pPr marL="0" marR="0" lvl="0" indent="0" algn="l" defTabSz="914400" rtl="0" eaLnBrk="0" fontAlgn="base" latinLnBrk="0" hangingPunct="0">
+              <a:lnSpc>
+                <a:spcPct val="100000"/>
+              </a:lnSpc>
+              <a:spcBef>
+                <a:spcPct val="0"/>
+              </a:spcBef>
+              <a:spcAft>
+                <a:spcPct val="0"/>
+              </a:spcAft>
+              <a:buClrTx/>
+              <a:buSzTx/>
+              <a:buFontTx/>
+              <a:buNone/>
+              <a:tabLst/>
+            </a:pPr>
+            <a:endParaRPr kumimoji="0" lang="ru-RU" altLang="ru-RU" sz="1800" b="0" i="0" u="none" strike="noStrike" cap="none" normalizeH="0" baseline="0" dirty="0" smtClean="0">
+              <a:ln>
+                <a:noFill/>
+              </a:ln>
+              <a:solidFill>
+                <a:schemeClr val="tx1"/>
+              </a:solidFill>
+              <a:effectLst/>
+              <a:latin typeface="Arial" panose="020B0604020202020204" pitchFamily="34" charset="0"/>
+            </a:endParaRPr>
+          </a:p>
+        </p:txBody>
+      </p:sp>
+    </p:spTree>
+    <p:extLst>
+      <p:ext uri="{BB962C8B-B14F-4D97-AF65-F5344CB8AC3E}">
+        <p14:creationId xmlns:p14="http://schemas.microsoft.com/office/powerpoint/2010/main" val="222020583"/>
+      </p:ext>
+    </p:extLst>
+  </p:cSld>
+  <p:clrMapOvr>
+    <a:masterClrMapping/>
+  </p:clrMapOvr>
+  <p:timing>
+    <p:tnLst>
+      <p:par>
+        <p:cTn id="1" dur="indefinite" restart="never" nodeType="tmRoot"/>
+      </p:par>
+    </p:tnLst>
+  </p:timing>
+</p:sld>
+</file>
+
+<file path=ppt/slides/slide12.xml><?xml version="1.0" encoding="utf-8"?>
+<p:sld xmlns:a="http://schemas.openxmlformats.org/drawingml/2006/main" xmlns:r="http://schemas.openxmlformats.org/officeDocument/2006/relationships" xmlns:p="http://schemas.openxmlformats.org/presentationml/2006/main">
+  <p:cSld>
+    <p:spTree>
+      <p:nvGrpSpPr>
+        <p:cNvPr id="1" name=""/>
+        <p:cNvGrpSpPr/>
+        <p:nvPr/>
+      </p:nvGrpSpPr>
+      <p:grpSpPr>
+        <a:xfrm>
+          <a:off x="0" y="0"/>
+          <a:ext cx="0" cy="0"/>
+          <a:chOff x="0" y="0"/>
+          <a:chExt cx="0" cy="0"/>
+        </a:xfrm>
+      </p:grpSpPr>
+      <p:sp>
+        <p:nvSpPr>
+          <p:cNvPr id="2" name="Заголовок 1"/>
+          <p:cNvSpPr>
+            <a:spLocks noGrp="1"/>
+          </p:cNvSpPr>
+          <p:nvPr>
+            <p:ph type="title"/>
+          </p:nvPr>
+        </p:nvSpPr>
+        <p:spPr>
+          <a:xfrm>
+            <a:off x="218342" y="206864"/>
+            <a:ext cx="10515600" cy="628406"/>
+          </a:xfrm>
+        </p:spPr>
+        <p:txBody>
+          <a:bodyPr>
+            <a:normAutofit fontScale="90000"/>
+          </a:bodyPr>
+          <a:lstStyle/>
+          <a:p>
+            <a:r>
+              <a:rPr lang="ru-RU" dirty="0"/>
+              <a:t>Расширенные списки доступа</a:t>
+            </a:r>
+          </a:p>
+        </p:txBody>
+      </p:sp>
+      <p:sp>
+        <p:nvSpPr>
+          <p:cNvPr id="4" name="Заголовок 3"/>
+          <p:cNvSpPr txBox="1">
+            <a:spLocks/>
+          </p:cNvSpPr>
+          <p:nvPr/>
+        </p:nvSpPr>
+        <p:spPr>
+          <a:xfrm>
             <a:off x="218342" y="993532"/>
             <a:ext cx="11755315" cy="5591906"/>
           </a:xfrm>
@@ -4504,7 +5496,7 @@
 </p:sld>
 </file>
 
-<file path=ppt/slides/slide11.xml><?xml version="1.0" encoding="utf-8"?>
+<file path=ppt/slides/slide13.xml><?xml version="1.0" encoding="utf-8"?>
 <p:sld xmlns:a="http://schemas.openxmlformats.org/drawingml/2006/main" xmlns:r="http://schemas.openxmlformats.org/officeDocument/2006/relationships" xmlns:p="http://schemas.openxmlformats.org/presentationml/2006/main">
   <p:cSld>
     <p:spTree>
@@ -5842,7 +6834,7 @@
 </p:sld>
 </file>
 
-<file path=ppt/slides/slide12.xml><?xml version="1.0" encoding="utf-8"?>
+<file path=ppt/slides/slide14.xml><?xml version="1.0" encoding="utf-8"?>
 <p:sld xmlns:a="http://schemas.openxmlformats.org/drawingml/2006/main" xmlns:r="http://schemas.openxmlformats.org/officeDocument/2006/relationships" xmlns:p="http://schemas.openxmlformats.org/presentationml/2006/main">
   <p:cSld>
     <p:spTree>
@@ -6709,7 +7701,6 @@
               <a:rPr lang="ru-RU" b="1" dirty="0"/>
               <a:t>Трансляция с перегрузкой с использованием пула адресов</a:t>
             </a:r>
-            <a:endParaRPr lang="ru-RU" b="1" dirty="0"/>
           </a:p>
         </p:txBody>
       </p:sp>
@@ -6934,7 +7925,7 @@
 </p:sld>
 </file>
 
-<file path=ppt/slides/slide13.xml><?xml version="1.0" encoding="utf-8"?>
+<file path=ppt/slides/slide15.xml><?xml version="1.0" encoding="utf-8"?>
 <p:sld xmlns:a="http://schemas.openxmlformats.org/drawingml/2006/main" xmlns:r="http://schemas.openxmlformats.org/officeDocument/2006/relationships" xmlns:p="http://schemas.openxmlformats.org/presentationml/2006/main">
   <p:cSld>
     <p:spTree>
@@ -7985,17 +8976,7 @@
                 <a:effectLst/>
                 <a:latin typeface="-apple-system"/>
               </a:rPr>
-              <a:t> - пароль </a:t>
-            </a:r>
-            <a:r>
-              <a:rPr kumimoji="0" lang="ru-RU" altLang="ru-RU" sz="2400" b="0" i="0" u="none" strike="noStrike" cap="none" normalizeH="0" baseline="0" dirty="0" smtClean="0">
-                <a:ln>
-                  <a:noFill/>
-                </a:ln>
-                <a:effectLst/>
-                <a:latin typeface="-apple-system"/>
-              </a:rPr>
-              <a:t>пользователя</a:t>
+              <a:t> - пароль пользователя</a:t>
             </a:r>
             <a:endParaRPr kumimoji="0" lang="en-US" altLang="ru-RU" sz="2400" b="0" i="0" u="none" strike="noStrike" cap="none" normalizeH="0" baseline="0" dirty="0" smtClean="0">
               <a:ln>
@@ -10223,7 +11204,7 @@
                 </a:solidFill>
                 <a:latin typeface="Consolas" panose="020B0609020204030204" pitchFamily="49" charset="0"/>
               </a:rPr>
-              <a:t>&gt;]c</a:t>
+              <a:t>&gt;]</a:t>
             </a:r>
             <a:endParaRPr lang="en-US" sz="2400" dirty="0">
               <a:solidFill>
@@ -10310,37 +11291,7 @@
       </p:grpSpPr>
       <p:sp>
         <p:nvSpPr>
-          <p:cNvPr id="2" name="Заголовок 1"/>
-          <p:cNvSpPr>
-            <a:spLocks noGrp="1"/>
-          </p:cNvSpPr>
-          <p:nvPr>
-            <p:ph type="title"/>
-          </p:nvPr>
-        </p:nvSpPr>
-        <p:spPr>
-          <a:xfrm>
-            <a:off x="218342" y="206864"/>
-            <a:ext cx="10515600" cy="628406"/>
-          </a:xfrm>
-        </p:spPr>
-        <p:txBody>
-          <a:bodyPr>
-            <a:normAutofit fontScale="90000"/>
-          </a:bodyPr>
-          <a:lstStyle/>
-          <a:p>
-            <a:r>
-              <a:rPr lang="ru-RU" dirty="0" smtClean="0"/>
-              <a:t>Стандартные списки доступа</a:t>
-            </a:r>
-            <a:endParaRPr lang="ru-RU" dirty="0"/>
-          </a:p>
-        </p:txBody>
-      </p:sp>
-      <p:sp>
-        <p:nvSpPr>
-          <p:cNvPr id="4" name="Заголовок 3"/>
+          <p:cNvPr id="8" name="Заголовок 3"/>
           <p:cNvSpPr txBox="1">
             <a:spLocks/>
           </p:cNvSpPr>
@@ -10348,8 +11299,8 @@
         </p:nvSpPr>
         <p:spPr>
           <a:xfrm>
-            <a:off x="218342" y="993532"/>
-            <a:ext cx="11755315" cy="5591906"/>
+            <a:off x="279887" y="1881442"/>
+            <a:ext cx="11755315" cy="3279641"/>
           </a:xfrm>
           <a:prstGeom prst="rect">
             <a:avLst/>
@@ -10387,308 +11338,92 @@
             </a:lvl1pPr>
           </a:lstStyle>
           <a:p>
-            <a:endParaRPr lang="ru-RU" sz="2400" dirty="0" smtClean="0">
-              <a:solidFill>
-                <a:schemeClr val="bg1"/>
-              </a:solidFill>
-              <a:latin typeface="Consolas" panose="020B0609020204030204" pitchFamily="49" charset="0"/>
-            </a:endParaRPr>
-          </a:p>
-          <a:p>
-            <a:r>
-              <a:rPr lang="en-US" sz="2400" dirty="0">
-                <a:solidFill>
-                  <a:schemeClr val="bg1"/>
-                </a:solidFill>
-                <a:latin typeface="Consolas" panose="020B0609020204030204" pitchFamily="49" charset="0"/>
-              </a:rPr>
-              <a:t>Router(</a:t>
-            </a:r>
-            <a:r>
-              <a:rPr lang="en-US" sz="2400" dirty="0" err="1">
-                <a:solidFill>
-                  <a:schemeClr val="bg1"/>
-                </a:solidFill>
-                <a:latin typeface="Consolas" panose="020B0609020204030204" pitchFamily="49" charset="0"/>
-              </a:rPr>
-              <a:t>config</a:t>
-            </a:r>
-            <a:r>
-              <a:rPr lang="en-US" sz="2400" dirty="0">
-                <a:solidFill>
-                  <a:schemeClr val="bg1"/>
-                </a:solidFill>
-                <a:latin typeface="Consolas" panose="020B0609020204030204" pitchFamily="49" charset="0"/>
-              </a:rPr>
-              <a:t>)#(</a:t>
-            </a:r>
-            <a:r>
-              <a:rPr lang="en-US" sz="2400" dirty="0" err="1">
-                <a:solidFill>
-                  <a:schemeClr val="bg1"/>
-                </a:solidFill>
-                <a:latin typeface="Consolas" panose="020B0609020204030204" pitchFamily="49" charset="0"/>
-              </a:rPr>
-              <a:t>config</a:t>
-            </a:r>
-            <a:r>
-              <a:rPr lang="en-US" sz="2400" dirty="0">
-                <a:solidFill>
-                  <a:schemeClr val="bg1"/>
-                </a:solidFill>
-                <a:latin typeface="Consolas" panose="020B0609020204030204" pitchFamily="49" charset="0"/>
-              </a:rPr>
-              <a:t>)#</a:t>
-            </a:r>
-            <a:r>
-              <a:rPr lang="en-US" sz="2400" dirty="0" err="1">
-                <a:solidFill>
-                  <a:schemeClr val="bg1"/>
-                </a:solidFill>
-                <a:latin typeface="Consolas" panose="020B0609020204030204" pitchFamily="49" charset="0"/>
-              </a:rPr>
-              <a:t>ip</a:t>
-            </a:r>
-            <a:r>
-              <a:rPr lang="en-US" sz="2400" dirty="0">
-                <a:solidFill>
-                  <a:schemeClr val="bg1"/>
-                </a:solidFill>
-                <a:latin typeface="Consolas" panose="020B0609020204030204" pitchFamily="49" charset="0"/>
-              </a:rPr>
-              <a:t> access-list standard ?</a:t>
-            </a:r>
-          </a:p>
-          <a:p>
-            <a:r>
-              <a:rPr lang="en-US" sz="2400" dirty="0">
-                <a:solidFill>
-                  <a:schemeClr val="bg1"/>
-                </a:solidFill>
-                <a:latin typeface="Consolas" panose="020B0609020204030204" pitchFamily="49" charset="0"/>
-              </a:rPr>
-              <a:t>  &lt;1-99&gt;       Standard IP access-list number</a:t>
-            </a:r>
-          </a:p>
-          <a:p>
-            <a:r>
-              <a:rPr lang="en-US" sz="2400" dirty="0">
-                <a:solidFill>
-                  <a:schemeClr val="bg1"/>
-                </a:solidFill>
-                <a:latin typeface="Consolas" panose="020B0609020204030204" pitchFamily="49" charset="0"/>
-              </a:rPr>
-              <a:t>  &lt;1300-1999&gt;  Standard IP access-list number (expanded range)</a:t>
-            </a:r>
-          </a:p>
-          <a:p>
-            <a:r>
-              <a:rPr lang="en-US" sz="2400" dirty="0">
-                <a:solidFill>
-                  <a:schemeClr val="bg1"/>
-                </a:solidFill>
-                <a:latin typeface="Consolas" panose="020B0609020204030204" pitchFamily="49" charset="0"/>
-              </a:rPr>
-              <a:t>  WORD         Access-list name</a:t>
-            </a:r>
-          </a:p>
-          <a:p>
-            <a:endParaRPr lang="ru-RU" sz="2400" dirty="0">
-              <a:solidFill>
-                <a:schemeClr val="bg1"/>
-              </a:solidFill>
-              <a:latin typeface="Consolas" panose="020B0609020204030204" pitchFamily="49" charset="0"/>
-            </a:endParaRPr>
-          </a:p>
-          <a:p>
-            <a:r>
-              <a:rPr lang="en-US" sz="2400" dirty="0" smtClean="0">
-                <a:solidFill>
-                  <a:schemeClr val="bg1"/>
-                </a:solidFill>
-                <a:latin typeface="Consolas" panose="020B0609020204030204" pitchFamily="49" charset="0"/>
-              </a:rPr>
-              <a:t>Router(</a:t>
-            </a:r>
-            <a:r>
-              <a:rPr lang="en-US" sz="2400" dirty="0" err="1" smtClean="0">
-                <a:solidFill>
-                  <a:schemeClr val="bg1"/>
-                </a:solidFill>
-                <a:latin typeface="Consolas" panose="020B0609020204030204" pitchFamily="49" charset="0"/>
-              </a:rPr>
-              <a:t>config</a:t>
-            </a:r>
-            <a:r>
-              <a:rPr lang="en-US" sz="2400" dirty="0">
-                <a:solidFill>
-                  <a:schemeClr val="bg1"/>
-                </a:solidFill>
-                <a:latin typeface="Consolas" panose="020B0609020204030204" pitchFamily="49" charset="0"/>
-              </a:rPr>
-              <a:t>)# </a:t>
-            </a:r>
-            <a:r>
-              <a:rPr lang="en-US" sz="2400" dirty="0" err="1">
-                <a:solidFill>
-                  <a:schemeClr val="bg1"/>
-                </a:solidFill>
-                <a:latin typeface="Consolas" panose="020B0609020204030204" pitchFamily="49" charset="0"/>
-              </a:rPr>
-              <a:t>ip</a:t>
-            </a:r>
-            <a:r>
-              <a:rPr lang="en-US" sz="2400" dirty="0">
-                <a:solidFill>
-                  <a:schemeClr val="bg1"/>
-                </a:solidFill>
-                <a:latin typeface="Consolas" panose="020B0609020204030204" pitchFamily="49" charset="0"/>
-              </a:rPr>
-              <a:t> access-list standard &lt;</a:t>
-            </a:r>
-            <a:r>
-              <a:rPr lang="ru-RU" sz="2400" dirty="0">
-                <a:solidFill>
-                  <a:schemeClr val="bg1"/>
-                </a:solidFill>
-                <a:latin typeface="Consolas" panose="020B0609020204030204" pitchFamily="49" charset="0"/>
-              </a:rPr>
-              <a:t>ИМЯ_ИЛИ_НОМЕР&gt;</a:t>
-            </a:r>
-          </a:p>
-          <a:p>
-            <a:r>
-              <a:rPr lang="en-US" sz="2400" dirty="0">
-                <a:solidFill>
-                  <a:schemeClr val="bg1"/>
-                </a:solidFill>
-                <a:latin typeface="Consolas" panose="020B0609020204030204" pitchFamily="49" charset="0"/>
-              </a:rPr>
-              <a:t>Router(</a:t>
-            </a:r>
-            <a:r>
-              <a:rPr lang="en-US" sz="2400" dirty="0" err="1">
-                <a:solidFill>
-                  <a:schemeClr val="bg1"/>
-                </a:solidFill>
-                <a:latin typeface="Consolas" panose="020B0609020204030204" pitchFamily="49" charset="0"/>
-              </a:rPr>
-              <a:t>config-std-nacl</a:t>
-            </a:r>
-            <a:r>
-              <a:rPr lang="en-US" sz="2400" dirty="0">
-                <a:solidFill>
-                  <a:schemeClr val="bg1"/>
-                </a:solidFill>
-                <a:latin typeface="Consolas" panose="020B0609020204030204" pitchFamily="49" charset="0"/>
-              </a:rPr>
-              <a:t>)# [permit | deny] &lt;IP_</a:t>
-            </a:r>
-            <a:r>
-              <a:rPr lang="ru-RU" sz="2400" dirty="0">
-                <a:solidFill>
-                  <a:schemeClr val="bg1"/>
-                </a:solidFill>
-                <a:latin typeface="Consolas" panose="020B0609020204030204" pitchFamily="49" charset="0"/>
-              </a:rPr>
-              <a:t>ИСТОЧНИКА&gt; &lt;</a:t>
-            </a:r>
-            <a:r>
-              <a:rPr lang="en-US" sz="2400" dirty="0">
-                <a:solidFill>
-                  <a:schemeClr val="bg1"/>
-                </a:solidFill>
-                <a:latin typeface="Consolas" panose="020B0609020204030204" pitchFamily="49" charset="0"/>
-              </a:rPr>
-              <a:t>WILDCARD_</a:t>
-            </a:r>
-            <a:r>
-              <a:rPr lang="ru-RU" sz="2400" dirty="0">
-                <a:solidFill>
-                  <a:schemeClr val="bg1"/>
-                </a:solidFill>
-                <a:latin typeface="Consolas" panose="020B0609020204030204" pitchFamily="49" charset="0"/>
-              </a:rPr>
-              <a:t>МАСКА&gt;</a:t>
-            </a:r>
-          </a:p>
-          <a:p>
-            <a:r>
-              <a:rPr lang="en-US" sz="2400" dirty="0">
-                <a:solidFill>
-                  <a:schemeClr val="bg1"/>
-                </a:solidFill>
-                <a:latin typeface="Consolas" panose="020B0609020204030204" pitchFamily="49" charset="0"/>
-              </a:rPr>
-              <a:t>Router(</a:t>
-            </a:r>
-            <a:r>
-              <a:rPr lang="en-US" sz="2400" dirty="0" err="1">
-                <a:solidFill>
-                  <a:schemeClr val="bg1"/>
-                </a:solidFill>
-                <a:latin typeface="Consolas" panose="020B0609020204030204" pitchFamily="49" charset="0"/>
-              </a:rPr>
-              <a:t>config-std-nacl</a:t>
-            </a:r>
-            <a:r>
-              <a:rPr lang="en-US" sz="2400" dirty="0">
-                <a:solidFill>
-                  <a:schemeClr val="bg1"/>
-                </a:solidFill>
-                <a:latin typeface="Consolas" panose="020B0609020204030204" pitchFamily="49" charset="0"/>
-              </a:rPr>
-              <a:t>)# [permit | deny] host &lt;IP_</a:t>
-            </a:r>
-            <a:r>
-              <a:rPr lang="ru-RU" sz="2400" dirty="0">
-                <a:solidFill>
-                  <a:schemeClr val="bg1"/>
-                </a:solidFill>
-                <a:latin typeface="Consolas" panose="020B0609020204030204" pitchFamily="49" charset="0"/>
-              </a:rPr>
-              <a:t>ИСТОЧНИКА&gt;</a:t>
-            </a:r>
-          </a:p>
-          <a:p>
-            <a:r>
-              <a:rPr lang="en-US" sz="2400" dirty="0">
-                <a:solidFill>
-                  <a:schemeClr val="bg1"/>
-                </a:solidFill>
-                <a:latin typeface="Consolas" panose="020B0609020204030204" pitchFamily="49" charset="0"/>
-              </a:rPr>
-              <a:t>Router(</a:t>
-            </a:r>
-            <a:r>
-              <a:rPr lang="en-US" sz="2400" dirty="0" err="1">
-                <a:solidFill>
-                  <a:schemeClr val="bg1"/>
-                </a:solidFill>
-                <a:latin typeface="Consolas" panose="020B0609020204030204" pitchFamily="49" charset="0"/>
-              </a:rPr>
-              <a:t>config-std-nacl</a:t>
-            </a:r>
-            <a:r>
-              <a:rPr lang="en-US" sz="2400" dirty="0">
-                <a:solidFill>
-                  <a:schemeClr val="bg1"/>
-                </a:solidFill>
-                <a:latin typeface="Consolas" panose="020B0609020204030204" pitchFamily="49" charset="0"/>
-              </a:rPr>
-              <a:t>)# [permit | deny] </a:t>
-            </a:r>
-            <a:r>
-              <a:rPr lang="en-US" sz="2400" dirty="0" smtClean="0">
-                <a:solidFill>
-                  <a:schemeClr val="bg1"/>
-                </a:solidFill>
-                <a:latin typeface="Consolas" panose="020B0609020204030204" pitchFamily="49" charset="0"/>
-              </a:rPr>
-              <a:t>any</a:t>
-            </a:r>
-          </a:p>
-          <a:p>
+            <a:r>
+              <a:rPr lang="af-ZA" sz="2400" dirty="0">
+                <a:solidFill>
+                  <a:schemeClr val="bg1"/>
+                </a:solidFill>
+                <a:latin typeface="Consolas" panose="020B0609020204030204" pitchFamily="49" charset="0"/>
+              </a:rPr>
+              <a:t>R1(config)# ip dhcp excluded-address 192.168.10.1 192.168.10.9</a:t>
+            </a:r>
+          </a:p>
+          <a:p>
+            <a:r>
+              <a:rPr lang="af-ZA" sz="2400" dirty="0">
+                <a:solidFill>
+                  <a:schemeClr val="bg1"/>
+                </a:solidFill>
+                <a:latin typeface="Consolas" panose="020B0609020204030204" pitchFamily="49" charset="0"/>
+              </a:rPr>
+              <a:t>R1(config)# ip dhcp excluded-address 192.168.10.254</a:t>
+            </a:r>
+          </a:p>
+          <a:p>
+            <a:r>
+              <a:rPr lang="af-ZA" sz="2400" dirty="0">
+                <a:solidFill>
+                  <a:schemeClr val="bg1"/>
+                </a:solidFill>
+                <a:latin typeface="Consolas" panose="020B0609020204030204" pitchFamily="49" charset="0"/>
+              </a:rPr>
+              <a:t>R1(config)# ip dhcp pool LAN-POOL-1</a:t>
+            </a:r>
+          </a:p>
+          <a:p>
+            <a:r>
+              <a:rPr lang="af-ZA" sz="2400" dirty="0">
+                <a:solidFill>
+                  <a:schemeClr val="bg1"/>
+                </a:solidFill>
+                <a:latin typeface="Consolas" panose="020B0609020204030204" pitchFamily="49" charset="0"/>
+              </a:rPr>
+              <a:t>R1(dhcp-config)# network 192.168.10.0 255.255.255.0</a:t>
+            </a:r>
+          </a:p>
+          <a:p>
+            <a:r>
+              <a:rPr lang="af-ZA" sz="2400" dirty="0">
+                <a:solidFill>
+                  <a:schemeClr val="bg1"/>
+                </a:solidFill>
+                <a:latin typeface="Consolas" panose="020B0609020204030204" pitchFamily="49" charset="0"/>
+              </a:rPr>
+              <a:t>R1(dhcp-config)# default-router 192.168.10.1</a:t>
+            </a:r>
+          </a:p>
+          <a:p>
+            <a:r>
+              <a:rPr lang="af-ZA" sz="2400" dirty="0">
+                <a:solidFill>
+                  <a:schemeClr val="bg1"/>
+                </a:solidFill>
+                <a:latin typeface="Consolas" panose="020B0609020204030204" pitchFamily="49" charset="0"/>
+              </a:rPr>
+              <a:t>R1(dhcp-config)# dns-server 192.168.11.5</a:t>
+            </a:r>
+          </a:p>
+          <a:p>
+            <a:r>
+              <a:rPr lang="af-ZA" sz="2400" dirty="0">
+                <a:solidFill>
+                  <a:schemeClr val="bg1"/>
+                </a:solidFill>
+                <a:latin typeface="Consolas" panose="020B0609020204030204" pitchFamily="49" charset="0"/>
+              </a:rPr>
+              <a:t>R1(dhcp-config)# domain-name example.com</a:t>
+            </a:r>
+          </a:p>
+          <a:p>
+            <a:r>
+              <a:rPr lang="af-ZA" sz="2400" dirty="0">
+                <a:solidFill>
+                  <a:schemeClr val="bg1"/>
+                </a:solidFill>
+                <a:latin typeface="Consolas" panose="020B0609020204030204" pitchFamily="49" charset="0"/>
+              </a:rPr>
+              <a:t>R1(dhcp-config)# end</a:t>
+            </a:r>
             <a:endParaRPr lang="en-US" sz="2400" dirty="0">
               <a:solidFill>
                 <a:schemeClr val="bg1"/>
@@ -10696,49 +11431,49 @@
               <a:latin typeface="Consolas" panose="020B0609020204030204" pitchFamily="49" charset="0"/>
             </a:endParaRPr>
           </a:p>
-          <a:p>
-            <a:r>
-              <a:rPr lang="af-ZA" sz="2400" dirty="0">
-                <a:solidFill>
-                  <a:schemeClr val="bg1"/>
-                </a:solidFill>
-                <a:latin typeface="Consolas" panose="020B0609020204030204" pitchFamily="49" charset="0"/>
-              </a:rPr>
-              <a:t>Router#show ip access-lists </a:t>
-            </a:r>
-            <a:r>
-              <a:rPr lang="en-US" sz="2400" dirty="0">
-                <a:solidFill>
-                  <a:schemeClr val="bg1"/>
-                </a:solidFill>
-                <a:latin typeface="Consolas" panose="020B0609020204030204" pitchFamily="49" charset="0"/>
-              </a:rPr>
-              <a:t>&lt;</a:t>
-            </a:r>
-            <a:r>
-              <a:rPr lang="ru-RU" sz="2400" dirty="0">
-                <a:solidFill>
-                  <a:schemeClr val="bg1"/>
-                </a:solidFill>
-                <a:latin typeface="Consolas" panose="020B0609020204030204" pitchFamily="49" charset="0"/>
-              </a:rPr>
-              <a:t>ИМЯ_ИЛИ_НОМЕР&gt;</a:t>
-            </a:r>
-          </a:p>
-          <a:p>
-            <a:endParaRPr lang="en-US" sz="2400" dirty="0">
-              <a:solidFill>
-                <a:schemeClr val="bg1"/>
-              </a:solidFill>
-              <a:latin typeface="Consolas" panose="020B0609020204030204" pitchFamily="49" charset="0"/>
-            </a:endParaRPr>
+        </p:txBody>
+      </p:sp>
+      <p:sp>
+        <p:nvSpPr>
+          <p:cNvPr id="9" name="TextBox 8"/>
+          <p:cNvSpPr txBox="1"/>
+          <p:nvPr/>
+        </p:nvSpPr>
+        <p:spPr>
+          <a:xfrm>
+            <a:off x="279887" y="1318736"/>
+            <a:ext cx="4219810" cy="369332"/>
+          </a:xfrm>
+          <a:prstGeom prst="rect">
+            <a:avLst/>
+          </a:prstGeom>
+          <a:noFill/>
+        </p:spPr>
+        <p:txBody>
+          <a:bodyPr wrap="none" rtlCol="0">
+            <a:spAutoFit/>
+          </a:bodyPr>
+          <a:lstStyle/>
+          <a:p>
+            <a:r>
+              <a:rPr lang="ru-RU" dirty="0"/>
+              <a:t>Конфигурация локального </a:t>
+            </a:r>
+            <a:r>
+              <a:rPr lang="af-ZA" dirty="0"/>
+              <a:t>DHCP-</a:t>
+            </a:r>
+            <a:r>
+              <a:rPr lang="ru-RU" dirty="0"/>
+              <a:t>сервера</a:t>
+            </a:r>
           </a:p>
         </p:txBody>
       </p:sp>
     </p:spTree>
     <p:extLst>
       <p:ext uri="{BB962C8B-B14F-4D97-AF65-F5344CB8AC3E}">
-        <p14:creationId xmlns:p14="http://schemas.microsoft.com/office/powerpoint/2010/main" val="3798248272"/>
+        <p14:creationId xmlns:p14="http://schemas.microsoft.com/office/powerpoint/2010/main" val="2940011268"/>
       </p:ext>
     </p:extLst>
   </p:cSld>
@@ -10774,37 +11509,7 @@
       </p:grpSpPr>
       <p:sp>
         <p:nvSpPr>
-          <p:cNvPr id="2" name="Заголовок 1"/>
-          <p:cNvSpPr>
-            <a:spLocks noGrp="1"/>
-          </p:cNvSpPr>
-          <p:nvPr>
-            <p:ph type="title"/>
-          </p:nvPr>
-        </p:nvSpPr>
-        <p:spPr>
-          <a:xfrm>
-            <a:off x="218342" y="206864"/>
-            <a:ext cx="10515600" cy="628406"/>
-          </a:xfrm>
-        </p:spPr>
-        <p:txBody>
-          <a:bodyPr>
-            <a:normAutofit fontScale="90000"/>
-          </a:bodyPr>
-          <a:lstStyle/>
-          <a:p>
-            <a:r>
-              <a:rPr lang="ru-RU" dirty="0" smtClean="0"/>
-              <a:t>Стандартные списки доступа</a:t>
-            </a:r>
-            <a:endParaRPr lang="ru-RU" dirty="0"/>
-          </a:p>
-        </p:txBody>
-      </p:sp>
-      <p:sp>
-        <p:nvSpPr>
-          <p:cNvPr id="4" name="Заголовок 3"/>
+          <p:cNvPr id="8" name="Заголовок 3"/>
           <p:cNvSpPr txBox="1">
             <a:spLocks/>
           </p:cNvSpPr>
@@ -10812,8 +11517,8 @@
         </p:nvSpPr>
         <p:spPr>
           <a:xfrm>
-            <a:off x="218342" y="1652955"/>
-            <a:ext cx="11755315" cy="4211514"/>
+            <a:off x="279887" y="1881442"/>
+            <a:ext cx="11755315" cy="3991820"/>
           </a:xfrm>
           <a:prstGeom prst="rect">
             <a:avLst/>
@@ -10851,6 +11556,44 @@
             </a:lvl1pPr>
           </a:lstStyle>
           <a:p>
+            <a:r>
+              <a:rPr lang="ru-RU" sz="2400" dirty="0">
+                <a:solidFill>
+                  <a:schemeClr val="bg1"/>
+                </a:solidFill>
+                <a:latin typeface="Consolas" panose="020B0609020204030204" pitchFamily="49" charset="0"/>
+              </a:rPr>
+              <a:t>! Отображает команды DHCPv4, настроенные на маршрутизаторе.</a:t>
+            </a:r>
+          </a:p>
+          <a:p>
+            <a:r>
+              <a:rPr lang="af-ZA" sz="2400" dirty="0" smtClean="0">
+                <a:solidFill>
+                  <a:schemeClr val="bg1"/>
+                </a:solidFill>
+                <a:latin typeface="Consolas" panose="020B0609020204030204" pitchFamily="49" charset="0"/>
+              </a:rPr>
+              <a:t>show </a:t>
+            </a:r>
+            <a:r>
+              <a:rPr lang="af-ZA" sz="2400" dirty="0">
+                <a:solidFill>
+                  <a:schemeClr val="bg1"/>
+                </a:solidFill>
+                <a:latin typeface="Consolas" panose="020B0609020204030204" pitchFamily="49" charset="0"/>
+              </a:rPr>
+              <a:t>running-config | section </a:t>
+            </a:r>
+            <a:r>
+              <a:rPr lang="af-ZA" sz="2400" dirty="0" smtClean="0">
+                <a:solidFill>
+                  <a:schemeClr val="bg1"/>
+                </a:solidFill>
+                <a:latin typeface="Consolas" panose="020B0609020204030204" pitchFamily="49" charset="0"/>
+              </a:rPr>
+              <a:t>dhcp</a:t>
+            </a:r>
             <a:endParaRPr lang="ru-RU" sz="2400" dirty="0" smtClean="0">
               <a:solidFill>
                 <a:schemeClr val="bg1"/>
@@ -10859,237 +11602,51 @@
             </a:endParaRPr>
           </a:p>
           <a:p>
-            <a:r>
-              <a:rPr lang="en-US" sz="2400" dirty="0">
-                <a:solidFill>
-                  <a:schemeClr val="bg1"/>
-                </a:solidFill>
-                <a:latin typeface="Consolas" panose="020B0609020204030204" pitchFamily="49" charset="0"/>
-              </a:rPr>
-              <a:t>Router(</a:t>
-            </a:r>
-            <a:r>
-              <a:rPr lang="en-US" sz="2400" dirty="0" err="1">
-                <a:solidFill>
-                  <a:schemeClr val="bg1"/>
-                </a:solidFill>
-                <a:latin typeface="Consolas" panose="020B0609020204030204" pitchFamily="49" charset="0"/>
-              </a:rPr>
-              <a:t>config</a:t>
-            </a:r>
-            <a:r>
-              <a:rPr lang="en-US" sz="2400" dirty="0">
-                <a:solidFill>
-                  <a:schemeClr val="bg1"/>
-                </a:solidFill>
-                <a:latin typeface="Consolas" panose="020B0609020204030204" pitchFamily="49" charset="0"/>
-              </a:rPr>
-              <a:t>)#</a:t>
-            </a:r>
-            <a:r>
-              <a:rPr lang="en-US" sz="2400" dirty="0" err="1">
-                <a:solidFill>
-                  <a:schemeClr val="bg1"/>
-                </a:solidFill>
-                <a:latin typeface="Consolas" panose="020B0609020204030204" pitchFamily="49" charset="0"/>
-              </a:rPr>
-              <a:t>ip</a:t>
-            </a:r>
-            <a:r>
-              <a:rPr lang="en-US" sz="2400" dirty="0">
-                <a:solidFill>
-                  <a:schemeClr val="bg1"/>
-                </a:solidFill>
-                <a:latin typeface="Consolas" panose="020B0609020204030204" pitchFamily="49" charset="0"/>
-              </a:rPr>
-              <a:t> access-list standard </a:t>
-            </a:r>
-            <a:r>
-              <a:rPr lang="en-US" sz="2400" dirty="0" smtClean="0">
-                <a:solidFill>
-                  <a:schemeClr val="bg1"/>
-                </a:solidFill>
-                <a:latin typeface="Consolas" panose="020B0609020204030204" pitchFamily="49" charset="0"/>
-              </a:rPr>
-              <a:t>99</a:t>
-            </a:r>
-          </a:p>
-          <a:p>
-            <a:r>
-              <a:rPr lang="en-US" sz="2400" dirty="0">
-                <a:solidFill>
-                  <a:schemeClr val="bg1"/>
-                </a:solidFill>
-                <a:latin typeface="Consolas" panose="020B0609020204030204" pitchFamily="49" charset="0"/>
-              </a:rPr>
-              <a:t>Router(</a:t>
-            </a:r>
-            <a:r>
-              <a:rPr lang="en-US" sz="2400" dirty="0" err="1">
-                <a:solidFill>
-                  <a:schemeClr val="bg1"/>
-                </a:solidFill>
-                <a:latin typeface="Consolas" panose="020B0609020204030204" pitchFamily="49" charset="0"/>
-              </a:rPr>
-              <a:t>config-std-nacl</a:t>
-            </a:r>
-            <a:r>
-              <a:rPr lang="en-US" sz="2400" dirty="0">
-                <a:solidFill>
-                  <a:schemeClr val="bg1"/>
-                </a:solidFill>
-                <a:latin typeface="Consolas" panose="020B0609020204030204" pitchFamily="49" charset="0"/>
-              </a:rPr>
-              <a:t>)#permit 192.168.10.0 0.0.0.255</a:t>
-            </a:r>
-          </a:p>
-          <a:p>
-            <a:r>
-              <a:rPr lang="en-US" sz="2400" dirty="0" smtClean="0">
-                <a:solidFill>
-                  <a:schemeClr val="bg1"/>
-                </a:solidFill>
-                <a:latin typeface="Consolas" panose="020B0609020204030204" pitchFamily="49" charset="0"/>
-              </a:rPr>
-              <a:t>Router(</a:t>
-            </a:r>
-            <a:r>
-              <a:rPr lang="en-US" sz="2400" dirty="0" err="1" smtClean="0">
-                <a:solidFill>
-                  <a:schemeClr val="bg1"/>
-                </a:solidFill>
-                <a:latin typeface="Consolas" panose="020B0609020204030204" pitchFamily="49" charset="0"/>
-              </a:rPr>
-              <a:t>config-std-nacl</a:t>
-            </a:r>
-            <a:r>
-              <a:rPr lang="en-US" sz="2400" dirty="0">
-                <a:solidFill>
-                  <a:schemeClr val="bg1"/>
-                </a:solidFill>
-                <a:latin typeface="Consolas" panose="020B0609020204030204" pitchFamily="49" charset="0"/>
-              </a:rPr>
-              <a:t>)#deny 172.16.0.0 0.0.127.255</a:t>
-            </a:r>
-          </a:p>
-          <a:p>
-            <a:r>
-              <a:rPr lang="en-US" sz="2400" dirty="0">
-                <a:solidFill>
-                  <a:schemeClr val="bg1"/>
-                </a:solidFill>
-                <a:latin typeface="Consolas" panose="020B0609020204030204" pitchFamily="49" charset="0"/>
-              </a:rPr>
-              <a:t>Router(</a:t>
-            </a:r>
-            <a:r>
-              <a:rPr lang="en-US" sz="2400" dirty="0" err="1">
-                <a:solidFill>
-                  <a:schemeClr val="bg1"/>
-                </a:solidFill>
-                <a:latin typeface="Consolas" panose="020B0609020204030204" pitchFamily="49" charset="0"/>
-              </a:rPr>
-              <a:t>config-std-nacl</a:t>
-            </a:r>
-            <a:r>
-              <a:rPr lang="en-US" sz="2400" dirty="0">
-                <a:solidFill>
-                  <a:schemeClr val="bg1"/>
-                </a:solidFill>
-                <a:latin typeface="Consolas" panose="020B0609020204030204" pitchFamily="49" charset="0"/>
-              </a:rPr>
-              <a:t>)#end</a:t>
-            </a:r>
-          </a:p>
-          <a:p>
-            <a:r>
-              <a:rPr lang="en-US" sz="2400" dirty="0">
-                <a:solidFill>
-                  <a:schemeClr val="bg1"/>
-                </a:solidFill>
-                <a:latin typeface="Consolas" panose="020B0609020204030204" pitchFamily="49" charset="0"/>
-              </a:rPr>
-              <a:t>Router</a:t>
-            </a:r>
-            <a:r>
-              <a:rPr lang="en-US" sz="2400" dirty="0" smtClean="0">
-                <a:solidFill>
-                  <a:schemeClr val="bg1"/>
-                </a:solidFill>
-                <a:latin typeface="Consolas" panose="020B0609020204030204" pitchFamily="49" charset="0"/>
-              </a:rPr>
-              <a:t>#</a:t>
-            </a:r>
-          </a:p>
-          <a:p>
-            <a:r>
-              <a:rPr lang="en-US" sz="2400" dirty="0" err="1">
-                <a:solidFill>
-                  <a:schemeClr val="bg1"/>
-                </a:solidFill>
-                <a:latin typeface="Consolas" panose="020B0609020204030204" pitchFamily="49" charset="0"/>
-              </a:rPr>
-              <a:t>Router#show</a:t>
-            </a:r>
-            <a:r>
-              <a:rPr lang="en-US" sz="2400" dirty="0">
-                <a:solidFill>
-                  <a:schemeClr val="bg1"/>
-                </a:solidFill>
-                <a:latin typeface="Consolas" panose="020B0609020204030204" pitchFamily="49" charset="0"/>
-              </a:rPr>
-              <a:t> </a:t>
-            </a:r>
-            <a:r>
-              <a:rPr lang="en-US" sz="2400" dirty="0" err="1">
-                <a:solidFill>
-                  <a:schemeClr val="bg1"/>
-                </a:solidFill>
-                <a:latin typeface="Consolas" panose="020B0609020204030204" pitchFamily="49" charset="0"/>
-              </a:rPr>
-              <a:t>ip</a:t>
-            </a:r>
-            <a:r>
-              <a:rPr lang="en-US" sz="2400" dirty="0">
-                <a:solidFill>
-                  <a:schemeClr val="bg1"/>
-                </a:solidFill>
-                <a:latin typeface="Consolas" panose="020B0609020204030204" pitchFamily="49" charset="0"/>
-              </a:rPr>
-              <a:t> access-lists 99</a:t>
-            </a:r>
-          </a:p>
-          <a:p>
-            <a:r>
-              <a:rPr lang="en-US" sz="2400" dirty="0">
-                <a:solidFill>
-                  <a:schemeClr val="bg1"/>
-                </a:solidFill>
-                <a:latin typeface="Consolas" panose="020B0609020204030204" pitchFamily="49" charset="0"/>
-              </a:rPr>
-              <a:t>Standard IP access list 99</a:t>
-            </a:r>
-          </a:p>
-          <a:p>
-            <a:r>
-              <a:rPr lang="en-US" sz="2400" dirty="0">
-                <a:solidFill>
-                  <a:schemeClr val="bg1"/>
-                </a:solidFill>
-                <a:latin typeface="Consolas" panose="020B0609020204030204" pitchFamily="49" charset="0"/>
-              </a:rPr>
-              <a:t>    permit 192.168.10.0 0.0.0.255</a:t>
-            </a:r>
-          </a:p>
-          <a:p>
-            <a:r>
-              <a:rPr lang="en-US" sz="2400" dirty="0">
-                <a:solidFill>
-                  <a:schemeClr val="bg1"/>
-                </a:solidFill>
-                <a:latin typeface="Consolas" panose="020B0609020204030204" pitchFamily="49" charset="0"/>
-              </a:rPr>
-              <a:t>    deny 172.16.0.0 0.0.127.255</a:t>
+            <a:endParaRPr lang="ru-RU" sz="2400" dirty="0">
+              <a:solidFill>
+                <a:schemeClr val="bg1"/>
+              </a:solidFill>
+              <a:latin typeface="Consolas" panose="020B0609020204030204" pitchFamily="49" charset="0"/>
+            </a:endParaRPr>
+          </a:p>
+          <a:p>
+            <a:r>
+              <a:rPr lang="ru-RU" sz="2400" dirty="0">
+                <a:solidFill>
+                  <a:schemeClr val="bg1"/>
+                </a:solidFill>
+                <a:latin typeface="Consolas" panose="020B0609020204030204" pitchFamily="49" charset="0"/>
+              </a:rPr>
+              <a:t>! Отображает список всех привязок IPv4 к MAC-адресам, предоставляемых сервисом DHCPv4</a:t>
+            </a:r>
+            <a:r>
+              <a:rPr lang="ru-RU" sz="2400" dirty="0" smtClean="0">
+                <a:solidFill>
+                  <a:schemeClr val="bg1"/>
+                </a:solidFill>
+                <a:latin typeface="Consolas" panose="020B0609020204030204" pitchFamily="49" charset="0"/>
+              </a:rPr>
+              <a:t>.</a:t>
+            </a:r>
+          </a:p>
+          <a:p>
+            <a:r>
+              <a:rPr lang="af-ZA" sz="2400" dirty="0">
+                <a:solidFill>
+                  <a:schemeClr val="bg1"/>
+                </a:solidFill>
+                <a:latin typeface="Consolas" panose="020B0609020204030204" pitchFamily="49" charset="0"/>
+              </a:rPr>
+              <a:t>show ip dhcp </a:t>
+            </a:r>
+            <a:r>
+              <a:rPr lang="af-ZA" sz="2400" dirty="0" smtClean="0">
+                <a:solidFill>
+                  <a:schemeClr val="bg1"/>
+                </a:solidFill>
+                <a:latin typeface="Consolas" panose="020B0609020204030204" pitchFamily="49" charset="0"/>
+              </a:rPr>
+              <a:t>binding</a:t>
             </a:r>
             <a:endParaRPr lang="ru-RU" sz="2400" dirty="0" smtClean="0">
               <a:solidFill>
@@ -11099,6 +11656,86 @@
             </a:endParaRPr>
           </a:p>
           <a:p>
+            <a:endParaRPr lang="ru-RU" sz="2400" dirty="0">
+              <a:solidFill>
+                <a:schemeClr val="bg1"/>
+              </a:solidFill>
+              <a:latin typeface="Consolas" panose="020B0609020204030204" pitchFamily="49" charset="0"/>
+            </a:endParaRPr>
+          </a:p>
+          <a:p>
+            <a:endParaRPr lang="ru-RU" sz="2400" dirty="0" smtClean="0">
+              <a:solidFill>
+                <a:schemeClr val="bg1"/>
+              </a:solidFill>
+              <a:latin typeface="Consolas" panose="020B0609020204030204" pitchFamily="49" charset="0"/>
+            </a:endParaRPr>
+          </a:p>
+          <a:p>
+            <a:r>
+              <a:rPr lang="ru-RU" sz="2400" dirty="0">
+                <a:solidFill>
+                  <a:schemeClr val="bg1"/>
+                </a:solidFill>
+                <a:latin typeface="Consolas" panose="020B0609020204030204" pitchFamily="49" charset="0"/>
+              </a:rPr>
+              <a:t>! Данная команда отображает информацию о количестве принятых и отправленных сообщений DHCPv4.</a:t>
+            </a:r>
+          </a:p>
+          <a:p>
+            <a:r>
+              <a:rPr lang="en-US" sz="2400" dirty="0">
+                <a:solidFill>
+                  <a:schemeClr val="bg1"/>
+                </a:solidFill>
+                <a:latin typeface="Consolas" panose="020B0609020204030204" pitchFamily="49" charset="0"/>
+              </a:rPr>
+              <a:t>show </a:t>
+            </a:r>
+            <a:r>
+              <a:rPr lang="en-US" sz="2400" dirty="0" err="1">
+                <a:solidFill>
+                  <a:schemeClr val="bg1"/>
+                </a:solidFill>
+                <a:latin typeface="Consolas" panose="020B0609020204030204" pitchFamily="49" charset="0"/>
+              </a:rPr>
+              <a:t>ip</a:t>
+            </a:r>
+            <a:r>
+              <a:rPr lang="en-US" sz="2400" dirty="0">
+                <a:solidFill>
+                  <a:schemeClr val="bg1"/>
+                </a:solidFill>
+                <a:latin typeface="Consolas" panose="020B0609020204030204" pitchFamily="49" charset="0"/>
+              </a:rPr>
+              <a:t> </a:t>
+            </a:r>
+            <a:r>
+              <a:rPr lang="en-US" sz="2400" dirty="0" err="1">
+                <a:solidFill>
+                  <a:schemeClr val="bg1"/>
+                </a:solidFill>
+                <a:latin typeface="Consolas" panose="020B0609020204030204" pitchFamily="49" charset="0"/>
+              </a:rPr>
+              <a:t>dhcp</a:t>
+            </a:r>
+            <a:r>
+              <a:rPr lang="en-US" sz="2400" dirty="0">
+                <a:solidFill>
+                  <a:schemeClr val="bg1"/>
+                </a:solidFill>
+                <a:latin typeface="Consolas" panose="020B0609020204030204" pitchFamily="49" charset="0"/>
+              </a:rPr>
+              <a:t> server statistics</a:t>
+            </a:r>
+            <a:endParaRPr lang="ru-RU" sz="2400" dirty="0">
+              <a:solidFill>
+                <a:schemeClr val="bg1"/>
+              </a:solidFill>
+              <a:latin typeface="Consolas" panose="020B0609020204030204" pitchFamily="49" charset="0"/>
+            </a:endParaRPr>
+          </a:p>
+          <a:p>
             <a:endParaRPr lang="en-US" sz="2400" dirty="0">
               <a:solidFill>
                 <a:schemeClr val="bg1"/>
@@ -11108,10 +11745,48 @@
           </a:p>
         </p:txBody>
       </p:sp>
+      <p:sp>
+        <p:nvSpPr>
+          <p:cNvPr id="9" name="TextBox 8"/>
+          <p:cNvSpPr txBox="1"/>
+          <p:nvPr/>
+        </p:nvSpPr>
+        <p:spPr>
+          <a:xfrm>
+            <a:off x="279887" y="1318736"/>
+            <a:ext cx="3746475" cy="369332"/>
+          </a:xfrm>
+          <a:prstGeom prst="rect">
+            <a:avLst/>
+          </a:prstGeom>
+          <a:noFill/>
+        </p:spPr>
+        <p:txBody>
+          <a:bodyPr wrap="none" rtlCol="0">
+            <a:spAutoFit/>
+          </a:bodyPr>
+          <a:lstStyle/>
+          <a:p>
+            <a:r>
+              <a:rPr lang="ru-RU" dirty="0" smtClean="0"/>
+              <a:t>Команды проверки </a:t>
+            </a:r>
+            <a:r>
+              <a:rPr lang="en-US" dirty="0" smtClean="0"/>
+              <a:t>DHCPv4 </a:t>
+            </a:r>
+            <a:r>
+              <a:rPr lang="ru-RU" dirty="0" smtClean="0"/>
+              <a:t>сервера</a:t>
+            </a:r>
+            <a:endParaRPr lang="ru-RU" dirty="0"/>
+          </a:p>
+        </p:txBody>
+      </p:sp>
     </p:spTree>
     <p:extLst>
       <p:ext uri="{BB962C8B-B14F-4D97-AF65-F5344CB8AC3E}">
-        <p14:creationId xmlns:p14="http://schemas.microsoft.com/office/powerpoint/2010/main" val="4175971484"/>
+        <p14:creationId xmlns:p14="http://schemas.microsoft.com/office/powerpoint/2010/main" val="2171313661"/>
       </p:ext>
     </p:extLst>
   </p:cSld>
@@ -11168,9 +11843,10 @@
           <a:lstStyle/>
           <a:p>
             <a:r>
-              <a:rPr lang="ru-RU" dirty="0"/>
-              <a:t>Расширенные списки доступа</a:t>
-            </a:r>
+              <a:rPr lang="ru-RU" dirty="0" smtClean="0"/>
+              <a:t>Стандартные списки доступа</a:t>
+            </a:r>
+            <a:endParaRPr lang="ru-RU" dirty="0"/>
           </a:p>
         </p:txBody>
       </p:sp>
@@ -11184,8 +11860,8 @@
         </p:nvSpPr>
         <p:spPr>
           <a:xfrm>
-            <a:off x="218342" y="1424355"/>
-            <a:ext cx="11755315" cy="4607168"/>
+            <a:off x="218342" y="993532"/>
+            <a:ext cx="11755315" cy="5591906"/>
           </a:xfrm>
           <a:prstGeom prst="rect">
             <a:avLst/>
@@ -11292,7 +11968,7 @@
                 </a:solidFill>
                 <a:latin typeface="Consolas" panose="020B0609020204030204" pitchFamily="49" charset="0"/>
               </a:rPr>
-              <a:t> access-list extended ?</a:t>
+              <a:t> access-list standard ?</a:t>
             </a:r>
           </a:p>
           <a:p>
@@ -11303,7 +11979,7 @@
                 </a:solidFill>
                 <a:latin typeface="Consolas" panose="020B0609020204030204" pitchFamily="49" charset="0"/>
               </a:rPr>
-              <a:t>  &lt;100-199&gt;    Extended IP access-list number</a:t>
+              <a:t>  &lt;1-99&gt;       Standard IP access-list number</a:t>
             </a:r>
           </a:p>
           <a:p>
@@ -11314,7 +11990,7 @@
                 </a:solidFill>
                 <a:latin typeface="Consolas" panose="020B0609020204030204" pitchFamily="49" charset="0"/>
               </a:rPr>
-              <a:t>  &lt;2000-2699&gt;  Extended IP access-list number (expanded range)</a:t>
+              <a:t>  &lt;1300-1999&gt;  Standard IP access-list number (expanded range)</a:t>
             </a:r>
           </a:p>
           <a:p>
@@ -11337,14 +12013,24 @@
             </a:endParaRPr>
           </a:p>
           <a:p>
-            <a:endParaRPr lang="ru-RU" sz="2400" dirty="0">
-              <a:solidFill>
-                <a:schemeClr val="bg1"/>
-              </a:solidFill>
-              <a:latin typeface="Consolas" panose="020B0609020204030204" pitchFamily="49" charset="0"/>
-            </a:endParaRPr>
-          </a:p>
-          <a:p>
+            <a:r>
+              <a:rPr lang="en-US" sz="2400" dirty="0" smtClean="0">
+                <a:solidFill>
+                  <a:schemeClr val="bg1"/>
+                </a:solidFill>
+                <a:latin typeface="Consolas" panose="020B0609020204030204" pitchFamily="49" charset="0"/>
+              </a:rPr>
+              <a:t>Router(</a:t>
+            </a:r>
+            <a:r>
+              <a:rPr lang="en-US" sz="2400" dirty="0" err="1" smtClean="0">
+                <a:solidFill>
+                  <a:schemeClr val="bg1"/>
+                </a:solidFill>
+                <a:latin typeface="Consolas" panose="020B0609020204030204" pitchFamily="49" charset="0"/>
+              </a:rPr>
+              <a:t>config</a:t>
+            </a:r>
             <a:r>
               <a:rPr lang="en-US" sz="2400" dirty="0">
                 <a:solidFill>
@@ -11352,6 +12038,44 @@
                 </a:solidFill>
                 <a:latin typeface="Consolas" panose="020B0609020204030204" pitchFamily="49" charset="0"/>
               </a:rPr>
+              <a:t>)# </a:t>
+            </a:r>
+            <a:r>
+              <a:rPr lang="en-US" sz="2400" dirty="0" err="1">
+                <a:solidFill>
+                  <a:schemeClr val="bg1"/>
+                </a:solidFill>
+                <a:latin typeface="Consolas" panose="020B0609020204030204" pitchFamily="49" charset="0"/>
+              </a:rPr>
+              <a:t>ip</a:t>
+            </a:r>
+            <a:r>
+              <a:rPr lang="en-US" sz="2400" dirty="0">
+                <a:solidFill>
+                  <a:schemeClr val="bg1"/>
+                </a:solidFill>
+                <a:latin typeface="Consolas" panose="020B0609020204030204" pitchFamily="49" charset="0"/>
+              </a:rPr>
+              <a:t> access-list standard &lt;</a:t>
+            </a:r>
+            <a:r>
+              <a:rPr lang="ru-RU" sz="2400" dirty="0">
+                <a:solidFill>
+                  <a:schemeClr val="bg1"/>
+                </a:solidFill>
+                <a:latin typeface="Consolas" panose="020B0609020204030204" pitchFamily="49" charset="0"/>
+              </a:rPr>
+              <a:t>ИМЯ_ИЛИ_НОМЕР&gt;</a:t>
+            </a:r>
+          </a:p>
+          <a:p>
+            <a:r>
+              <a:rPr lang="en-US" sz="2400" dirty="0">
+                <a:solidFill>
+                  <a:schemeClr val="bg1"/>
+                </a:solidFill>
+                <a:latin typeface="Consolas" panose="020B0609020204030204" pitchFamily="49" charset="0"/>
+              </a:rPr>
               <a:t>Router(</a:t>
             </a:r>
             <a:r>
@@ -11361,7 +12085,7 @@
                 </a:solidFill>
                 <a:latin typeface="Consolas" panose="020B0609020204030204" pitchFamily="49" charset="0"/>
               </a:rPr>
-              <a:t>config</a:t>
+              <a:t>config-std-nacl</a:t>
             </a:r>
             <a:r>
               <a:rPr lang="en-US" sz="2400" dirty="0">
@@ -11370,7 +12094,45 @@
                 </a:solidFill>
                 <a:latin typeface="Consolas" panose="020B0609020204030204" pitchFamily="49" charset="0"/>
               </a:rPr>
-              <a:t>)# </a:t>
+              <a:t>)# [permit | deny] &lt;IP_</a:t>
+            </a:r>
+            <a:r>
+              <a:rPr lang="ru-RU" sz="2400" dirty="0">
+                <a:solidFill>
+                  <a:schemeClr val="bg1"/>
+                </a:solidFill>
+                <a:latin typeface="Consolas" panose="020B0609020204030204" pitchFamily="49" charset="0"/>
+              </a:rPr>
+              <a:t>ИСТОЧНИКА&gt; &lt;</a:t>
+            </a:r>
+            <a:r>
+              <a:rPr lang="en-US" sz="2400" dirty="0">
+                <a:solidFill>
+                  <a:schemeClr val="bg1"/>
+                </a:solidFill>
+                <a:latin typeface="Consolas" panose="020B0609020204030204" pitchFamily="49" charset="0"/>
+              </a:rPr>
+              <a:t>WILDCARD_</a:t>
+            </a:r>
+            <a:r>
+              <a:rPr lang="ru-RU" sz="2400" dirty="0">
+                <a:solidFill>
+                  <a:schemeClr val="bg1"/>
+                </a:solidFill>
+                <a:latin typeface="Consolas" panose="020B0609020204030204" pitchFamily="49" charset="0"/>
+              </a:rPr>
+              <a:t>МАСКА&gt;</a:t>
+            </a:r>
+          </a:p>
+          <a:p>
+            <a:r>
+              <a:rPr lang="en-US" sz="2400" dirty="0">
+                <a:solidFill>
+                  <a:schemeClr val="bg1"/>
+                </a:solidFill>
+                <a:latin typeface="Consolas" panose="020B0609020204030204" pitchFamily="49" charset="0"/>
+              </a:rPr>
+              <a:t>Router(</a:t>
             </a:r>
             <a:r>
               <a:rPr lang="en-US" sz="2400" dirty="0" err="1">
@@ -11379,7 +12141,7 @@
                 </a:solidFill>
                 <a:latin typeface="Consolas" panose="020B0609020204030204" pitchFamily="49" charset="0"/>
               </a:rPr>
-              <a:t>ip</a:t>
+              <a:t>config-std-nacl</a:t>
             </a:r>
             <a:r>
               <a:rPr lang="en-US" sz="2400" dirty="0">
@@ -11388,7 +12150,7 @@
                 </a:solidFill>
                 <a:latin typeface="Consolas" panose="020B0609020204030204" pitchFamily="49" charset="0"/>
               </a:rPr>
-              <a:t> access-list extended &lt;</a:t>
+              <a:t>)# [permit | deny] host &lt;IP_</a:t>
             </a:r>
             <a:r>
               <a:rPr lang="ru-RU" sz="2400" dirty="0">
@@ -11397,16 +12159,8 @@
                 </a:solidFill>
                 <a:latin typeface="Consolas" panose="020B0609020204030204" pitchFamily="49" charset="0"/>
               </a:rPr>
-              <a:t>ИМЯ_ИЛИ_НОМЕР&gt;</a:t>
-            </a:r>
-          </a:p>
-          <a:p>
-            <a:endParaRPr lang="ru-RU" sz="2400" dirty="0">
-              <a:solidFill>
-                <a:schemeClr val="bg1"/>
-              </a:solidFill>
-              <a:latin typeface="Consolas" panose="020B0609020204030204" pitchFamily="49" charset="0"/>
-            </a:endParaRPr>
+              <a:t>ИСТОЧНИКА&gt;</a:t>
+            </a:r>
           </a:p>
           <a:p>
             <a:r>
@@ -11425,7 +12179,7 @@
                 </a:solidFill>
                 <a:latin typeface="Consolas" panose="020B0609020204030204" pitchFamily="49" charset="0"/>
               </a:rPr>
-              <a:t>config-ext-nacl</a:t>
+              <a:t>config-std-nacl</a:t>
             </a:r>
             <a:r>
               <a:rPr lang="en-US" sz="2400" dirty="0">
@@ -11434,83 +12188,17 @@
                 </a:solidFill>
                 <a:latin typeface="Consolas" panose="020B0609020204030204" pitchFamily="49" charset="0"/>
               </a:rPr>
-              <a:t>)# [permit | deny] &lt;</a:t>
-            </a:r>
-            <a:r>
-              <a:rPr lang="ru-RU" sz="2400" dirty="0">
-                <a:solidFill>
-                  <a:schemeClr val="bg1"/>
-                </a:solidFill>
-                <a:latin typeface="Consolas" panose="020B0609020204030204" pitchFamily="49" charset="0"/>
-              </a:rPr>
-              <a:t>ПРОТОКОЛ&gt; \</a:t>
-            </a:r>
-          </a:p>
-          <a:p>
-            <a:r>
-              <a:rPr lang="ru-RU" sz="2400" dirty="0">
-                <a:solidFill>
-                  <a:schemeClr val="bg1"/>
-                </a:solidFill>
-                <a:latin typeface="Consolas" panose="020B0609020204030204" pitchFamily="49" charset="0"/>
-              </a:rPr>
-              <a:t>    &lt;ИСТОЧНИК&gt; &lt;</a:t>
-            </a:r>
-            <a:r>
-              <a:rPr lang="en-US" sz="2400" dirty="0">
-                <a:solidFill>
-                  <a:schemeClr val="bg1"/>
-                </a:solidFill>
-                <a:latin typeface="Consolas" panose="020B0609020204030204" pitchFamily="49" charset="0"/>
-              </a:rPr>
-              <a:t>WILDCARD_</a:t>
-            </a:r>
-            <a:r>
-              <a:rPr lang="ru-RU" sz="2400" dirty="0">
-                <a:solidFill>
-                  <a:schemeClr val="bg1"/>
-                </a:solidFill>
-                <a:latin typeface="Consolas" panose="020B0609020204030204" pitchFamily="49" charset="0"/>
-              </a:rPr>
-              <a:t>ИСТОЧНИКА&gt; [ОПЕРАТОР ПОРТ_ИСТОЧНИКА] \</a:t>
-            </a:r>
-          </a:p>
-          <a:p>
-            <a:r>
-              <a:rPr lang="ru-RU" sz="2400" dirty="0">
-                <a:solidFill>
-                  <a:schemeClr val="bg1"/>
-                </a:solidFill>
-                <a:latin typeface="Consolas" panose="020B0609020204030204" pitchFamily="49" charset="0"/>
-              </a:rPr>
-              <a:t>    &lt;НАЗНАЧЕНИЕ&gt; &lt;</a:t>
-            </a:r>
-            <a:r>
-              <a:rPr lang="en-US" sz="2400" dirty="0">
-                <a:solidFill>
-                  <a:schemeClr val="bg1"/>
-                </a:solidFill>
-                <a:latin typeface="Consolas" panose="020B0609020204030204" pitchFamily="49" charset="0"/>
-              </a:rPr>
-              <a:t>WILDCARD_</a:t>
-            </a:r>
-            <a:r>
-              <a:rPr lang="ru-RU" sz="2400" dirty="0">
-                <a:solidFill>
-                  <a:schemeClr val="bg1"/>
-                </a:solidFill>
-                <a:latin typeface="Consolas" panose="020B0609020204030204" pitchFamily="49" charset="0"/>
-              </a:rPr>
-              <a:t>НАЗНАЧЕНИЯ&gt; [ОПЕРАТОР ПОРТ_НАЗНАЧЕНИЯ]</a:t>
-            </a:r>
-          </a:p>
-          <a:p>
-            <a:endParaRPr lang="ru-RU" sz="2400" dirty="0">
-              <a:solidFill>
-                <a:schemeClr val="bg1"/>
-              </a:solidFill>
-              <a:latin typeface="Consolas" panose="020B0609020204030204" pitchFamily="49" charset="0"/>
-            </a:endParaRPr>
+              <a:t>)# [permit | deny] </a:t>
+            </a:r>
+            <a:r>
+              <a:rPr lang="en-US" sz="2400" dirty="0" smtClean="0">
+                <a:solidFill>
+                  <a:schemeClr val="bg1"/>
+                </a:solidFill>
+                <a:latin typeface="Consolas" panose="020B0609020204030204" pitchFamily="49" charset="0"/>
+              </a:rPr>
+              <a:t>any</a:t>
+            </a:r>
           </a:p>
           <a:p>
             <a:endParaRPr lang="en-US" sz="2400" dirty="0">
@@ -11520,12 +12208,49 @@
               <a:latin typeface="Consolas" panose="020B0609020204030204" pitchFamily="49" charset="0"/>
             </a:endParaRPr>
           </a:p>
+          <a:p>
+            <a:r>
+              <a:rPr lang="af-ZA" sz="2400" dirty="0">
+                <a:solidFill>
+                  <a:schemeClr val="bg1"/>
+                </a:solidFill>
+                <a:latin typeface="Consolas" panose="020B0609020204030204" pitchFamily="49" charset="0"/>
+              </a:rPr>
+              <a:t>Router#show ip access-lists </a:t>
+            </a:r>
+            <a:r>
+              <a:rPr lang="en-US" sz="2400" dirty="0">
+                <a:solidFill>
+                  <a:schemeClr val="bg1"/>
+                </a:solidFill>
+                <a:latin typeface="Consolas" panose="020B0609020204030204" pitchFamily="49" charset="0"/>
+              </a:rPr>
+              <a:t>&lt;</a:t>
+            </a:r>
+            <a:r>
+              <a:rPr lang="ru-RU" sz="2400" dirty="0">
+                <a:solidFill>
+                  <a:schemeClr val="bg1"/>
+                </a:solidFill>
+                <a:latin typeface="Consolas" panose="020B0609020204030204" pitchFamily="49" charset="0"/>
+              </a:rPr>
+              <a:t>ИМЯ_ИЛИ_НОМЕР&gt;</a:t>
+            </a:r>
+          </a:p>
+          <a:p>
+            <a:endParaRPr lang="en-US" sz="2400" dirty="0">
+              <a:solidFill>
+                <a:schemeClr val="bg1"/>
+              </a:solidFill>
+              <a:latin typeface="Consolas" panose="020B0609020204030204" pitchFamily="49" charset="0"/>
+            </a:endParaRPr>
+          </a:p>
         </p:txBody>
       </p:sp>
     </p:spTree>
     <p:extLst>
       <p:ext uri="{BB962C8B-B14F-4D97-AF65-F5344CB8AC3E}">
-        <p14:creationId xmlns:p14="http://schemas.microsoft.com/office/powerpoint/2010/main" val="3383313223"/>
+        <p14:creationId xmlns:p14="http://schemas.microsoft.com/office/powerpoint/2010/main" val="3798248272"/>
       </p:ext>
     </p:extLst>
   </p:cSld>
@@ -11569,18 +12294,21 @@
             <p:ph type="title"/>
           </p:nvPr>
         </p:nvSpPr>
-        <p:spPr/>
+        <p:spPr>
+          <a:xfrm>
+            <a:off x="218342" y="206864"/>
+            <a:ext cx="10515600" cy="628406"/>
+          </a:xfrm>
+        </p:spPr>
         <p:txBody>
-          <a:bodyPr/>
+          <a:bodyPr>
+            <a:normAutofit fontScale="90000"/>
+          </a:bodyPr>
           <a:lstStyle/>
           <a:p>
             <a:r>
               <a:rPr lang="ru-RU" dirty="0" smtClean="0"/>
-              <a:t>Операторы портов в </a:t>
-            </a:r>
-            <a:r>
-              <a:rPr lang="en-US" dirty="0" smtClean="0"/>
-              <a:t>Extended ACL</a:t>
+              <a:t>Стандартные списки доступа</a:t>
             </a:r>
             <a:endParaRPr lang="ru-RU" dirty="0"/>
           </a:p>
@@ -11588,512 +12316,306 @@
       </p:sp>
       <p:sp>
         <p:nvSpPr>
-          <p:cNvPr id="4" name="Rectangle 1"/>
-          <p:cNvSpPr>
-            <a:spLocks noGrp="1" noChangeArrowheads="1"/>
+          <p:cNvPr id="4" name="Заголовок 3"/>
+          <p:cNvSpPr txBox="1">
+            <a:spLocks/>
           </p:cNvSpPr>
-          <p:nvPr>
-            <p:ph idx="1"/>
-          </p:nvPr>
+          <p:nvPr/>
         </p:nvSpPr>
-        <p:spPr bwMode="auto">
+        <p:spPr>
           <a:xfrm>
-            <a:off x="838200" y="2437105"/>
-            <a:ext cx="10835402" cy="3128385"/>
+            <a:off x="218342" y="1652955"/>
+            <a:ext cx="11755315" cy="4211514"/>
           </a:xfrm>
           <a:prstGeom prst="rect">
             <a:avLst/>
           </a:prstGeom>
           <a:solidFill>
-            <a:schemeClr val="bg1"/>
+            <a:schemeClr val="tx1"/>
           </a:solidFill>
           <a:ln>
-            <a:noFill/>
+            <a:solidFill>
+              <a:schemeClr val="tx1"/>
+            </a:solidFill>
           </a:ln>
-          <a:effectLst/>
         </p:spPr>
         <p:txBody>
-          <a:bodyPr vert="horz" wrap="none" lIns="91440" tIns="0" rIns="91440" bIns="111090" numCol="1" anchor="ctr" anchorCtr="0" compatLnSpc="1">
-            <a:prstTxWarp prst="textNoShape">
-              <a:avLst/>
-            </a:prstTxWarp>
-            <a:spAutoFit/>
+          <a:bodyPr vert="horz" lIns="91440" tIns="45720" rIns="91440" bIns="45720" rtlCol="0" anchor="ctr">
+            <a:normAutofit/>
           </a:bodyPr>
-          <a:lstStyle/>
-          <a:p>
-            <a:pPr marL="0" marR="0" lvl="0" indent="0" algn="l" defTabSz="914400" rtl="0" eaLnBrk="0" fontAlgn="base" latinLnBrk="0" hangingPunct="0">
+          <a:lstStyle>
+            <a:lvl1pPr algn="l" defTabSz="914400" rtl="0" eaLnBrk="1" latinLnBrk="0" hangingPunct="1">
               <a:lnSpc>
-                <a:spcPct val="100000"/>
+                <a:spcPct val="90000"/>
               </a:lnSpc>
               <a:spcBef>
                 <a:spcPct val="0"/>
               </a:spcBef>
-              <a:spcAft>
-                <a:spcPct val="0"/>
-              </a:spcAft>
-              <a:buClrTx/>
-              <a:buSzTx/>
-              <a:buFontTx/>
               <a:buNone/>
-              <a:tabLst/>
-            </a:pPr>
-            <a:endParaRPr kumimoji="0" lang="ru-RU" altLang="ru-RU" sz="1800" b="0" i="0" u="none" strike="noStrike" cap="none" normalizeH="0" baseline="0" dirty="0" smtClean="0">
-              <a:ln>
-                <a:noFill/>
-              </a:ln>
+              <a:defRPr sz="4400" kern="1200">
+                <a:solidFill>
+                  <a:schemeClr val="tx1"/>
+                </a:solidFill>
+                <a:latin typeface="+mj-lt"/>
+                <a:ea typeface="+mj-ea"/>
+                <a:cs typeface="+mj-cs"/>
+              </a:defRPr>
+            </a:lvl1pPr>
+          </a:lstStyle>
+          <a:p>
+            <a:endParaRPr lang="ru-RU" sz="2400" dirty="0" smtClean="0">
               <a:solidFill>
-                <a:schemeClr val="tx1"/>
+                <a:schemeClr val="bg1"/>
               </a:solidFill>
-              <a:effectLst/>
-              <a:latin typeface="Arial" panose="020B0604020202020204" pitchFamily="34" charset="0"/>
+              <a:latin typeface="Consolas" panose="020B0609020204030204" pitchFamily="49" charset="0"/>
             </a:endParaRPr>
           </a:p>
           <a:p>
-            <a:pPr marL="0" marR="0" lvl="0" indent="0" algn="l" defTabSz="914400" rtl="0" eaLnBrk="0" fontAlgn="base" latinLnBrk="0" hangingPunct="0">
-              <a:lnSpc>
-                <a:spcPct val="100000"/>
-              </a:lnSpc>
-              <a:spcBef>
-                <a:spcPct val="0"/>
-              </a:spcBef>
-              <a:spcAft>
-                <a:spcPct val="0"/>
-              </a:spcAft>
-              <a:buClrTx/>
-              <a:buSzTx/>
-              <a:buFontTx/>
-              <a:buChar char="•"/>
-              <a:tabLst/>
-            </a:pPr>
-            <a:r>
-              <a:rPr kumimoji="0" lang="ru-RU" altLang="ru-RU" sz="3200" b="0" i="0" u="none" strike="noStrike" cap="none" normalizeH="0" baseline="0" dirty="0" err="1" smtClean="0">
-                <a:ln>
-                  <a:noFill/>
-                </a:ln>
-                <a:effectLst/>
-                <a:latin typeface="Consolas" panose="020B0609020204030204" pitchFamily="49" charset="0"/>
-              </a:rPr>
-              <a:t>eq</a:t>
-            </a:r>
-            <a:r>
-              <a:rPr kumimoji="0" lang="ru-RU" altLang="ru-RU" sz="3200" b="0" i="0" u="none" strike="noStrike" cap="none" normalizeH="0" baseline="0" dirty="0" smtClean="0">
-                <a:ln>
-                  <a:noFill/>
-                </a:ln>
-                <a:effectLst/>
-                <a:latin typeface="Consolas" panose="020B0609020204030204" pitchFamily="49" charset="0"/>
-              </a:rPr>
-              <a:t> &lt;</a:t>
-            </a:r>
-            <a:r>
-              <a:rPr kumimoji="0" lang="ru-RU" altLang="ru-RU" sz="3200" b="0" i="0" u="none" strike="noStrike" cap="none" normalizeH="0" baseline="0" dirty="0" err="1" smtClean="0">
-                <a:ln>
-                  <a:noFill/>
-                </a:ln>
-                <a:effectLst/>
-                <a:latin typeface="Consolas" panose="020B0609020204030204" pitchFamily="49" charset="0"/>
-              </a:rPr>
-              <a:t>номер|имя</a:t>
-            </a:r>
-            <a:r>
-              <a:rPr kumimoji="0" lang="ru-RU" altLang="ru-RU" sz="3200" b="0" i="0" u="none" strike="noStrike" cap="none" normalizeH="0" baseline="0" dirty="0" smtClean="0">
-                <a:ln>
-                  <a:noFill/>
-                </a:ln>
-                <a:effectLst/>
-                <a:latin typeface="Consolas" panose="020B0609020204030204" pitchFamily="49" charset="0"/>
-              </a:rPr>
-              <a:t>&gt;</a:t>
-            </a:r>
-            <a:r>
-              <a:rPr kumimoji="0" lang="ru-RU" altLang="ru-RU" sz="3200" b="0" i="0" u="none" strike="noStrike" cap="none" normalizeH="0" baseline="0" dirty="0" smtClean="0">
-                <a:ln>
-                  <a:noFill/>
-                </a:ln>
-                <a:effectLst/>
-                <a:latin typeface="-apple-system"/>
-              </a:rPr>
-              <a:t> — строгое равенство (</a:t>
-            </a:r>
-            <a:r>
-              <a:rPr kumimoji="0" lang="ru-RU" altLang="ru-RU" sz="3200" b="0" i="0" u="none" strike="noStrike" cap="none" normalizeH="0" baseline="0" dirty="0" err="1" smtClean="0">
-                <a:ln>
-                  <a:noFill/>
-                </a:ln>
-                <a:effectLst/>
-                <a:latin typeface="-apple-system"/>
-              </a:rPr>
-              <a:t>equal</a:t>
-            </a:r>
-            <a:r>
-              <a:rPr kumimoji="0" lang="ru-RU" altLang="ru-RU" sz="3200" b="0" i="0" u="none" strike="noStrike" cap="none" normalizeH="0" baseline="0" dirty="0" smtClean="0">
-                <a:ln>
-                  <a:noFill/>
-                </a:ln>
-                <a:effectLst/>
-                <a:latin typeface="-apple-system"/>
-              </a:rPr>
-              <a:t>).</a:t>
-            </a:r>
-          </a:p>
-          <a:p>
-            <a:pPr marL="0" marR="0" lvl="0" indent="0" algn="l" defTabSz="914400" rtl="0" eaLnBrk="0" fontAlgn="base" latinLnBrk="0" hangingPunct="0">
-              <a:lnSpc>
-                <a:spcPct val="100000"/>
-              </a:lnSpc>
-              <a:spcBef>
-                <a:spcPct val="0"/>
-              </a:spcBef>
-              <a:spcAft>
-                <a:spcPct val="0"/>
-              </a:spcAft>
-              <a:buClrTx/>
-              <a:buSzTx/>
-              <a:buFontTx/>
-              <a:buChar char="•"/>
-              <a:tabLst/>
-            </a:pPr>
-            <a:r>
-              <a:rPr kumimoji="0" lang="ru-RU" altLang="ru-RU" sz="3200" b="0" i="0" u="none" strike="noStrike" cap="none" normalizeH="0" baseline="0" dirty="0" err="1" smtClean="0">
-                <a:ln>
-                  <a:noFill/>
-                </a:ln>
-                <a:effectLst/>
-                <a:latin typeface="Consolas" panose="020B0609020204030204" pitchFamily="49" charset="0"/>
-              </a:rPr>
-              <a:t>neq</a:t>
-            </a:r>
-            <a:r>
-              <a:rPr kumimoji="0" lang="ru-RU" altLang="ru-RU" sz="3200" b="0" i="0" u="none" strike="noStrike" cap="none" normalizeH="0" baseline="0" dirty="0" smtClean="0">
-                <a:ln>
-                  <a:noFill/>
-                </a:ln>
-                <a:effectLst/>
-                <a:latin typeface="Consolas" panose="020B0609020204030204" pitchFamily="49" charset="0"/>
-              </a:rPr>
-              <a:t> &lt;</a:t>
-            </a:r>
-            <a:r>
-              <a:rPr kumimoji="0" lang="ru-RU" altLang="ru-RU" sz="3200" b="0" i="0" u="none" strike="noStrike" cap="none" normalizeH="0" baseline="0" dirty="0" err="1" smtClean="0">
-                <a:ln>
-                  <a:noFill/>
-                </a:ln>
-                <a:effectLst/>
-                <a:latin typeface="Consolas" panose="020B0609020204030204" pitchFamily="49" charset="0"/>
-              </a:rPr>
-              <a:t>номер|имя</a:t>
-            </a:r>
-            <a:r>
-              <a:rPr kumimoji="0" lang="ru-RU" altLang="ru-RU" sz="3200" b="0" i="0" u="none" strike="noStrike" cap="none" normalizeH="0" baseline="0" dirty="0" smtClean="0">
-                <a:ln>
-                  <a:noFill/>
-                </a:ln>
-                <a:effectLst/>
-                <a:latin typeface="Consolas" panose="020B0609020204030204" pitchFamily="49" charset="0"/>
-              </a:rPr>
-              <a:t>&gt;</a:t>
-            </a:r>
-            <a:r>
-              <a:rPr kumimoji="0" lang="ru-RU" altLang="ru-RU" sz="3200" b="0" i="0" u="none" strike="noStrike" cap="none" normalizeH="0" baseline="0" dirty="0" smtClean="0">
-                <a:ln>
-                  <a:noFill/>
-                </a:ln>
-                <a:effectLst/>
-                <a:latin typeface="-apple-system"/>
-              </a:rPr>
-              <a:t> — все, кроме указанного (</a:t>
-            </a:r>
-            <a:r>
-              <a:rPr kumimoji="0" lang="ru-RU" altLang="ru-RU" sz="3200" b="0" i="0" u="none" strike="noStrike" cap="none" normalizeH="0" baseline="0" dirty="0" err="1" smtClean="0">
-                <a:ln>
-                  <a:noFill/>
-                </a:ln>
-                <a:effectLst/>
-                <a:latin typeface="-apple-system"/>
-              </a:rPr>
-              <a:t>not</a:t>
-            </a:r>
-            <a:r>
-              <a:rPr kumimoji="0" lang="ru-RU" altLang="ru-RU" sz="3200" b="0" i="0" u="none" strike="noStrike" cap="none" normalizeH="0" baseline="0" dirty="0" smtClean="0">
-                <a:ln>
-                  <a:noFill/>
-                </a:ln>
-                <a:effectLst/>
-                <a:latin typeface="-apple-system"/>
+            <a:r>
+              <a:rPr lang="en-US" sz="2400" dirty="0">
+                <a:solidFill>
+                  <a:schemeClr val="bg1"/>
+                </a:solidFill>
+                <a:latin typeface="Consolas" panose="020B0609020204030204" pitchFamily="49" charset="0"/>
+              </a:rPr>
+              <a:t>Router(</a:t>
+            </a:r>
+            <a:r>
+              <a:rPr lang="en-US" sz="2400" dirty="0" err="1">
+                <a:solidFill>
+                  <a:schemeClr val="bg1"/>
+                </a:solidFill>
+                <a:latin typeface="Consolas" panose="020B0609020204030204" pitchFamily="49" charset="0"/>
+              </a:rPr>
+              <a:t>config</a:t>
+            </a:r>
+            <a:r>
+              <a:rPr lang="en-US" sz="2400" dirty="0">
+                <a:solidFill>
+                  <a:schemeClr val="bg1"/>
+                </a:solidFill>
+                <a:latin typeface="Consolas" panose="020B0609020204030204" pitchFamily="49" charset="0"/>
+              </a:rPr>
+              <a:t>)#</a:t>
+            </a:r>
+            <a:r>
+              <a:rPr lang="en-US" sz="2400" dirty="0" err="1">
+                <a:solidFill>
+                  <a:schemeClr val="bg1"/>
+                </a:solidFill>
+                <a:latin typeface="Consolas" panose="020B0609020204030204" pitchFamily="49" charset="0"/>
+              </a:rPr>
+              <a:t>ip</a:t>
+            </a:r>
+            <a:r>
+              <a:rPr lang="en-US" sz="2400" dirty="0">
+                <a:solidFill>
+                  <a:schemeClr val="bg1"/>
+                </a:solidFill>
+                <a:latin typeface="Consolas" panose="020B0609020204030204" pitchFamily="49" charset="0"/>
+              </a:rPr>
+              <a:t> access-list standard </a:t>
+            </a:r>
+            <a:r>
+              <a:rPr lang="en-US" sz="2400" dirty="0" smtClean="0">
+                <a:solidFill>
+                  <a:schemeClr val="bg1"/>
+                </a:solidFill>
+                <a:latin typeface="Consolas" panose="020B0609020204030204" pitchFamily="49" charset="0"/>
+              </a:rPr>
+              <a:t>99</a:t>
+            </a:r>
+          </a:p>
+          <a:p>
+            <a:r>
+              <a:rPr lang="en-US" sz="2400" dirty="0">
+                <a:solidFill>
+                  <a:schemeClr val="bg1"/>
+                </a:solidFill>
+                <a:latin typeface="Consolas" panose="020B0609020204030204" pitchFamily="49" charset="0"/>
+              </a:rPr>
+              <a:t>Router(</a:t>
+            </a:r>
+            <a:r>
+              <a:rPr lang="en-US" sz="2400" dirty="0" err="1">
+                <a:solidFill>
+                  <a:schemeClr val="bg1"/>
+                </a:solidFill>
+                <a:latin typeface="Consolas" panose="020B0609020204030204" pitchFamily="49" charset="0"/>
+              </a:rPr>
+              <a:t>config-std-nacl</a:t>
+            </a:r>
+            <a:r>
+              <a:rPr lang="en-US" sz="2400" dirty="0">
+                <a:solidFill>
+                  <a:schemeClr val="bg1"/>
+                </a:solidFill>
+                <a:latin typeface="Consolas" panose="020B0609020204030204" pitchFamily="49" charset="0"/>
+              </a:rPr>
+              <a:t>)#permit 192.168.10.0 0.0.0.255</a:t>
+            </a:r>
+          </a:p>
+          <a:p>
+            <a:r>
+              <a:rPr lang="en-US" sz="2400" dirty="0" smtClean="0">
+                <a:solidFill>
+                  <a:schemeClr val="bg1"/>
+                </a:solidFill>
+                <a:latin typeface="Consolas" panose="020B0609020204030204" pitchFamily="49" charset="0"/>
+              </a:rPr>
+              <a:t>Router(</a:t>
+            </a:r>
+            <a:r>
+              <a:rPr lang="en-US" sz="2400" dirty="0" err="1" smtClean="0">
+                <a:solidFill>
+                  <a:schemeClr val="bg1"/>
+                </a:solidFill>
+                <a:latin typeface="Consolas" panose="020B0609020204030204" pitchFamily="49" charset="0"/>
+              </a:rPr>
+              <a:t>config-std-nacl</a:t>
+            </a:r>
+            <a:r>
+              <a:rPr lang="en-US" sz="2400" dirty="0">
+                <a:solidFill>
+                  <a:schemeClr val="bg1"/>
+                </a:solidFill>
+                <a:latin typeface="Consolas" panose="020B0609020204030204" pitchFamily="49" charset="0"/>
+              </a:rPr>
+              <a:t>)#deny 172.16.0.0 0.0.127.255</a:t>
+            </a:r>
+          </a:p>
+          <a:p>
+            <a:r>
+              <a:rPr lang="en-US" sz="2400" dirty="0">
+                <a:solidFill>
+                  <a:schemeClr val="bg1"/>
+                </a:solidFill>
+                <a:latin typeface="Consolas" panose="020B0609020204030204" pitchFamily="49" charset="0"/>
+              </a:rPr>
+              <a:t>Router(</a:t>
+            </a:r>
+            <a:r>
+              <a:rPr lang="en-US" sz="2400" dirty="0" err="1">
+                <a:solidFill>
+                  <a:schemeClr val="bg1"/>
+                </a:solidFill>
+                <a:latin typeface="Consolas" panose="020B0609020204030204" pitchFamily="49" charset="0"/>
+              </a:rPr>
+              <a:t>config-std-nacl</a:t>
+            </a:r>
+            <a:r>
+              <a:rPr lang="en-US" sz="2400" dirty="0">
+                <a:solidFill>
+                  <a:schemeClr val="bg1"/>
+                </a:solidFill>
+                <a:latin typeface="Consolas" panose="020B0609020204030204" pitchFamily="49" charset="0"/>
+              </a:rPr>
+              <a:t>)#end</a:t>
+            </a:r>
+          </a:p>
+          <a:p>
+            <a:r>
+              <a:rPr lang="en-US" sz="2400" dirty="0">
+                <a:solidFill>
+                  <a:schemeClr val="bg1"/>
+                </a:solidFill>
+                <a:latin typeface="Consolas" panose="020B0609020204030204" pitchFamily="49" charset="0"/>
+              </a:rPr>
+              <a:t>Router</a:t>
+            </a:r>
+            <a:r>
+              <a:rPr lang="en-US" sz="2400" dirty="0" smtClean="0">
+                <a:solidFill>
+                  <a:schemeClr val="bg1"/>
+                </a:solidFill>
+                <a:latin typeface="Consolas" panose="020B0609020204030204" pitchFamily="49" charset="0"/>
+              </a:rPr>
+              <a:t>#</a:t>
+            </a:r>
+          </a:p>
+          <a:p>
+            <a:r>
+              <a:rPr lang="en-US" sz="2400" dirty="0" err="1">
+                <a:solidFill>
+                  <a:schemeClr val="bg1"/>
+                </a:solidFill>
+                <a:latin typeface="Consolas" panose="020B0609020204030204" pitchFamily="49" charset="0"/>
+              </a:rPr>
+              <a:t>Router#show</a:t>
+            </a:r>
+            <a:r>
+              <a:rPr lang="en-US" sz="2400" dirty="0">
+                <a:solidFill>
+                  <a:schemeClr val="bg1"/>
+                </a:solidFill>
+                <a:latin typeface="Consolas" panose="020B0609020204030204" pitchFamily="49" charset="0"/>
               </a:rPr>
               <a:t> </a:t>
             </a:r>
             <a:r>
-              <a:rPr kumimoji="0" lang="ru-RU" altLang="ru-RU" sz="3200" b="0" i="0" u="none" strike="noStrike" cap="none" normalizeH="0" baseline="0" dirty="0" err="1" smtClean="0">
-                <a:ln>
-                  <a:noFill/>
-                </a:ln>
-                <a:effectLst/>
-                <a:latin typeface="-apple-system"/>
-              </a:rPr>
-              <a:t>equal</a:t>
-            </a:r>
-            <a:r>
-              <a:rPr kumimoji="0" lang="ru-RU" altLang="ru-RU" sz="3200" b="0" i="0" u="none" strike="noStrike" cap="none" normalizeH="0" baseline="0" dirty="0" smtClean="0">
-                <a:ln>
-                  <a:noFill/>
-                </a:ln>
-                <a:effectLst/>
-                <a:latin typeface="-apple-system"/>
-              </a:rPr>
-              <a:t>).</a:t>
-            </a:r>
-          </a:p>
-          <a:p>
-            <a:pPr marL="0" marR="0" lvl="0" indent="0" algn="l" defTabSz="914400" rtl="0" eaLnBrk="0" fontAlgn="base" latinLnBrk="0" hangingPunct="0">
-              <a:lnSpc>
-                <a:spcPct val="100000"/>
-              </a:lnSpc>
-              <a:spcBef>
-                <a:spcPct val="0"/>
-              </a:spcBef>
-              <a:spcAft>
-                <a:spcPct val="0"/>
-              </a:spcAft>
-              <a:buClrTx/>
-              <a:buSzTx/>
-              <a:buFontTx/>
-              <a:buChar char="•"/>
-              <a:tabLst/>
-            </a:pPr>
-            <a:r>
-              <a:rPr kumimoji="0" lang="ru-RU" altLang="ru-RU" sz="3200" b="0" i="0" u="none" strike="noStrike" cap="none" normalizeH="0" baseline="0" dirty="0" err="1" smtClean="0">
-                <a:ln>
-                  <a:noFill/>
-                </a:ln>
-                <a:effectLst/>
-                <a:latin typeface="Consolas" panose="020B0609020204030204" pitchFamily="49" charset="0"/>
-              </a:rPr>
-              <a:t>gt</a:t>
-            </a:r>
-            <a:r>
-              <a:rPr kumimoji="0" lang="ru-RU" altLang="ru-RU" sz="3200" b="0" i="0" u="none" strike="noStrike" cap="none" normalizeH="0" baseline="0" dirty="0" smtClean="0">
-                <a:ln>
-                  <a:noFill/>
-                </a:ln>
-                <a:effectLst/>
-                <a:latin typeface="Consolas" panose="020B0609020204030204" pitchFamily="49" charset="0"/>
-              </a:rPr>
-              <a:t> &lt;номер&gt;</a:t>
-            </a:r>
-            <a:r>
-              <a:rPr kumimoji="0" lang="ru-RU" altLang="ru-RU" sz="3200" b="0" i="0" u="none" strike="noStrike" cap="none" normalizeH="0" baseline="0" dirty="0" smtClean="0">
-                <a:ln>
-                  <a:noFill/>
-                </a:ln>
-                <a:effectLst/>
-                <a:latin typeface="-apple-system"/>
-              </a:rPr>
-              <a:t> — строго больше (</a:t>
-            </a:r>
-            <a:r>
-              <a:rPr kumimoji="0" lang="ru-RU" altLang="ru-RU" sz="3200" b="0" i="0" u="none" strike="noStrike" cap="none" normalizeH="0" baseline="0" dirty="0" err="1" smtClean="0">
-                <a:ln>
-                  <a:noFill/>
-                </a:ln>
-                <a:effectLst/>
-                <a:latin typeface="-apple-system"/>
-              </a:rPr>
-              <a:t>greater</a:t>
-            </a:r>
-            <a:r>
-              <a:rPr kumimoji="0" lang="ru-RU" altLang="ru-RU" sz="3200" b="0" i="0" u="none" strike="noStrike" cap="none" normalizeH="0" baseline="0" dirty="0" smtClean="0">
-                <a:ln>
-                  <a:noFill/>
-                </a:ln>
-                <a:effectLst/>
-                <a:latin typeface="-apple-system"/>
-              </a:rPr>
-              <a:t> </a:t>
-            </a:r>
-            <a:r>
-              <a:rPr kumimoji="0" lang="ru-RU" altLang="ru-RU" sz="3200" b="0" i="0" u="none" strike="noStrike" cap="none" normalizeH="0" baseline="0" dirty="0" err="1" smtClean="0">
-                <a:ln>
-                  <a:noFill/>
-                </a:ln>
-                <a:effectLst/>
-                <a:latin typeface="-apple-system"/>
-              </a:rPr>
-              <a:t>than</a:t>
-            </a:r>
-            <a:r>
-              <a:rPr kumimoji="0" lang="ru-RU" altLang="ru-RU" sz="3200" b="0" i="0" u="none" strike="noStrike" cap="none" normalizeH="0" baseline="0" dirty="0" smtClean="0">
-                <a:ln>
-                  <a:noFill/>
-                </a:ln>
-                <a:effectLst/>
-                <a:latin typeface="-apple-system"/>
-              </a:rPr>
-              <a:t>).</a:t>
-            </a:r>
-          </a:p>
-          <a:p>
-            <a:pPr marL="0" marR="0" lvl="0" indent="0" algn="l" defTabSz="914400" rtl="0" eaLnBrk="0" fontAlgn="base" latinLnBrk="0" hangingPunct="0">
-              <a:lnSpc>
-                <a:spcPct val="100000"/>
-              </a:lnSpc>
-              <a:spcBef>
-                <a:spcPct val="0"/>
-              </a:spcBef>
-              <a:spcAft>
-                <a:spcPct val="0"/>
-              </a:spcAft>
-              <a:buClrTx/>
-              <a:buSzTx/>
-              <a:buFontTx/>
-              <a:buChar char="•"/>
-              <a:tabLst/>
-            </a:pPr>
-            <a:r>
-              <a:rPr kumimoji="0" lang="ru-RU" altLang="ru-RU" sz="3200" b="0" i="0" u="none" strike="noStrike" cap="none" normalizeH="0" baseline="0" dirty="0" err="1" smtClean="0">
-                <a:ln>
-                  <a:noFill/>
-                </a:ln>
-                <a:effectLst/>
-                <a:latin typeface="Consolas" panose="020B0609020204030204" pitchFamily="49" charset="0"/>
-              </a:rPr>
-              <a:t>lt</a:t>
-            </a:r>
-            <a:r>
-              <a:rPr kumimoji="0" lang="ru-RU" altLang="ru-RU" sz="3200" b="0" i="0" u="none" strike="noStrike" cap="none" normalizeH="0" baseline="0" dirty="0" smtClean="0">
-                <a:ln>
-                  <a:noFill/>
-                </a:ln>
-                <a:effectLst/>
-                <a:latin typeface="Consolas" panose="020B0609020204030204" pitchFamily="49" charset="0"/>
-              </a:rPr>
-              <a:t> &lt;номер&gt;</a:t>
-            </a:r>
-            <a:r>
-              <a:rPr kumimoji="0" lang="ru-RU" altLang="ru-RU" sz="3200" b="0" i="0" u="none" strike="noStrike" cap="none" normalizeH="0" baseline="0" dirty="0" smtClean="0">
-                <a:ln>
-                  <a:noFill/>
-                </a:ln>
-                <a:effectLst/>
-                <a:latin typeface="-apple-system"/>
-              </a:rPr>
-              <a:t> — строго меньше (</a:t>
-            </a:r>
-            <a:r>
-              <a:rPr kumimoji="0" lang="ru-RU" altLang="ru-RU" sz="3200" b="0" i="0" u="none" strike="noStrike" cap="none" normalizeH="0" baseline="0" dirty="0" err="1" smtClean="0">
-                <a:ln>
-                  <a:noFill/>
-                </a:ln>
-                <a:effectLst/>
-                <a:latin typeface="-apple-system"/>
-              </a:rPr>
-              <a:t>less</a:t>
-            </a:r>
-            <a:r>
-              <a:rPr kumimoji="0" lang="ru-RU" altLang="ru-RU" sz="3200" b="0" i="0" u="none" strike="noStrike" cap="none" normalizeH="0" baseline="0" dirty="0" smtClean="0">
-                <a:ln>
-                  <a:noFill/>
-                </a:ln>
-                <a:effectLst/>
-                <a:latin typeface="-apple-system"/>
-              </a:rPr>
-              <a:t> </a:t>
-            </a:r>
-            <a:r>
-              <a:rPr kumimoji="0" lang="ru-RU" altLang="ru-RU" sz="3200" b="0" i="0" u="none" strike="noStrike" cap="none" normalizeH="0" baseline="0" dirty="0" err="1" smtClean="0">
-                <a:ln>
-                  <a:noFill/>
-                </a:ln>
-                <a:effectLst/>
-                <a:latin typeface="-apple-system"/>
-              </a:rPr>
-              <a:t>than</a:t>
-            </a:r>
-            <a:r>
-              <a:rPr kumimoji="0" lang="ru-RU" altLang="ru-RU" sz="3200" b="0" i="0" u="none" strike="noStrike" cap="none" normalizeH="0" baseline="0" dirty="0" smtClean="0">
-                <a:ln>
-                  <a:noFill/>
-                </a:ln>
-                <a:effectLst/>
-                <a:latin typeface="-apple-system"/>
-              </a:rPr>
-              <a:t>).</a:t>
-            </a:r>
-          </a:p>
-          <a:p>
-            <a:pPr marL="0" marR="0" lvl="0" indent="0" algn="l" defTabSz="914400" rtl="0" eaLnBrk="0" fontAlgn="base" latinLnBrk="0" hangingPunct="0">
-              <a:lnSpc>
-                <a:spcPct val="100000"/>
-              </a:lnSpc>
-              <a:spcBef>
-                <a:spcPct val="0"/>
-              </a:spcBef>
-              <a:spcAft>
-                <a:spcPct val="0"/>
-              </a:spcAft>
-              <a:buClrTx/>
-              <a:buSzTx/>
-              <a:buFontTx/>
-              <a:buChar char="•"/>
-              <a:tabLst/>
-            </a:pPr>
-            <a:r>
-              <a:rPr kumimoji="0" lang="ru-RU" altLang="ru-RU" sz="3200" b="0" i="0" u="none" strike="noStrike" cap="none" normalizeH="0" baseline="0" dirty="0" err="1" smtClean="0">
-                <a:ln>
-                  <a:noFill/>
-                </a:ln>
-                <a:effectLst/>
-                <a:latin typeface="Consolas" panose="020B0609020204030204" pitchFamily="49" charset="0"/>
-              </a:rPr>
-              <a:t>range</a:t>
-            </a:r>
-            <a:r>
-              <a:rPr kumimoji="0" lang="ru-RU" altLang="ru-RU" sz="3200" b="0" i="0" u="none" strike="noStrike" cap="none" normalizeH="0" baseline="0" dirty="0" smtClean="0">
-                <a:ln>
-                  <a:noFill/>
-                </a:ln>
-                <a:effectLst/>
-                <a:latin typeface="Consolas" panose="020B0609020204030204" pitchFamily="49" charset="0"/>
-              </a:rPr>
-              <a:t> &lt;старт&gt; &lt;конец&gt;</a:t>
-            </a:r>
-            <a:r>
-              <a:rPr kumimoji="0" lang="ru-RU" altLang="ru-RU" sz="3200" b="0" i="0" u="none" strike="noStrike" cap="none" normalizeH="0" baseline="0" dirty="0" smtClean="0">
-                <a:ln>
-                  <a:noFill/>
-                </a:ln>
-                <a:effectLst/>
-                <a:latin typeface="-apple-system"/>
-              </a:rPr>
-              <a:t> — диапазон портов.</a:t>
-            </a:r>
-          </a:p>
-          <a:p>
-            <a:pPr marL="0" marR="0" lvl="0" indent="0" algn="l" defTabSz="914400" rtl="0" eaLnBrk="0" fontAlgn="base" latinLnBrk="0" hangingPunct="0">
-              <a:lnSpc>
-                <a:spcPct val="100000"/>
-              </a:lnSpc>
-              <a:spcBef>
-                <a:spcPct val="0"/>
-              </a:spcBef>
-              <a:spcAft>
-                <a:spcPct val="0"/>
-              </a:spcAft>
-              <a:buClrTx/>
-              <a:buSzTx/>
-              <a:buFontTx/>
-              <a:buNone/>
-              <a:tabLst/>
-            </a:pPr>
-            <a:endParaRPr kumimoji="0" lang="ru-RU" altLang="ru-RU" sz="1800" b="0" i="0" u="none" strike="noStrike" cap="none" normalizeH="0" baseline="0" dirty="0" smtClean="0">
-              <a:ln>
-                <a:noFill/>
-              </a:ln>
+              <a:rPr lang="en-US" sz="2400" dirty="0" err="1">
+                <a:solidFill>
+                  <a:schemeClr val="bg1"/>
+                </a:solidFill>
+                <a:latin typeface="Consolas" panose="020B0609020204030204" pitchFamily="49" charset="0"/>
+              </a:rPr>
+              <a:t>ip</a:t>
+            </a:r>
+            <a:r>
+              <a:rPr lang="en-US" sz="2400" dirty="0">
+                <a:solidFill>
+                  <a:schemeClr val="bg1"/>
+                </a:solidFill>
+                <a:latin typeface="Consolas" panose="020B0609020204030204" pitchFamily="49" charset="0"/>
+              </a:rPr>
+              <a:t> access-lists 99</a:t>
+            </a:r>
+          </a:p>
+          <a:p>
+            <a:r>
+              <a:rPr lang="en-US" sz="2400" dirty="0">
+                <a:solidFill>
+                  <a:schemeClr val="bg1"/>
+                </a:solidFill>
+                <a:latin typeface="Consolas" panose="020B0609020204030204" pitchFamily="49" charset="0"/>
+              </a:rPr>
+              <a:t>Standard IP access list 99</a:t>
+            </a:r>
+          </a:p>
+          <a:p>
+            <a:r>
+              <a:rPr lang="en-US" sz="2400" dirty="0">
+                <a:solidFill>
+                  <a:schemeClr val="bg1"/>
+                </a:solidFill>
+                <a:latin typeface="Consolas" panose="020B0609020204030204" pitchFamily="49" charset="0"/>
+              </a:rPr>
+              <a:t>    permit 192.168.10.0 0.0.0.255</a:t>
+            </a:r>
+          </a:p>
+          <a:p>
+            <a:r>
+              <a:rPr lang="en-US" sz="2400" dirty="0">
+                <a:solidFill>
+                  <a:schemeClr val="bg1"/>
+                </a:solidFill>
+                <a:latin typeface="Consolas" panose="020B0609020204030204" pitchFamily="49" charset="0"/>
+              </a:rPr>
+              <a:t>    deny 172.16.0.0 0.0.127.255</a:t>
+            </a:r>
+            <a:endParaRPr lang="ru-RU" sz="2400" dirty="0" smtClean="0">
               <a:solidFill>
-                <a:schemeClr val="tx1"/>
+                <a:schemeClr val="bg1"/>
               </a:solidFill>
-              <a:effectLst/>
-              <a:latin typeface="Arial" panose="020B0604020202020204" pitchFamily="34" charset="0"/>
+              <a:latin typeface="Consolas" panose="020B0609020204030204" pitchFamily="49" charset="0"/>
+            </a:endParaRPr>
+          </a:p>
+          <a:p>
+            <a:endParaRPr lang="en-US" sz="2400" dirty="0">
+              <a:solidFill>
+                <a:schemeClr val="bg1"/>
+              </a:solidFill>
+              <a:latin typeface="Consolas" panose="020B0609020204030204" pitchFamily="49" charset="0"/>
             </a:endParaRPr>
           </a:p>
         </p:txBody>
@@ -12101,7 +12623,7 @@
     </p:spTree>
     <p:extLst>
       <p:ext uri="{BB962C8B-B14F-4D97-AF65-F5344CB8AC3E}">
-        <p14:creationId xmlns:p14="http://schemas.microsoft.com/office/powerpoint/2010/main" val="222020583"/>
+        <p14:creationId xmlns:p14="http://schemas.microsoft.com/office/powerpoint/2010/main" val="4175971484"/>
       </p:ext>
     </p:extLst>
   </p:cSld>
